--- a/submission/OfflineID_Hackathon7.pptx
+++ b/submission/OfflineID_Hackathon7.pptx
@@ -3867,7 +3867,7 @@
                 </a:solidFill>
                 <a:latin typeface="Segoe UI"/>
               </a:rPr>
-              <a:t>Comfortably inside every target</a:t>
+              <a:t>Measured against every target</a:t>
             </a:r>
           </a:p>
         </p:txBody>
@@ -4002,7 +4002,7 @@
                 </a:solidFill>
                 <a:latin typeface="Segoe UI"/>
               </a:rPr>
-              <a:t>~50 ms</a:t>
+              <a:t>51 ms</a:t>
             </a:r>
           </a:p>
           <a:p>
@@ -4465,7 +4465,7 @@
           <p:nvPr/>
         </p:nvGraphicFramePr>
         <p:xfrm>
-          <a:off x="822960" y="4069080"/>
+          <a:off x="822960" y="3931920"/>
           <a:ext cx="10515600" cy="1627632"/>
         </p:xfrm>
         <a:graphic>
@@ -4475,9 +4475,10 @@
                 <a:tableStyleId>{5C22544A-7EE6-4342-B048-85BDC9FD1C3A}</a:tableStyleId>
               </a:tblPr>
               <a:tblGrid>
-                <a:gridCol w="4663440"/>
-                <a:gridCol w="2926080"/>
-                <a:gridCol w="2926080"/>
+                <a:gridCol w="4206240"/>
+                <a:gridCol w="1828800"/>
+                <a:gridCol w="2331720"/>
+                <a:gridCol w="2148840"/>
               </a:tblGrid>
               <a:tr h="420624">
                 <a:tc>
@@ -4487,7 +4488,7 @@
                     <a:p>
                       <a:pPr algn="l"/>
                       <a:r>
-                        <a:rPr sz="1300" b="1">
+                        <a:rPr sz="1250" b="1">
                           <a:solidFill>
                             <a:srgbClr val="00E676"/>
                           </a:solidFill>
@@ -4510,13 +4511,13 @@
                     <a:p>
                       <a:pPr algn="l"/>
                       <a:r>
-                        <a:rPr sz="1300" b="1">
+                        <a:rPr sz="1250" b="1">
                           <a:solidFill>
                             <a:srgbClr val="00E676"/>
                           </a:solidFill>
                           <a:latin typeface="Segoe UI"/>
                         </a:rPr>
-                        <a:t>Avg latency</a:t>
+                        <a:t>Size</a:t>
                       </a:r>
                     </a:p>
                   </a:txBody>
@@ -4533,7 +4534,30 @@
                     <a:p>
                       <a:pPr algn="l"/>
                       <a:r>
-                        <a:rPr sz="1300" b="1">
+                        <a:rPr sz="1250" b="1">
+                          <a:solidFill>
+                            <a:srgbClr val="00E676"/>
+                          </a:solidFill>
+                          <a:latin typeface="Segoe UI"/>
+                        </a:rPr>
+                        <a:t>Avg</a:t>
+                      </a:r>
+                    </a:p>
+                  </a:txBody>
+                  <a:tcPr marL="109728" marR="73152" marT="27432" marB="27432" anchor="ctr">
+                    <a:solidFill>
+                      <a:srgbClr val="0B3D2A"/>
+                    </a:solidFill>
+                  </a:tcPr>
+                </a:tc>
+                <a:tc>
+                  <a:txBody>
+                    <a:bodyPr/>
+                    <a:lstStyle/>
+                    <a:p>
+                      <a:pPr algn="l"/>
+                      <a:r>
+                        <a:rPr sz="1250" b="1">
                           <a:solidFill>
                             <a:srgbClr val="00E676"/>
                           </a:solidFill>
@@ -4558,13 +4582,13 @@
                     <a:p>
                       <a:pPr algn="l"/>
                       <a:r>
-                        <a:rPr sz="1300" b="1">
+                        <a:rPr sz="1250" b="1">
                           <a:solidFill>
                             <a:srgbClr val="EAF3EF"/>
                           </a:solidFill>
                           <a:latin typeface="Segoe UI"/>
                         </a:rPr>
-                        <a:t>SCRFD-500M</a:t>
+                        <a:t>SCRFD-500M (detect)</a:t>
                       </a:r>
                     </a:p>
                   </a:txBody>
@@ -4581,7 +4605,30 @@
                     <a:p>
                       <a:pPr algn="l"/>
                       <a:r>
-                        <a:rPr sz="1300" b="0">
+                        <a:rPr sz="1250" b="0">
+                          <a:solidFill>
+                            <a:srgbClr val="8DA39B"/>
+                          </a:solidFill>
+                          <a:latin typeface="Consolas"/>
+                        </a:rPr>
+                        <a:t>2.41 MB</a:t>
+                      </a:r>
+                    </a:p>
+                  </a:txBody>
+                  <a:tcPr marL="109728" marR="73152" marT="27432" marB="27432" anchor="ctr">
+                    <a:solidFill>
+                      <a:srgbClr val="111714"/>
+                    </a:solidFill>
+                  </a:tcPr>
+                </a:tc>
+                <a:tc>
+                  <a:txBody>
+                    <a:bodyPr/>
+                    <a:lstStyle/>
+                    <a:p>
+                      <a:pPr algn="l"/>
+                      <a:r>
+                        <a:rPr sz="1250" b="0">
                           <a:solidFill>
                             <a:srgbClr val="8DA39B"/>
                           </a:solidFill>
@@ -4604,7 +4651,7 @@
                     <a:p>
                       <a:pPr algn="l"/>
                       <a:r>
-                        <a:rPr sz="1300" b="0">
+                        <a:rPr sz="1250" b="0">
                           <a:solidFill>
                             <a:srgbClr val="8DA39B"/>
                           </a:solidFill>
@@ -4629,13 +4676,13 @@
                     <a:p>
                       <a:pPr algn="l"/>
                       <a:r>
-                        <a:rPr sz="1300" b="1">
+                        <a:rPr sz="1250" b="1">
                           <a:solidFill>
                             <a:srgbClr val="EAF3EF"/>
                           </a:solidFill>
                           <a:latin typeface="Segoe UI"/>
                         </a:rPr>
-                        <a:t>MobileFaceNet INT8</a:t>
+                        <a:t>MobileFaceNet INT8 (embed)</a:t>
                       </a:r>
                     </a:p>
                   </a:txBody>
@@ -4652,7 +4699,30 @@
                     <a:p>
                       <a:pPr algn="l"/>
                       <a:r>
-                        <a:rPr sz="1300" b="0">
+                        <a:rPr sz="1250" b="0">
+                          <a:solidFill>
+                            <a:srgbClr val="8DA39B"/>
+                          </a:solidFill>
+                          <a:latin typeface="Consolas"/>
+                        </a:rPr>
+                        <a:t>3.35 MB</a:t>
+                      </a:r>
+                    </a:p>
+                  </a:txBody>
+                  <a:tcPr marL="109728" marR="73152" marT="27432" marB="27432" anchor="ctr">
+                    <a:solidFill>
+                      <a:srgbClr val="161D1A"/>
+                    </a:solidFill>
+                  </a:tcPr>
+                </a:tc>
+                <a:tc>
+                  <a:txBody>
+                    <a:bodyPr/>
+                    <a:lstStyle/>
+                    <a:p>
+                      <a:pPr algn="l"/>
+                      <a:r>
+                        <a:rPr sz="1250" b="0">
                           <a:solidFill>
                             <a:srgbClr val="8DA39B"/>
                           </a:solidFill>
@@ -4675,7 +4745,7 @@
                     <a:p>
                       <a:pPr algn="l"/>
                       <a:r>
-                        <a:rPr sz="1300" b="0">
+                        <a:rPr sz="1250" b="0">
                           <a:solidFill>
                             <a:srgbClr val="8DA39B"/>
                           </a:solidFill>
@@ -4700,13 +4770,13 @@
                     <a:p>
                       <a:pPr algn="l"/>
                       <a:r>
-                        <a:rPr sz="1300" b="1">
+                        <a:rPr sz="1250" b="1">
                           <a:solidFill>
                             <a:srgbClr val="EAF3EF"/>
                           </a:solidFill>
                           <a:latin typeface="Segoe UI"/>
                         </a:rPr>
-                        <a:t>FASNet 2.7 / 4.0</a:t>
+                        <a:t>MiniFASNet 2.7 / 4.0 (liveness)</a:t>
                       </a:r>
                     </a:p>
                   </a:txBody>
@@ -4723,7 +4793,30 @@
                     <a:p>
                       <a:pPr algn="l"/>
                       <a:r>
-                        <a:rPr sz="1300" b="0">
+                        <a:rPr sz="1250" b="0">
+                          <a:solidFill>
+                            <a:srgbClr val="8DA39B"/>
+                          </a:solidFill>
+                          <a:latin typeface="Consolas"/>
+                        </a:rPr>
+                        <a:t>1.66 MB</a:t>
+                      </a:r>
+                    </a:p>
+                  </a:txBody>
+                  <a:tcPr marL="109728" marR="73152" marT="27432" marB="27432" anchor="ctr">
+                    <a:solidFill>
+                      <a:srgbClr val="111714"/>
+                    </a:solidFill>
+                  </a:tcPr>
+                </a:tc>
+                <a:tc>
+                  <a:txBody>
+                    <a:bodyPr/>
+                    <a:lstStyle/>
+                    <a:p>
+                      <a:pPr algn="l"/>
+                      <a:r>
+                        <a:rPr sz="1250" b="0">
                           <a:solidFill>
                             <a:srgbClr val="8DA39B"/>
                           </a:solidFill>
@@ -4746,7 +4839,7 @@
                     <a:p>
                       <a:pPr algn="l"/>
                       <a:r>
-                        <a:rPr sz="1300" b="0">
+                        <a:rPr sz="1250" b="0">
                           <a:solidFill>
                             <a:srgbClr val="8DA39B"/>
                           </a:solidFill>
@@ -4767,6 +4860,73 @@
           </a:graphicData>
         </a:graphic>
       </p:graphicFrame>
+      <p:sp>
+        <p:nvSpPr>
+          <p:cNvPr id="17" name="TextBox 16"/>
+          <p:cNvSpPr txBox="1"/>
+          <p:nvPr/>
+        </p:nvSpPr>
+        <p:spPr>
+          <a:xfrm>
+            <a:off x="822960" y="5669280"/>
+            <a:ext cx="10607040" cy="731520"/>
+          </a:xfrm>
+          <a:prstGeom prst="rect">
+            <a:avLst/>
+          </a:prstGeom>
+          <a:noFill/>
+        </p:spPr>
+        <p:txBody>
+          <a:bodyPr wrap="square" anchor="t" lIns="0" rIns="0" tIns="0" bIns="0">
+            <a:spAutoFit/>
+          </a:bodyPr>
+          <a:lstStyle/>
+          <a:p>
+            <a:pPr algn="l">
+              <a:lnSpc>
+                <a:spcPct val="105000"/>
+              </a:lnSpc>
+              <a:spcBef>
+                <a:spcPts val="0"/>
+              </a:spcBef>
+              <a:spcAft>
+                <a:spcPts val="300"/>
+              </a:spcAft>
+            </a:pPr>
+            <a:r>
+              <a:rPr sz="1200" b="0">
+                <a:solidFill>
+                  <a:srgbClr val="8DA39B"/>
+                </a:solidFill>
+                <a:latin typeface="Segoe UI"/>
+              </a:rPr>
+              <a:t>Host CPU · ONNX Runtime.  Pipeline = detect + 2x liveness + embed; add align &amp; cosine &lt; 10 ms for end-to-end.</a:t>
+            </a:r>
+          </a:p>
+          <a:p>
+            <a:pPr algn="l">
+              <a:lnSpc>
+                <a:spcPct val="105000"/>
+              </a:lnSpc>
+              <a:spcBef>
+                <a:spcPts val="0"/>
+              </a:spcBef>
+              <a:spcAft>
+                <a:spcPts val="300"/>
+              </a:spcAft>
+            </a:pPr>
+            <a:r>
+              <a:rPr sz="1200" b="0">
+                <a:solidFill>
+                  <a:srgbClr val="8DA39B"/>
+                </a:solidFill>
+                <a:latin typeface="Segoe UI"/>
+              </a:rPr>
+              <a:t>App footprint on Datalake ≈ 12.6 MB (9.1 MB models + 3.5 MB runtime).  INT8 vs FP32 cosine &gt; 0.99 on aligned faces.</a:t>
+            </a:r>
+          </a:p>
+        </p:txBody>
+      </p:sp>
     </p:spTree>
   </p:cSld>
   <p:clrMapOvr>
@@ -6432,7 +6592,7 @@
                 </a:solidFill>
                 <a:latin typeface="Consolas"/>
               </a:rPr>
-              <a:t>(ios/FaceEngine/, a 1:1 Swift port — same models &amp; math)</a:t>
+              <a:t>(ios/FaceEngine/, a 1:1 Swift port, same models &amp; math)</a:t>
             </a:r>
             <a:r>
               <a:rPr sz="1400" b="0">
@@ -6807,7 +6967,7 @@
                 </a:solidFill>
                 <a:latin typeface="Segoe UI"/>
               </a:rPr>
-              <a:t>  MIT / Apache stack — no paid licences, source shared.</a:t>
+              <a:t>  MIT / Apache stack, no paid licences, source shared.</a:t>
             </a:r>
           </a:p>
           <a:p>
@@ -6887,7 +7047,7 @@
                 </a:solidFill>
                 <a:latin typeface="Segoe UI"/>
               </a:rPr>
-              <a:t>  release build embeds JS — runs in airplane mode, no Metro.</a:t>
+              <a:t>  release build embeds JS, runs in airplane mode, no Metro.</a:t>
             </a:r>
           </a:p>
           <a:p>
@@ -7413,7 +7573,7 @@
                 </a:solidFill>
                 <a:latin typeface="Segoe UI"/>
               </a:rPr>
-              <a:t>  update accuracy by replacing ONNX files — 8 MB headroom.</a:t>
+              <a:t>  update accuracy by replacing ONNX files, 8 MB headroom.</a:t>
             </a:r>
           </a:p>
           <a:p>
@@ -8382,7 +8542,7 @@
                 </a:solidFill>
                 <a:latin typeface="Segoe UI"/>
               </a:rPr>
-              <a:t>Authenticate anyone, anywhere —</a:t>
+              <a:t>Authenticate anyone, anywhere,</a:t>
             </a:r>
           </a:p>
           <a:p>
@@ -8989,7 +9149,7 @@
                 </a:solidFill>
                 <a:latin typeface="Segoe UI"/>
               </a:rPr>
-              <a:t>  NHAI personnel work in remote zones — cloud face APIs simply fail offline.</a:t>
+              <a:t>  NHAI personnel work in remote zones, cloud face APIs simply fail offline.</a:t>
             </a:r>
           </a:p>
           <a:p>
@@ -9149,7 +9309,7 @@
                 </a:solidFill>
                 <a:latin typeface="Segoe UI"/>
               </a:rPr>
-              <a:t>  Ship as a React Native module — not a separate app.</a:t>
+              <a:t>  Ship as a React Native module, not a separate app.</a:t>
             </a:r>
           </a:p>
         </p:txBody>
@@ -9249,7 +9409,7 @@
                 </a:solidFill>
                 <a:latin typeface="Segoe UI"/>
               </a:rPr>
-              <a:t>How do we authenticate field personnel securely, fully offline, on standard phones — and integrate it into a React Native app on Android and iOS?</a:t>
+              <a:t>How do we authenticate field personnel securely, fully offline, on standard phones, and integrate it into a React Native app on Android and iOS?</a:t>
             </a:r>
           </a:p>
         </p:txBody>
@@ -9615,7 +9775,7 @@
                 </a:solidFill>
                 <a:latin typeface="Segoe UI"/>
               </a:rPr>
-              <a:t>, with no internet — then </a:t>
+              <a:t>, with no internet, then </a:t>
             </a:r>
             <a:r>
               <a:rPr sz="1800" b="1">
@@ -12070,7 +12230,7 @@
                 <a:latin typeface="Segoe UI"/>
               </a:rPr>
               <a:t>Detection, liveness and matching all run
-on-device — works in airplane mode.</a:t>
+on-device, works in airplane mode.</a:t>
             </a:r>
           </a:p>
         </p:txBody>
@@ -13019,7 +13179,7 @@
                 </a:solidFill>
                 <a:latin typeface="Segoe UI"/>
               </a:rPr>
-              <a:t>Total models 9.1 MB + ONNX Runtime ≈ 12.6 MB add to the Datalake APK — inside the 20 MB brief budget.</a:t>
+              <a:t>Total models 9.1 MB + ONNX Runtime ≈ 12.6 MB add to the Datalake APK, inside the 20 MB brief budget.</a:t>
             </a:r>
           </a:p>
         </p:txBody>
@@ -13767,7 +13927,7 @@
                 </a:solidFill>
                 <a:latin typeface="Segoe UI"/>
               </a:rPr>
-              <a:t>On-device ML Kit — no network</a:t>
+              <a:t>On-device ML Kit, no network</a:t>
             </a:r>
           </a:p>
           <a:p>
@@ -14258,7 +14418,7 @@
                 </a:solidFill>
                 <a:latin typeface="Segoe UI"/>
               </a:rPr>
-              <a:t>  Only 512-d embeddings are stored — never photos of faces.</a:t>
+              <a:t>  Only 512-d embeddings are stored, never photos of faces.</a:t>
             </a:r>
           </a:p>
           <a:p>
@@ -14888,7 +15048,7 @@
                 </a:solidFill>
                 <a:latin typeface="Segoe UI"/>
               </a:rPr>
-              <a:t>Enroll · authenticate · log — all offline</a:t>
+              <a:t>Enroll · authenticate · log, all offline</a:t>
             </a:r>
           </a:p>
         </p:txBody>

--- a/submission/OfflineID_Hackathon7.pptx
+++ b/submission/OfflineID_Hackathon7.pptx
@@ -3201,13 +3201,145 @@
       </p:sp>
       <p:sp>
         <p:nvSpPr>
-          <p:cNvPr id="4" name="TextBox 3"/>
+          <p:cNvPr id="4" name="Rectangle 3"/>
+          <p:cNvSpPr/>
+          <p:nvPr/>
+        </p:nvSpPr>
+        <p:spPr>
+          <a:xfrm>
+            <a:off x="11185855" y="6748272"/>
+            <a:ext cx="1005840" cy="109728"/>
+          </a:xfrm>
+          <a:prstGeom prst="rect">
+            <a:avLst/>
+          </a:prstGeom>
+          <a:solidFill>
+            <a:srgbClr val="00E676"/>
+          </a:solidFill>
+          <a:ln>
+            <a:noFill/>
+          </a:ln>
+          <a:effectLst/>
+        </p:spPr>
+        <p:style>
+          <a:lnRef idx="1">
+            <a:schemeClr val="accent1"/>
+          </a:lnRef>
+          <a:fillRef idx="3">
+            <a:schemeClr val="accent1"/>
+          </a:fillRef>
+          <a:effectRef idx="2">
+            <a:schemeClr val="accent1"/>
+          </a:effectRef>
+          <a:fontRef idx="minor">
+            <a:schemeClr val="lt1"/>
+          </a:fontRef>
+        </p:style>
+        <p:txBody>
+          <a:bodyPr rtlCol="0" anchor="ctr"/>
+          <a:lstStyle/>
+          <a:p>
+            <a:pPr algn="ctr"/>
+          </a:p>
+        </p:txBody>
+      </p:sp>
+      <p:sp>
+        <p:nvSpPr>
+          <p:cNvPr id="5" name="Rectangle 4"/>
+          <p:cNvSpPr/>
+          <p:nvPr/>
+        </p:nvSpPr>
+        <p:spPr>
+          <a:xfrm>
+            <a:off x="12081967" y="5852160"/>
+            <a:ext cx="109728" cy="1005840"/>
+          </a:xfrm>
+          <a:prstGeom prst="rect">
+            <a:avLst/>
+          </a:prstGeom>
+          <a:solidFill>
+            <a:srgbClr val="00E676"/>
+          </a:solidFill>
+          <a:ln>
+            <a:noFill/>
+          </a:ln>
+          <a:effectLst/>
+        </p:spPr>
+        <p:style>
+          <a:lnRef idx="1">
+            <a:schemeClr val="accent1"/>
+          </a:lnRef>
+          <a:fillRef idx="3">
+            <a:schemeClr val="accent1"/>
+          </a:fillRef>
+          <a:effectRef idx="2">
+            <a:schemeClr val="accent1"/>
+          </a:effectRef>
+          <a:fontRef idx="minor">
+            <a:schemeClr val="lt1"/>
+          </a:fontRef>
+        </p:style>
+        <p:txBody>
+          <a:bodyPr rtlCol="0" anchor="ctr"/>
+          <a:lstStyle/>
+          <a:p>
+            <a:pPr algn="ctr"/>
+          </a:p>
+        </p:txBody>
+      </p:sp>
+      <p:sp>
+        <p:nvSpPr>
+          <p:cNvPr id="6" name="Rectangle 5"/>
+          <p:cNvSpPr/>
+          <p:nvPr/>
+        </p:nvSpPr>
+        <p:spPr>
+          <a:xfrm>
+            <a:off x="822960" y="1325880"/>
+            <a:ext cx="73152" cy="310896"/>
+          </a:xfrm>
+          <a:prstGeom prst="rect">
+            <a:avLst/>
+          </a:prstGeom>
+          <a:solidFill>
+            <a:srgbClr val="00E676"/>
+          </a:solidFill>
+          <a:ln>
+            <a:noFill/>
+          </a:ln>
+          <a:effectLst/>
+        </p:spPr>
+        <p:style>
+          <a:lnRef idx="1">
+            <a:schemeClr val="accent1"/>
+          </a:lnRef>
+          <a:fillRef idx="3">
+            <a:schemeClr val="accent1"/>
+          </a:fillRef>
+          <a:effectRef idx="2">
+            <a:schemeClr val="accent1"/>
+          </a:effectRef>
+          <a:fontRef idx="minor">
+            <a:schemeClr val="lt1"/>
+          </a:fontRef>
+        </p:style>
+        <p:txBody>
+          <a:bodyPr rtlCol="0" anchor="ctr"/>
+          <a:lstStyle/>
+          <a:p>
+            <a:pPr algn="ctr"/>
+          </a:p>
+        </p:txBody>
+      </p:sp>
+      <p:sp>
+        <p:nvSpPr>
+          <p:cNvPr id="7" name="TextBox 6"/>
           <p:cNvSpPr txBox="1"/>
           <p:nvPr/>
         </p:nvSpPr>
         <p:spPr>
           <a:xfrm>
-            <a:off x="822960" y="1371600"/>
+            <a:off x="1024128" y="1353312"/>
             <a:ext cx="10515600" cy="365760"/>
           </a:xfrm>
           <a:prstGeom prst="rect">
@@ -3246,7 +3378,7 @@
       </p:sp>
       <p:sp>
         <p:nvSpPr>
-          <p:cNvPr id="5" name="TextBox 4"/>
+          <p:cNvPr id="8" name="TextBox 7"/>
           <p:cNvSpPr txBox="1"/>
           <p:nvPr/>
         </p:nvSpPr>
@@ -3291,7 +3423,7 @@
       </p:sp>
       <p:sp>
         <p:nvSpPr>
-          <p:cNvPr id="6" name="Rectangle 5"/>
+          <p:cNvPr id="9" name="Rectangle 8"/>
           <p:cNvSpPr/>
           <p:nvPr/>
         </p:nvSpPr>
@@ -3335,7 +3467,7 @@
       </p:sp>
       <p:sp>
         <p:nvSpPr>
-          <p:cNvPr id="7" name="TextBox 6"/>
+          <p:cNvPr id="10" name="TextBox 9"/>
           <p:cNvSpPr txBox="1"/>
           <p:nvPr/>
         </p:nvSpPr>
@@ -3402,14 +3534,14 @@
       </p:sp>
       <p:sp>
         <p:nvSpPr>
-          <p:cNvPr id="8" name="Rounded Rectangle 7"/>
+          <p:cNvPr id="11" name="Rounded Rectangle 10"/>
           <p:cNvSpPr/>
           <p:nvPr/>
         </p:nvSpPr>
         <p:spPr>
           <a:xfrm>
-            <a:off x="822960" y="4800600"/>
-            <a:ext cx="2194560" cy="384048"/>
+            <a:off x="822960" y="4754880"/>
+            <a:ext cx="2194560" cy="402336"/>
           </a:xfrm>
           <a:prstGeom prst="roundRect">
             <a:avLst/>
@@ -3455,14 +3587,14 @@
       </p:sp>
       <p:sp>
         <p:nvSpPr>
-          <p:cNvPr id="9" name="Rounded Rectangle 8"/>
+          <p:cNvPr id="12" name="Rounded Rectangle 11"/>
           <p:cNvSpPr/>
           <p:nvPr/>
         </p:nvSpPr>
         <p:spPr>
           <a:xfrm>
-            <a:off x="3154680" y="4800600"/>
-            <a:ext cx="1920240" cy="384048"/>
+            <a:off x="3154680" y="4754880"/>
+            <a:ext cx="1920240" cy="402336"/>
           </a:xfrm>
           <a:prstGeom prst="roundRect">
             <a:avLst/>
@@ -3508,14 +3640,14 @@
       </p:sp>
       <p:sp>
         <p:nvSpPr>
-          <p:cNvPr id="10" name="Rounded Rectangle 9"/>
+          <p:cNvPr id="13" name="Rounded Rectangle 12"/>
           <p:cNvSpPr/>
           <p:nvPr/>
         </p:nvSpPr>
         <p:spPr>
           <a:xfrm>
-            <a:off x="5212080" y="4800600"/>
-            <a:ext cx="2011680" cy="384048"/>
+            <a:off x="5212080" y="4754880"/>
+            <a:ext cx="2011680" cy="402336"/>
           </a:xfrm>
           <a:prstGeom prst="roundRect">
             <a:avLst/>
@@ -3561,7 +3693,104 @@
       </p:sp>
       <p:sp>
         <p:nvSpPr>
-          <p:cNvPr id="11" name="TextBox 10"/>
+          <p:cNvPr id="14" name="Rounded Rectangle 13"/>
+          <p:cNvSpPr/>
+          <p:nvPr/>
+        </p:nvSpPr>
+        <p:spPr>
+          <a:xfrm>
+            <a:off x="7360920" y="4754880"/>
+            <a:ext cx="1828800" cy="402336"/>
+          </a:xfrm>
+          <a:prstGeom prst="roundRect">
+            <a:avLst/>
+          </a:prstGeom>
+          <a:noFill/>
+          <a:ln w="15875">
+            <a:solidFill>
+              <a:srgbClr val="8DA39B"/>
+            </a:solidFill>
+          </a:ln>
+          <a:effectLst/>
+        </p:spPr>
+        <p:style>
+          <a:lnRef idx="1">
+            <a:schemeClr val="accent1"/>
+          </a:lnRef>
+          <a:fillRef idx="3">
+            <a:schemeClr val="accent1"/>
+          </a:fillRef>
+          <a:effectRef idx="2">
+            <a:schemeClr val="accent1"/>
+          </a:effectRef>
+          <a:fontRef idx="minor">
+            <a:schemeClr val="lt1"/>
+          </a:fontRef>
+        </p:style>
+        <p:txBody>
+          <a:bodyPr rtlCol="0" anchor="ctr" tIns="0" bIns="0"/>
+          <a:lstStyle/>
+          <a:p>
+            <a:pPr algn="ctr"/>
+            <a:r>
+              <a:rPr sz="1100" b="1">
+                <a:solidFill>
+                  <a:srgbClr val="8DA39B"/>
+                </a:solidFill>
+                <a:latin typeface="Consolas"/>
+              </a:rPr>
+              <a:t>OPEN SOURCE</a:t>
+            </a:r>
+          </a:p>
+        </p:txBody>
+      </p:sp>
+      <p:sp>
+        <p:nvSpPr>
+          <p:cNvPr id="15" name="Rectangle 14"/>
+          <p:cNvSpPr/>
+          <p:nvPr/>
+        </p:nvSpPr>
+        <p:spPr>
+          <a:xfrm>
+            <a:off x="841248" y="5806440"/>
+            <a:ext cx="2926080" cy="10972"/>
+          </a:xfrm>
+          <a:prstGeom prst="rect">
+            <a:avLst/>
+          </a:prstGeom>
+          <a:solidFill>
+            <a:srgbClr val="2F423B"/>
+          </a:solidFill>
+          <a:ln>
+            <a:noFill/>
+          </a:ln>
+          <a:effectLst/>
+        </p:spPr>
+        <p:style>
+          <a:lnRef idx="1">
+            <a:schemeClr val="accent1"/>
+          </a:lnRef>
+          <a:fillRef idx="3">
+            <a:schemeClr val="accent1"/>
+          </a:fillRef>
+          <a:effectRef idx="2">
+            <a:schemeClr val="accent1"/>
+          </a:effectRef>
+          <a:fontRef idx="minor">
+            <a:schemeClr val="lt1"/>
+          </a:fontRef>
+        </p:style>
+        <p:txBody>
+          <a:bodyPr rtlCol="0" anchor="ctr"/>
+          <a:lstStyle/>
+          <a:p>
+            <a:pPr algn="ctr"/>
+          </a:p>
+        </p:txBody>
+      </p:sp>
+      <p:sp>
+        <p:nvSpPr>
+          <p:cNvPr id="16" name="TextBox 15"/>
           <p:cNvSpPr txBox="1"/>
           <p:nvPr/>
         </p:nvSpPr>
@@ -3608,7 +3837,7 @@
                 </a:solidFill>
                 <a:latin typeface="Segoe UI"/>
               </a:rPr>
-              <a:t>   ·   Datalake 3.0 integration module</a:t>
+              <a:t>   ·   Datalake 3.0 integration module   ·   v1.0.0</a:t>
             </a:r>
           </a:p>
         </p:txBody>
@@ -3685,13 +3914,101 @@
       </p:sp>
       <p:sp>
         <p:nvSpPr>
-          <p:cNvPr id="3" name="TextBox 2"/>
+          <p:cNvPr id="3" name="Rectangle 2"/>
+          <p:cNvSpPr/>
+          <p:nvPr/>
+        </p:nvSpPr>
+        <p:spPr>
+          <a:xfrm>
+            <a:off x="822960" y="6291072"/>
+            <a:ext cx="10515600" cy="10972"/>
+          </a:xfrm>
+          <a:prstGeom prst="rect">
+            <a:avLst/>
+          </a:prstGeom>
+          <a:solidFill>
+            <a:srgbClr val="22302B"/>
+          </a:solidFill>
+          <a:ln>
+            <a:noFill/>
+          </a:ln>
+          <a:effectLst/>
+        </p:spPr>
+        <p:style>
+          <a:lnRef idx="1">
+            <a:schemeClr val="accent1"/>
+          </a:lnRef>
+          <a:fillRef idx="3">
+            <a:schemeClr val="accent1"/>
+          </a:fillRef>
+          <a:effectRef idx="2">
+            <a:schemeClr val="accent1"/>
+          </a:effectRef>
+          <a:fontRef idx="minor">
+            <a:schemeClr val="lt1"/>
+          </a:fontRef>
+        </p:style>
+        <p:txBody>
+          <a:bodyPr rtlCol="0" anchor="ctr"/>
+          <a:lstStyle/>
+          <a:p>
+            <a:pPr algn="ctr"/>
+          </a:p>
+        </p:txBody>
+      </p:sp>
+      <p:sp>
+        <p:nvSpPr>
+          <p:cNvPr id="4" name="Rectangle 3"/>
+          <p:cNvSpPr/>
+          <p:nvPr/>
+        </p:nvSpPr>
+        <p:spPr>
+          <a:xfrm>
+            <a:off x="822960" y="6391656"/>
+            <a:ext cx="73152" cy="155448"/>
+          </a:xfrm>
+          <a:prstGeom prst="rect">
+            <a:avLst/>
+          </a:prstGeom>
+          <a:solidFill>
+            <a:srgbClr val="00E676"/>
+          </a:solidFill>
+          <a:ln>
+            <a:noFill/>
+          </a:ln>
+          <a:effectLst/>
+        </p:spPr>
+        <p:style>
+          <a:lnRef idx="1">
+            <a:schemeClr val="accent1"/>
+          </a:lnRef>
+          <a:fillRef idx="3">
+            <a:schemeClr val="accent1"/>
+          </a:fillRef>
+          <a:effectRef idx="2">
+            <a:schemeClr val="accent1"/>
+          </a:effectRef>
+          <a:fontRef idx="minor">
+            <a:schemeClr val="lt1"/>
+          </a:fontRef>
+        </p:style>
+        <p:txBody>
+          <a:bodyPr rtlCol="0" anchor="ctr"/>
+          <a:lstStyle/>
+          <a:p>
+            <a:pPr algn="ctr"/>
+          </a:p>
+        </p:txBody>
+      </p:sp>
+      <p:sp>
+        <p:nvSpPr>
+          <p:cNvPr id="5" name="TextBox 4"/>
           <p:cNvSpPr txBox="1"/>
           <p:nvPr/>
         </p:nvSpPr>
         <p:spPr>
           <a:xfrm>
-            <a:off x="822960" y="6355080"/>
+            <a:off x="1005840" y="6364224"/>
             <a:ext cx="7315200" cy="365760"/>
           </a:xfrm>
           <a:prstGeom prst="rect">
@@ -3739,14 +4056,14 @@
       </p:sp>
       <p:sp>
         <p:nvSpPr>
-          <p:cNvPr id="4" name="TextBox 3"/>
+          <p:cNvPr id="6" name="TextBox 5"/>
           <p:cNvSpPr txBox="1"/>
           <p:nvPr/>
         </p:nvSpPr>
         <p:spPr>
           <a:xfrm>
-            <a:off x="10637215" y="6355080"/>
-            <a:ext cx="822960" cy="365760"/>
+            <a:off x="10454335" y="6364224"/>
+            <a:ext cx="1005840" cy="365760"/>
           </a:xfrm>
           <a:prstGeom prst="rect">
             <a:avLst/>
@@ -3784,14 +4101,58 @@
       </p:sp>
       <p:sp>
         <p:nvSpPr>
-          <p:cNvPr id="5" name="TextBox 4"/>
+          <p:cNvPr id="7" name="Rectangle 6"/>
+          <p:cNvSpPr/>
+          <p:nvPr/>
+        </p:nvSpPr>
+        <p:spPr>
+          <a:xfrm>
+            <a:off x="822960" y="576072"/>
+            <a:ext cx="64008" cy="182880"/>
+          </a:xfrm>
+          <a:prstGeom prst="rect">
+            <a:avLst/>
+          </a:prstGeom>
+          <a:solidFill>
+            <a:srgbClr val="00E676"/>
+          </a:solidFill>
+          <a:ln>
+            <a:noFill/>
+          </a:ln>
+          <a:effectLst/>
+        </p:spPr>
+        <p:style>
+          <a:lnRef idx="1">
+            <a:schemeClr val="accent1"/>
+          </a:lnRef>
+          <a:fillRef idx="3">
+            <a:schemeClr val="accent1"/>
+          </a:fillRef>
+          <a:effectRef idx="2">
+            <a:schemeClr val="accent1"/>
+          </a:effectRef>
+          <a:fontRef idx="minor">
+            <a:schemeClr val="lt1"/>
+          </a:fontRef>
+        </p:style>
+        <p:txBody>
+          <a:bodyPr rtlCol="0" anchor="ctr"/>
+          <a:lstStyle/>
+          <a:p>
+            <a:pPr algn="ctr"/>
+          </a:p>
+        </p:txBody>
+      </p:sp>
+      <p:sp>
+        <p:nvSpPr>
+          <p:cNvPr id="8" name="TextBox 7"/>
           <p:cNvSpPr txBox="1"/>
           <p:nvPr/>
         </p:nvSpPr>
         <p:spPr>
           <a:xfrm>
-            <a:off x="822960" y="566928"/>
-            <a:ext cx="10515600" cy="274320"/>
+            <a:off x="1024128" y="548640"/>
+            <a:ext cx="10332720" cy="274320"/>
           </a:xfrm>
           <a:prstGeom prst="rect">
             <a:avLst/>
@@ -3829,13 +4190,13 @@
       </p:sp>
       <p:sp>
         <p:nvSpPr>
-          <p:cNvPr id="6" name="TextBox 5"/>
+          <p:cNvPr id="9" name="TextBox 8"/>
           <p:cNvSpPr txBox="1"/>
           <p:nvPr/>
         </p:nvSpPr>
         <p:spPr>
           <a:xfrm>
-            <a:off x="822960" y="950976"/>
+            <a:off x="804672" y="950976"/>
             <a:ext cx="10607040" cy="914400"/>
           </a:xfrm>
           <a:prstGeom prst="rect">
@@ -3874,14 +4235,14 @@
       </p:sp>
       <p:sp>
         <p:nvSpPr>
-          <p:cNvPr id="7" name="Rectangle 6"/>
+          <p:cNvPr id="10" name="Rectangle 9"/>
           <p:cNvSpPr/>
           <p:nvPr/>
         </p:nvSpPr>
         <p:spPr>
           <a:xfrm>
-            <a:off x="841248" y="1664208"/>
-            <a:ext cx="640080" cy="41148"/>
+            <a:off x="841248" y="1627632"/>
+            <a:ext cx="603504" cy="45720"/>
           </a:xfrm>
           <a:prstGeom prst="rect">
             <a:avLst/>
@@ -3918,14 +4279,58 @@
       </p:sp>
       <p:sp>
         <p:nvSpPr>
-          <p:cNvPr id="8" name="Rounded Rectangle 7"/>
+          <p:cNvPr id="11" name="Rectangle 10"/>
           <p:cNvSpPr/>
           <p:nvPr/>
         </p:nvSpPr>
         <p:spPr>
           <a:xfrm>
-            <a:off x="822960" y="1874519"/>
-            <a:ext cx="2542032" cy="1828800"/>
+            <a:off x="822960" y="1664208"/>
+            <a:ext cx="10515600" cy="10972"/>
+          </a:xfrm>
+          <a:prstGeom prst="rect">
+            <a:avLst/>
+          </a:prstGeom>
+          <a:solidFill>
+            <a:srgbClr val="22302B"/>
+          </a:solidFill>
+          <a:ln>
+            <a:noFill/>
+          </a:ln>
+          <a:effectLst/>
+        </p:spPr>
+        <p:style>
+          <a:lnRef idx="1">
+            <a:schemeClr val="accent1"/>
+          </a:lnRef>
+          <a:fillRef idx="3">
+            <a:schemeClr val="accent1"/>
+          </a:fillRef>
+          <a:effectRef idx="2">
+            <a:schemeClr val="accent1"/>
+          </a:effectRef>
+          <a:fontRef idx="minor">
+            <a:schemeClr val="lt1"/>
+          </a:fontRef>
+        </p:style>
+        <p:txBody>
+          <a:bodyPr rtlCol="0" anchor="ctr"/>
+          <a:lstStyle/>
+          <a:p>
+            <a:pPr algn="ctr"/>
+          </a:p>
+        </p:txBody>
+      </p:sp>
+      <p:sp>
+        <p:nvSpPr>
+          <p:cNvPr id="12" name="Rounded Rectangle 11"/>
+          <p:cNvSpPr/>
+          <p:nvPr/>
+        </p:nvSpPr>
+        <p:spPr>
+          <a:xfrm>
+            <a:off x="822960" y="1938528"/>
+            <a:ext cx="2542032" cy="1783080"/>
           </a:xfrm>
           <a:prstGeom prst="roundRect">
             <a:avLst/>
@@ -3964,13 +4369,13 @@
       </p:sp>
       <p:sp>
         <p:nvSpPr>
-          <p:cNvPr id="9" name="TextBox 8"/>
+          <p:cNvPr id="13" name="TextBox 12"/>
           <p:cNvSpPr txBox="1"/>
           <p:nvPr/>
         </p:nvSpPr>
         <p:spPr>
           <a:xfrm>
-            <a:off x="1005840" y="2057400"/>
+            <a:off x="1024128" y="2103120"/>
             <a:ext cx="2176272" cy="1463040"/>
           </a:xfrm>
           <a:prstGeom prst="rect">
@@ -4053,14 +4458,14 @@
       </p:sp>
       <p:sp>
         <p:nvSpPr>
-          <p:cNvPr id="10" name="Rounded Rectangle 9"/>
+          <p:cNvPr id="14" name="Rounded Rectangle 13"/>
           <p:cNvSpPr/>
           <p:nvPr/>
         </p:nvSpPr>
         <p:spPr>
           <a:xfrm>
-            <a:off x="3483863" y="1874519"/>
-            <a:ext cx="2542032" cy="1828800"/>
+            <a:off x="3483863" y="1938528"/>
+            <a:ext cx="2542032" cy="1783080"/>
           </a:xfrm>
           <a:prstGeom prst="roundRect">
             <a:avLst/>
@@ -4099,13 +4504,13 @@
       </p:sp>
       <p:sp>
         <p:nvSpPr>
-          <p:cNvPr id="11" name="TextBox 10"/>
+          <p:cNvPr id="15" name="TextBox 14"/>
           <p:cNvSpPr txBox="1"/>
           <p:nvPr/>
         </p:nvSpPr>
         <p:spPr>
           <a:xfrm>
-            <a:off x="3666744" y="2057400"/>
+            <a:off x="3685031" y="2103120"/>
             <a:ext cx="2176272" cy="1463040"/>
           </a:xfrm>
           <a:prstGeom prst="rect">
@@ -4188,14 +4593,14 @@
       </p:sp>
       <p:sp>
         <p:nvSpPr>
-          <p:cNvPr id="12" name="Rounded Rectangle 11"/>
+          <p:cNvPr id="16" name="Rounded Rectangle 15"/>
           <p:cNvSpPr/>
           <p:nvPr/>
         </p:nvSpPr>
         <p:spPr>
           <a:xfrm>
-            <a:off x="6144768" y="1874519"/>
-            <a:ext cx="2542032" cy="1828800"/>
+            <a:off x="6144768" y="1938528"/>
+            <a:ext cx="2542032" cy="1783080"/>
           </a:xfrm>
           <a:prstGeom prst="roundRect">
             <a:avLst/>
@@ -4234,13 +4639,13 @@
       </p:sp>
       <p:sp>
         <p:nvSpPr>
-          <p:cNvPr id="13" name="TextBox 12"/>
+          <p:cNvPr id="17" name="TextBox 16"/>
           <p:cNvSpPr txBox="1"/>
           <p:nvPr/>
         </p:nvSpPr>
         <p:spPr>
           <a:xfrm>
-            <a:off x="6327648" y="2057400"/>
+            <a:off x="6345936" y="2103120"/>
             <a:ext cx="2176272" cy="1463040"/>
           </a:xfrm>
           <a:prstGeom prst="rect">
@@ -4323,14 +4728,14 @@
       </p:sp>
       <p:sp>
         <p:nvSpPr>
-          <p:cNvPr id="14" name="Rounded Rectangle 13"/>
+          <p:cNvPr id="18" name="Rounded Rectangle 17"/>
           <p:cNvSpPr/>
           <p:nvPr/>
         </p:nvSpPr>
         <p:spPr>
           <a:xfrm>
-            <a:off x="8805672" y="1874519"/>
-            <a:ext cx="2542032" cy="1828800"/>
+            <a:off x="8805672" y="1938528"/>
+            <a:ext cx="2542032" cy="1783080"/>
           </a:xfrm>
           <a:prstGeom prst="roundRect">
             <a:avLst/>
@@ -4369,13 +4774,13 @@
       </p:sp>
       <p:sp>
         <p:nvSpPr>
-          <p:cNvPr id="15" name="TextBox 14"/>
+          <p:cNvPr id="19" name="TextBox 18"/>
           <p:cNvSpPr txBox="1"/>
           <p:nvPr/>
         </p:nvSpPr>
         <p:spPr>
           <a:xfrm>
-            <a:off x="8988551" y="2057400"/>
+            <a:off x="9006840" y="2103120"/>
             <a:ext cx="2176272" cy="1463040"/>
           </a:xfrm>
           <a:prstGeom prst="rect">
@@ -4458,14 +4863,14 @@
       </p:sp>
       <p:graphicFrame>
         <p:nvGraphicFramePr>
-          <p:cNvPr id="16" name="Table 15"/>
+          <p:cNvPr id="20" name="Table 19"/>
           <p:cNvGraphicFramePr>
             <a:graphicFrameLocks noGrp="1"/>
           </p:cNvGraphicFramePr>
           <p:nvPr/>
         </p:nvGraphicFramePr>
         <p:xfrm>
-          <a:off x="822960" y="3931920"/>
+          <a:off x="822960" y="3950208"/>
           <a:ext cx="10515600" cy="1627632"/>
         </p:xfrm>
         <a:graphic>
@@ -4498,7 +4903,7 @@
                       </a:r>
                     </a:p>
                   </a:txBody>
-                  <a:tcPr marL="109728" marR="73152" marT="27432" marB="27432" anchor="ctr">
+                  <a:tcPr marL="128016" marR="73152" marT="18288" marB="18288" anchor="ctr">
                     <a:solidFill>
                       <a:srgbClr val="0B3D2A"/>
                     </a:solidFill>
@@ -4521,7 +4926,7 @@
                       </a:r>
                     </a:p>
                   </a:txBody>
-                  <a:tcPr marL="109728" marR="73152" marT="27432" marB="27432" anchor="ctr">
+                  <a:tcPr marL="128016" marR="73152" marT="18288" marB="18288" anchor="ctr">
                     <a:solidFill>
                       <a:srgbClr val="0B3D2A"/>
                     </a:solidFill>
@@ -4544,7 +4949,7 @@
                       </a:r>
                     </a:p>
                   </a:txBody>
-                  <a:tcPr marL="109728" marR="73152" marT="27432" marB="27432" anchor="ctr">
+                  <a:tcPr marL="128016" marR="73152" marT="18288" marB="18288" anchor="ctr">
                     <a:solidFill>
                       <a:srgbClr val="0B3D2A"/>
                     </a:solidFill>
@@ -4567,7 +4972,7 @@
                       </a:r>
                     </a:p>
                   </a:txBody>
-                  <a:tcPr marL="109728" marR="73152" marT="27432" marB="27432" anchor="ctr">
+                  <a:tcPr marL="128016" marR="73152" marT="18288" marB="18288" anchor="ctr">
                     <a:solidFill>
                       <a:srgbClr val="0B3D2A"/>
                     </a:solidFill>
@@ -4592,7 +4997,7 @@
                       </a:r>
                     </a:p>
                   </a:txBody>
-                  <a:tcPr marL="109728" marR="73152" marT="27432" marB="27432" anchor="ctr">
+                  <a:tcPr marL="128016" marR="73152" marT="18288" marB="18288" anchor="ctr">
                     <a:solidFill>
                       <a:srgbClr val="111714"/>
                     </a:solidFill>
@@ -4615,7 +5020,7 @@
                       </a:r>
                     </a:p>
                   </a:txBody>
-                  <a:tcPr marL="109728" marR="73152" marT="27432" marB="27432" anchor="ctr">
+                  <a:tcPr marL="128016" marR="73152" marT="18288" marB="18288" anchor="ctr">
                     <a:solidFill>
                       <a:srgbClr val="111714"/>
                     </a:solidFill>
@@ -4638,7 +5043,7 @@
                       </a:r>
                     </a:p>
                   </a:txBody>
-                  <a:tcPr marL="109728" marR="73152" marT="27432" marB="27432" anchor="ctr">
+                  <a:tcPr marL="128016" marR="73152" marT="18288" marB="18288" anchor="ctr">
                     <a:solidFill>
                       <a:srgbClr val="111714"/>
                     </a:solidFill>
@@ -4661,7 +5066,7 @@
                       </a:r>
                     </a:p>
                   </a:txBody>
-                  <a:tcPr marL="109728" marR="73152" marT="27432" marB="27432" anchor="ctr">
+                  <a:tcPr marL="128016" marR="73152" marT="18288" marB="18288" anchor="ctr">
                     <a:solidFill>
                       <a:srgbClr val="111714"/>
                     </a:solidFill>
@@ -4686,7 +5091,7 @@
                       </a:r>
                     </a:p>
                   </a:txBody>
-                  <a:tcPr marL="109728" marR="73152" marT="27432" marB="27432" anchor="ctr">
+                  <a:tcPr marL="128016" marR="73152" marT="18288" marB="18288" anchor="ctr">
                     <a:solidFill>
                       <a:srgbClr val="161D1A"/>
                     </a:solidFill>
@@ -4709,7 +5114,7 @@
                       </a:r>
                     </a:p>
                   </a:txBody>
-                  <a:tcPr marL="109728" marR="73152" marT="27432" marB="27432" anchor="ctr">
+                  <a:tcPr marL="128016" marR="73152" marT="18288" marB="18288" anchor="ctr">
                     <a:solidFill>
                       <a:srgbClr val="161D1A"/>
                     </a:solidFill>
@@ -4732,7 +5137,7 @@
                       </a:r>
                     </a:p>
                   </a:txBody>
-                  <a:tcPr marL="109728" marR="73152" marT="27432" marB="27432" anchor="ctr">
+                  <a:tcPr marL="128016" marR="73152" marT="18288" marB="18288" anchor="ctr">
                     <a:solidFill>
                       <a:srgbClr val="161D1A"/>
                     </a:solidFill>
@@ -4755,7 +5160,7 @@
                       </a:r>
                     </a:p>
                   </a:txBody>
-                  <a:tcPr marL="109728" marR="73152" marT="27432" marB="27432" anchor="ctr">
+                  <a:tcPr marL="128016" marR="73152" marT="18288" marB="18288" anchor="ctr">
                     <a:solidFill>
                       <a:srgbClr val="161D1A"/>
                     </a:solidFill>
@@ -4780,7 +5185,7 @@
                       </a:r>
                     </a:p>
                   </a:txBody>
-                  <a:tcPr marL="109728" marR="73152" marT="27432" marB="27432" anchor="ctr">
+                  <a:tcPr marL="128016" marR="73152" marT="18288" marB="18288" anchor="ctr">
                     <a:solidFill>
                       <a:srgbClr val="111714"/>
                     </a:solidFill>
@@ -4803,7 +5208,7 @@
                       </a:r>
                     </a:p>
                   </a:txBody>
-                  <a:tcPr marL="109728" marR="73152" marT="27432" marB="27432" anchor="ctr">
+                  <a:tcPr marL="128016" marR="73152" marT="18288" marB="18288" anchor="ctr">
                     <a:solidFill>
                       <a:srgbClr val="111714"/>
                     </a:solidFill>
@@ -4826,7 +5231,7 @@
                       </a:r>
                     </a:p>
                   </a:txBody>
-                  <a:tcPr marL="109728" marR="73152" marT="27432" marB="27432" anchor="ctr">
+                  <a:tcPr marL="128016" marR="73152" marT="18288" marB="18288" anchor="ctr">
                     <a:solidFill>
                       <a:srgbClr val="111714"/>
                     </a:solidFill>
@@ -4849,7 +5254,7 @@
                       </a:r>
                     </a:p>
                   </a:txBody>
-                  <a:tcPr marL="109728" marR="73152" marT="27432" marB="27432" anchor="ctr">
+                  <a:tcPr marL="128016" marR="73152" marT="18288" marB="18288" anchor="ctr">
                     <a:solidFill>
                       <a:srgbClr val="111714"/>
                     </a:solidFill>
@@ -4862,13 +5267,13 @@
       </p:graphicFrame>
       <p:sp>
         <p:nvSpPr>
-          <p:cNvPr id="17" name="TextBox 16"/>
+          <p:cNvPr id="21" name="TextBox 20"/>
           <p:cNvSpPr txBox="1"/>
           <p:nvPr/>
         </p:nvSpPr>
         <p:spPr>
           <a:xfrm>
-            <a:off x="822960" y="5669280"/>
+            <a:off x="822960" y="5687568"/>
             <a:ext cx="10607040" cy="731520"/>
           </a:xfrm>
           <a:prstGeom prst="rect">
@@ -4900,7 +5305,7 @@
                 </a:solidFill>
                 <a:latin typeface="Segoe UI"/>
               </a:rPr>
-              <a:t>Host CPU · ONNX Runtime.  Pipeline = detect + 2x liveness + embed; add align &amp; cosine &lt; 10 ms for end-to-end.</a:t>
+              <a:t>Host CPU · ONNX Runtime.  Pipeline = detect + 2× liveness + embed; add align &amp; cosine &lt; 10 ms for end-to-end.</a:t>
             </a:r>
           </a:p>
           <a:p>
@@ -4999,13 +5404,101 @@
       </p:sp>
       <p:sp>
         <p:nvSpPr>
-          <p:cNvPr id="3" name="TextBox 2"/>
+          <p:cNvPr id="3" name="Rectangle 2"/>
+          <p:cNvSpPr/>
+          <p:nvPr/>
+        </p:nvSpPr>
+        <p:spPr>
+          <a:xfrm>
+            <a:off x="822960" y="6291072"/>
+            <a:ext cx="10515600" cy="10972"/>
+          </a:xfrm>
+          <a:prstGeom prst="rect">
+            <a:avLst/>
+          </a:prstGeom>
+          <a:solidFill>
+            <a:srgbClr val="22302B"/>
+          </a:solidFill>
+          <a:ln>
+            <a:noFill/>
+          </a:ln>
+          <a:effectLst/>
+        </p:spPr>
+        <p:style>
+          <a:lnRef idx="1">
+            <a:schemeClr val="accent1"/>
+          </a:lnRef>
+          <a:fillRef idx="3">
+            <a:schemeClr val="accent1"/>
+          </a:fillRef>
+          <a:effectRef idx="2">
+            <a:schemeClr val="accent1"/>
+          </a:effectRef>
+          <a:fontRef idx="minor">
+            <a:schemeClr val="lt1"/>
+          </a:fontRef>
+        </p:style>
+        <p:txBody>
+          <a:bodyPr rtlCol="0" anchor="ctr"/>
+          <a:lstStyle/>
+          <a:p>
+            <a:pPr algn="ctr"/>
+          </a:p>
+        </p:txBody>
+      </p:sp>
+      <p:sp>
+        <p:nvSpPr>
+          <p:cNvPr id="4" name="Rectangle 3"/>
+          <p:cNvSpPr/>
+          <p:nvPr/>
+        </p:nvSpPr>
+        <p:spPr>
+          <a:xfrm>
+            <a:off x="822960" y="6391656"/>
+            <a:ext cx="73152" cy="155448"/>
+          </a:xfrm>
+          <a:prstGeom prst="rect">
+            <a:avLst/>
+          </a:prstGeom>
+          <a:solidFill>
+            <a:srgbClr val="00E676"/>
+          </a:solidFill>
+          <a:ln>
+            <a:noFill/>
+          </a:ln>
+          <a:effectLst/>
+        </p:spPr>
+        <p:style>
+          <a:lnRef idx="1">
+            <a:schemeClr val="accent1"/>
+          </a:lnRef>
+          <a:fillRef idx="3">
+            <a:schemeClr val="accent1"/>
+          </a:fillRef>
+          <a:effectRef idx="2">
+            <a:schemeClr val="accent1"/>
+          </a:effectRef>
+          <a:fontRef idx="minor">
+            <a:schemeClr val="lt1"/>
+          </a:fontRef>
+        </p:style>
+        <p:txBody>
+          <a:bodyPr rtlCol="0" anchor="ctr"/>
+          <a:lstStyle/>
+          <a:p>
+            <a:pPr algn="ctr"/>
+          </a:p>
+        </p:txBody>
+      </p:sp>
+      <p:sp>
+        <p:nvSpPr>
+          <p:cNvPr id="5" name="TextBox 4"/>
           <p:cNvSpPr txBox="1"/>
           <p:nvPr/>
         </p:nvSpPr>
         <p:spPr>
           <a:xfrm>
-            <a:off x="822960" y="6355080"/>
+            <a:off x="1005840" y="6364224"/>
             <a:ext cx="7315200" cy="365760"/>
           </a:xfrm>
           <a:prstGeom prst="rect">
@@ -5053,14 +5546,14 @@
       </p:sp>
       <p:sp>
         <p:nvSpPr>
-          <p:cNvPr id="4" name="TextBox 3"/>
+          <p:cNvPr id="6" name="TextBox 5"/>
           <p:cNvSpPr txBox="1"/>
           <p:nvPr/>
         </p:nvSpPr>
         <p:spPr>
           <a:xfrm>
-            <a:off x="10637215" y="6355080"/>
-            <a:ext cx="822960" cy="365760"/>
+            <a:off x="10454335" y="6364224"/>
+            <a:ext cx="1005840" cy="365760"/>
           </a:xfrm>
           <a:prstGeom prst="rect">
             <a:avLst/>
@@ -5098,14 +5591,58 @@
       </p:sp>
       <p:sp>
         <p:nvSpPr>
-          <p:cNvPr id="5" name="TextBox 4"/>
+          <p:cNvPr id="7" name="Rectangle 6"/>
+          <p:cNvSpPr/>
+          <p:nvPr/>
+        </p:nvSpPr>
+        <p:spPr>
+          <a:xfrm>
+            <a:off x="822960" y="576072"/>
+            <a:ext cx="64008" cy="182880"/>
+          </a:xfrm>
+          <a:prstGeom prst="rect">
+            <a:avLst/>
+          </a:prstGeom>
+          <a:solidFill>
+            <a:srgbClr val="00E676"/>
+          </a:solidFill>
+          <a:ln>
+            <a:noFill/>
+          </a:ln>
+          <a:effectLst/>
+        </p:spPr>
+        <p:style>
+          <a:lnRef idx="1">
+            <a:schemeClr val="accent1"/>
+          </a:lnRef>
+          <a:fillRef idx="3">
+            <a:schemeClr val="accent1"/>
+          </a:fillRef>
+          <a:effectRef idx="2">
+            <a:schemeClr val="accent1"/>
+          </a:effectRef>
+          <a:fontRef idx="minor">
+            <a:schemeClr val="lt1"/>
+          </a:fontRef>
+        </p:style>
+        <p:txBody>
+          <a:bodyPr rtlCol="0" anchor="ctr"/>
+          <a:lstStyle/>
+          <a:p>
+            <a:pPr algn="ctr"/>
+          </a:p>
+        </p:txBody>
+      </p:sp>
+      <p:sp>
+        <p:nvSpPr>
+          <p:cNvPr id="8" name="TextBox 7"/>
           <p:cNvSpPr txBox="1"/>
           <p:nvPr/>
         </p:nvSpPr>
         <p:spPr>
           <a:xfrm>
-            <a:off x="822960" y="566928"/>
-            <a:ext cx="10515600" cy="274320"/>
+            <a:off x="1024128" y="548640"/>
+            <a:ext cx="10332720" cy="274320"/>
           </a:xfrm>
           <a:prstGeom prst="rect">
             <a:avLst/>
@@ -5143,13 +5680,13 @@
       </p:sp>
       <p:sp>
         <p:nvSpPr>
-          <p:cNvPr id="6" name="TextBox 5"/>
+          <p:cNvPr id="9" name="TextBox 8"/>
           <p:cNvSpPr txBox="1"/>
           <p:nvPr/>
         </p:nvSpPr>
         <p:spPr>
           <a:xfrm>
-            <a:off x="822960" y="950976"/>
+            <a:off x="804672" y="950976"/>
             <a:ext cx="10607040" cy="914400"/>
           </a:xfrm>
           <a:prstGeom prst="rect">
@@ -5188,14 +5725,14 @@
       </p:sp>
       <p:sp>
         <p:nvSpPr>
-          <p:cNvPr id="7" name="Rectangle 6"/>
+          <p:cNvPr id="10" name="Rectangle 9"/>
           <p:cNvSpPr/>
           <p:nvPr/>
         </p:nvSpPr>
         <p:spPr>
           <a:xfrm>
-            <a:off x="841248" y="1664208"/>
-            <a:ext cx="640080" cy="41148"/>
+            <a:off x="841248" y="1627632"/>
+            <a:ext cx="603504" cy="45720"/>
           </a:xfrm>
           <a:prstGeom prst="rect">
             <a:avLst/>
@@ -5232,14 +5769,58 @@
       </p:sp>
       <p:sp>
         <p:nvSpPr>
-          <p:cNvPr id="8" name="Rounded Rectangle 7"/>
+          <p:cNvPr id="11" name="Rectangle 10"/>
           <p:cNvSpPr/>
           <p:nvPr/>
         </p:nvSpPr>
         <p:spPr>
           <a:xfrm>
-            <a:off x="822960" y="1828800"/>
-            <a:ext cx="10515600" cy="713232"/>
+            <a:off x="822960" y="1664208"/>
+            <a:ext cx="10515600" cy="10972"/>
+          </a:xfrm>
+          <a:prstGeom prst="rect">
+            <a:avLst/>
+          </a:prstGeom>
+          <a:solidFill>
+            <a:srgbClr val="22302B"/>
+          </a:solidFill>
+          <a:ln>
+            <a:noFill/>
+          </a:ln>
+          <a:effectLst/>
+        </p:spPr>
+        <p:style>
+          <a:lnRef idx="1">
+            <a:schemeClr val="accent1"/>
+          </a:lnRef>
+          <a:fillRef idx="3">
+            <a:schemeClr val="accent1"/>
+          </a:fillRef>
+          <a:effectRef idx="2">
+            <a:schemeClr val="accent1"/>
+          </a:effectRef>
+          <a:fontRef idx="minor">
+            <a:schemeClr val="lt1"/>
+          </a:fontRef>
+        </p:style>
+        <p:txBody>
+          <a:bodyPr rtlCol="0" anchor="ctr"/>
+          <a:lstStyle/>
+          <a:p>
+            <a:pPr algn="ctr"/>
+          </a:p>
+        </p:txBody>
+      </p:sp>
+      <p:sp>
+        <p:nvSpPr>
+          <p:cNvPr id="12" name="Rounded Rectangle 11"/>
+          <p:cNvSpPr/>
+          <p:nvPr/>
+        </p:nvSpPr>
+        <p:spPr>
+          <a:xfrm>
+            <a:off x="822960" y="1892807"/>
+            <a:ext cx="10515600" cy="676656"/>
           </a:xfrm>
           <a:prstGeom prst="roundRect">
             <a:avLst/>
@@ -5278,14 +5859,58 @@
       </p:sp>
       <p:sp>
         <p:nvSpPr>
-          <p:cNvPr id="9" name="TextBox 8"/>
+          <p:cNvPr id="13" name="Rectangle 12"/>
+          <p:cNvSpPr/>
+          <p:nvPr/>
+        </p:nvSpPr>
+        <p:spPr>
+          <a:xfrm>
+            <a:off x="822960" y="2002536"/>
+            <a:ext cx="64008" cy="457200"/>
+          </a:xfrm>
+          <a:prstGeom prst="rect">
+            <a:avLst/>
+          </a:prstGeom>
+          <a:solidFill>
+            <a:srgbClr val="00E676"/>
+          </a:solidFill>
+          <a:ln>
+            <a:noFill/>
+          </a:ln>
+          <a:effectLst/>
+        </p:spPr>
+        <p:style>
+          <a:lnRef idx="1">
+            <a:schemeClr val="accent1"/>
+          </a:lnRef>
+          <a:fillRef idx="3">
+            <a:schemeClr val="accent1"/>
+          </a:fillRef>
+          <a:effectRef idx="2">
+            <a:schemeClr val="accent1"/>
+          </a:effectRef>
+          <a:fontRef idx="minor">
+            <a:schemeClr val="lt1"/>
+          </a:fontRef>
+        </p:style>
+        <p:txBody>
+          <a:bodyPr rtlCol="0" anchor="ctr"/>
+          <a:lstStyle/>
+          <a:p>
+            <a:pPr algn="ctr"/>
+          </a:p>
+        </p:txBody>
+      </p:sp>
+      <p:sp>
+        <p:nvSpPr>
+          <p:cNvPr id="14" name="TextBox 13"/>
           <p:cNvSpPr txBox="1"/>
           <p:nvPr/>
         </p:nvSpPr>
         <p:spPr>
           <a:xfrm>
-            <a:off x="987552" y="1938528"/>
-            <a:ext cx="10186416" cy="493776"/>
+            <a:off x="1060704" y="1984248"/>
+            <a:ext cx="10094976" cy="493776"/>
           </a:xfrm>
           <a:prstGeom prst="rect">
             <a:avLst/>
@@ -5345,14 +5970,14 @@
       </p:sp>
       <p:sp>
         <p:nvSpPr>
-          <p:cNvPr id="10" name="Down Arrow 9"/>
+          <p:cNvPr id="15" name="Down Arrow 14"/>
           <p:cNvSpPr/>
           <p:nvPr/>
         </p:nvSpPr>
         <p:spPr>
           <a:xfrm>
-            <a:off x="5925312" y="2542032"/>
-            <a:ext cx="310896" cy="274320"/>
+            <a:off x="5934456" y="2551175"/>
+            <a:ext cx="292608" cy="237744"/>
           </a:xfrm>
           <a:prstGeom prst="downArrow">
             <a:avLst/>
@@ -5389,14 +6014,14 @@
       </p:sp>
       <p:sp>
         <p:nvSpPr>
-          <p:cNvPr id="11" name="Rounded Rectangle 10"/>
+          <p:cNvPr id="16" name="Rounded Rectangle 15"/>
           <p:cNvSpPr/>
           <p:nvPr/>
         </p:nvSpPr>
         <p:spPr>
           <a:xfrm>
-            <a:off x="822960" y="2798064"/>
-            <a:ext cx="10515600" cy="713232"/>
+            <a:off x="822960" y="2770632"/>
+            <a:ext cx="10515600" cy="676656"/>
           </a:xfrm>
           <a:prstGeom prst="roundRect">
             <a:avLst/>
@@ -5435,14 +6060,58 @@
       </p:sp>
       <p:sp>
         <p:nvSpPr>
-          <p:cNvPr id="12" name="TextBox 11"/>
+          <p:cNvPr id="17" name="Rectangle 16"/>
+          <p:cNvSpPr/>
+          <p:nvPr/>
+        </p:nvSpPr>
+        <p:spPr>
+          <a:xfrm>
+            <a:off x="822960" y="2880360"/>
+            <a:ext cx="64008" cy="457200"/>
+          </a:xfrm>
+          <a:prstGeom prst="rect">
+            <a:avLst/>
+          </a:prstGeom>
+          <a:solidFill>
+            <a:srgbClr val="4FC3F7"/>
+          </a:solidFill>
+          <a:ln>
+            <a:noFill/>
+          </a:ln>
+          <a:effectLst/>
+        </p:spPr>
+        <p:style>
+          <a:lnRef idx="1">
+            <a:schemeClr val="accent1"/>
+          </a:lnRef>
+          <a:fillRef idx="3">
+            <a:schemeClr val="accent1"/>
+          </a:fillRef>
+          <a:effectRef idx="2">
+            <a:schemeClr val="accent1"/>
+          </a:effectRef>
+          <a:fontRef idx="minor">
+            <a:schemeClr val="lt1"/>
+          </a:fontRef>
+        </p:style>
+        <p:txBody>
+          <a:bodyPr rtlCol="0" anchor="ctr"/>
+          <a:lstStyle/>
+          <a:p>
+            <a:pPr algn="ctr"/>
+          </a:p>
+        </p:txBody>
+      </p:sp>
+      <p:sp>
+        <p:nvSpPr>
+          <p:cNvPr id="18" name="TextBox 17"/>
           <p:cNvSpPr txBox="1"/>
           <p:nvPr/>
         </p:nvSpPr>
         <p:spPr>
           <a:xfrm>
-            <a:off x="987552" y="2907792"/>
-            <a:ext cx="10186416" cy="493776"/>
+            <a:off x="1060704" y="2862072"/>
+            <a:ext cx="10094976" cy="493776"/>
           </a:xfrm>
           <a:prstGeom prst="rect">
             <a:avLst/>
@@ -5502,14 +6171,14 @@
       </p:sp>
       <p:sp>
         <p:nvSpPr>
-          <p:cNvPr id="13" name="Down Arrow 12"/>
+          <p:cNvPr id="19" name="Down Arrow 18"/>
           <p:cNvSpPr/>
           <p:nvPr/>
         </p:nvSpPr>
         <p:spPr>
           <a:xfrm>
-            <a:off x="5925312" y="3511296"/>
-            <a:ext cx="310896" cy="274320"/>
+            <a:off x="5934456" y="3428999"/>
+            <a:ext cx="292608" cy="237744"/>
           </a:xfrm>
           <a:prstGeom prst="downArrow">
             <a:avLst/>
@@ -5546,14 +6215,14 @@
       </p:sp>
       <p:sp>
         <p:nvSpPr>
-          <p:cNvPr id="14" name="Rounded Rectangle 13"/>
+          <p:cNvPr id="20" name="Rounded Rectangle 19"/>
           <p:cNvSpPr/>
           <p:nvPr/>
         </p:nvSpPr>
         <p:spPr>
           <a:xfrm>
-            <a:off x="822960" y="3767328"/>
-            <a:ext cx="10515600" cy="713232"/>
+            <a:off x="822960" y="3648456"/>
+            <a:ext cx="10515600" cy="676656"/>
           </a:xfrm>
           <a:prstGeom prst="roundRect">
             <a:avLst/>
@@ -5592,14 +6261,58 @@
       </p:sp>
       <p:sp>
         <p:nvSpPr>
-          <p:cNvPr id="15" name="TextBox 14"/>
+          <p:cNvPr id="21" name="Rectangle 20"/>
+          <p:cNvSpPr/>
+          <p:nvPr/>
+        </p:nvSpPr>
+        <p:spPr>
+          <a:xfrm>
+            <a:off x="822960" y="3758183"/>
+            <a:ext cx="64008" cy="457200"/>
+          </a:xfrm>
+          <a:prstGeom prst="rect">
+            <a:avLst/>
+          </a:prstGeom>
+          <a:solidFill>
+            <a:srgbClr val="4FC3F7"/>
+          </a:solidFill>
+          <a:ln>
+            <a:noFill/>
+          </a:ln>
+          <a:effectLst/>
+        </p:spPr>
+        <p:style>
+          <a:lnRef idx="1">
+            <a:schemeClr val="accent1"/>
+          </a:lnRef>
+          <a:fillRef idx="3">
+            <a:schemeClr val="accent1"/>
+          </a:fillRef>
+          <a:effectRef idx="2">
+            <a:schemeClr val="accent1"/>
+          </a:effectRef>
+          <a:fontRef idx="minor">
+            <a:schemeClr val="lt1"/>
+          </a:fontRef>
+        </p:style>
+        <p:txBody>
+          <a:bodyPr rtlCol="0" anchor="ctr"/>
+          <a:lstStyle/>
+          <a:p>
+            <a:pPr algn="ctr"/>
+          </a:p>
+        </p:txBody>
+      </p:sp>
+      <p:sp>
+        <p:nvSpPr>
+          <p:cNvPr id="22" name="TextBox 21"/>
           <p:cNvSpPr txBox="1"/>
           <p:nvPr/>
         </p:nvSpPr>
         <p:spPr>
           <a:xfrm>
-            <a:off x="987552" y="3877056"/>
-            <a:ext cx="10186416" cy="493776"/>
+            <a:off x="1060704" y="3739896"/>
+            <a:ext cx="10094976" cy="493776"/>
           </a:xfrm>
           <a:prstGeom prst="rect">
             <a:avLst/>
@@ -5659,14 +6372,14 @@
       </p:sp>
       <p:sp>
         <p:nvSpPr>
-          <p:cNvPr id="16" name="Down Arrow 15"/>
+          <p:cNvPr id="23" name="Down Arrow 22"/>
           <p:cNvSpPr/>
           <p:nvPr/>
         </p:nvSpPr>
         <p:spPr>
           <a:xfrm>
-            <a:off x="5925312" y="4480560"/>
-            <a:ext cx="310896" cy="274320"/>
+            <a:off x="5934456" y="4306824"/>
+            <a:ext cx="292608" cy="237744"/>
           </a:xfrm>
           <a:prstGeom prst="downArrow">
             <a:avLst/>
@@ -5703,14 +6416,14 @@
       </p:sp>
       <p:sp>
         <p:nvSpPr>
-          <p:cNvPr id="17" name="Rounded Rectangle 16"/>
+          <p:cNvPr id="24" name="Rounded Rectangle 23"/>
           <p:cNvSpPr/>
           <p:nvPr/>
         </p:nvSpPr>
         <p:spPr>
           <a:xfrm>
-            <a:off x="822960" y="4736592"/>
-            <a:ext cx="10515600" cy="713232"/>
+            <a:off x="822960" y="4526279"/>
+            <a:ext cx="10515600" cy="676656"/>
           </a:xfrm>
           <a:prstGeom prst="roundRect">
             <a:avLst/>
@@ -5749,14 +6462,58 @@
       </p:sp>
       <p:sp>
         <p:nvSpPr>
-          <p:cNvPr id="18" name="TextBox 17"/>
+          <p:cNvPr id="25" name="Rectangle 24"/>
+          <p:cNvSpPr/>
+          <p:nvPr/>
+        </p:nvSpPr>
+        <p:spPr>
+          <a:xfrm>
+            <a:off x="822960" y="4636007"/>
+            <a:ext cx="64008" cy="457200"/>
+          </a:xfrm>
+          <a:prstGeom prst="rect">
+            <a:avLst/>
+          </a:prstGeom>
+          <a:solidFill>
+            <a:srgbClr val="00E676"/>
+          </a:solidFill>
+          <a:ln>
+            <a:noFill/>
+          </a:ln>
+          <a:effectLst/>
+        </p:spPr>
+        <p:style>
+          <a:lnRef idx="1">
+            <a:schemeClr val="accent1"/>
+          </a:lnRef>
+          <a:fillRef idx="3">
+            <a:schemeClr val="accent1"/>
+          </a:fillRef>
+          <a:effectRef idx="2">
+            <a:schemeClr val="accent1"/>
+          </a:effectRef>
+          <a:fontRef idx="minor">
+            <a:schemeClr val="lt1"/>
+          </a:fontRef>
+        </p:style>
+        <p:txBody>
+          <a:bodyPr rtlCol="0" anchor="ctr"/>
+          <a:lstStyle/>
+          <a:p>
+            <a:pPr algn="ctr"/>
+          </a:p>
+        </p:txBody>
+      </p:sp>
+      <p:sp>
+        <p:nvSpPr>
+          <p:cNvPr id="26" name="TextBox 25"/>
           <p:cNvSpPr txBox="1"/>
           <p:nvPr/>
         </p:nvSpPr>
         <p:spPr>
           <a:xfrm>
-            <a:off x="987552" y="4846320"/>
-            <a:ext cx="10186416" cy="493776"/>
+            <a:off x="1060704" y="4617719"/>
+            <a:ext cx="10094976" cy="493776"/>
           </a:xfrm>
           <a:prstGeom prst="rect">
             <a:avLst/>
@@ -5816,14 +6573,14 @@
       </p:sp>
       <p:sp>
         <p:nvSpPr>
-          <p:cNvPr id="19" name="Down Arrow 18"/>
+          <p:cNvPr id="27" name="Down Arrow 26"/>
           <p:cNvSpPr/>
           <p:nvPr/>
         </p:nvSpPr>
         <p:spPr>
           <a:xfrm>
-            <a:off x="5925312" y="5449824"/>
-            <a:ext cx="310896" cy="274320"/>
+            <a:off x="5934456" y="5184648"/>
+            <a:ext cx="292608" cy="237744"/>
           </a:xfrm>
           <a:prstGeom prst="downArrow">
             <a:avLst/>
@@ -5860,14 +6617,14 @@
       </p:sp>
       <p:sp>
         <p:nvSpPr>
-          <p:cNvPr id="20" name="Rounded Rectangle 19"/>
+          <p:cNvPr id="28" name="Rounded Rectangle 27"/>
           <p:cNvSpPr/>
           <p:nvPr/>
         </p:nvSpPr>
         <p:spPr>
           <a:xfrm>
-            <a:off x="822960" y="5705856"/>
-            <a:ext cx="10515600" cy="713232"/>
+            <a:off x="822960" y="5404103"/>
+            <a:ext cx="10515600" cy="676656"/>
           </a:xfrm>
           <a:prstGeom prst="roundRect">
             <a:avLst/>
@@ -5906,14 +6663,58 @@
       </p:sp>
       <p:sp>
         <p:nvSpPr>
-          <p:cNvPr id="21" name="TextBox 20"/>
+          <p:cNvPr id="29" name="Rectangle 28"/>
+          <p:cNvSpPr/>
+          <p:nvPr/>
+        </p:nvSpPr>
+        <p:spPr>
+          <a:xfrm>
+            <a:off x="822960" y="5513831"/>
+            <a:ext cx="64008" cy="457200"/>
+          </a:xfrm>
+          <a:prstGeom prst="rect">
+            <a:avLst/>
+          </a:prstGeom>
+          <a:solidFill>
+            <a:srgbClr val="FFB300"/>
+          </a:solidFill>
+          <a:ln>
+            <a:noFill/>
+          </a:ln>
+          <a:effectLst/>
+        </p:spPr>
+        <p:style>
+          <a:lnRef idx="1">
+            <a:schemeClr val="accent1"/>
+          </a:lnRef>
+          <a:fillRef idx="3">
+            <a:schemeClr val="accent1"/>
+          </a:fillRef>
+          <a:effectRef idx="2">
+            <a:schemeClr val="accent1"/>
+          </a:effectRef>
+          <a:fontRef idx="minor">
+            <a:schemeClr val="lt1"/>
+          </a:fontRef>
+        </p:style>
+        <p:txBody>
+          <a:bodyPr rtlCol="0" anchor="ctr"/>
+          <a:lstStyle/>
+          <a:p>
+            <a:pPr algn="ctr"/>
+          </a:p>
+        </p:txBody>
+      </p:sp>
+      <p:sp>
+        <p:nvSpPr>
+          <p:cNvPr id="30" name="TextBox 29"/>
           <p:cNvSpPr txBox="1"/>
           <p:nvPr/>
         </p:nvSpPr>
         <p:spPr>
           <a:xfrm>
-            <a:off x="987552" y="5815584"/>
-            <a:ext cx="10186416" cy="493776"/>
+            <a:off x="1060704" y="5495543"/>
+            <a:ext cx="10094976" cy="493776"/>
           </a:xfrm>
           <a:prstGeom prst="rect">
             <a:avLst/>
@@ -6043,13 +6844,101 @@
       </p:sp>
       <p:sp>
         <p:nvSpPr>
-          <p:cNvPr id="3" name="TextBox 2"/>
+          <p:cNvPr id="3" name="Rectangle 2"/>
+          <p:cNvSpPr/>
+          <p:nvPr/>
+        </p:nvSpPr>
+        <p:spPr>
+          <a:xfrm>
+            <a:off x="822960" y="6291072"/>
+            <a:ext cx="10515600" cy="10972"/>
+          </a:xfrm>
+          <a:prstGeom prst="rect">
+            <a:avLst/>
+          </a:prstGeom>
+          <a:solidFill>
+            <a:srgbClr val="22302B"/>
+          </a:solidFill>
+          <a:ln>
+            <a:noFill/>
+          </a:ln>
+          <a:effectLst/>
+        </p:spPr>
+        <p:style>
+          <a:lnRef idx="1">
+            <a:schemeClr val="accent1"/>
+          </a:lnRef>
+          <a:fillRef idx="3">
+            <a:schemeClr val="accent1"/>
+          </a:fillRef>
+          <a:effectRef idx="2">
+            <a:schemeClr val="accent1"/>
+          </a:effectRef>
+          <a:fontRef idx="minor">
+            <a:schemeClr val="lt1"/>
+          </a:fontRef>
+        </p:style>
+        <p:txBody>
+          <a:bodyPr rtlCol="0" anchor="ctr"/>
+          <a:lstStyle/>
+          <a:p>
+            <a:pPr algn="ctr"/>
+          </a:p>
+        </p:txBody>
+      </p:sp>
+      <p:sp>
+        <p:nvSpPr>
+          <p:cNvPr id="4" name="Rectangle 3"/>
+          <p:cNvSpPr/>
+          <p:nvPr/>
+        </p:nvSpPr>
+        <p:spPr>
+          <a:xfrm>
+            <a:off x="822960" y="6391656"/>
+            <a:ext cx="73152" cy="155448"/>
+          </a:xfrm>
+          <a:prstGeom prst="rect">
+            <a:avLst/>
+          </a:prstGeom>
+          <a:solidFill>
+            <a:srgbClr val="00E676"/>
+          </a:solidFill>
+          <a:ln>
+            <a:noFill/>
+          </a:ln>
+          <a:effectLst/>
+        </p:spPr>
+        <p:style>
+          <a:lnRef idx="1">
+            <a:schemeClr val="accent1"/>
+          </a:lnRef>
+          <a:fillRef idx="3">
+            <a:schemeClr val="accent1"/>
+          </a:fillRef>
+          <a:effectRef idx="2">
+            <a:schemeClr val="accent1"/>
+          </a:effectRef>
+          <a:fontRef idx="minor">
+            <a:schemeClr val="lt1"/>
+          </a:fontRef>
+        </p:style>
+        <p:txBody>
+          <a:bodyPr rtlCol="0" anchor="ctr"/>
+          <a:lstStyle/>
+          <a:p>
+            <a:pPr algn="ctr"/>
+          </a:p>
+        </p:txBody>
+      </p:sp>
+      <p:sp>
+        <p:nvSpPr>
+          <p:cNvPr id="5" name="TextBox 4"/>
           <p:cNvSpPr txBox="1"/>
           <p:nvPr/>
         </p:nvSpPr>
         <p:spPr>
           <a:xfrm>
-            <a:off x="822960" y="6355080"/>
+            <a:off x="1005840" y="6364224"/>
             <a:ext cx="7315200" cy="365760"/>
           </a:xfrm>
           <a:prstGeom prst="rect">
@@ -6097,14 +6986,14 @@
       </p:sp>
       <p:sp>
         <p:nvSpPr>
-          <p:cNvPr id="4" name="TextBox 3"/>
+          <p:cNvPr id="6" name="TextBox 5"/>
           <p:cNvSpPr txBox="1"/>
           <p:nvPr/>
         </p:nvSpPr>
         <p:spPr>
           <a:xfrm>
-            <a:off x="10637215" y="6355080"/>
-            <a:ext cx="822960" cy="365760"/>
+            <a:off x="10454335" y="6364224"/>
+            <a:ext cx="1005840" cy="365760"/>
           </a:xfrm>
           <a:prstGeom prst="rect">
             <a:avLst/>
@@ -6142,14 +7031,58 @@
       </p:sp>
       <p:sp>
         <p:nvSpPr>
-          <p:cNvPr id="5" name="TextBox 4"/>
+          <p:cNvPr id="7" name="Rectangle 6"/>
+          <p:cNvSpPr/>
+          <p:nvPr/>
+        </p:nvSpPr>
+        <p:spPr>
+          <a:xfrm>
+            <a:off x="822960" y="576072"/>
+            <a:ext cx="64008" cy="182880"/>
+          </a:xfrm>
+          <a:prstGeom prst="rect">
+            <a:avLst/>
+          </a:prstGeom>
+          <a:solidFill>
+            <a:srgbClr val="00E676"/>
+          </a:solidFill>
+          <a:ln>
+            <a:noFill/>
+          </a:ln>
+          <a:effectLst/>
+        </p:spPr>
+        <p:style>
+          <a:lnRef idx="1">
+            <a:schemeClr val="accent1"/>
+          </a:lnRef>
+          <a:fillRef idx="3">
+            <a:schemeClr val="accent1"/>
+          </a:fillRef>
+          <a:effectRef idx="2">
+            <a:schemeClr val="accent1"/>
+          </a:effectRef>
+          <a:fontRef idx="minor">
+            <a:schemeClr val="lt1"/>
+          </a:fontRef>
+        </p:style>
+        <p:txBody>
+          <a:bodyPr rtlCol="0" anchor="ctr"/>
+          <a:lstStyle/>
+          <a:p>
+            <a:pPr algn="ctr"/>
+          </a:p>
+        </p:txBody>
+      </p:sp>
+      <p:sp>
+        <p:nvSpPr>
+          <p:cNvPr id="8" name="TextBox 7"/>
           <p:cNvSpPr txBox="1"/>
           <p:nvPr/>
         </p:nvSpPr>
         <p:spPr>
           <a:xfrm>
-            <a:off x="822960" y="566928"/>
-            <a:ext cx="10515600" cy="274320"/>
+            <a:off x="1024128" y="548640"/>
+            <a:ext cx="10332720" cy="274320"/>
           </a:xfrm>
           <a:prstGeom prst="rect">
             <a:avLst/>
@@ -6187,13 +7120,13 @@
       </p:sp>
       <p:sp>
         <p:nvSpPr>
-          <p:cNvPr id="6" name="TextBox 5"/>
+          <p:cNvPr id="9" name="TextBox 8"/>
           <p:cNvSpPr txBox="1"/>
           <p:nvPr/>
         </p:nvSpPr>
         <p:spPr>
           <a:xfrm>
-            <a:off x="822960" y="950976"/>
+            <a:off x="804672" y="950976"/>
             <a:ext cx="10607040" cy="914400"/>
           </a:xfrm>
           <a:prstGeom prst="rect">
@@ -6232,14 +7165,14 @@
       </p:sp>
       <p:sp>
         <p:nvSpPr>
-          <p:cNvPr id="7" name="Rectangle 6"/>
+          <p:cNvPr id="10" name="Rectangle 9"/>
           <p:cNvSpPr/>
           <p:nvPr/>
         </p:nvSpPr>
         <p:spPr>
           <a:xfrm>
-            <a:off x="841248" y="1664208"/>
-            <a:ext cx="640080" cy="41148"/>
+            <a:off x="841248" y="1627632"/>
+            <a:ext cx="603504" cy="45720"/>
           </a:xfrm>
           <a:prstGeom prst="rect">
             <a:avLst/>
@@ -6276,13 +7209,57 @@
       </p:sp>
       <p:sp>
         <p:nvSpPr>
-          <p:cNvPr id="8" name="TextBox 7"/>
+          <p:cNvPr id="11" name="Rectangle 10"/>
+          <p:cNvSpPr/>
+          <p:nvPr/>
+        </p:nvSpPr>
+        <p:spPr>
+          <a:xfrm>
+            <a:off x="822960" y="1664208"/>
+            <a:ext cx="10515600" cy="10972"/>
+          </a:xfrm>
+          <a:prstGeom prst="rect">
+            <a:avLst/>
+          </a:prstGeom>
+          <a:solidFill>
+            <a:srgbClr val="22302B"/>
+          </a:solidFill>
+          <a:ln>
+            <a:noFill/>
+          </a:ln>
+          <a:effectLst/>
+        </p:spPr>
+        <p:style>
+          <a:lnRef idx="1">
+            <a:schemeClr val="accent1"/>
+          </a:lnRef>
+          <a:fillRef idx="3">
+            <a:schemeClr val="accent1"/>
+          </a:fillRef>
+          <a:effectRef idx="2">
+            <a:schemeClr val="accent1"/>
+          </a:effectRef>
+          <a:fontRef idx="minor">
+            <a:schemeClr val="lt1"/>
+          </a:fontRef>
+        </p:style>
+        <p:txBody>
+          <a:bodyPr rtlCol="0" anchor="ctr"/>
+          <a:lstStyle/>
+          <a:p>
+            <a:pPr algn="ctr"/>
+          </a:p>
+        </p:txBody>
+      </p:sp>
+      <p:sp>
+        <p:nvSpPr>
+          <p:cNvPr id="12" name="TextBox 11"/>
           <p:cNvSpPr txBox="1"/>
           <p:nvPr/>
         </p:nvSpPr>
         <p:spPr>
           <a:xfrm>
-            <a:off x="822960" y="1828800"/>
+            <a:off x="822960" y="1892807"/>
             <a:ext cx="10607040" cy="4572000"/>
           </a:xfrm>
           <a:prstGeom prst="rect">
@@ -6499,13 +7476,13 @@
       </p:sp>
       <p:sp>
         <p:nvSpPr>
-          <p:cNvPr id="9" name="Rounded Rectangle 8"/>
+          <p:cNvPr id="13" name="Rounded Rectangle 12"/>
           <p:cNvSpPr/>
           <p:nvPr/>
         </p:nvSpPr>
         <p:spPr>
           <a:xfrm>
-            <a:off x="822960" y="4983480"/>
+            <a:off x="822960" y="5047488"/>
             <a:ext cx="10515600" cy="914400"/>
           </a:xfrm>
           <a:prstGeom prst="roundRect">
@@ -6545,13 +7522,57 @@
       </p:sp>
       <p:sp>
         <p:nvSpPr>
-          <p:cNvPr id="10" name="TextBox 9"/>
+          <p:cNvPr id="14" name="Rectangle 13"/>
+          <p:cNvSpPr/>
+          <p:nvPr/>
+        </p:nvSpPr>
+        <p:spPr>
+          <a:xfrm>
+            <a:off x="822960" y="5047488"/>
+            <a:ext cx="73152" cy="914400"/>
+          </a:xfrm>
+          <a:prstGeom prst="rect">
+            <a:avLst/>
+          </a:prstGeom>
+          <a:solidFill>
+            <a:srgbClr val="00E676"/>
+          </a:solidFill>
+          <a:ln>
+            <a:noFill/>
+          </a:ln>
+          <a:effectLst/>
+        </p:spPr>
+        <p:style>
+          <a:lnRef idx="1">
+            <a:schemeClr val="accent1"/>
+          </a:lnRef>
+          <a:fillRef idx="3">
+            <a:schemeClr val="accent1"/>
+          </a:fillRef>
+          <a:effectRef idx="2">
+            <a:schemeClr val="accent1"/>
+          </a:effectRef>
+          <a:fontRef idx="minor">
+            <a:schemeClr val="lt1"/>
+          </a:fontRef>
+        </p:style>
+        <p:txBody>
+          <a:bodyPr rtlCol="0" anchor="ctr"/>
+          <a:lstStyle/>
+          <a:p>
+            <a:pPr algn="ctr"/>
+          </a:p>
+        </p:txBody>
+      </p:sp>
+      <p:sp>
+        <p:nvSpPr>
+          <p:cNvPr id="15" name="TextBox 14"/>
           <p:cNvSpPr txBox="1"/>
           <p:nvPr/>
         </p:nvSpPr>
         <p:spPr>
           <a:xfrm>
-            <a:off x="1051560" y="5093208"/>
+            <a:off x="1097280" y="5157216"/>
             <a:ext cx="10058400" cy="731520"/>
           </a:xfrm>
           <a:prstGeom prst="rect">
@@ -6678,13 +7699,101 @@
       </p:sp>
       <p:sp>
         <p:nvSpPr>
-          <p:cNvPr id="3" name="TextBox 2"/>
+          <p:cNvPr id="3" name="Rectangle 2"/>
+          <p:cNvSpPr/>
+          <p:nvPr/>
+        </p:nvSpPr>
+        <p:spPr>
+          <a:xfrm>
+            <a:off x="822960" y="6291072"/>
+            <a:ext cx="10515600" cy="10972"/>
+          </a:xfrm>
+          <a:prstGeom prst="rect">
+            <a:avLst/>
+          </a:prstGeom>
+          <a:solidFill>
+            <a:srgbClr val="22302B"/>
+          </a:solidFill>
+          <a:ln>
+            <a:noFill/>
+          </a:ln>
+          <a:effectLst/>
+        </p:spPr>
+        <p:style>
+          <a:lnRef idx="1">
+            <a:schemeClr val="accent1"/>
+          </a:lnRef>
+          <a:fillRef idx="3">
+            <a:schemeClr val="accent1"/>
+          </a:fillRef>
+          <a:effectRef idx="2">
+            <a:schemeClr val="accent1"/>
+          </a:effectRef>
+          <a:fontRef idx="minor">
+            <a:schemeClr val="lt1"/>
+          </a:fontRef>
+        </p:style>
+        <p:txBody>
+          <a:bodyPr rtlCol="0" anchor="ctr"/>
+          <a:lstStyle/>
+          <a:p>
+            <a:pPr algn="ctr"/>
+          </a:p>
+        </p:txBody>
+      </p:sp>
+      <p:sp>
+        <p:nvSpPr>
+          <p:cNvPr id="4" name="Rectangle 3"/>
+          <p:cNvSpPr/>
+          <p:nvPr/>
+        </p:nvSpPr>
+        <p:spPr>
+          <a:xfrm>
+            <a:off x="822960" y="6391656"/>
+            <a:ext cx="73152" cy="155448"/>
+          </a:xfrm>
+          <a:prstGeom prst="rect">
+            <a:avLst/>
+          </a:prstGeom>
+          <a:solidFill>
+            <a:srgbClr val="00E676"/>
+          </a:solidFill>
+          <a:ln>
+            <a:noFill/>
+          </a:ln>
+          <a:effectLst/>
+        </p:spPr>
+        <p:style>
+          <a:lnRef idx="1">
+            <a:schemeClr val="accent1"/>
+          </a:lnRef>
+          <a:fillRef idx="3">
+            <a:schemeClr val="accent1"/>
+          </a:fillRef>
+          <a:effectRef idx="2">
+            <a:schemeClr val="accent1"/>
+          </a:effectRef>
+          <a:fontRef idx="minor">
+            <a:schemeClr val="lt1"/>
+          </a:fontRef>
+        </p:style>
+        <p:txBody>
+          <a:bodyPr rtlCol="0" anchor="ctr"/>
+          <a:lstStyle/>
+          <a:p>
+            <a:pPr algn="ctr"/>
+          </a:p>
+        </p:txBody>
+      </p:sp>
+      <p:sp>
+        <p:nvSpPr>
+          <p:cNvPr id="5" name="TextBox 4"/>
           <p:cNvSpPr txBox="1"/>
           <p:nvPr/>
         </p:nvSpPr>
         <p:spPr>
           <a:xfrm>
-            <a:off x="822960" y="6355080"/>
+            <a:off x="1005840" y="6364224"/>
             <a:ext cx="7315200" cy="365760"/>
           </a:xfrm>
           <a:prstGeom prst="rect">
@@ -6732,14 +7841,14 @@
       </p:sp>
       <p:sp>
         <p:nvSpPr>
-          <p:cNvPr id="4" name="TextBox 3"/>
+          <p:cNvPr id="6" name="TextBox 5"/>
           <p:cNvSpPr txBox="1"/>
           <p:nvPr/>
         </p:nvSpPr>
         <p:spPr>
           <a:xfrm>
-            <a:off x="10637215" y="6355080"/>
-            <a:ext cx="822960" cy="365760"/>
+            <a:off x="10454335" y="6364224"/>
+            <a:ext cx="1005840" cy="365760"/>
           </a:xfrm>
           <a:prstGeom prst="rect">
             <a:avLst/>
@@ -6777,14 +7886,58 @@
       </p:sp>
       <p:sp>
         <p:nvSpPr>
-          <p:cNvPr id="5" name="TextBox 4"/>
+          <p:cNvPr id="7" name="Rectangle 6"/>
+          <p:cNvSpPr/>
+          <p:nvPr/>
+        </p:nvSpPr>
+        <p:spPr>
+          <a:xfrm>
+            <a:off x="822960" y="576072"/>
+            <a:ext cx="64008" cy="182880"/>
+          </a:xfrm>
+          <a:prstGeom prst="rect">
+            <a:avLst/>
+          </a:prstGeom>
+          <a:solidFill>
+            <a:srgbClr val="00E676"/>
+          </a:solidFill>
+          <a:ln>
+            <a:noFill/>
+          </a:ln>
+          <a:effectLst/>
+        </p:spPr>
+        <p:style>
+          <a:lnRef idx="1">
+            <a:schemeClr val="accent1"/>
+          </a:lnRef>
+          <a:fillRef idx="3">
+            <a:schemeClr val="accent1"/>
+          </a:fillRef>
+          <a:effectRef idx="2">
+            <a:schemeClr val="accent1"/>
+          </a:effectRef>
+          <a:fontRef idx="minor">
+            <a:schemeClr val="lt1"/>
+          </a:fontRef>
+        </p:style>
+        <p:txBody>
+          <a:bodyPr rtlCol="0" anchor="ctr"/>
+          <a:lstStyle/>
+          <a:p>
+            <a:pPr algn="ctr"/>
+          </a:p>
+        </p:txBody>
+      </p:sp>
+      <p:sp>
+        <p:nvSpPr>
+          <p:cNvPr id="8" name="TextBox 7"/>
           <p:cNvSpPr txBox="1"/>
           <p:nvPr/>
         </p:nvSpPr>
         <p:spPr>
           <a:xfrm>
-            <a:off x="822960" y="566928"/>
-            <a:ext cx="10515600" cy="274320"/>
+            <a:off x="1024128" y="548640"/>
+            <a:ext cx="10332720" cy="274320"/>
           </a:xfrm>
           <a:prstGeom prst="rect">
             <a:avLst/>
@@ -6822,13 +7975,13 @@
       </p:sp>
       <p:sp>
         <p:nvSpPr>
-          <p:cNvPr id="6" name="TextBox 5"/>
+          <p:cNvPr id="9" name="TextBox 8"/>
           <p:cNvSpPr txBox="1"/>
           <p:nvPr/>
         </p:nvSpPr>
         <p:spPr>
           <a:xfrm>
-            <a:off x="822960" y="950976"/>
+            <a:off x="804672" y="950976"/>
             <a:ext cx="10607040" cy="914400"/>
           </a:xfrm>
           <a:prstGeom prst="rect">
@@ -6867,14 +8020,14 @@
       </p:sp>
       <p:sp>
         <p:nvSpPr>
-          <p:cNvPr id="7" name="Rectangle 6"/>
+          <p:cNvPr id="10" name="Rectangle 9"/>
           <p:cNvSpPr/>
           <p:nvPr/>
         </p:nvSpPr>
         <p:spPr>
           <a:xfrm>
-            <a:off x="841248" y="1664208"/>
-            <a:ext cx="640080" cy="41148"/>
+            <a:off x="841248" y="1627632"/>
+            <a:ext cx="603504" cy="45720"/>
           </a:xfrm>
           <a:prstGeom prst="rect">
             <a:avLst/>
@@ -6911,13 +8064,57 @@
       </p:sp>
       <p:sp>
         <p:nvSpPr>
-          <p:cNvPr id="8" name="TextBox 7"/>
+          <p:cNvPr id="11" name="Rectangle 10"/>
+          <p:cNvSpPr/>
+          <p:nvPr/>
+        </p:nvSpPr>
+        <p:spPr>
+          <a:xfrm>
+            <a:off x="822960" y="1664208"/>
+            <a:ext cx="10515600" cy="10972"/>
+          </a:xfrm>
+          <a:prstGeom prst="rect">
+            <a:avLst/>
+          </a:prstGeom>
+          <a:solidFill>
+            <a:srgbClr val="22302B"/>
+          </a:solidFill>
+          <a:ln>
+            <a:noFill/>
+          </a:ln>
+          <a:effectLst/>
+        </p:spPr>
+        <p:style>
+          <a:lnRef idx="1">
+            <a:schemeClr val="accent1"/>
+          </a:lnRef>
+          <a:fillRef idx="3">
+            <a:schemeClr val="accent1"/>
+          </a:fillRef>
+          <a:effectRef idx="2">
+            <a:schemeClr val="accent1"/>
+          </a:effectRef>
+          <a:fontRef idx="minor">
+            <a:schemeClr val="lt1"/>
+          </a:fontRef>
+        </p:style>
+        <p:txBody>
+          <a:bodyPr rtlCol="0" anchor="ctr"/>
+          <a:lstStyle/>
+          <a:p>
+            <a:pPr algn="ctr"/>
+          </a:p>
+        </p:txBody>
+      </p:sp>
+      <p:sp>
+        <p:nvSpPr>
+          <p:cNvPr id="12" name="TextBox 11"/>
           <p:cNvSpPr txBox="1"/>
           <p:nvPr/>
         </p:nvSpPr>
         <p:spPr>
           <a:xfrm>
-            <a:off x="822960" y="1874519"/>
+            <a:off x="822960" y="1938528"/>
             <a:ext cx="10607040" cy="4572000"/>
           </a:xfrm>
           <a:prstGeom prst="rect">
@@ -7047,7 +8244,7 @@
                 </a:solidFill>
                 <a:latin typeface="Segoe UI"/>
               </a:rPr>
-              <a:t>  release build embeds JS, runs in airplane mode, no Metro.</a:t>
+              <a:t>  release build embeds JS; runs in airplane mode, no Metro.</a:t>
             </a:r>
           </a:p>
           <a:p>
@@ -7204,13 +8401,101 @@
       </p:sp>
       <p:sp>
         <p:nvSpPr>
-          <p:cNvPr id="3" name="TextBox 2"/>
+          <p:cNvPr id="3" name="Rectangle 2"/>
+          <p:cNvSpPr/>
+          <p:nvPr/>
+        </p:nvSpPr>
+        <p:spPr>
+          <a:xfrm>
+            <a:off x="822960" y="6291072"/>
+            <a:ext cx="10515600" cy="10972"/>
+          </a:xfrm>
+          <a:prstGeom prst="rect">
+            <a:avLst/>
+          </a:prstGeom>
+          <a:solidFill>
+            <a:srgbClr val="22302B"/>
+          </a:solidFill>
+          <a:ln>
+            <a:noFill/>
+          </a:ln>
+          <a:effectLst/>
+        </p:spPr>
+        <p:style>
+          <a:lnRef idx="1">
+            <a:schemeClr val="accent1"/>
+          </a:lnRef>
+          <a:fillRef idx="3">
+            <a:schemeClr val="accent1"/>
+          </a:fillRef>
+          <a:effectRef idx="2">
+            <a:schemeClr val="accent1"/>
+          </a:effectRef>
+          <a:fontRef idx="minor">
+            <a:schemeClr val="lt1"/>
+          </a:fontRef>
+        </p:style>
+        <p:txBody>
+          <a:bodyPr rtlCol="0" anchor="ctr"/>
+          <a:lstStyle/>
+          <a:p>
+            <a:pPr algn="ctr"/>
+          </a:p>
+        </p:txBody>
+      </p:sp>
+      <p:sp>
+        <p:nvSpPr>
+          <p:cNvPr id="4" name="Rectangle 3"/>
+          <p:cNvSpPr/>
+          <p:nvPr/>
+        </p:nvSpPr>
+        <p:spPr>
+          <a:xfrm>
+            <a:off x="822960" y="6391656"/>
+            <a:ext cx="73152" cy="155448"/>
+          </a:xfrm>
+          <a:prstGeom prst="rect">
+            <a:avLst/>
+          </a:prstGeom>
+          <a:solidFill>
+            <a:srgbClr val="00E676"/>
+          </a:solidFill>
+          <a:ln>
+            <a:noFill/>
+          </a:ln>
+          <a:effectLst/>
+        </p:spPr>
+        <p:style>
+          <a:lnRef idx="1">
+            <a:schemeClr val="accent1"/>
+          </a:lnRef>
+          <a:fillRef idx="3">
+            <a:schemeClr val="accent1"/>
+          </a:fillRef>
+          <a:effectRef idx="2">
+            <a:schemeClr val="accent1"/>
+          </a:effectRef>
+          <a:fontRef idx="minor">
+            <a:schemeClr val="lt1"/>
+          </a:fontRef>
+        </p:style>
+        <p:txBody>
+          <a:bodyPr rtlCol="0" anchor="ctr"/>
+          <a:lstStyle/>
+          <a:p>
+            <a:pPr algn="ctr"/>
+          </a:p>
+        </p:txBody>
+      </p:sp>
+      <p:sp>
+        <p:nvSpPr>
+          <p:cNvPr id="5" name="TextBox 4"/>
           <p:cNvSpPr txBox="1"/>
           <p:nvPr/>
         </p:nvSpPr>
         <p:spPr>
           <a:xfrm>
-            <a:off x="822960" y="6355080"/>
+            <a:off x="1005840" y="6364224"/>
             <a:ext cx="7315200" cy="365760"/>
           </a:xfrm>
           <a:prstGeom prst="rect">
@@ -7258,14 +8543,14 @@
       </p:sp>
       <p:sp>
         <p:nvSpPr>
-          <p:cNvPr id="4" name="TextBox 3"/>
+          <p:cNvPr id="6" name="TextBox 5"/>
           <p:cNvSpPr txBox="1"/>
           <p:nvPr/>
         </p:nvSpPr>
         <p:spPr>
           <a:xfrm>
-            <a:off x="10637215" y="6355080"/>
-            <a:ext cx="822960" cy="365760"/>
+            <a:off x="10454335" y="6364224"/>
+            <a:ext cx="1005840" cy="365760"/>
           </a:xfrm>
           <a:prstGeom prst="rect">
             <a:avLst/>
@@ -7303,14 +8588,58 @@
       </p:sp>
       <p:sp>
         <p:nvSpPr>
-          <p:cNvPr id="5" name="TextBox 4"/>
+          <p:cNvPr id="7" name="Rectangle 6"/>
+          <p:cNvSpPr/>
+          <p:nvPr/>
+        </p:nvSpPr>
+        <p:spPr>
+          <a:xfrm>
+            <a:off x="822960" y="576072"/>
+            <a:ext cx="64008" cy="182880"/>
+          </a:xfrm>
+          <a:prstGeom prst="rect">
+            <a:avLst/>
+          </a:prstGeom>
+          <a:solidFill>
+            <a:srgbClr val="00E676"/>
+          </a:solidFill>
+          <a:ln>
+            <a:noFill/>
+          </a:ln>
+          <a:effectLst/>
+        </p:spPr>
+        <p:style>
+          <a:lnRef idx="1">
+            <a:schemeClr val="accent1"/>
+          </a:lnRef>
+          <a:fillRef idx="3">
+            <a:schemeClr val="accent1"/>
+          </a:fillRef>
+          <a:effectRef idx="2">
+            <a:schemeClr val="accent1"/>
+          </a:effectRef>
+          <a:fontRef idx="minor">
+            <a:schemeClr val="lt1"/>
+          </a:fontRef>
+        </p:style>
+        <p:txBody>
+          <a:bodyPr rtlCol="0" anchor="ctr"/>
+          <a:lstStyle/>
+          <a:p>
+            <a:pPr algn="ctr"/>
+          </a:p>
+        </p:txBody>
+      </p:sp>
+      <p:sp>
+        <p:nvSpPr>
+          <p:cNvPr id="8" name="TextBox 7"/>
           <p:cNvSpPr txBox="1"/>
           <p:nvPr/>
         </p:nvSpPr>
         <p:spPr>
           <a:xfrm>
-            <a:off x="822960" y="566928"/>
-            <a:ext cx="10515600" cy="274320"/>
+            <a:off x="1024128" y="548640"/>
+            <a:ext cx="10332720" cy="274320"/>
           </a:xfrm>
           <a:prstGeom prst="rect">
             <a:avLst/>
@@ -7348,13 +8677,13 @@
       </p:sp>
       <p:sp>
         <p:nvSpPr>
-          <p:cNvPr id="6" name="TextBox 5"/>
+          <p:cNvPr id="9" name="TextBox 8"/>
           <p:cNvSpPr txBox="1"/>
           <p:nvPr/>
         </p:nvSpPr>
         <p:spPr>
           <a:xfrm>
-            <a:off x="822960" y="950976"/>
+            <a:off x="804672" y="950976"/>
             <a:ext cx="10607040" cy="914400"/>
           </a:xfrm>
           <a:prstGeom prst="rect">
@@ -7393,14 +8722,14 @@
       </p:sp>
       <p:sp>
         <p:nvSpPr>
-          <p:cNvPr id="7" name="Rectangle 6"/>
+          <p:cNvPr id="10" name="Rectangle 9"/>
           <p:cNvSpPr/>
           <p:nvPr/>
         </p:nvSpPr>
         <p:spPr>
           <a:xfrm>
-            <a:off x="841248" y="1664208"/>
-            <a:ext cx="640080" cy="41148"/>
+            <a:off x="841248" y="1627632"/>
+            <a:ext cx="603504" cy="45720"/>
           </a:xfrm>
           <a:prstGeom prst="rect">
             <a:avLst/>
@@ -7437,13 +8766,57 @@
       </p:sp>
       <p:sp>
         <p:nvSpPr>
-          <p:cNvPr id="8" name="TextBox 7"/>
+          <p:cNvPr id="11" name="Rectangle 10"/>
+          <p:cNvSpPr/>
+          <p:nvPr/>
+        </p:nvSpPr>
+        <p:spPr>
+          <a:xfrm>
+            <a:off x="822960" y="1664208"/>
+            <a:ext cx="10515600" cy="10972"/>
+          </a:xfrm>
+          <a:prstGeom prst="rect">
+            <a:avLst/>
+          </a:prstGeom>
+          <a:solidFill>
+            <a:srgbClr val="22302B"/>
+          </a:solidFill>
+          <a:ln>
+            <a:noFill/>
+          </a:ln>
+          <a:effectLst/>
+        </p:spPr>
+        <p:style>
+          <a:lnRef idx="1">
+            <a:schemeClr val="accent1"/>
+          </a:lnRef>
+          <a:fillRef idx="3">
+            <a:schemeClr val="accent1"/>
+          </a:fillRef>
+          <a:effectRef idx="2">
+            <a:schemeClr val="accent1"/>
+          </a:effectRef>
+          <a:fontRef idx="minor">
+            <a:schemeClr val="lt1"/>
+          </a:fontRef>
+        </p:style>
+        <p:txBody>
+          <a:bodyPr rtlCol="0" anchor="ctr"/>
+          <a:lstStyle/>
+          <a:p>
+            <a:pPr algn="ctr"/>
+          </a:p>
+        </p:txBody>
+      </p:sp>
+      <p:sp>
+        <p:nvSpPr>
+          <p:cNvPr id="12" name="TextBox 11"/>
           <p:cNvSpPr txBox="1"/>
           <p:nvPr/>
         </p:nvSpPr>
         <p:spPr>
           <a:xfrm>
-            <a:off x="822960" y="1874519"/>
+            <a:off x="822960" y="1938528"/>
             <a:ext cx="10607040" cy="4572000"/>
           </a:xfrm>
           <a:prstGeom prst="rect">
@@ -7730,13 +9103,101 @@
       </p:sp>
       <p:sp>
         <p:nvSpPr>
-          <p:cNvPr id="3" name="TextBox 2"/>
+          <p:cNvPr id="3" name="Rectangle 2"/>
+          <p:cNvSpPr/>
+          <p:nvPr/>
+        </p:nvSpPr>
+        <p:spPr>
+          <a:xfrm>
+            <a:off x="822960" y="6291072"/>
+            <a:ext cx="10515600" cy="10972"/>
+          </a:xfrm>
+          <a:prstGeom prst="rect">
+            <a:avLst/>
+          </a:prstGeom>
+          <a:solidFill>
+            <a:srgbClr val="22302B"/>
+          </a:solidFill>
+          <a:ln>
+            <a:noFill/>
+          </a:ln>
+          <a:effectLst/>
+        </p:spPr>
+        <p:style>
+          <a:lnRef idx="1">
+            <a:schemeClr val="accent1"/>
+          </a:lnRef>
+          <a:fillRef idx="3">
+            <a:schemeClr val="accent1"/>
+          </a:fillRef>
+          <a:effectRef idx="2">
+            <a:schemeClr val="accent1"/>
+          </a:effectRef>
+          <a:fontRef idx="minor">
+            <a:schemeClr val="lt1"/>
+          </a:fontRef>
+        </p:style>
+        <p:txBody>
+          <a:bodyPr rtlCol="0" anchor="ctr"/>
+          <a:lstStyle/>
+          <a:p>
+            <a:pPr algn="ctr"/>
+          </a:p>
+        </p:txBody>
+      </p:sp>
+      <p:sp>
+        <p:nvSpPr>
+          <p:cNvPr id="4" name="Rectangle 3"/>
+          <p:cNvSpPr/>
+          <p:nvPr/>
+        </p:nvSpPr>
+        <p:spPr>
+          <a:xfrm>
+            <a:off x="822960" y="6391656"/>
+            <a:ext cx="73152" cy="155448"/>
+          </a:xfrm>
+          <a:prstGeom prst="rect">
+            <a:avLst/>
+          </a:prstGeom>
+          <a:solidFill>
+            <a:srgbClr val="00E676"/>
+          </a:solidFill>
+          <a:ln>
+            <a:noFill/>
+          </a:ln>
+          <a:effectLst/>
+        </p:spPr>
+        <p:style>
+          <a:lnRef idx="1">
+            <a:schemeClr val="accent1"/>
+          </a:lnRef>
+          <a:fillRef idx="3">
+            <a:schemeClr val="accent1"/>
+          </a:fillRef>
+          <a:effectRef idx="2">
+            <a:schemeClr val="accent1"/>
+          </a:effectRef>
+          <a:fontRef idx="minor">
+            <a:schemeClr val="lt1"/>
+          </a:fontRef>
+        </p:style>
+        <p:txBody>
+          <a:bodyPr rtlCol="0" anchor="ctr"/>
+          <a:lstStyle/>
+          <a:p>
+            <a:pPr algn="ctr"/>
+          </a:p>
+        </p:txBody>
+      </p:sp>
+      <p:sp>
+        <p:nvSpPr>
+          <p:cNvPr id="5" name="TextBox 4"/>
           <p:cNvSpPr txBox="1"/>
           <p:nvPr/>
         </p:nvSpPr>
         <p:spPr>
           <a:xfrm>
-            <a:off x="822960" y="6355080"/>
+            <a:off x="1005840" y="6364224"/>
             <a:ext cx="7315200" cy="365760"/>
           </a:xfrm>
           <a:prstGeom prst="rect">
@@ -7784,14 +9245,14 @@
       </p:sp>
       <p:sp>
         <p:nvSpPr>
-          <p:cNvPr id="4" name="TextBox 3"/>
+          <p:cNvPr id="6" name="TextBox 5"/>
           <p:cNvSpPr txBox="1"/>
           <p:nvPr/>
         </p:nvSpPr>
         <p:spPr>
           <a:xfrm>
-            <a:off x="10637215" y="6355080"/>
-            <a:ext cx="822960" cy="365760"/>
+            <a:off x="10454335" y="6364224"/>
+            <a:ext cx="1005840" cy="365760"/>
           </a:xfrm>
           <a:prstGeom prst="rect">
             <a:avLst/>
@@ -7829,14 +9290,58 @@
       </p:sp>
       <p:sp>
         <p:nvSpPr>
-          <p:cNvPr id="5" name="TextBox 4"/>
+          <p:cNvPr id="7" name="Rectangle 6"/>
+          <p:cNvSpPr/>
+          <p:nvPr/>
+        </p:nvSpPr>
+        <p:spPr>
+          <a:xfrm>
+            <a:off x="822960" y="576072"/>
+            <a:ext cx="64008" cy="182880"/>
+          </a:xfrm>
+          <a:prstGeom prst="rect">
+            <a:avLst/>
+          </a:prstGeom>
+          <a:solidFill>
+            <a:srgbClr val="00E676"/>
+          </a:solidFill>
+          <a:ln>
+            <a:noFill/>
+          </a:ln>
+          <a:effectLst/>
+        </p:spPr>
+        <p:style>
+          <a:lnRef idx="1">
+            <a:schemeClr val="accent1"/>
+          </a:lnRef>
+          <a:fillRef idx="3">
+            <a:schemeClr val="accent1"/>
+          </a:fillRef>
+          <a:effectRef idx="2">
+            <a:schemeClr val="accent1"/>
+          </a:effectRef>
+          <a:fontRef idx="minor">
+            <a:schemeClr val="lt1"/>
+          </a:fontRef>
+        </p:style>
+        <p:txBody>
+          <a:bodyPr rtlCol="0" anchor="ctr"/>
+          <a:lstStyle/>
+          <a:p>
+            <a:pPr algn="ctr"/>
+          </a:p>
+        </p:txBody>
+      </p:sp>
+      <p:sp>
+        <p:nvSpPr>
+          <p:cNvPr id="8" name="TextBox 7"/>
           <p:cNvSpPr txBox="1"/>
           <p:nvPr/>
         </p:nvSpPr>
         <p:spPr>
           <a:xfrm>
-            <a:off x="822960" y="566928"/>
-            <a:ext cx="10515600" cy="274320"/>
+            <a:off x="1024128" y="548640"/>
+            <a:ext cx="10332720" cy="274320"/>
           </a:xfrm>
           <a:prstGeom prst="rect">
             <a:avLst/>
@@ -7874,13 +9379,13 @@
       </p:sp>
       <p:sp>
         <p:nvSpPr>
-          <p:cNvPr id="6" name="TextBox 5"/>
+          <p:cNvPr id="9" name="TextBox 8"/>
           <p:cNvSpPr txBox="1"/>
           <p:nvPr/>
         </p:nvSpPr>
         <p:spPr>
           <a:xfrm>
-            <a:off x="822960" y="950976"/>
+            <a:off x="804672" y="950976"/>
             <a:ext cx="10607040" cy="914400"/>
           </a:xfrm>
           <a:prstGeom prst="rect">
@@ -7919,14 +9424,14 @@
       </p:sp>
       <p:sp>
         <p:nvSpPr>
-          <p:cNvPr id="7" name="Rectangle 6"/>
+          <p:cNvPr id="10" name="Rectangle 9"/>
           <p:cNvSpPr/>
           <p:nvPr/>
         </p:nvSpPr>
         <p:spPr>
           <a:xfrm>
-            <a:off x="841248" y="1664208"/>
-            <a:ext cx="640080" cy="41148"/>
+            <a:off x="841248" y="1627632"/>
+            <a:ext cx="603504" cy="45720"/>
           </a:xfrm>
           <a:prstGeom prst="rect">
             <a:avLst/>
@@ -7961,17 +9466,61 @@
           </a:p>
         </p:txBody>
       </p:sp>
+      <p:sp>
+        <p:nvSpPr>
+          <p:cNvPr id="11" name="Rectangle 10"/>
+          <p:cNvSpPr/>
+          <p:nvPr/>
+        </p:nvSpPr>
+        <p:spPr>
+          <a:xfrm>
+            <a:off x="822960" y="1664208"/>
+            <a:ext cx="10515600" cy="10972"/>
+          </a:xfrm>
+          <a:prstGeom prst="rect">
+            <a:avLst/>
+          </a:prstGeom>
+          <a:solidFill>
+            <a:srgbClr val="22302B"/>
+          </a:solidFill>
+          <a:ln>
+            <a:noFill/>
+          </a:ln>
+          <a:effectLst/>
+        </p:spPr>
+        <p:style>
+          <a:lnRef idx="1">
+            <a:schemeClr val="accent1"/>
+          </a:lnRef>
+          <a:fillRef idx="3">
+            <a:schemeClr val="accent1"/>
+          </a:fillRef>
+          <a:effectRef idx="2">
+            <a:schemeClr val="accent1"/>
+          </a:effectRef>
+          <a:fontRef idx="minor">
+            <a:schemeClr val="lt1"/>
+          </a:fontRef>
+        </p:style>
+        <p:txBody>
+          <a:bodyPr rtlCol="0" anchor="ctr"/>
+          <a:lstStyle/>
+          <a:p>
+            <a:pPr algn="ctr"/>
+          </a:p>
+        </p:txBody>
+      </p:sp>
       <p:graphicFrame>
         <p:nvGraphicFramePr>
-          <p:cNvPr id="8" name="Table 7"/>
+          <p:cNvPr id="12" name="Table 11"/>
           <p:cNvGraphicFramePr>
             <a:graphicFrameLocks noGrp="1"/>
           </p:cNvGraphicFramePr>
           <p:nvPr/>
         </p:nvGraphicFramePr>
         <p:xfrm>
-          <a:off x="822960" y="1965960"/>
-          <a:ext cx="10515600" cy="2871216"/>
+          <a:off x="822960" y="2075688"/>
+          <a:ext cx="10515600" cy="2962656"/>
         </p:xfrm>
         <a:graphic>
           <a:graphicData uri="http://schemas.openxmlformats.org/drawingml/2006/table">
@@ -7984,7 +9533,7 @@
                 <a:gridCol w="1280160"/>
                 <a:gridCol w="5029200"/>
               </a:tblGrid>
-              <a:tr h="457200">
+              <a:tr h="475488">
                 <a:tc>
                   <a:txBody>
                     <a:bodyPr/>
@@ -8002,7 +9551,7 @@
                       </a:r>
                     </a:p>
                   </a:txBody>
-                  <a:tcPr marL="109728" marR="73152" marT="27432" marB="27432" anchor="ctr">
+                  <a:tcPr marL="128016" marR="73152" marT="18288" marB="18288" anchor="ctr">
                     <a:solidFill>
                       <a:srgbClr val="0B3D2A"/>
                     </a:solidFill>
@@ -8025,7 +9574,7 @@
                       </a:r>
                     </a:p>
                   </a:txBody>
-                  <a:tcPr marL="109728" marR="73152" marT="27432" marB="27432" anchor="ctr">
+                  <a:tcPr marL="128016" marR="73152" marT="18288" marB="18288" anchor="ctr">
                     <a:solidFill>
                       <a:srgbClr val="0B3D2A"/>
                     </a:solidFill>
@@ -8048,14 +9597,14 @@
                       </a:r>
                     </a:p>
                   </a:txBody>
-                  <a:tcPr marL="109728" marR="73152" marT="27432" marB="27432" anchor="ctr">
+                  <a:tcPr marL="128016" marR="73152" marT="18288" marB="18288" anchor="ctr">
                     <a:solidFill>
                       <a:srgbClr val="0B3D2A"/>
                     </a:solidFill>
                   </a:tcPr>
                 </a:tc>
               </a:tr>
-              <a:tr h="603504">
+              <a:tr h="621792">
                 <a:tc>
                   <a:txBody>
                     <a:bodyPr/>
@@ -8073,7 +9622,7 @@
                       </a:r>
                     </a:p>
                   </a:txBody>
-                  <a:tcPr marL="109728" marR="73152" marT="27432" marB="27432" anchor="ctr">
+                  <a:tcPr marL="128016" marR="73152" marT="18288" marB="18288" anchor="ctr">
                     <a:solidFill>
                       <a:srgbClr val="111714"/>
                     </a:solidFill>
@@ -8096,7 +9645,7 @@
                       </a:r>
                     </a:p>
                   </a:txBody>
-                  <a:tcPr marL="109728" marR="73152" marT="27432" marB="27432" anchor="ctr">
+                  <a:tcPr marL="128016" marR="73152" marT="18288" marB="18288" anchor="ctr">
                     <a:solidFill>
                       <a:srgbClr val="111714"/>
                     </a:solidFill>
@@ -8119,14 +9668,14 @@
                       </a:r>
                     </a:p>
                   </a:txBody>
-                  <a:tcPr marL="109728" marR="73152" marT="27432" marB="27432" anchor="ctr">
+                  <a:tcPr marL="128016" marR="73152" marT="18288" marB="18288" anchor="ctr">
                     <a:solidFill>
                       <a:srgbClr val="111714"/>
                     </a:solidFill>
                   </a:tcPr>
                 </a:tc>
               </a:tr>
-              <a:tr h="603504">
+              <a:tr h="621792">
                 <a:tc>
                   <a:txBody>
                     <a:bodyPr/>
@@ -8144,7 +9693,7 @@
                       </a:r>
                     </a:p>
                   </a:txBody>
-                  <a:tcPr marL="109728" marR="73152" marT="27432" marB="27432" anchor="ctr">
+                  <a:tcPr marL="128016" marR="73152" marT="18288" marB="18288" anchor="ctr">
                     <a:solidFill>
                       <a:srgbClr val="161D1A"/>
                     </a:solidFill>
@@ -8167,7 +9716,7 @@
                       </a:r>
                     </a:p>
                   </a:txBody>
-                  <a:tcPr marL="109728" marR="73152" marT="27432" marB="27432" anchor="ctr">
+                  <a:tcPr marL="128016" marR="73152" marT="18288" marB="18288" anchor="ctr">
                     <a:solidFill>
                       <a:srgbClr val="161D1A"/>
                     </a:solidFill>
@@ -8186,18 +9735,18 @@
                           </a:solidFill>
                           <a:latin typeface="Consolas"/>
                         </a:rPr>
-                        <a:t>drops into Datalake 3.0 · ~50 ms · &lt; 1 s</a:t>
+                        <a:t>drops into Datalake 3.0 · ~51 ms · &lt; 1 s</a:t>
                       </a:r>
                     </a:p>
                   </a:txBody>
-                  <a:tcPr marL="109728" marR="73152" marT="27432" marB="27432" anchor="ctr">
+                  <a:tcPr marL="128016" marR="73152" marT="18288" marB="18288" anchor="ctr">
                     <a:solidFill>
                       <a:srgbClr val="161D1A"/>
                     </a:solidFill>
                   </a:tcPr>
                 </a:tc>
               </a:tr>
-              <a:tr h="603504">
+              <a:tr h="621792">
                 <a:tc>
                   <a:txBody>
                     <a:bodyPr/>
@@ -8215,7 +9764,7 @@
                       </a:r>
                     </a:p>
                   </a:txBody>
-                  <a:tcPr marL="109728" marR="73152" marT="27432" marB="27432" anchor="ctr">
+                  <a:tcPr marL="128016" marR="73152" marT="18288" marB="18288" anchor="ctr">
                     <a:solidFill>
                       <a:srgbClr val="111714"/>
                     </a:solidFill>
@@ -8238,7 +9787,7 @@
                       </a:r>
                     </a:p>
                   </a:txBody>
-                  <a:tcPr marL="109728" marR="73152" marT="27432" marB="27432" anchor="ctr">
+                  <a:tcPr marL="128016" marR="73152" marT="18288" marB="18288" anchor="ctr">
                     <a:solidFill>
                       <a:srgbClr val="111714"/>
                     </a:solidFill>
@@ -8261,14 +9810,14 @@
                       </a:r>
                     </a:p>
                   </a:txBody>
-                  <a:tcPr marL="109728" marR="73152" marT="27432" marB="27432" anchor="ctr">
+                  <a:tcPr marL="128016" marR="73152" marT="18288" marB="18288" anchor="ctr">
                     <a:solidFill>
                       <a:srgbClr val="111714"/>
                     </a:solidFill>
                   </a:tcPr>
                 </a:tc>
               </a:tr>
-              <a:tr h="603504">
+              <a:tr h="621792">
                 <a:tc>
                   <a:txBody>
                     <a:bodyPr/>
@@ -8286,7 +9835,7 @@
                       </a:r>
                     </a:p>
                   </a:txBody>
-                  <a:tcPr marL="109728" marR="73152" marT="27432" marB="27432" anchor="ctr">
+                  <a:tcPr marL="128016" marR="73152" marT="18288" marB="18288" anchor="ctr">
                     <a:solidFill>
                       <a:srgbClr val="161D1A"/>
                     </a:solidFill>
@@ -8309,7 +9858,7 @@
                       </a:r>
                     </a:p>
                   </a:txBody>
-                  <a:tcPr marL="109728" marR="73152" marT="27432" marB="27432" anchor="ctr">
+                  <a:tcPr marL="128016" marR="73152" marT="18288" marB="18288" anchor="ctr">
                     <a:solidFill>
                       <a:srgbClr val="161D1A"/>
                     </a:solidFill>
@@ -8332,7 +9881,7 @@
                       </a:r>
                     </a:p>
                   </a:txBody>
-                  <a:tcPr marL="109728" marR="73152" marT="27432" marB="27432" anchor="ctr">
+                  <a:tcPr marL="128016" marR="73152" marT="18288" marB="18288" anchor="ctr">
                     <a:solidFill>
                       <a:srgbClr val="161D1A"/>
                     </a:solidFill>
@@ -8343,6 +9892,51 @@
           </a:graphicData>
         </a:graphic>
       </p:graphicFrame>
+      <p:sp>
+        <p:nvSpPr>
+          <p:cNvPr id="13" name="TextBox 12"/>
+          <p:cNvSpPr txBox="1"/>
+          <p:nvPr/>
+        </p:nvSpPr>
+        <p:spPr>
+          <a:xfrm>
+            <a:off x="822960" y="5458968"/>
+            <a:ext cx="10515600" cy="457200"/>
+          </a:xfrm>
+          <a:prstGeom prst="rect">
+            <a:avLst/>
+          </a:prstGeom>
+          <a:noFill/>
+        </p:spPr>
+        <p:txBody>
+          <a:bodyPr wrap="square" anchor="t" lIns="0" rIns="0" tIns="0" bIns="0">
+            <a:spAutoFit/>
+          </a:bodyPr>
+          <a:lstStyle/>
+          <a:p>
+            <a:pPr algn="l">
+              <a:lnSpc>
+                <a:spcPct val="100000"/>
+              </a:lnSpc>
+              <a:spcBef>
+                <a:spcPts val="0"/>
+              </a:spcBef>
+              <a:spcAft>
+                <a:spcPts val="400"/>
+              </a:spcAft>
+            </a:pPr>
+            <a:r>
+              <a:rPr sz="1400" b="0">
+                <a:solidFill>
+                  <a:srgbClr val="8DA39B"/>
+                </a:solidFill>
+                <a:latin typeface="Segoe UI"/>
+              </a:rPr>
+              <a:t>Open-source · lightweight · fully offline · ready for Datalake 3.0.</a:t>
+            </a:r>
+          </a:p>
+        </p:txBody>
+      </p:sp>
     </p:spTree>
   </p:cSld>
   <p:clrMapOvr>
@@ -8459,13 +10053,145 @@
       </p:sp>
       <p:sp>
         <p:nvSpPr>
-          <p:cNvPr id="4" name="TextBox 3"/>
+          <p:cNvPr id="4" name="Rectangle 3"/>
+          <p:cNvSpPr/>
+          <p:nvPr/>
+        </p:nvSpPr>
+        <p:spPr>
+          <a:xfrm>
+            <a:off x="11185855" y="6748272"/>
+            <a:ext cx="1005840" cy="109728"/>
+          </a:xfrm>
+          <a:prstGeom prst="rect">
+            <a:avLst/>
+          </a:prstGeom>
+          <a:solidFill>
+            <a:srgbClr val="00E676"/>
+          </a:solidFill>
+          <a:ln>
+            <a:noFill/>
+          </a:ln>
+          <a:effectLst/>
+        </p:spPr>
+        <p:style>
+          <a:lnRef idx="1">
+            <a:schemeClr val="accent1"/>
+          </a:lnRef>
+          <a:fillRef idx="3">
+            <a:schemeClr val="accent1"/>
+          </a:fillRef>
+          <a:effectRef idx="2">
+            <a:schemeClr val="accent1"/>
+          </a:effectRef>
+          <a:fontRef idx="minor">
+            <a:schemeClr val="lt1"/>
+          </a:fontRef>
+        </p:style>
+        <p:txBody>
+          <a:bodyPr rtlCol="0" anchor="ctr"/>
+          <a:lstStyle/>
+          <a:p>
+            <a:pPr algn="ctr"/>
+          </a:p>
+        </p:txBody>
+      </p:sp>
+      <p:sp>
+        <p:nvSpPr>
+          <p:cNvPr id="5" name="Rectangle 4"/>
+          <p:cNvSpPr/>
+          <p:nvPr/>
+        </p:nvSpPr>
+        <p:spPr>
+          <a:xfrm>
+            <a:off x="12081967" y="5852160"/>
+            <a:ext cx="109728" cy="1005840"/>
+          </a:xfrm>
+          <a:prstGeom prst="rect">
+            <a:avLst/>
+          </a:prstGeom>
+          <a:solidFill>
+            <a:srgbClr val="00E676"/>
+          </a:solidFill>
+          <a:ln>
+            <a:noFill/>
+          </a:ln>
+          <a:effectLst/>
+        </p:spPr>
+        <p:style>
+          <a:lnRef idx="1">
+            <a:schemeClr val="accent1"/>
+          </a:lnRef>
+          <a:fillRef idx="3">
+            <a:schemeClr val="accent1"/>
+          </a:fillRef>
+          <a:effectRef idx="2">
+            <a:schemeClr val="accent1"/>
+          </a:effectRef>
+          <a:fontRef idx="minor">
+            <a:schemeClr val="lt1"/>
+          </a:fontRef>
+        </p:style>
+        <p:txBody>
+          <a:bodyPr rtlCol="0" anchor="ctr"/>
+          <a:lstStyle/>
+          <a:p>
+            <a:pPr algn="ctr"/>
+          </a:p>
+        </p:txBody>
+      </p:sp>
+      <p:sp>
+        <p:nvSpPr>
+          <p:cNvPr id="6" name="Rectangle 5"/>
+          <p:cNvSpPr/>
+          <p:nvPr/>
+        </p:nvSpPr>
+        <p:spPr>
+          <a:xfrm>
+            <a:off x="822960" y="1508760"/>
+            <a:ext cx="73152" cy="310896"/>
+          </a:xfrm>
+          <a:prstGeom prst="rect">
+            <a:avLst/>
+          </a:prstGeom>
+          <a:solidFill>
+            <a:srgbClr val="00E676"/>
+          </a:solidFill>
+          <a:ln>
+            <a:noFill/>
+          </a:ln>
+          <a:effectLst/>
+        </p:spPr>
+        <p:style>
+          <a:lnRef idx="1">
+            <a:schemeClr val="accent1"/>
+          </a:lnRef>
+          <a:fillRef idx="3">
+            <a:schemeClr val="accent1"/>
+          </a:fillRef>
+          <a:effectRef idx="2">
+            <a:schemeClr val="accent1"/>
+          </a:effectRef>
+          <a:fontRef idx="minor">
+            <a:schemeClr val="lt1"/>
+          </a:fontRef>
+        </p:style>
+        <p:txBody>
+          <a:bodyPr rtlCol="0" anchor="ctr"/>
+          <a:lstStyle/>
+          <a:p>
+            <a:pPr algn="ctr"/>
+          </a:p>
+        </p:txBody>
+      </p:sp>
+      <p:sp>
+        <p:nvSpPr>
+          <p:cNvPr id="7" name="TextBox 6"/>
           <p:cNvSpPr txBox="1"/>
           <p:nvPr/>
         </p:nvSpPr>
         <p:spPr>
           <a:xfrm>
-            <a:off x="822960" y="1554480"/>
+            <a:off x="1024128" y="1536192"/>
             <a:ext cx="10515600" cy="365760"/>
           </a:xfrm>
           <a:prstGeom prst="rect">
@@ -8504,7 +10230,7 @@
       </p:sp>
       <p:sp>
         <p:nvSpPr>
-          <p:cNvPr id="5" name="TextBox 4"/>
+          <p:cNvPr id="8" name="TextBox 7"/>
           <p:cNvSpPr txBox="1"/>
           <p:nvPr/>
         </p:nvSpPr>
@@ -8571,7 +10297,7 @@
       </p:sp>
       <p:sp>
         <p:nvSpPr>
-          <p:cNvPr id="6" name="Rectangle 5"/>
+          <p:cNvPr id="9" name="Rectangle 8"/>
           <p:cNvSpPr/>
           <p:nvPr/>
         </p:nvSpPr>
@@ -8615,7 +10341,7 @@
       </p:sp>
       <p:sp>
         <p:nvSpPr>
-          <p:cNvPr id="7" name="TextBox 6"/>
+          <p:cNvPr id="10" name="TextBox 9"/>
           <p:cNvSpPr txBox="1"/>
           <p:nvPr/>
         </p:nvSpPr>
@@ -8660,13 +10386,13 @@
       </p:sp>
       <p:sp>
         <p:nvSpPr>
-          <p:cNvPr id="8" name="TextBox 7"/>
+          <p:cNvPr id="11" name="TextBox 10"/>
           <p:cNvSpPr txBox="1"/>
           <p:nvPr/>
         </p:nvSpPr>
         <p:spPr>
           <a:xfrm>
-            <a:off x="822960" y="4663440"/>
+            <a:off x="822960" y="4617720"/>
             <a:ext cx="10515600" cy="1097280"/>
           </a:xfrm>
           <a:prstGeom prst="rect">
@@ -8682,7 +10408,7 @@
           <a:p>
             <a:pPr algn="l">
               <a:lnSpc>
-                <a:spcPct val="100000"/>
+                <a:spcPct val="120000"/>
               </a:lnSpc>
               <a:spcBef>
                 <a:spcPts val="0"/>
@@ -8698,7 +10424,7 @@
                 </a:solidFill>
                 <a:latin typeface="Consolas"/>
               </a:rPr>
-              <a:t>Source   </a:t>
+              <a:t>Source    </a:t>
             </a:r>
             <a:r>
               <a:rPr sz="1300" b="0">
@@ -8713,7 +10439,7 @@
           <a:p>
             <a:pPr algn="l">
               <a:lnSpc>
-                <a:spcPct val="100000"/>
+                <a:spcPct val="120000"/>
               </a:lnSpc>
               <a:spcBef>
                 <a:spcPts val="0"/>
@@ -8729,7 +10455,7 @@
                 </a:solidFill>
                 <a:latin typeface="Consolas"/>
               </a:rPr>
-              <a:t>Release  </a:t>
+              <a:t>Release   </a:t>
             </a:r>
             <a:r>
               <a:rPr sz="1300" b="0">
@@ -8745,13 +10471,13 @@
       </p:sp>
       <p:sp>
         <p:nvSpPr>
-          <p:cNvPr id="9" name="TextBox 8"/>
+          <p:cNvPr id="12" name="TextBox 11"/>
           <p:cNvSpPr txBox="1"/>
           <p:nvPr/>
         </p:nvSpPr>
         <p:spPr>
           <a:xfrm>
-            <a:off x="822960" y="5852160"/>
+            <a:off x="822960" y="5897880"/>
             <a:ext cx="10515600" cy="457200"/>
           </a:xfrm>
           <a:prstGeom prst="rect">
@@ -8783,7 +10509,7 @@
                 </a:solidFill>
                 <a:latin typeface="Segoe UI"/>
               </a:rPr>
-              <a:t>Thank you  ·  Q &amp; A</a:t>
+              <a:t>Thank you   ·   Q &amp; A</a:t>
             </a:r>
           </a:p>
         </p:txBody>
@@ -8860,13 +10586,101 @@
       </p:sp>
       <p:sp>
         <p:nvSpPr>
-          <p:cNvPr id="3" name="TextBox 2"/>
+          <p:cNvPr id="3" name="Rectangle 2"/>
+          <p:cNvSpPr/>
+          <p:nvPr/>
+        </p:nvSpPr>
+        <p:spPr>
+          <a:xfrm>
+            <a:off x="822960" y="6291072"/>
+            <a:ext cx="10515600" cy="10972"/>
+          </a:xfrm>
+          <a:prstGeom prst="rect">
+            <a:avLst/>
+          </a:prstGeom>
+          <a:solidFill>
+            <a:srgbClr val="22302B"/>
+          </a:solidFill>
+          <a:ln>
+            <a:noFill/>
+          </a:ln>
+          <a:effectLst/>
+        </p:spPr>
+        <p:style>
+          <a:lnRef idx="1">
+            <a:schemeClr val="accent1"/>
+          </a:lnRef>
+          <a:fillRef idx="3">
+            <a:schemeClr val="accent1"/>
+          </a:fillRef>
+          <a:effectRef idx="2">
+            <a:schemeClr val="accent1"/>
+          </a:effectRef>
+          <a:fontRef idx="minor">
+            <a:schemeClr val="lt1"/>
+          </a:fontRef>
+        </p:style>
+        <p:txBody>
+          <a:bodyPr rtlCol="0" anchor="ctr"/>
+          <a:lstStyle/>
+          <a:p>
+            <a:pPr algn="ctr"/>
+          </a:p>
+        </p:txBody>
+      </p:sp>
+      <p:sp>
+        <p:nvSpPr>
+          <p:cNvPr id="4" name="Rectangle 3"/>
+          <p:cNvSpPr/>
+          <p:nvPr/>
+        </p:nvSpPr>
+        <p:spPr>
+          <a:xfrm>
+            <a:off x="822960" y="6391656"/>
+            <a:ext cx="73152" cy="155448"/>
+          </a:xfrm>
+          <a:prstGeom prst="rect">
+            <a:avLst/>
+          </a:prstGeom>
+          <a:solidFill>
+            <a:srgbClr val="00E676"/>
+          </a:solidFill>
+          <a:ln>
+            <a:noFill/>
+          </a:ln>
+          <a:effectLst/>
+        </p:spPr>
+        <p:style>
+          <a:lnRef idx="1">
+            <a:schemeClr val="accent1"/>
+          </a:lnRef>
+          <a:fillRef idx="3">
+            <a:schemeClr val="accent1"/>
+          </a:fillRef>
+          <a:effectRef idx="2">
+            <a:schemeClr val="accent1"/>
+          </a:effectRef>
+          <a:fontRef idx="minor">
+            <a:schemeClr val="lt1"/>
+          </a:fontRef>
+        </p:style>
+        <p:txBody>
+          <a:bodyPr rtlCol="0" anchor="ctr"/>
+          <a:lstStyle/>
+          <a:p>
+            <a:pPr algn="ctr"/>
+          </a:p>
+        </p:txBody>
+      </p:sp>
+      <p:sp>
+        <p:nvSpPr>
+          <p:cNvPr id="5" name="TextBox 4"/>
           <p:cNvSpPr txBox="1"/>
           <p:nvPr/>
         </p:nvSpPr>
         <p:spPr>
           <a:xfrm>
-            <a:off x="822960" y="6355080"/>
+            <a:off x="1005840" y="6364224"/>
             <a:ext cx="7315200" cy="365760"/>
           </a:xfrm>
           <a:prstGeom prst="rect">
@@ -8914,14 +10728,14 @@
       </p:sp>
       <p:sp>
         <p:nvSpPr>
-          <p:cNvPr id="4" name="TextBox 3"/>
+          <p:cNvPr id="6" name="TextBox 5"/>
           <p:cNvSpPr txBox="1"/>
           <p:nvPr/>
         </p:nvSpPr>
         <p:spPr>
           <a:xfrm>
-            <a:off x="10637215" y="6355080"/>
-            <a:ext cx="822960" cy="365760"/>
+            <a:off x="10454335" y="6364224"/>
+            <a:ext cx="1005840" cy="365760"/>
           </a:xfrm>
           <a:prstGeom prst="rect">
             <a:avLst/>
@@ -8959,14 +10773,58 @@
       </p:sp>
       <p:sp>
         <p:nvSpPr>
-          <p:cNvPr id="5" name="TextBox 4"/>
+          <p:cNvPr id="7" name="Rectangle 6"/>
+          <p:cNvSpPr/>
+          <p:nvPr/>
+        </p:nvSpPr>
+        <p:spPr>
+          <a:xfrm>
+            <a:off x="822960" y="576072"/>
+            <a:ext cx="64008" cy="182880"/>
+          </a:xfrm>
+          <a:prstGeom prst="rect">
+            <a:avLst/>
+          </a:prstGeom>
+          <a:solidFill>
+            <a:srgbClr val="00E676"/>
+          </a:solidFill>
+          <a:ln>
+            <a:noFill/>
+          </a:ln>
+          <a:effectLst/>
+        </p:spPr>
+        <p:style>
+          <a:lnRef idx="1">
+            <a:schemeClr val="accent1"/>
+          </a:lnRef>
+          <a:fillRef idx="3">
+            <a:schemeClr val="accent1"/>
+          </a:fillRef>
+          <a:effectRef idx="2">
+            <a:schemeClr val="accent1"/>
+          </a:effectRef>
+          <a:fontRef idx="minor">
+            <a:schemeClr val="lt1"/>
+          </a:fontRef>
+        </p:style>
+        <p:txBody>
+          <a:bodyPr rtlCol="0" anchor="ctr"/>
+          <a:lstStyle/>
+          <a:p>
+            <a:pPr algn="ctr"/>
+          </a:p>
+        </p:txBody>
+      </p:sp>
+      <p:sp>
+        <p:nvSpPr>
+          <p:cNvPr id="8" name="TextBox 7"/>
           <p:cNvSpPr txBox="1"/>
           <p:nvPr/>
         </p:nvSpPr>
         <p:spPr>
           <a:xfrm>
-            <a:off x="822960" y="566928"/>
-            <a:ext cx="10515600" cy="274320"/>
+            <a:off x="1024128" y="548640"/>
+            <a:ext cx="10332720" cy="274320"/>
           </a:xfrm>
           <a:prstGeom prst="rect">
             <a:avLst/>
@@ -9004,13 +10862,13 @@
       </p:sp>
       <p:sp>
         <p:nvSpPr>
-          <p:cNvPr id="6" name="TextBox 5"/>
+          <p:cNvPr id="9" name="TextBox 8"/>
           <p:cNvSpPr txBox="1"/>
           <p:nvPr/>
         </p:nvSpPr>
         <p:spPr>
           <a:xfrm>
-            <a:off x="822960" y="950976"/>
+            <a:off x="804672" y="950976"/>
             <a:ext cx="10607040" cy="914400"/>
           </a:xfrm>
           <a:prstGeom prst="rect">
@@ -9049,14 +10907,14 @@
       </p:sp>
       <p:sp>
         <p:nvSpPr>
-          <p:cNvPr id="7" name="Rectangle 6"/>
+          <p:cNvPr id="10" name="Rectangle 9"/>
           <p:cNvSpPr/>
           <p:nvPr/>
         </p:nvSpPr>
         <p:spPr>
           <a:xfrm>
-            <a:off x="841248" y="1664208"/>
-            <a:ext cx="640080" cy="41148"/>
+            <a:off x="841248" y="1627632"/>
+            <a:ext cx="603504" cy="45720"/>
           </a:xfrm>
           <a:prstGeom prst="rect">
             <a:avLst/>
@@ -9093,13 +10951,57 @@
       </p:sp>
       <p:sp>
         <p:nvSpPr>
-          <p:cNvPr id="8" name="TextBox 7"/>
+          <p:cNvPr id="11" name="Rectangle 10"/>
+          <p:cNvSpPr/>
+          <p:nvPr/>
+        </p:nvSpPr>
+        <p:spPr>
+          <a:xfrm>
+            <a:off x="822960" y="1664208"/>
+            <a:ext cx="10515600" cy="10972"/>
+          </a:xfrm>
+          <a:prstGeom prst="rect">
+            <a:avLst/>
+          </a:prstGeom>
+          <a:solidFill>
+            <a:srgbClr val="22302B"/>
+          </a:solidFill>
+          <a:ln>
+            <a:noFill/>
+          </a:ln>
+          <a:effectLst/>
+        </p:spPr>
+        <p:style>
+          <a:lnRef idx="1">
+            <a:schemeClr val="accent1"/>
+          </a:lnRef>
+          <a:fillRef idx="3">
+            <a:schemeClr val="accent1"/>
+          </a:fillRef>
+          <a:effectRef idx="2">
+            <a:schemeClr val="accent1"/>
+          </a:effectRef>
+          <a:fontRef idx="minor">
+            <a:schemeClr val="lt1"/>
+          </a:fontRef>
+        </p:style>
+        <p:txBody>
+          <a:bodyPr rtlCol="0" anchor="ctr"/>
+          <a:lstStyle/>
+          <a:p>
+            <a:pPr algn="ctr"/>
+          </a:p>
+        </p:txBody>
+      </p:sp>
+      <p:sp>
+        <p:nvSpPr>
+          <p:cNvPr id="12" name="TextBox 11"/>
           <p:cNvSpPr txBox="1"/>
           <p:nvPr/>
         </p:nvSpPr>
         <p:spPr>
           <a:xfrm>
-            <a:off x="822960" y="1783080"/>
+            <a:off x="822960" y="1847088"/>
             <a:ext cx="10607040" cy="4572000"/>
           </a:xfrm>
           <a:prstGeom prst="rect">
@@ -9149,7 +11051,7 @@
                 </a:solidFill>
                 <a:latin typeface="Segoe UI"/>
               </a:rPr>
-              <a:t>  NHAI personnel work in remote zones, cloud face APIs simply fail offline.</a:t>
+              <a:t>  NHAI personnel work in remote zones; cloud face APIs simply fail offline.</a:t>
             </a:r>
           </a:p>
           <a:p>
@@ -9316,13 +11218,13 @@
       </p:sp>
       <p:sp>
         <p:nvSpPr>
-          <p:cNvPr id="9" name="Rounded Rectangle 8"/>
+          <p:cNvPr id="13" name="Rounded Rectangle 12"/>
           <p:cNvSpPr/>
           <p:nvPr/>
         </p:nvSpPr>
         <p:spPr>
           <a:xfrm>
-            <a:off x="822960" y="5074920"/>
+            <a:off x="822960" y="5093208"/>
             <a:ext cx="10515600" cy="868680"/>
           </a:xfrm>
           <a:prstGeom prst="roundRect">
@@ -9362,13 +11264,57 @@
       </p:sp>
       <p:sp>
         <p:nvSpPr>
-          <p:cNvPr id="10" name="TextBox 9"/>
+          <p:cNvPr id="14" name="Rectangle 13"/>
+          <p:cNvSpPr/>
+          <p:nvPr/>
+        </p:nvSpPr>
+        <p:spPr>
+          <a:xfrm>
+            <a:off x="822960" y="5093208"/>
+            <a:ext cx="73152" cy="868680"/>
+          </a:xfrm>
+          <a:prstGeom prst="rect">
+            <a:avLst/>
+          </a:prstGeom>
+          <a:solidFill>
+            <a:srgbClr val="00E676"/>
+          </a:solidFill>
+          <a:ln>
+            <a:noFill/>
+          </a:ln>
+          <a:effectLst/>
+        </p:spPr>
+        <p:style>
+          <a:lnRef idx="1">
+            <a:schemeClr val="accent1"/>
+          </a:lnRef>
+          <a:fillRef idx="3">
+            <a:schemeClr val="accent1"/>
+          </a:fillRef>
+          <a:effectRef idx="2">
+            <a:schemeClr val="accent1"/>
+          </a:effectRef>
+          <a:fontRef idx="minor">
+            <a:schemeClr val="lt1"/>
+          </a:fontRef>
+        </p:style>
+        <p:txBody>
+          <a:bodyPr rtlCol="0" anchor="ctr"/>
+          <a:lstStyle/>
+          <a:p>
+            <a:pPr algn="ctr"/>
+          </a:p>
+        </p:txBody>
+      </p:sp>
+      <p:sp>
+        <p:nvSpPr>
+          <p:cNvPr id="15" name="TextBox 14"/>
           <p:cNvSpPr txBox="1"/>
           <p:nvPr/>
         </p:nvSpPr>
         <p:spPr>
           <a:xfrm>
-            <a:off x="1051560" y="5212080"/>
+            <a:off x="1097280" y="5230368"/>
             <a:ext cx="10058400" cy="640080"/>
           </a:xfrm>
           <a:prstGeom prst="rect">
@@ -9400,7 +11346,7 @@
                 </a:solidFill>
                 <a:latin typeface="Segoe UI"/>
               </a:rPr>
-              <a:t>"</a:t>
+              <a:t>“</a:t>
             </a:r>
             <a:r>
               <a:rPr sz="1450" b="0">
@@ -9486,13 +11432,101 @@
       </p:sp>
       <p:sp>
         <p:nvSpPr>
-          <p:cNvPr id="3" name="TextBox 2"/>
+          <p:cNvPr id="3" name="Rectangle 2"/>
+          <p:cNvSpPr/>
+          <p:nvPr/>
+        </p:nvSpPr>
+        <p:spPr>
+          <a:xfrm>
+            <a:off x="822960" y="6291072"/>
+            <a:ext cx="10515600" cy="10972"/>
+          </a:xfrm>
+          <a:prstGeom prst="rect">
+            <a:avLst/>
+          </a:prstGeom>
+          <a:solidFill>
+            <a:srgbClr val="22302B"/>
+          </a:solidFill>
+          <a:ln>
+            <a:noFill/>
+          </a:ln>
+          <a:effectLst/>
+        </p:spPr>
+        <p:style>
+          <a:lnRef idx="1">
+            <a:schemeClr val="accent1"/>
+          </a:lnRef>
+          <a:fillRef idx="3">
+            <a:schemeClr val="accent1"/>
+          </a:fillRef>
+          <a:effectRef idx="2">
+            <a:schemeClr val="accent1"/>
+          </a:effectRef>
+          <a:fontRef idx="minor">
+            <a:schemeClr val="lt1"/>
+          </a:fontRef>
+        </p:style>
+        <p:txBody>
+          <a:bodyPr rtlCol="0" anchor="ctr"/>
+          <a:lstStyle/>
+          <a:p>
+            <a:pPr algn="ctr"/>
+          </a:p>
+        </p:txBody>
+      </p:sp>
+      <p:sp>
+        <p:nvSpPr>
+          <p:cNvPr id="4" name="Rectangle 3"/>
+          <p:cNvSpPr/>
+          <p:nvPr/>
+        </p:nvSpPr>
+        <p:spPr>
+          <a:xfrm>
+            <a:off x="822960" y="6391656"/>
+            <a:ext cx="73152" cy="155448"/>
+          </a:xfrm>
+          <a:prstGeom prst="rect">
+            <a:avLst/>
+          </a:prstGeom>
+          <a:solidFill>
+            <a:srgbClr val="00E676"/>
+          </a:solidFill>
+          <a:ln>
+            <a:noFill/>
+          </a:ln>
+          <a:effectLst/>
+        </p:spPr>
+        <p:style>
+          <a:lnRef idx="1">
+            <a:schemeClr val="accent1"/>
+          </a:lnRef>
+          <a:fillRef idx="3">
+            <a:schemeClr val="accent1"/>
+          </a:fillRef>
+          <a:effectRef idx="2">
+            <a:schemeClr val="accent1"/>
+          </a:effectRef>
+          <a:fontRef idx="minor">
+            <a:schemeClr val="lt1"/>
+          </a:fontRef>
+        </p:style>
+        <p:txBody>
+          <a:bodyPr rtlCol="0" anchor="ctr"/>
+          <a:lstStyle/>
+          <a:p>
+            <a:pPr algn="ctr"/>
+          </a:p>
+        </p:txBody>
+      </p:sp>
+      <p:sp>
+        <p:nvSpPr>
+          <p:cNvPr id="5" name="TextBox 4"/>
           <p:cNvSpPr txBox="1"/>
           <p:nvPr/>
         </p:nvSpPr>
         <p:spPr>
           <a:xfrm>
-            <a:off x="822960" y="6355080"/>
+            <a:off x="1005840" y="6364224"/>
             <a:ext cx="7315200" cy="365760"/>
           </a:xfrm>
           <a:prstGeom prst="rect">
@@ -9540,14 +11574,14 @@
       </p:sp>
       <p:sp>
         <p:nvSpPr>
-          <p:cNvPr id="4" name="TextBox 3"/>
+          <p:cNvPr id="6" name="TextBox 5"/>
           <p:cNvSpPr txBox="1"/>
           <p:nvPr/>
         </p:nvSpPr>
         <p:spPr>
           <a:xfrm>
-            <a:off x="10637215" y="6355080"/>
-            <a:ext cx="822960" cy="365760"/>
+            <a:off x="10454335" y="6364224"/>
+            <a:ext cx="1005840" cy="365760"/>
           </a:xfrm>
           <a:prstGeom prst="rect">
             <a:avLst/>
@@ -9585,14 +11619,58 @@
       </p:sp>
       <p:sp>
         <p:nvSpPr>
-          <p:cNvPr id="5" name="TextBox 4"/>
+          <p:cNvPr id="7" name="Rectangle 6"/>
+          <p:cNvSpPr/>
+          <p:nvPr/>
+        </p:nvSpPr>
+        <p:spPr>
+          <a:xfrm>
+            <a:off x="822960" y="576072"/>
+            <a:ext cx="64008" cy="182880"/>
+          </a:xfrm>
+          <a:prstGeom prst="rect">
+            <a:avLst/>
+          </a:prstGeom>
+          <a:solidFill>
+            <a:srgbClr val="00E676"/>
+          </a:solidFill>
+          <a:ln>
+            <a:noFill/>
+          </a:ln>
+          <a:effectLst/>
+        </p:spPr>
+        <p:style>
+          <a:lnRef idx="1">
+            <a:schemeClr val="accent1"/>
+          </a:lnRef>
+          <a:fillRef idx="3">
+            <a:schemeClr val="accent1"/>
+          </a:fillRef>
+          <a:effectRef idx="2">
+            <a:schemeClr val="accent1"/>
+          </a:effectRef>
+          <a:fontRef idx="minor">
+            <a:schemeClr val="lt1"/>
+          </a:fontRef>
+        </p:style>
+        <p:txBody>
+          <a:bodyPr rtlCol="0" anchor="ctr"/>
+          <a:lstStyle/>
+          <a:p>
+            <a:pPr algn="ctr"/>
+          </a:p>
+        </p:txBody>
+      </p:sp>
+      <p:sp>
+        <p:nvSpPr>
+          <p:cNvPr id="8" name="TextBox 7"/>
           <p:cNvSpPr txBox="1"/>
           <p:nvPr/>
         </p:nvSpPr>
         <p:spPr>
           <a:xfrm>
-            <a:off x="822960" y="566928"/>
-            <a:ext cx="10515600" cy="274320"/>
+            <a:off x="1024128" y="548640"/>
+            <a:ext cx="10332720" cy="274320"/>
           </a:xfrm>
           <a:prstGeom prst="rect">
             <a:avLst/>
@@ -9630,13 +11708,13 @@
       </p:sp>
       <p:sp>
         <p:nvSpPr>
-          <p:cNvPr id="6" name="TextBox 5"/>
+          <p:cNvPr id="9" name="TextBox 8"/>
           <p:cNvSpPr txBox="1"/>
           <p:nvPr/>
         </p:nvSpPr>
         <p:spPr>
           <a:xfrm>
-            <a:off x="822960" y="950976"/>
+            <a:off x="804672" y="950976"/>
             <a:ext cx="10607040" cy="914400"/>
           </a:xfrm>
           <a:prstGeom prst="rect">
@@ -9675,14 +11753,14 @@
       </p:sp>
       <p:sp>
         <p:nvSpPr>
-          <p:cNvPr id="7" name="Rectangle 6"/>
+          <p:cNvPr id="10" name="Rectangle 9"/>
           <p:cNvSpPr/>
           <p:nvPr/>
         </p:nvSpPr>
         <p:spPr>
           <a:xfrm>
-            <a:off x="841248" y="1664208"/>
-            <a:ext cx="640080" cy="41148"/>
+            <a:off x="841248" y="1627632"/>
+            <a:ext cx="603504" cy="45720"/>
           </a:xfrm>
           <a:prstGeom prst="rect">
             <a:avLst/>
@@ -9719,13 +11797,57 @@
       </p:sp>
       <p:sp>
         <p:nvSpPr>
-          <p:cNvPr id="8" name="TextBox 7"/>
+          <p:cNvPr id="11" name="Rectangle 10"/>
+          <p:cNvSpPr/>
+          <p:nvPr/>
+        </p:nvSpPr>
+        <p:spPr>
+          <a:xfrm>
+            <a:off x="822960" y="1664208"/>
+            <a:ext cx="10515600" cy="10972"/>
+          </a:xfrm>
+          <a:prstGeom prst="rect">
+            <a:avLst/>
+          </a:prstGeom>
+          <a:solidFill>
+            <a:srgbClr val="22302B"/>
+          </a:solidFill>
+          <a:ln>
+            <a:noFill/>
+          </a:ln>
+          <a:effectLst/>
+        </p:spPr>
+        <p:style>
+          <a:lnRef idx="1">
+            <a:schemeClr val="accent1"/>
+          </a:lnRef>
+          <a:fillRef idx="3">
+            <a:schemeClr val="accent1"/>
+          </a:fillRef>
+          <a:effectRef idx="2">
+            <a:schemeClr val="accent1"/>
+          </a:effectRef>
+          <a:fontRef idx="minor">
+            <a:schemeClr val="lt1"/>
+          </a:fontRef>
+        </p:style>
+        <p:txBody>
+          <a:bodyPr rtlCol="0" anchor="ctr"/>
+          <a:lstStyle/>
+          <a:p>
+            <a:pPr algn="ctr"/>
+          </a:p>
+        </p:txBody>
+      </p:sp>
+      <p:sp>
+        <p:nvSpPr>
+          <p:cNvPr id="12" name="TextBox 11"/>
           <p:cNvSpPr txBox="1"/>
           <p:nvPr/>
         </p:nvSpPr>
         <p:spPr>
           <a:xfrm>
-            <a:off x="822960" y="1783080"/>
+            <a:off x="822960" y="1847088"/>
             <a:ext cx="10607040" cy="1005840"/>
           </a:xfrm>
           <a:prstGeom prst="rect">
@@ -9766,7 +11888,7 @@
                 </a:solidFill>
                 <a:latin typeface="Consolas"/>
               </a:rPr>
-              <a:t>~50 ms</a:t>
+              <a:t>~51 ms</a:t>
             </a:r>
             <a:r>
               <a:rPr sz="1800" b="0">
@@ -9800,14 +11922,14 @@
       </p:sp>
       <p:sp>
         <p:nvSpPr>
-          <p:cNvPr id="9" name="Rounded Rectangle 8"/>
+          <p:cNvPr id="13" name="Rounded Rectangle 12"/>
           <p:cNvSpPr/>
           <p:nvPr/>
         </p:nvSpPr>
         <p:spPr>
           <a:xfrm>
-            <a:off x="822960" y="3154680"/>
-            <a:ext cx="2542032" cy="2286000"/>
+            <a:off x="822960" y="3172968"/>
+            <a:ext cx="2542032" cy="2331720"/>
           </a:xfrm>
           <a:prstGeom prst="roundRect">
             <a:avLst/>
@@ -9846,14 +11968,58 @@
       </p:sp>
       <p:sp>
         <p:nvSpPr>
-          <p:cNvPr id="10" name="TextBox 9"/>
+          <p:cNvPr id="14" name="Rectangle 13"/>
+          <p:cNvSpPr/>
+          <p:nvPr/>
+        </p:nvSpPr>
+        <p:spPr>
+          <a:xfrm>
+            <a:off x="1024128" y="3383280"/>
+            <a:ext cx="274320" cy="64008"/>
+          </a:xfrm>
+          <a:prstGeom prst="rect">
+            <a:avLst/>
+          </a:prstGeom>
+          <a:solidFill>
+            <a:srgbClr val="00E676"/>
+          </a:solidFill>
+          <a:ln>
+            <a:noFill/>
+          </a:ln>
+          <a:effectLst/>
+        </p:spPr>
+        <p:style>
+          <a:lnRef idx="1">
+            <a:schemeClr val="accent1"/>
+          </a:lnRef>
+          <a:fillRef idx="3">
+            <a:schemeClr val="accent1"/>
+          </a:fillRef>
+          <a:effectRef idx="2">
+            <a:schemeClr val="accent1"/>
+          </a:effectRef>
+          <a:fontRef idx="minor">
+            <a:schemeClr val="lt1"/>
+          </a:fontRef>
+        </p:style>
+        <p:txBody>
+          <a:bodyPr rtlCol="0" anchor="ctr"/>
+          <a:lstStyle/>
+          <a:p>
+            <a:pPr algn="ctr"/>
+          </a:p>
+        </p:txBody>
+      </p:sp>
+      <p:sp>
+        <p:nvSpPr>
+          <p:cNvPr id="15" name="TextBox 14"/>
           <p:cNvSpPr txBox="1"/>
           <p:nvPr/>
         </p:nvSpPr>
         <p:spPr>
           <a:xfrm>
-            <a:off x="1005840" y="3355848"/>
-            <a:ext cx="2176272" cy="1920240"/>
+            <a:off x="1024128" y="3529584"/>
+            <a:ext cx="2176272" cy="1828800"/>
           </a:xfrm>
           <a:prstGeom prst="rect">
             <a:avLst/>
@@ -9914,14 +12080,14 @@
       </p:sp>
       <p:sp>
         <p:nvSpPr>
-          <p:cNvPr id="11" name="Rounded Rectangle 10"/>
+          <p:cNvPr id="16" name="Rounded Rectangle 15"/>
           <p:cNvSpPr/>
           <p:nvPr/>
         </p:nvSpPr>
         <p:spPr>
           <a:xfrm>
-            <a:off x="3483863" y="3154680"/>
-            <a:ext cx="2542032" cy="2286000"/>
+            <a:off x="3483863" y="3172968"/>
+            <a:ext cx="2542032" cy="2331720"/>
           </a:xfrm>
           <a:prstGeom prst="roundRect">
             <a:avLst/>
@@ -9960,14 +12126,58 @@
       </p:sp>
       <p:sp>
         <p:nvSpPr>
-          <p:cNvPr id="12" name="TextBox 11"/>
+          <p:cNvPr id="17" name="Rectangle 16"/>
+          <p:cNvSpPr/>
+          <p:nvPr/>
+        </p:nvSpPr>
+        <p:spPr>
+          <a:xfrm>
+            <a:off x="3685031" y="3383280"/>
+            <a:ext cx="274320" cy="64008"/>
+          </a:xfrm>
+          <a:prstGeom prst="rect">
+            <a:avLst/>
+          </a:prstGeom>
+          <a:solidFill>
+            <a:srgbClr val="4FC3F7"/>
+          </a:solidFill>
+          <a:ln>
+            <a:noFill/>
+          </a:ln>
+          <a:effectLst/>
+        </p:spPr>
+        <p:style>
+          <a:lnRef idx="1">
+            <a:schemeClr val="accent1"/>
+          </a:lnRef>
+          <a:fillRef idx="3">
+            <a:schemeClr val="accent1"/>
+          </a:fillRef>
+          <a:effectRef idx="2">
+            <a:schemeClr val="accent1"/>
+          </a:effectRef>
+          <a:fontRef idx="minor">
+            <a:schemeClr val="lt1"/>
+          </a:fontRef>
+        </p:style>
+        <p:txBody>
+          <a:bodyPr rtlCol="0" anchor="ctr"/>
+          <a:lstStyle/>
+          <a:p>
+            <a:pPr algn="ctr"/>
+          </a:p>
+        </p:txBody>
+      </p:sp>
+      <p:sp>
+        <p:nvSpPr>
+          <p:cNvPr id="18" name="TextBox 17"/>
           <p:cNvSpPr txBox="1"/>
           <p:nvPr/>
         </p:nvSpPr>
         <p:spPr>
           <a:xfrm>
-            <a:off x="3666744" y="3355848"/>
-            <a:ext cx="2176272" cy="1920240"/>
+            <a:off x="3685031" y="3529584"/>
+            <a:ext cx="2176272" cy="1828800"/>
           </a:xfrm>
           <a:prstGeom prst="rect">
             <a:avLst/>
@@ -10028,14 +12238,14 @@
       </p:sp>
       <p:sp>
         <p:nvSpPr>
-          <p:cNvPr id="13" name="Rounded Rectangle 12"/>
+          <p:cNvPr id="19" name="Rounded Rectangle 18"/>
           <p:cNvSpPr/>
           <p:nvPr/>
         </p:nvSpPr>
         <p:spPr>
           <a:xfrm>
-            <a:off x="6144768" y="3154680"/>
-            <a:ext cx="2542032" cy="2286000"/>
+            <a:off x="6144768" y="3172968"/>
+            <a:ext cx="2542032" cy="2331720"/>
           </a:xfrm>
           <a:prstGeom prst="roundRect">
             <a:avLst/>
@@ -10074,14 +12284,58 @@
       </p:sp>
       <p:sp>
         <p:nvSpPr>
-          <p:cNvPr id="14" name="TextBox 13"/>
+          <p:cNvPr id="20" name="Rectangle 19"/>
+          <p:cNvSpPr/>
+          <p:nvPr/>
+        </p:nvSpPr>
+        <p:spPr>
+          <a:xfrm>
+            <a:off x="6345936" y="3383280"/>
+            <a:ext cx="274320" cy="64008"/>
+          </a:xfrm>
+          <a:prstGeom prst="rect">
+            <a:avLst/>
+          </a:prstGeom>
+          <a:solidFill>
+            <a:srgbClr val="FFB300"/>
+          </a:solidFill>
+          <a:ln>
+            <a:noFill/>
+          </a:ln>
+          <a:effectLst/>
+        </p:spPr>
+        <p:style>
+          <a:lnRef idx="1">
+            <a:schemeClr val="accent1"/>
+          </a:lnRef>
+          <a:fillRef idx="3">
+            <a:schemeClr val="accent1"/>
+          </a:fillRef>
+          <a:effectRef idx="2">
+            <a:schemeClr val="accent1"/>
+          </a:effectRef>
+          <a:fontRef idx="minor">
+            <a:schemeClr val="lt1"/>
+          </a:fontRef>
+        </p:style>
+        <p:txBody>
+          <a:bodyPr rtlCol="0" anchor="ctr"/>
+          <a:lstStyle/>
+          <a:p>
+            <a:pPr algn="ctr"/>
+          </a:p>
+        </p:txBody>
+      </p:sp>
+      <p:sp>
+        <p:nvSpPr>
+          <p:cNvPr id="21" name="TextBox 20"/>
           <p:cNvSpPr txBox="1"/>
           <p:nvPr/>
         </p:nvSpPr>
         <p:spPr>
           <a:xfrm>
-            <a:off x="6327648" y="3355848"/>
-            <a:ext cx="2176272" cy="1920240"/>
+            <a:off x="6345936" y="3529584"/>
+            <a:ext cx="2176272" cy="1828800"/>
           </a:xfrm>
           <a:prstGeom prst="rect">
             <a:avLst/>
@@ -10142,14 +12396,14 @@
       </p:sp>
       <p:sp>
         <p:nvSpPr>
-          <p:cNvPr id="15" name="Rounded Rectangle 14"/>
+          <p:cNvPr id="22" name="Rounded Rectangle 21"/>
           <p:cNvSpPr/>
           <p:nvPr/>
         </p:nvSpPr>
         <p:spPr>
           <a:xfrm>
-            <a:off x="8805672" y="3154680"/>
-            <a:ext cx="2542032" cy="2286000"/>
+            <a:off x="8805672" y="3172968"/>
+            <a:ext cx="2542032" cy="2331720"/>
           </a:xfrm>
           <a:prstGeom prst="roundRect">
             <a:avLst/>
@@ -10188,14 +12442,58 @@
       </p:sp>
       <p:sp>
         <p:nvSpPr>
-          <p:cNvPr id="16" name="TextBox 15"/>
+          <p:cNvPr id="23" name="Rectangle 22"/>
+          <p:cNvSpPr/>
+          <p:nvPr/>
+        </p:nvSpPr>
+        <p:spPr>
+          <a:xfrm>
+            <a:off x="9006840" y="3383280"/>
+            <a:ext cx="274320" cy="64008"/>
+          </a:xfrm>
+          <a:prstGeom prst="rect">
+            <a:avLst/>
+          </a:prstGeom>
+          <a:solidFill>
+            <a:srgbClr val="00E676"/>
+          </a:solidFill>
+          <a:ln>
+            <a:noFill/>
+          </a:ln>
+          <a:effectLst/>
+        </p:spPr>
+        <p:style>
+          <a:lnRef idx="1">
+            <a:schemeClr val="accent1"/>
+          </a:lnRef>
+          <a:fillRef idx="3">
+            <a:schemeClr val="accent1"/>
+          </a:fillRef>
+          <a:effectRef idx="2">
+            <a:schemeClr val="accent1"/>
+          </a:effectRef>
+          <a:fontRef idx="minor">
+            <a:schemeClr val="lt1"/>
+          </a:fontRef>
+        </p:style>
+        <p:txBody>
+          <a:bodyPr rtlCol="0" anchor="ctr"/>
+          <a:lstStyle/>
+          <a:p>
+            <a:pPr algn="ctr"/>
+          </a:p>
+        </p:txBody>
+      </p:sp>
+      <p:sp>
+        <p:nvSpPr>
+          <p:cNvPr id="24" name="TextBox 23"/>
           <p:cNvSpPr txBox="1"/>
           <p:nvPr/>
         </p:nvSpPr>
         <p:spPr>
           <a:xfrm>
-            <a:off x="8988551" y="3355848"/>
-            <a:ext cx="2176272" cy="1920240"/>
+            <a:off x="9006840" y="3529584"/>
+            <a:ext cx="2176272" cy="1828800"/>
           </a:xfrm>
           <a:prstGeom prst="rect">
             <a:avLst/>
@@ -10326,13 +12624,101 @@
       </p:sp>
       <p:sp>
         <p:nvSpPr>
-          <p:cNvPr id="3" name="TextBox 2"/>
+          <p:cNvPr id="3" name="Rectangle 2"/>
+          <p:cNvSpPr/>
+          <p:nvPr/>
+        </p:nvSpPr>
+        <p:spPr>
+          <a:xfrm>
+            <a:off x="822960" y="6291072"/>
+            <a:ext cx="10515600" cy="10972"/>
+          </a:xfrm>
+          <a:prstGeom prst="rect">
+            <a:avLst/>
+          </a:prstGeom>
+          <a:solidFill>
+            <a:srgbClr val="22302B"/>
+          </a:solidFill>
+          <a:ln>
+            <a:noFill/>
+          </a:ln>
+          <a:effectLst/>
+        </p:spPr>
+        <p:style>
+          <a:lnRef idx="1">
+            <a:schemeClr val="accent1"/>
+          </a:lnRef>
+          <a:fillRef idx="3">
+            <a:schemeClr val="accent1"/>
+          </a:fillRef>
+          <a:effectRef idx="2">
+            <a:schemeClr val="accent1"/>
+          </a:effectRef>
+          <a:fontRef idx="minor">
+            <a:schemeClr val="lt1"/>
+          </a:fontRef>
+        </p:style>
+        <p:txBody>
+          <a:bodyPr rtlCol="0" anchor="ctr"/>
+          <a:lstStyle/>
+          <a:p>
+            <a:pPr algn="ctr"/>
+          </a:p>
+        </p:txBody>
+      </p:sp>
+      <p:sp>
+        <p:nvSpPr>
+          <p:cNvPr id="4" name="Rectangle 3"/>
+          <p:cNvSpPr/>
+          <p:nvPr/>
+        </p:nvSpPr>
+        <p:spPr>
+          <a:xfrm>
+            <a:off x="822960" y="6391656"/>
+            <a:ext cx="73152" cy="155448"/>
+          </a:xfrm>
+          <a:prstGeom prst="rect">
+            <a:avLst/>
+          </a:prstGeom>
+          <a:solidFill>
+            <a:srgbClr val="00E676"/>
+          </a:solidFill>
+          <a:ln>
+            <a:noFill/>
+          </a:ln>
+          <a:effectLst/>
+        </p:spPr>
+        <p:style>
+          <a:lnRef idx="1">
+            <a:schemeClr val="accent1"/>
+          </a:lnRef>
+          <a:fillRef idx="3">
+            <a:schemeClr val="accent1"/>
+          </a:fillRef>
+          <a:effectRef idx="2">
+            <a:schemeClr val="accent1"/>
+          </a:effectRef>
+          <a:fontRef idx="minor">
+            <a:schemeClr val="lt1"/>
+          </a:fontRef>
+        </p:style>
+        <p:txBody>
+          <a:bodyPr rtlCol="0" anchor="ctr"/>
+          <a:lstStyle/>
+          <a:p>
+            <a:pPr algn="ctr"/>
+          </a:p>
+        </p:txBody>
+      </p:sp>
+      <p:sp>
+        <p:nvSpPr>
+          <p:cNvPr id="5" name="TextBox 4"/>
           <p:cNvSpPr txBox="1"/>
           <p:nvPr/>
         </p:nvSpPr>
         <p:spPr>
           <a:xfrm>
-            <a:off x="822960" y="6355080"/>
+            <a:off x="1005840" y="6364224"/>
             <a:ext cx="7315200" cy="365760"/>
           </a:xfrm>
           <a:prstGeom prst="rect">
@@ -10380,14 +12766,14 @@
       </p:sp>
       <p:sp>
         <p:nvSpPr>
-          <p:cNvPr id="4" name="TextBox 3"/>
+          <p:cNvPr id="6" name="TextBox 5"/>
           <p:cNvSpPr txBox="1"/>
           <p:nvPr/>
         </p:nvSpPr>
         <p:spPr>
           <a:xfrm>
-            <a:off x="10637215" y="6355080"/>
-            <a:ext cx="822960" cy="365760"/>
+            <a:off x="10454335" y="6364224"/>
+            <a:ext cx="1005840" cy="365760"/>
           </a:xfrm>
           <a:prstGeom prst="rect">
             <a:avLst/>
@@ -10425,14 +12811,58 @@
       </p:sp>
       <p:sp>
         <p:nvSpPr>
-          <p:cNvPr id="5" name="TextBox 4"/>
+          <p:cNvPr id="7" name="Rectangle 6"/>
+          <p:cNvSpPr/>
+          <p:nvPr/>
+        </p:nvSpPr>
+        <p:spPr>
+          <a:xfrm>
+            <a:off x="822960" y="576072"/>
+            <a:ext cx="64008" cy="182880"/>
+          </a:xfrm>
+          <a:prstGeom prst="rect">
+            <a:avLst/>
+          </a:prstGeom>
+          <a:solidFill>
+            <a:srgbClr val="00E676"/>
+          </a:solidFill>
+          <a:ln>
+            <a:noFill/>
+          </a:ln>
+          <a:effectLst/>
+        </p:spPr>
+        <p:style>
+          <a:lnRef idx="1">
+            <a:schemeClr val="accent1"/>
+          </a:lnRef>
+          <a:fillRef idx="3">
+            <a:schemeClr val="accent1"/>
+          </a:fillRef>
+          <a:effectRef idx="2">
+            <a:schemeClr val="accent1"/>
+          </a:effectRef>
+          <a:fontRef idx="minor">
+            <a:schemeClr val="lt1"/>
+          </a:fontRef>
+        </p:style>
+        <p:txBody>
+          <a:bodyPr rtlCol="0" anchor="ctr"/>
+          <a:lstStyle/>
+          <a:p>
+            <a:pPr algn="ctr"/>
+          </a:p>
+        </p:txBody>
+      </p:sp>
+      <p:sp>
+        <p:nvSpPr>
+          <p:cNvPr id="8" name="TextBox 7"/>
           <p:cNvSpPr txBox="1"/>
           <p:nvPr/>
         </p:nvSpPr>
         <p:spPr>
           <a:xfrm>
-            <a:off x="822960" y="566928"/>
-            <a:ext cx="10515600" cy="274320"/>
+            <a:off x="1024128" y="548640"/>
+            <a:ext cx="10332720" cy="274320"/>
           </a:xfrm>
           <a:prstGeom prst="rect">
             <a:avLst/>
@@ -10470,13 +12900,13 @@
       </p:sp>
       <p:sp>
         <p:nvSpPr>
-          <p:cNvPr id="6" name="TextBox 5"/>
+          <p:cNvPr id="9" name="TextBox 8"/>
           <p:cNvSpPr txBox="1"/>
           <p:nvPr/>
         </p:nvSpPr>
         <p:spPr>
           <a:xfrm>
-            <a:off x="822960" y="950976"/>
+            <a:off x="804672" y="950976"/>
             <a:ext cx="10607040" cy="914400"/>
           </a:xfrm>
           <a:prstGeom prst="rect">
@@ -10515,14 +12945,14 @@
       </p:sp>
       <p:sp>
         <p:nvSpPr>
-          <p:cNvPr id="7" name="Rectangle 6"/>
+          <p:cNvPr id="10" name="Rectangle 9"/>
           <p:cNvSpPr/>
           <p:nvPr/>
         </p:nvSpPr>
         <p:spPr>
           <a:xfrm>
-            <a:off x="841248" y="1664208"/>
-            <a:ext cx="640080" cy="41148"/>
+            <a:off x="841248" y="1627632"/>
+            <a:ext cx="603504" cy="45720"/>
           </a:xfrm>
           <a:prstGeom prst="rect">
             <a:avLst/>
@@ -10559,14 +12989,58 @@
       </p:sp>
       <p:sp>
         <p:nvSpPr>
-          <p:cNvPr id="8" name="Rounded Rectangle 7"/>
+          <p:cNvPr id="11" name="Rectangle 10"/>
           <p:cNvSpPr/>
           <p:nvPr/>
         </p:nvSpPr>
         <p:spPr>
           <a:xfrm>
-            <a:off x="822960" y="1828800"/>
-            <a:ext cx="10515600" cy="566928"/>
+            <a:off x="822960" y="1664208"/>
+            <a:ext cx="10515600" cy="10972"/>
+          </a:xfrm>
+          <a:prstGeom prst="rect">
+            <a:avLst/>
+          </a:prstGeom>
+          <a:solidFill>
+            <a:srgbClr val="22302B"/>
+          </a:solidFill>
+          <a:ln>
+            <a:noFill/>
+          </a:ln>
+          <a:effectLst/>
+        </p:spPr>
+        <p:style>
+          <a:lnRef idx="1">
+            <a:schemeClr val="accent1"/>
+          </a:lnRef>
+          <a:fillRef idx="3">
+            <a:schemeClr val="accent1"/>
+          </a:fillRef>
+          <a:effectRef idx="2">
+            <a:schemeClr val="accent1"/>
+          </a:effectRef>
+          <a:fontRef idx="minor">
+            <a:schemeClr val="lt1"/>
+          </a:fontRef>
+        </p:style>
+        <p:txBody>
+          <a:bodyPr rtlCol="0" anchor="ctr"/>
+          <a:lstStyle/>
+          <a:p>
+            <a:pPr algn="ctr"/>
+          </a:p>
+        </p:txBody>
+      </p:sp>
+      <p:sp>
+        <p:nvSpPr>
+          <p:cNvPr id="12" name="Rounded Rectangle 11"/>
+          <p:cNvSpPr/>
+          <p:nvPr/>
+        </p:nvSpPr>
+        <p:spPr>
+          <a:xfrm>
+            <a:off x="822960" y="1865376"/>
+            <a:ext cx="10515600" cy="512064"/>
           </a:xfrm>
           <a:prstGeom prst="roundRect">
             <a:avLst/>
@@ -10605,14 +13079,58 @@
       </p:sp>
       <p:sp>
         <p:nvSpPr>
-          <p:cNvPr id="9" name="TextBox 8"/>
+          <p:cNvPr id="13" name="Rectangle 12"/>
+          <p:cNvSpPr/>
+          <p:nvPr/>
+        </p:nvSpPr>
+        <p:spPr>
+          <a:xfrm>
+            <a:off x="822960" y="1975104"/>
+            <a:ext cx="64008" cy="292608"/>
+          </a:xfrm>
+          <a:prstGeom prst="rect">
+            <a:avLst/>
+          </a:prstGeom>
+          <a:solidFill>
+            <a:srgbClr val="00E676"/>
+          </a:solidFill>
+          <a:ln>
+            <a:noFill/>
+          </a:ln>
+          <a:effectLst/>
+        </p:spPr>
+        <p:style>
+          <a:lnRef idx="1">
+            <a:schemeClr val="accent1"/>
+          </a:lnRef>
+          <a:fillRef idx="3">
+            <a:schemeClr val="accent1"/>
+          </a:fillRef>
+          <a:effectRef idx="2">
+            <a:schemeClr val="accent1"/>
+          </a:effectRef>
+          <a:fontRef idx="minor">
+            <a:schemeClr val="lt1"/>
+          </a:fontRef>
+        </p:style>
+        <p:txBody>
+          <a:bodyPr rtlCol="0" anchor="ctr"/>
+          <a:lstStyle/>
+          <a:p>
+            <a:pPr algn="ctr"/>
+          </a:p>
+        </p:txBody>
+      </p:sp>
+      <p:sp>
+        <p:nvSpPr>
+          <p:cNvPr id="14" name="TextBox 13"/>
           <p:cNvSpPr txBox="1"/>
           <p:nvPr/>
         </p:nvSpPr>
         <p:spPr>
           <a:xfrm>
-            <a:off x="987552" y="1938528"/>
-            <a:ext cx="10186416" cy="347472"/>
+            <a:off x="1060704" y="1956816"/>
+            <a:ext cx="10094976" cy="329184"/>
           </a:xfrm>
           <a:prstGeom prst="rect">
             <a:avLst/>
@@ -10672,14 +13190,14 @@
       </p:sp>
       <p:sp>
         <p:nvSpPr>
-          <p:cNvPr id="10" name="Down Arrow 9"/>
+          <p:cNvPr id="15" name="Down Arrow 14"/>
           <p:cNvSpPr/>
           <p:nvPr/>
         </p:nvSpPr>
         <p:spPr>
           <a:xfrm>
-            <a:off x="5925312" y="2423160"/>
-            <a:ext cx="310896" cy="274320"/>
+            <a:off x="5934456" y="2395728"/>
+            <a:ext cx="292608" cy="237744"/>
           </a:xfrm>
           <a:prstGeom prst="downArrow">
             <a:avLst/>
@@ -10716,14 +13234,14 @@
       </p:sp>
       <p:sp>
         <p:nvSpPr>
-          <p:cNvPr id="11" name="Rounded Rectangle 10"/>
+          <p:cNvPr id="16" name="Rounded Rectangle 15"/>
           <p:cNvSpPr/>
           <p:nvPr/>
         </p:nvSpPr>
         <p:spPr>
           <a:xfrm>
-            <a:off x="822960" y="2724912"/>
-            <a:ext cx="10515600" cy="566928"/>
+            <a:off x="822960" y="2601468"/>
+            <a:ext cx="10515600" cy="512064"/>
           </a:xfrm>
           <a:prstGeom prst="roundRect">
             <a:avLst/>
@@ -10762,14 +13280,58 @@
       </p:sp>
       <p:sp>
         <p:nvSpPr>
-          <p:cNvPr id="12" name="TextBox 11"/>
+          <p:cNvPr id="17" name="Rectangle 16"/>
+          <p:cNvSpPr/>
+          <p:nvPr/>
+        </p:nvSpPr>
+        <p:spPr>
+          <a:xfrm>
+            <a:off x="822960" y="2711196"/>
+            <a:ext cx="64008" cy="292608"/>
+          </a:xfrm>
+          <a:prstGeom prst="rect">
+            <a:avLst/>
+          </a:prstGeom>
+          <a:solidFill>
+            <a:srgbClr val="4FC3F7"/>
+          </a:solidFill>
+          <a:ln>
+            <a:noFill/>
+          </a:ln>
+          <a:effectLst/>
+        </p:spPr>
+        <p:style>
+          <a:lnRef idx="1">
+            <a:schemeClr val="accent1"/>
+          </a:lnRef>
+          <a:fillRef idx="3">
+            <a:schemeClr val="accent1"/>
+          </a:fillRef>
+          <a:effectRef idx="2">
+            <a:schemeClr val="accent1"/>
+          </a:effectRef>
+          <a:fontRef idx="minor">
+            <a:schemeClr val="lt1"/>
+          </a:fontRef>
+        </p:style>
+        <p:txBody>
+          <a:bodyPr rtlCol="0" anchor="ctr"/>
+          <a:lstStyle/>
+          <a:p>
+            <a:pPr algn="ctr"/>
+          </a:p>
+        </p:txBody>
+      </p:sp>
+      <p:sp>
+        <p:nvSpPr>
+          <p:cNvPr id="18" name="TextBox 17"/>
           <p:cNvSpPr txBox="1"/>
           <p:nvPr/>
         </p:nvSpPr>
         <p:spPr>
           <a:xfrm>
-            <a:off x="987552" y="2834640"/>
-            <a:ext cx="10186416" cy="347472"/>
+            <a:off x="1060704" y="2692908"/>
+            <a:ext cx="10094976" cy="329184"/>
           </a:xfrm>
           <a:prstGeom prst="rect">
             <a:avLst/>
@@ -10829,14 +13391,14 @@
       </p:sp>
       <p:sp>
         <p:nvSpPr>
-          <p:cNvPr id="13" name="Down Arrow 12"/>
+          <p:cNvPr id="19" name="Down Arrow 18"/>
           <p:cNvSpPr/>
           <p:nvPr/>
         </p:nvSpPr>
         <p:spPr>
           <a:xfrm>
-            <a:off x="5925312" y="3319272"/>
-            <a:ext cx="310896" cy="274320"/>
+            <a:off x="5934456" y="3131820"/>
+            <a:ext cx="292608" cy="237744"/>
           </a:xfrm>
           <a:prstGeom prst="downArrow">
             <a:avLst/>
@@ -10873,14 +13435,14 @@
       </p:sp>
       <p:sp>
         <p:nvSpPr>
-          <p:cNvPr id="14" name="Rounded Rectangle 13"/>
+          <p:cNvPr id="20" name="Rounded Rectangle 19"/>
           <p:cNvSpPr/>
           <p:nvPr/>
         </p:nvSpPr>
         <p:spPr>
           <a:xfrm>
-            <a:off x="822960" y="3621024"/>
-            <a:ext cx="10515600" cy="566928"/>
+            <a:off x="822960" y="3337560"/>
+            <a:ext cx="10515600" cy="512064"/>
           </a:xfrm>
           <a:prstGeom prst="roundRect">
             <a:avLst/>
@@ -10919,14 +13481,58 @@
       </p:sp>
       <p:sp>
         <p:nvSpPr>
-          <p:cNvPr id="15" name="TextBox 14"/>
+          <p:cNvPr id="21" name="Rectangle 20"/>
+          <p:cNvSpPr/>
+          <p:nvPr/>
+        </p:nvSpPr>
+        <p:spPr>
+          <a:xfrm>
+            <a:off x="822960" y="3447288"/>
+            <a:ext cx="64008" cy="292608"/>
+          </a:xfrm>
+          <a:prstGeom prst="rect">
+            <a:avLst/>
+          </a:prstGeom>
+          <a:solidFill>
+            <a:srgbClr val="4FC3F7"/>
+          </a:solidFill>
+          <a:ln>
+            <a:noFill/>
+          </a:ln>
+          <a:effectLst/>
+        </p:spPr>
+        <p:style>
+          <a:lnRef idx="1">
+            <a:schemeClr val="accent1"/>
+          </a:lnRef>
+          <a:fillRef idx="3">
+            <a:schemeClr val="accent1"/>
+          </a:fillRef>
+          <a:effectRef idx="2">
+            <a:schemeClr val="accent1"/>
+          </a:effectRef>
+          <a:fontRef idx="minor">
+            <a:schemeClr val="lt1"/>
+          </a:fontRef>
+        </p:style>
+        <p:txBody>
+          <a:bodyPr rtlCol="0" anchor="ctr"/>
+          <a:lstStyle/>
+          <a:p>
+            <a:pPr algn="ctr"/>
+          </a:p>
+        </p:txBody>
+      </p:sp>
+      <p:sp>
+        <p:nvSpPr>
+          <p:cNvPr id="22" name="TextBox 21"/>
           <p:cNvSpPr txBox="1"/>
           <p:nvPr/>
         </p:nvSpPr>
         <p:spPr>
           <a:xfrm>
-            <a:off x="987552" y="3730752"/>
-            <a:ext cx="10186416" cy="347472"/>
+            <a:off x="1060704" y="3429000"/>
+            <a:ext cx="10094976" cy="329184"/>
           </a:xfrm>
           <a:prstGeom prst="rect">
             <a:avLst/>
@@ -10986,14 +13592,14 @@
       </p:sp>
       <p:sp>
         <p:nvSpPr>
-          <p:cNvPr id="16" name="Down Arrow 15"/>
+          <p:cNvPr id="23" name="Down Arrow 22"/>
           <p:cNvSpPr/>
           <p:nvPr/>
         </p:nvSpPr>
         <p:spPr>
           <a:xfrm>
-            <a:off x="5925312" y="4215384"/>
-            <a:ext cx="310896" cy="274320"/>
+            <a:off x="5934456" y="3867912"/>
+            <a:ext cx="292608" cy="237744"/>
           </a:xfrm>
           <a:prstGeom prst="downArrow">
             <a:avLst/>
@@ -11030,14 +13636,14 @@
       </p:sp>
       <p:sp>
         <p:nvSpPr>
-          <p:cNvPr id="17" name="Rounded Rectangle 16"/>
+          <p:cNvPr id="24" name="Rounded Rectangle 23"/>
           <p:cNvSpPr/>
           <p:nvPr/>
         </p:nvSpPr>
         <p:spPr>
           <a:xfrm>
-            <a:off x="822960" y="4517136"/>
-            <a:ext cx="10515600" cy="566928"/>
+            <a:off x="822960" y="4073652"/>
+            <a:ext cx="10515600" cy="512064"/>
           </a:xfrm>
           <a:prstGeom prst="roundRect">
             <a:avLst/>
@@ -11076,14 +13682,58 @@
       </p:sp>
       <p:sp>
         <p:nvSpPr>
-          <p:cNvPr id="18" name="TextBox 17"/>
+          <p:cNvPr id="25" name="Rectangle 24"/>
+          <p:cNvSpPr/>
+          <p:nvPr/>
+        </p:nvSpPr>
+        <p:spPr>
+          <a:xfrm>
+            <a:off x="822960" y="4183380"/>
+            <a:ext cx="64008" cy="292608"/>
+          </a:xfrm>
+          <a:prstGeom prst="rect">
+            <a:avLst/>
+          </a:prstGeom>
+          <a:solidFill>
+            <a:srgbClr val="00E676"/>
+          </a:solidFill>
+          <a:ln>
+            <a:noFill/>
+          </a:ln>
+          <a:effectLst/>
+        </p:spPr>
+        <p:style>
+          <a:lnRef idx="1">
+            <a:schemeClr val="accent1"/>
+          </a:lnRef>
+          <a:fillRef idx="3">
+            <a:schemeClr val="accent1"/>
+          </a:fillRef>
+          <a:effectRef idx="2">
+            <a:schemeClr val="accent1"/>
+          </a:effectRef>
+          <a:fontRef idx="minor">
+            <a:schemeClr val="lt1"/>
+          </a:fontRef>
+        </p:style>
+        <p:txBody>
+          <a:bodyPr rtlCol="0" anchor="ctr"/>
+          <a:lstStyle/>
+          <a:p>
+            <a:pPr algn="ctr"/>
+          </a:p>
+        </p:txBody>
+      </p:sp>
+      <p:sp>
+        <p:nvSpPr>
+          <p:cNvPr id="26" name="TextBox 25"/>
           <p:cNvSpPr txBox="1"/>
           <p:nvPr/>
         </p:nvSpPr>
         <p:spPr>
           <a:xfrm>
-            <a:off x="987552" y="4626864"/>
-            <a:ext cx="10186416" cy="347472"/>
+            <a:off x="1060704" y="4165091"/>
+            <a:ext cx="10094976" cy="329184"/>
           </a:xfrm>
           <a:prstGeom prst="rect">
             <a:avLst/>
@@ -11143,14 +13793,14 @@
       </p:sp>
       <p:sp>
         <p:nvSpPr>
-          <p:cNvPr id="19" name="Down Arrow 18"/>
+          <p:cNvPr id="27" name="Down Arrow 26"/>
           <p:cNvSpPr/>
           <p:nvPr/>
         </p:nvSpPr>
         <p:spPr>
           <a:xfrm>
-            <a:off x="5925312" y="5111496"/>
-            <a:ext cx="310896" cy="274320"/>
+            <a:off x="5934456" y="4604004"/>
+            <a:ext cx="292608" cy="237744"/>
           </a:xfrm>
           <a:prstGeom prst="downArrow">
             <a:avLst/>
@@ -11187,14 +13837,14 @@
       </p:sp>
       <p:sp>
         <p:nvSpPr>
-          <p:cNvPr id="20" name="Rounded Rectangle 19"/>
+          <p:cNvPr id="28" name="Rounded Rectangle 27"/>
           <p:cNvSpPr/>
           <p:nvPr/>
         </p:nvSpPr>
         <p:spPr>
           <a:xfrm>
-            <a:off x="822960" y="5413248"/>
-            <a:ext cx="10515600" cy="566928"/>
+            <a:off x="822960" y="4809744"/>
+            <a:ext cx="10515600" cy="512064"/>
           </a:xfrm>
           <a:prstGeom prst="roundRect">
             <a:avLst/>
@@ -11233,14 +13883,58 @@
       </p:sp>
       <p:sp>
         <p:nvSpPr>
-          <p:cNvPr id="21" name="TextBox 20"/>
+          <p:cNvPr id="29" name="Rectangle 28"/>
+          <p:cNvSpPr/>
+          <p:nvPr/>
+        </p:nvSpPr>
+        <p:spPr>
+          <a:xfrm>
+            <a:off x="822960" y="4919472"/>
+            <a:ext cx="64008" cy="292608"/>
+          </a:xfrm>
+          <a:prstGeom prst="rect">
+            <a:avLst/>
+          </a:prstGeom>
+          <a:solidFill>
+            <a:srgbClr val="00E676"/>
+          </a:solidFill>
+          <a:ln>
+            <a:noFill/>
+          </a:ln>
+          <a:effectLst/>
+        </p:spPr>
+        <p:style>
+          <a:lnRef idx="1">
+            <a:schemeClr val="accent1"/>
+          </a:lnRef>
+          <a:fillRef idx="3">
+            <a:schemeClr val="accent1"/>
+          </a:fillRef>
+          <a:effectRef idx="2">
+            <a:schemeClr val="accent1"/>
+          </a:effectRef>
+          <a:fontRef idx="minor">
+            <a:schemeClr val="lt1"/>
+          </a:fontRef>
+        </p:style>
+        <p:txBody>
+          <a:bodyPr rtlCol="0" anchor="ctr"/>
+          <a:lstStyle/>
+          <a:p>
+            <a:pPr algn="ctr"/>
+          </a:p>
+        </p:txBody>
+      </p:sp>
+      <p:sp>
+        <p:nvSpPr>
+          <p:cNvPr id="30" name="TextBox 29"/>
           <p:cNvSpPr txBox="1"/>
           <p:nvPr/>
         </p:nvSpPr>
         <p:spPr>
           <a:xfrm>
-            <a:off x="987552" y="5522976"/>
-            <a:ext cx="10186416" cy="347472"/>
+            <a:off x="1060704" y="4901183"/>
+            <a:ext cx="10094976" cy="329184"/>
           </a:xfrm>
           <a:prstGeom prst="rect">
             <a:avLst/>
@@ -11300,14 +13994,14 @@
       </p:sp>
       <p:sp>
         <p:nvSpPr>
-          <p:cNvPr id="22" name="Down Arrow 21"/>
+          <p:cNvPr id="31" name="Down Arrow 30"/>
           <p:cNvSpPr/>
           <p:nvPr/>
         </p:nvSpPr>
         <p:spPr>
           <a:xfrm>
-            <a:off x="5925312" y="6007608"/>
-            <a:ext cx="310896" cy="274320"/>
+            <a:off x="5934456" y="5340096"/>
+            <a:ext cx="292608" cy="237744"/>
           </a:xfrm>
           <a:prstGeom prst="downArrow">
             <a:avLst/>
@@ -11344,14 +14038,14 @@
       </p:sp>
       <p:sp>
         <p:nvSpPr>
-          <p:cNvPr id="23" name="Rounded Rectangle 22"/>
+          <p:cNvPr id="32" name="Rounded Rectangle 31"/>
           <p:cNvSpPr/>
           <p:nvPr/>
         </p:nvSpPr>
         <p:spPr>
           <a:xfrm>
-            <a:off x="822960" y="6309360"/>
-            <a:ext cx="10515600" cy="566928"/>
+            <a:off x="822960" y="5545836"/>
+            <a:ext cx="10515600" cy="512064"/>
           </a:xfrm>
           <a:prstGeom prst="roundRect">
             <a:avLst/>
@@ -11390,14 +14084,58 @@
       </p:sp>
       <p:sp>
         <p:nvSpPr>
-          <p:cNvPr id="24" name="TextBox 23"/>
+          <p:cNvPr id="33" name="Rectangle 32"/>
+          <p:cNvSpPr/>
+          <p:nvPr/>
+        </p:nvSpPr>
+        <p:spPr>
+          <a:xfrm>
+            <a:off x="822960" y="5655564"/>
+            <a:ext cx="64008" cy="292608"/>
+          </a:xfrm>
+          <a:prstGeom prst="rect">
+            <a:avLst/>
+          </a:prstGeom>
+          <a:solidFill>
+            <a:srgbClr val="FFB300"/>
+          </a:solidFill>
+          <a:ln>
+            <a:noFill/>
+          </a:ln>
+          <a:effectLst/>
+        </p:spPr>
+        <p:style>
+          <a:lnRef idx="1">
+            <a:schemeClr val="accent1"/>
+          </a:lnRef>
+          <a:fillRef idx="3">
+            <a:schemeClr val="accent1"/>
+          </a:fillRef>
+          <a:effectRef idx="2">
+            <a:schemeClr val="accent1"/>
+          </a:effectRef>
+          <a:fontRef idx="minor">
+            <a:schemeClr val="lt1"/>
+          </a:fontRef>
+        </p:style>
+        <p:txBody>
+          <a:bodyPr rtlCol="0" anchor="ctr"/>
+          <a:lstStyle/>
+          <a:p>
+            <a:pPr algn="ctr"/>
+          </a:p>
+        </p:txBody>
+      </p:sp>
+      <p:sp>
+        <p:nvSpPr>
+          <p:cNvPr id="34" name="TextBox 33"/>
           <p:cNvSpPr txBox="1"/>
           <p:nvPr/>
         </p:nvSpPr>
         <p:spPr>
           <a:xfrm>
-            <a:off x="987552" y="6419088"/>
-            <a:ext cx="10186416" cy="347472"/>
+            <a:off x="1060704" y="5637275"/>
+            <a:ext cx="10094976" cy="329184"/>
           </a:xfrm>
           <a:prstGeom prst="rect">
             <a:avLst/>
@@ -11527,13 +14265,101 @@
       </p:sp>
       <p:sp>
         <p:nvSpPr>
-          <p:cNvPr id="3" name="TextBox 2"/>
+          <p:cNvPr id="3" name="Rectangle 2"/>
+          <p:cNvSpPr/>
+          <p:nvPr/>
+        </p:nvSpPr>
+        <p:spPr>
+          <a:xfrm>
+            <a:off x="822960" y="6291072"/>
+            <a:ext cx="10515600" cy="10972"/>
+          </a:xfrm>
+          <a:prstGeom prst="rect">
+            <a:avLst/>
+          </a:prstGeom>
+          <a:solidFill>
+            <a:srgbClr val="22302B"/>
+          </a:solidFill>
+          <a:ln>
+            <a:noFill/>
+          </a:ln>
+          <a:effectLst/>
+        </p:spPr>
+        <p:style>
+          <a:lnRef idx="1">
+            <a:schemeClr val="accent1"/>
+          </a:lnRef>
+          <a:fillRef idx="3">
+            <a:schemeClr val="accent1"/>
+          </a:fillRef>
+          <a:effectRef idx="2">
+            <a:schemeClr val="accent1"/>
+          </a:effectRef>
+          <a:fontRef idx="minor">
+            <a:schemeClr val="lt1"/>
+          </a:fontRef>
+        </p:style>
+        <p:txBody>
+          <a:bodyPr rtlCol="0" anchor="ctr"/>
+          <a:lstStyle/>
+          <a:p>
+            <a:pPr algn="ctr"/>
+          </a:p>
+        </p:txBody>
+      </p:sp>
+      <p:sp>
+        <p:nvSpPr>
+          <p:cNvPr id="4" name="Rectangle 3"/>
+          <p:cNvSpPr/>
+          <p:nvPr/>
+        </p:nvSpPr>
+        <p:spPr>
+          <a:xfrm>
+            <a:off x="822960" y="6391656"/>
+            <a:ext cx="73152" cy="155448"/>
+          </a:xfrm>
+          <a:prstGeom prst="rect">
+            <a:avLst/>
+          </a:prstGeom>
+          <a:solidFill>
+            <a:srgbClr val="00E676"/>
+          </a:solidFill>
+          <a:ln>
+            <a:noFill/>
+          </a:ln>
+          <a:effectLst/>
+        </p:spPr>
+        <p:style>
+          <a:lnRef idx="1">
+            <a:schemeClr val="accent1"/>
+          </a:lnRef>
+          <a:fillRef idx="3">
+            <a:schemeClr val="accent1"/>
+          </a:fillRef>
+          <a:effectRef idx="2">
+            <a:schemeClr val="accent1"/>
+          </a:effectRef>
+          <a:fontRef idx="minor">
+            <a:schemeClr val="lt1"/>
+          </a:fontRef>
+        </p:style>
+        <p:txBody>
+          <a:bodyPr rtlCol="0" anchor="ctr"/>
+          <a:lstStyle/>
+          <a:p>
+            <a:pPr algn="ctr"/>
+          </a:p>
+        </p:txBody>
+      </p:sp>
+      <p:sp>
+        <p:nvSpPr>
+          <p:cNvPr id="5" name="TextBox 4"/>
           <p:cNvSpPr txBox="1"/>
           <p:nvPr/>
         </p:nvSpPr>
         <p:spPr>
           <a:xfrm>
-            <a:off x="822960" y="6355080"/>
+            <a:off x="1005840" y="6364224"/>
             <a:ext cx="7315200" cy="365760"/>
           </a:xfrm>
           <a:prstGeom prst="rect">
@@ -11581,14 +14407,14 @@
       </p:sp>
       <p:sp>
         <p:nvSpPr>
-          <p:cNvPr id="4" name="TextBox 3"/>
+          <p:cNvPr id="6" name="TextBox 5"/>
           <p:cNvSpPr txBox="1"/>
           <p:nvPr/>
         </p:nvSpPr>
         <p:spPr>
           <a:xfrm>
-            <a:off x="10637215" y="6355080"/>
-            <a:ext cx="822960" cy="365760"/>
+            <a:off x="10454335" y="6364224"/>
+            <a:ext cx="1005840" cy="365760"/>
           </a:xfrm>
           <a:prstGeom prst="rect">
             <a:avLst/>
@@ -11626,14 +14452,58 @@
       </p:sp>
       <p:sp>
         <p:nvSpPr>
-          <p:cNvPr id="5" name="TextBox 4"/>
+          <p:cNvPr id="7" name="Rectangle 6"/>
+          <p:cNvSpPr/>
+          <p:nvPr/>
+        </p:nvSpPr>
+        <p:spPr>
+          <a:xfrm>
+            <a:off x="822960" y="576072"/>
+            <a:ext cx="64008" cy="182880"/>
+          </a:xfrm>
+          <a:prstGeom prst="rect">
+            <a:avLst/>
+          </a:prstGeom>
+          <a:solidFill>
+            <a:srgbClr val="00E676"/>
+          </a:solidFill>
+          <a:ln>
+            <a:noFill/>
+          </a:ln>
+          <a:effectLst/>
+        </p:spPr>
+        <p:style>
+          <a:lnRef idx="1">
+            <a:schemeClr val="accent1"/>
+          </a:lnRef>
+          <a:fillRef idx="3">
+            <a:schemeClr val="accent1"/>
+          </a:fillRef>
+          <a:effectRef idx="2">
+            <a:schemeClr val="accent1"/>
+          </a:effectRef>
+          <a:fontRef idx="minor">
+            <a:schemeClr val="lt1"/>
+          </a:fontRef>
+        </p:style>
+        <p:txBody>
+          <a:bodyPr rtlCol="0" anchor="ctr"/>
+          <a:lstStyle/>
+          <a:p>
+            <a:pPr algn="ctr"/>
+          </a:p>
+        </p:txBody>
+      </p:sp>
+      <p:sp>
+        <p:nvSpPr>
+          <p:cNvPr id="8" name="TextBox 7"/>
           <p:cNvSpPr txBox="1"/>
           <p:nvPr/>
         </p:nvSpPr>
         <p:spPr>
           <a:xfrm>
-            <a:off x="822960" y="566928"/>
-            <a:ext cx="10515600" cy="274320"/>
+            <a:off x="1024128" y="548640"/>
+            <a:ext cx="10332720" cy="274320"/>
           </a:xfrm>
           <a:prstGeom prst="rect">
             <a:avLst/>
@@ -11671,13 +14541,13 @@
       </p:sp>
       <p:sp>
         <p:nvSpPr>
-          <p:cNvPr id="6" name="TextBox 5"/>
+          <p:cNvPr id="9" name="TextBox 8"/>
           <p:cNvSpPr txBox="1"/>
           <p:nvPr/>
         </p:nvSpPr>
         <p:spPr>
           <a:xfrm>
-            <a:off x="822960" y="950976"/>
+            <a:off x="804672" y="950976"/>
             <a:ext cx="10607040" cy="914400"/>
           </a:xfrm>
           <a:prstGeom prst="rect">
@@ -11716,14 +14586,14 @@
       </p:sp>
       <p:sp>
         <p:nvSpPr>
-          <p:cNvPr id="7" name="Rectangle 6"/>
+          <p:cNvPr id="10" name="Rectangle 9"/>
           <p:cNvSpPr/>
           <p:nvPr/>
         </p:nvSpPr>
         <p:spPr>
           <a:xfrm>
-            <a:off x="841248" y="1664208"/>
-            <a:ext cx="640080" cy="41148"/>
+            <a:off x="841248" y="1627632"/>
+            <a:ext cx="603504" cy="45720"/>
           </a:xfrm>
           <a:prstGeom prst="rect">
             <a:avLst/>
@@ -11760,14 +14630,58 @@
       </p:sp>
       <p:sp>
         <p:nvSpPr>
-          <p:cNvPr id="8" name="Rounded Rectangle 7"/>
+          <p:cNvPr id="11" name="Rectangle 10"/>
           <p:cNvSpPr/>
           <p:nvPr/>
         </p:nvSpPr>
         <p:spPr>
           <a:xfrm>
-            <a:off x="822960" y="1874519"/>
-            <a:ext cx="3429000" cy="3291840"/>
+            <a:off x="822960" y="1664208"/>
+            <a:ext cx="10515600" cy="10972"/>
+          </a:xfrm>
+          <a:prstGeom prst="rect">
+            <a:avLst/>
+          </a:prstGeom>
+          <a:solidFill>
+            <a:srgbClr val="22302B"/>
+          </a:solidFill>
+          <a:ln>
+            <a:noFill/>
+          </a:ln>
+          <a:effectLst/>
+        </p:spPr>
+        <p:style>
+          <a:lnRef idx="1">
+            <a:schemeClr val="accent1"/>
+          </a:lnRef>
+          <a:fillRef idx="3">
+            <a:schemeClr val="accent1"/>
+          </a:fillRef>
+          <a:effectRef idx="2">
+            <a:schemeClr val="accent1"/>
+          </a:effectRef>
+          <a:fontRef idx="minor">
+            <a:schemeClr val="lt1"/>
+          </a:fontRef>
+        </p:style>
+        <p:txBody>
+          <a:bodyPr rtlCol="0" anchor="ctr"/>
+          <a:lstStyle/>
+          <a:p>
+            <a:pPr algn="ctr"/>
+          </a:p>
+        </p:txBody>
+      </p:sp>
+      <p:sp>
+        <p:nvSpPr>
+          <p:cNvPr id="12" name="Rounded Rectangle 11"/>
+          <p:cNvSpPr/>
+          <p:nvPr/>
+        </p:nvSpPr>
+        <p:spPr>
+          <a:xfrm>
+            <a:off x="822960" y="1984248"/>
+            <a:ext cx="3429000" cy="3246120"/>
           </a:xfrm>
           <a:prstGeom prst="roundRect">
             <a:avLst/>
@@ -11806,14 +14720,58 @@
       </p:sp>
       <p:sp>
         <p:nvSpPr>
-          <p:cNvPr id="9" name="TextBox 8"/>
+          <p:cNvPr id="13" name="Rectangle 12"/>
+          <p:cNvSpPr/>
+          <p:nvPr/>
+        </p:nvSpPr>
+        <p:spPr>
+          <a:xfrm>
+            <a:off x="1051560" y="2231136"/>
+            <a:ext cx="457200" cy="64008"/>
+          </a:xfrm>
+          <a:prstGeom prst="rect">
+            <a:avLst/>
+          </a:prstGeom>
+          <a:solidFill>
+            <a:srgbClr val="00E676"/>
+          </a:solidFill>
+          <a:ln>
+            <a:noFill/>
+          </a:ln>
+          <a:effectLst/>
+        </p:spPr>
+        <p:style>
+          <a:lnRef idx="1">
+            <a:schemeClr val="accent1"/>
+          </a:lnRef>
+          <a:fillRef idx="3">
+            <a:schemeClr val="accent1"/>
+          </a:fillRef>
+          <a:effectRef idx="2">
+            <a:schemeClr val="accent1"/>
+          </a:effectRef>
+          <a:fontRef idx="minor">
+            <a:schemeClr val="lt1"/>
+          </a:fontRef>
+        </p:style>
+        <p:txBody>
+          <a:bodyPr rtlCol="0" anchor="ctr"/>
+          <a:lstStyle/>
+          <a:p>
+            <a:pPr algn="ctr"/>
+          </a:p>
+        </p:txBody>
+      </p:sp>
+      <p:sp>
+        <p:nvSpPr>
+          <p:cNvPr id="14" name="TextBox 13"/>
           <p:cNvSpPr txBox="1"/>
           <p:nvPr/>
         </p:nvSpPr>
         <p:spPr>
           <a:xfrm>
-            <a:off x="1051560" y="2194560"/>
-            <a:ext cx="2971800" cy="1280160"/>
+            <a:off x="1051560" y="2377440"/>
+            <a:ext cx="2971800" cy="1188720"/>
           </a:xfrm>
           <a:prstGeom prst="rect">
             <a:avLst/>
@@ -11873,13 +14831,13 @@
       </p:sp>
       <p:sp>
         <p:nvSpPr>
-          <p:cNvPr id="10" name="TextBox 9"/>
+          <p:cNvPr id="15" name="TextBox 14"/>
           <p:cNvSpPr txBox="1"/>
           <p:nvPr/>
         </p:nvSpPr>
         <p:spPr>
           <a:xfrm>
-            <a:off x="1051560" y="3566160"/>
+            <a:off x="1051560" y="3721608"/>
             <a:ext cx="2971800" cy="1371600"/>
           </a:xfrm>
           <a:prstGeom prst="rect">
@@ -11919,14 +14877,14 @@
       </p:sp>
       <p:sp>
         <p:nvSpPr>
-          <p:cNvPr id="11" name="Rounded Rectangle 10"/>
+          <p:cNvPr id="16" name="Rounded Rectangle 15"/>
           <p:cNvSpPr/>
           <p:nvPr/>
         </p:nvSpPr>
         <p:spPr>
           <a:xfrm>
-            <a:off x="4416552" y="1874519"/>
-            <a:ext cx="3429000" cy="3291840"/>
+            <a:off x="4416552" y="1984248"/>
+            <a:ext cx="3429000" cy="3246120"/>
           </a:xfrm>
           <a:prstGeom prst="roundRect">
             <a:avLst/>
@@ -11965,14 +14923,58 @@
       </p:sp>
       <p:sp>
         <p:nvSpPr>
-          <p:cNvPr id="12" name="TextBox 11"/>
+          <p:cNvPr id="17" name="Rectangle 16"/>
+          <p:cNvSpPr/>
+          <p:nvPr/>
+        </p:nvSpPr>
+        <p:spPr>
+          <a:xfrm>
+            <a:off x="4645152" y="2231136"/>
+            <a:ext cx="457200" cy="64008"/>
+          </a:xfrm>
+          <a:prstGeom prst="rect">
+            <a:avLst/>
+          </a:prstGeom>
+          <a:solidFill>
+            <a:srgbClr val="00E676"/>
+          </a:solidFill>
+          <a:ln>
+            <a:noFill/>
+          </a:ln>
+          <a:effectLst/>
+        </p:spPr>
+        <p:style>
+          <a:lnRef idx="1">
+            <a:schemeClr val="accent1"/>
+          </a:lnRef>
+          <a:fillRef idx="3">
+            <a:schemeClr val="accent1"/>
+          </a:fillRef>
+          <a:effectRef idx="2">
+            <a:schemeClr val="accent1"/>
+          </a:effectRef>
+          <a:fontRef idx="minor">
+            <a:schemeClr val="lt1"/>
+          </a:fontRef>
+        </p:style>
+        <p:txBody>
+          <a:bodyPr rtlCol="0" anchor="ctr"/>
+          <a:lstStyle/>
+          <a:p>
+            <a:pPr algn="ctr"/>
+          </a:p>
+        </p:txBody>
+      </p:sp>
+      <p:sp>
+        <p:nvSpPr>
+          <p:cNvPr id="18" name="TextBox 17"/>
           <p:cNvSpPr txBox="1"/>
           <p:nvPr/>
         </p:nvSpPr>
         <p:spPr>
           <a:xfrm>
-            <a:off x="4645152" y="2194560"/>
-            <a:ext cx="2971800" cy="1280160"/>
+            <a:off x="4645152" y="2377440"/>
+            <a:ext cx="2971800" cy="1188720"/>
           </a:xfrm>
           <a:prstGeom prst="rect">
             <a:avLst/>
@@ -12032,13 +15034,13 @@
       </p:sp>
       <p:sp>
         <p:nvSpPr>
-          <p:cNvPr id="13" name="TextBox 12"/>
+          <p:cNvPr id="19" name="TextBox 18"/>
           <p:cNvSpPr txBox="1"/>
           <p:nvPr/>
         </p:nvSpPr>
         <p:spPr>
           <a:xfrm>
-            <a:off x="4645152" y="3566160"/>
+            <a:off x="4645152" y="3721608"/>
             <a:ext cx="2971800" cy="1371600"/>
           </a:xfrm>
           <a:prstGeom prst="rect">
@@ -12078,14 +15080,14 @@
       </p:sp>
       <p:sp>
         <p:nvSpPr>
-          <p:cNvPr id="14" name="Rounded Rectangle 13"/>
+          <p:cNvPr id="20" name="Rounded Rectangle 19"/>
           <p:cNvSpPr/>
           <p:nvPr/>
         </p:nvSpPr>
         <p:spPr>
           <a:xfrm>
-            <a:off x="8010144" y="1874519"/>
-            <a:ext cx="3429000" cy="3291840"/>
+            <a:off x="8010144" y="1984248"/>
+            <a:ext cx="3429000" cy="3246120"/>
           </a:xfrm>
           <a:prstGeom prst="roundRect">
             <a:avLst/>
@@ -12124,14 +15126,58 @@
       </p:sp>
       <p:sp>
         <p:nvSpPr>
-          <p:cNvPr id="15" name="TextBox 14"/>
+          <p:cNvPr id="21" name="Rectangle 20"/>
+          <p:cNvSpPr/>
+          <p:nvPr/>
+        </p:nvSpPr>
+        <p:spPr>
+          <a:xfrm>
+            <a:off x="8238744" y="2231136"/>
+            <a:ext cx="457200" cy="64008"/>
+          </a:xfrm>
+          <a:prstGeom prst="rect">
+            <a:avLst/>
+          </a:prstGeom>
+          <a:solidFill>
+            <a:srgbClr val="00E676"/>
+          </a:solidFill>
+          <a:ln>
+            <a:noFill/>
+          </a:ln>
+          <a:effectLst/>
+        </p:spPr>
+        <p:style>
+          <a:lnRef idx="1">
+            <a:schemeClr val="accent1"/>
+          </a:lnRef>
+          <a:fillRef idx="3">
+            <a:schemeClr val="accent1"/>
+          </a:fillRef>
+          <a:effectRef idx="2">
+            <a:schemeClr val="accent1"/>
+          </a:effectRef>
+          <a:fontRef idx="minor">
+            <a:schemeClr val="lt1"/>
+          </a:fontRef>
+        </p:style>
+        <p:txBody>
+          <a:bodyPr rtlCol="0" anchor="ctr"/>
+          <a:lstStyle/>
+          <a:p>
+            <a:pPr algn="ctr"/>
+          </a:p>
+        </p:txBody>
+      </p:sp>
+      <p:sp>
+        <p:nvSpPr>
+          <p:cNvPr id="22" name="TextBox 21"/>
           <p:cNvSpPr txBox="1"/>
           <p:nvPr/>
         </p:nvSpPr>
         <p:spPr>
           <a:xfrm>
-            <a:off x="8238744" y="2194560"/>
-            <a:ext cx="2971800" cy="1280160"/>
+            <a:off x="8238744" y="2377440"/>
+            <a:ext cx="2971800" cy="1188720"/>
           </a:xfrm>
           <a:prstGeom prst="rect">
             <a:avLst/>
@@ -12191,13 +15237,13 @@
       </p:sp>
       <p:sp>
         <p:nvSpPr>
-          <p:cNvPr id="16" name="TextBox 15"/>
+          <p:cNvPr id="23" name="TextBox 22"/>
           <p:cNvSpPr txBox="1"/>
           <p:nvPr/>
         </p:nvSpPr>
         <p:spPr>
           <a:xfrm>
-            <a:off x="8238744" y="3566160"/>
+            <a:off x="8238744" y="3721608"/>
             <a:ext cx="2971800" cy="1371600"/>
           </a:xfrm>
           <a:prstGeom prst="rect">
@@ -12230,7 +15276,7 @@
                 <a:latin typeface="Segoe UI"/>
               </a:rPr>
               <a:t>Detection, liveness and matching all run
-on-device, works in airplane mode.</a:t>
+on-device; works in airplane mode.</a:t>
             </a:r>
           </a:p>
         </p:txBody>
@@ -12307,13 +15353,101 @@
       </p:sp>
       <p:sp>
         <p:nvSpPr>
-          <p:cNvPr id="3" name="TextBox 2"/>
+          <p:cNvPr id="3" name="Rectangle 2"/>
+          <p:cNvSpPr/>
+          <p:nvPr/>
+        </p:nvSpPr>
+        <p:spPr>
+          <a:xfrm>
+            <a:off x="822960" y="6291072"/>
+            <a:ext cx="10515600" cy="10972"/>
+          </a:xfrm>
+          <a:prstGeom prst="rect">
+            <a:avLst/>
+          </a:prstGeom>
+          <a:solidFill>
+            <a:srgbClr val="22302B"/>
+          </a:solidFill>
+          <a:ln>
+            <a:noFill/>
+          </a:ln>
+          <a:effectLst/>
+        </p:spPr>
+        <p:style>
+          <a:lnRef idx="1">
+            <a:schemeClr val="accent1"/>
+          </a:lnRef>
+          <a:fillRef idx="3">
+            <a:schemeClr val="accent1"/>
+          </a:fillRef>
+          <a:effectRef idx="2">
+            <a:schemeClr val="accent1"/>
+          </a:effectRef>
+          <a:fontRef idx="minor">
+            <a:schemeClr val="lt1"/>
+          </a:fontRef>
+        </p:style>
+        <p:txBody>
+          <a:bodyPr rtlCol="0" anchor="ctr"/>
+          <a:lstStyle/>
+          <a:p>
+            <a:pPr algn="ctr"/>
+          </a:p>
+        </p:txBody>
+      </p:sp>
+      <p:sp>
+        <p:nvSpPr>
+          <p:cNvPr id="4" name="Rectangle 3"/>
+          <p:cNvSpPr/>
+          <p:nvPr/>
+        </p:nvSpPr>
+        <p:spPr>
+          <a:xfrm>
+            <a:off x="822960" y="6391656"/>
+            <a:ext cx="73152" cy="155448"/>
+          </a:xfrm>
+          <a:prstGeom prst="rect">
+            <a:avLst/>
+          </a:prstGeom>
+          <a:solidFill>
+            <a:srgbClr val="00E676"/>
+          </a:solidFill>
+          <a:ln>
+            <a:noFill/>
+          </a:ln>
+          <a:effectLst/>
+        </p:spPr>
+        <p:style>
+          <a:lnRef idx="1">
+            <a:schemeClr val="accent1"/>
+          </a:lnRef>
+          <a:fillRef idx="3">
+            <a:schemeClr val="accent1"/>
+          </a:fillRef>
+          <a:effectRef idx="2">
+            <a:schemeClr val="accent1"/>
+          </a:effectRef>
+          <a:fontRef idx="minor">
+            <a:schemeClr val="lt1"/>
+          </a:fontRef>
+        </p:style>
+        <p:txBody>
+          <a:bodyPr rtlCol="0" anchor="ctr"/>
+          <a:lstStyle/>
+          <a:p>
+            <a:pPr algn="ctr"/>
+          </a:p>
+        </p:txBody>
+      </p:sp>
+      <p:sp>
+        <p:nvSpPr>
+          <p:cNvPr id="5" name="TextBox 4"/>
           <p:cNvSpPr txBox="1"/>
           <p:nvPr/>
         </p:nvSpPr>
         <p:spPr>
           <a:xfrm>
-            <a:off x="822960" y="6355080"/>
+            <a:off x="1005840" y="6364224"/>
             <a:ext cx="7315200" cy="365760"/>
           </a:xfrm>
           <a:prstGeom prst="rect">
@@ -12361,14 +15495,14 @@
       </p:sp>
       <p:sp>
         <p:nvSpPr>
-          <p:cNvPr id="4" name="TextBox 3"/>
+          <p:cNvPr id="6" name="TextBox 5"/>
           <p:cNvSpPr txBox="1"/>
           <p:nvPr/>
         </p:nvSpPr>
         <p:spPr>
           <a:xfrm>
-            <a:off x="10637215" y="6355080"/>
-            <a:ext cx="822960" cy="365760"/>
+            <a:off x="10454335" y="6364224"/>
+            <a:ext cx="1005840" cy="365760"/>
           </a:xfrm>
           <a:prstGeom prst="rect">
             <a:avLst/>
@@ -12406,14 +15540,58 @@
       </p:sp>
       <p:sp>
         <p:nvSpPr>
-          <p:cNvPr id="5" name="TextBox 4"/>
+          <p:cNvPr id="7" name="Rectangle 6"/>
+          <p:cNvSpPr/>
+          <p:nvPr/>
+        </p:nvSpPr>
+        <p:spPr>
+          <a:xfrm>
+            <a:off x="822960" y="576072"/>
+            <a:ext cx="64008" cy="182880"/>
+          </a:xfrm>
+          <a:prstGeom prst="rect">
+            <a:avLst/>
+          </a:prstGeom>
+          <a:solidFill>
+            <a:srgbClr val="00E676"/>
+          </a:solidFill>
+          <a:ln>
+            <a:noFill/>
+          </a:ln>
+          <a:effectLst/>
+        </p:spPr>
+        <p:style>
+          <a:lnRef idx="1">
+            <a:schemeClr val="accent1"/>
+          </a:lnRef>
+          <a:fillRef idx="3">
+            <a:schemeClr val="accent1"/>
+          </a:fillRef>
+          <a:effectRef idx="2">
+            <a:schemeClr val="accent1"/>
+          </a:effectRef>
+          <a:fontRef idx="minor">
+            <a:schemeClr val="lt1"/>
+          </a:fontRef>
+        </p:style>
+        <p:txBody>
+          <a:bodyPr rtlCol="0" anchor="ctr"/>
+          <a:lstStyle/>
+          <a:p>
+            <a:pPr algn="ctr"/>
+          </a:p>
+        </p:txBody>
+      </p:sp>
+      <p:sp>
+        <p:nvSpPr>
+          <p:cNvPr id="8" name="TextBox 7"/>
           <p:cNvSpPr txBox="1"/>
           <p:nvPr/>
         </p:nvSpPr>
         <p:spPr>
           <a:xfrm>
-            <a:off x="822960" y="566928"/>
-            <a:ext cx="10515600" cy="274320"/>
+            <a:off x="1024128" y="548640"/>
+            <a:ext cx="10332720" cy="274320"/>
           </a:xfrm>
           <a:prstGeom prst="rect">
             <a:avLst/>
@@ -12451,13 +15629,13 @@
       </p:sp>
       <p:sp>
         <p:nvSpPr>
-          <p:cNvPr id="6" name="TextBox 5"/>
+          <p:cNvPr id="9" name="TextBox 8"/>
           <p:cNvSpPr txBox="1"/>
           <p:nvPr/>
         </p:nvSpPr>
         <p:spPr>
           <a:xfrm>
-            <a:off x="822960" y="950976"/>
+            <a:off x="804672" y="950976"/>
             <a:ext cx="10607040" cy="914400"/>
           </a:xfrm>
           <a:prstGeom prst="rect">
@@ -12496,14 +15674,14 @@
       </p:sp>
       <p:sp>
         <p:nvSpPr>
-          <p:cNvPr id="7" name="Rectangle 6"/>
+          <p:cNvPr id="10" name="Rectangle 9"/>
           <p:cNvSpPr/>
           <p:nvPr/>
         </p:nvSpPr>
         <p:spPr>
           <a:xfrm>
-            <a:off x="841248" y="1664208"/>
-            <a:ext cx="640080" cy="41148"/>
+            <a:off x="841248" y="1627632"/>
+            <a:ext cx="603504" cy="45720"/>
           </a:xfrm>
           <a:prstGeom prst="rect">
             <a:avLst/>
@@ -12538,17 +15716,61 @@
           </a:p>
         </p:txBody>
       </p:sp>
+      <p:sp>
+        <p:nvSpPr>
+          <p:cNvPr id="11" name="Rectangle 10"/>
+          <p:cNvSpPr/>
+          <p:nvPr/>
+        </p:nvSpPr>
+        <p:spPr>
+          <a:xfrm>
+            <a:off x="822960" y="1664208"/>
+            <a:ext cx="10515600" cy="10972"/>
+          </a:xfrm>
+          <a:prstGeom prst="rect">
+            <a:avLst/>
+          </a:prstGeom>
+          <a:solidFill>
+            <a:srgbClr val="22302B"/>
+          </a:solidFill>
+          <a:ln>
+            <a:noFill/>
+          </a:ln>
+          <a:effectLst/>
+        </p:spPr>
+        <p:style>
+          <a:lnRef idx="1">
+            <a:schemeClr val="accent1"/>
+          </a:lnRef>
+          <a:fillRef idx="3">
+            <a:schemeClr val="accent1"/>
+          </a:fillRef>
+          <a:effectRef idx="2">
+            <a:schemeClr val="accent1"/>
+          </a:effectRef>
+          <a:fontRef idx="minor">
+            <a:schemeClr val="lt1"/>
+          </a:fontRef>
+        </p:style>
+        <p:txBody>
+          <a:bodyPr rtlCol="0" anchor="ctr"/>
+          <a:lstStyle/>
+          <a:p>
+            <a:pPr algn="ctr"/>
+          </a:p>
+        </p:txBody>
+      </p:sp>
       <p:graphicFrame>
         <p:nvGraphicFramePr>
-          <p:cNvPr id="8" name="Table 7"/>
+          <p:cNvPr id="12" name="Table 11"/>
           <p:cNvGraphicFramePr>
             <a:graphicFrameLocks noGrp="1"/>
           </p:cNvGraphicFramePr>
           <p:nvPr/>
         </p:nvGraphicFramePr>
         <p:xfrm>
-          <a:off x="822960" y="1874519"/>
-          <a:ext cx="10515600" cy="3291840"/>
+          <a:off x="822960" y="1956816"/>
+          <a:ext cx="10515600" cy="3200400"/>
         </p:xfrm>
         <a:graphic>
           <a:graphicData uri="http://schemas.openxmlformats.org/drawingml/2006/table">
@@ -12580,7 +15802,7 @@
                       </a:r>
                     </a:p>
                   </a:txBody>
-                  <a:tcPr marL="109728" marR="73152" marT="27432" marB="27432" anchor="ctr">
+                  <a:tcPr marL="128016" marR="73152" marT="18288" marB="18288" anchor="ctr">
                     <a:solidFill>
                       <a:srgbClr val="0B3D2A"/>
                     </a:solidFill>
@@ -12603,7 +15825,7 @@
                       </a:r>
                     </a:p>
                   </a:txBody>
-                  <a:tcPr marL="109728" marR="73152" marT="27432" marB="27432" anchor="ctr">
+                  <a:tcPr marL="128016" marR="73152" marT="18288" marB="18288" anchor="ctr">
                     <a:solidFill>
                       <a:srgbClr val="0B3D2A"/>
                     </a:solidFill>
@@ -12626,7 +15848,7 @@
                       </a:r>
                     </a:p>
                   </a:txBody>
-                  <a:tcPr marL="109728" marR="73152" marT="27432" marB="27432" anchor="ctr">
+                  <a:tcPr marL="128016" marR="73152" marT="18288" marB="18288" anchor="ctr">
                     <a:solidFill>
                       <a:srgbClr val="0B3D2A"/>
                     </a:solidFill>
@@ -12649,14 +15871,14 @@
                       </a:r>
                     </a:p>
                   </a:txBody>
-                  <a:tcPr marL="109728" marR="73152" marT="27432" marB="27432" anchor="ctr">
+                  <a:tcPr marL="128016" marR="73152" marT="18288" marB="18288" anchor="ctr">
                     <a:solidFill>
                       <a:srgbClr val="0B3D2A"/>
                     </a:solidFill>
                   </a:tcPr>
                 </a:tc>
               </a:tr>
-              <a:tr h="566928">
+              <a:tr h="548640">
                 <a:tc>
                   <a:txBody>
                     <a:bodyPr/>
@@ -12674,7 +15896,7 @@
                       </a:r>
                     </a:p>
                   </a:txBody>
-                  <a:tcPr marL="109728" marR="73152" marT="27432" marB="27432" anchor="ctr">
+                  <a:tcPr marL="128016" marR="73152" marT="18288" marB="18288" anchor="ctr">
                     <a:solidFill>
                       <a:srgbClr val="111714"/>
                     </a:solidFill>
@@ -12697,7 +15919,7 @@
                       </a:r>
                     </a:p>
                   </a:txBody>
-                  <a:tcPr marL="109728" marR="73152" marT="27432" marB="27432" anchor="ctr">
+                  <a:tcPr marL="128016" marR="73152" marT="18288" marB="18288" anchor="ctr">
                     <a:solidFill>
                       <a:srgbClr val="111714"/>
                     </a:solidFill>
@@ -12720,7 +15942,7 @@
                       </a:r>
                     </a:p>
                   </a:txBody>
-                  <a:tcPr marL="109728" marR="73152" marT="27432" marB="27432" anchor="ctr">
+                  <a:tcPr marL="128016" marR="73152" marT="18288" marB="18288" anchor="ctr">
                     <a:solidFill>
                       <a:srgbClr val="111714"/>
                     </a:solidFill>
@@ -12743,14 +15965,14 @@
                       </a:r>
                     </a:p>
                   </a:txBody>
-                  <a:tcPr marL="109728" marR="73152" marT="27432" marB="27432" anchor="ctr">
+                  <a:tcPr marL="128016" marR="73152" marT="18288" marB="18288" anchor="ctr">
                     <a:solidFill>
                       <a:srgbClr val="111714"/>
                     </a:solidFill>
                   </a:tcPr>
                 </a:tc>
               </a:tr>
-              <a:tr h="566928">
+              <a:tr h="548640">
                 <a:tc>
                   <a:txBody>
                     <a:bodyPr/>
@@ -12768,7 +15990,7 @@
                       </a:r>
                     </a:p>
                   </a:txBody>
-                  <a:tcPr marL="109728" marR="73152" marT="27432" marB="27432" anchor="ctr">
+                  <a:tcPr marL="128016" marR="73152" marT="18288" marB="18288" anchor="ctr">
                     <a:solidFill>
                       <a:srgbClr val="161D1A"/>
                     </a:solidFill>
@@ -12791,7 +16013,7 @@
                       </a:r>
                     </a:p>
                   </a:txBody>
-                  <a:tcPr marL="109728" marR="73152" marT="27432" marB="27432" anchor="ctr">
+                  <a:tcPr marL="128016" marR="73152" marT="18288" marB="18288" anchor="ctr">
                     <a:solidFill>
                       <a:srgbClr val="161D1A"/>
                     </a:solidFill>
@@ -12814,7 +16036,7 @@
                       </a:r>
                     </a:p>
                   </a:txBody>
-                  <a:tcPr marL="109728" marR="73152" marT="27432" marB="27432" anchor="ctr">
+                  <a:tcPr marL="128016" marR="73152" marT="18288" marB="18288" anchor="ctr">
                     <a:solidFill>
                       <a:srgbClr val="161D1A"/>
                     </a:solidFill>
@@ -12837,14 +16059,14 @@
                       </a:r>
                     </a:p>
                   </a:txBody>
-                  <a:tcPr marL="109728" marR="73152" marT="27432" marB="27432" anchor="ctr">
+                  <a:tcPr marL="128016" marR="73152" marT="18288" marB="18288" anchor="ctr">
                     <a:solidFill>
                       <a:srgbClr val="161D1A"/>
                     </a:solidFill>
                   </a:tcPr>
                 </a:tc>
               </a:tr>
-              <a:tr h="566928">
+              <a:tr h="548640">
                 <a:tc>
                   <a:txBody>
                     <a:bodyPr/>
@@ -12862,7 +16084,7 @@
                       </a:r>
                     </a:p>
                   </a:txBody>
-                  <a:tcPr marL="109728" marR="73152" marT="27432" marB="27432" anchor="ctr">
+                  <a:tcPr marL="128016" marR="73152" marT="18288" marB="18288" anchor="ctr">
                     <a:solidFill>
                       <a:srgbClr val="111714"/>
                     </a:solidFill>
@@ -12885,7 +16107,7 @@
                       </a:r>
                     </a:p>
                   </a:txBody>
-                  <a:tcPr marL="109728" marR="73152" marT="27432" marB="27432" anchor="ctr">
+                  <a:tcPr marL="128016" marR="73152" marT="18288" marB="18288" anchor="ctr">
                     <a:solidFill>
                       <a:srgbClr val="111714"/>
                     </a:solidFill>
@@ -12908,7 +16130,7 @@
                       </a:r>
                     </a:p>
                   </a:txBody>
-                  <a:tcPr marL="109728" marR="73152" marT="27432" marB="27432" anchor="ctr">
+                  <a:tcPr marL="128016" marR="73152" marT="18288" marB="18288" anchor="ctr">
                     <a:solidFill>
                       <a:srgbClr val="111714"/>
                     </a:solidFill>
@@ -12931,14 +16153,14 @@
                       </a:r>
                     </a:p>
                   </a:txBody>
-                  <a:tcPr marL="109728" marR="73152" marT="27432" marB="27432" anchor="ctr">
+                  <a:tcPr marL="128016" marR="73152" marT="18288" marB="18288" anchor="ctr">
                     <a:solidFill>
                       <a:srgbClr val="111714"/>
                     </a:solidFill>
                   </a:tcPr>
                 </a:tc>
               </a:tr>
-              <a:tr h="566928">
+              <a:tr h="548640">
                 <a:tc>
                   <a:txBody>
                     <a:bodyPr/>
@@ -12956,7 +16178,7 @@
                       </a:r>
                     </a:p>
                   </a:txBody>
-                  <a:tcPr marL="109728" marR="73152" marT="27432" marB="27432" anchor="ctr">
+                  <a:tcPr marL="128016" marR="73152" marT="18288" marB="18288" anchor="ctr">
                     <a:solidFill>
                       <a:srgbClr val="161D1A"/>
                     </a:solidFill>
@@ -12979,7 +16201,7 @@
                       </a:r>
                     </a:p>
                   </a:txBody>
-                  <a:tcPr marL="109728" marR="73152" marT="27432" marB="27432" anchor="ctr">
+                  <a:tcPr marL="128016" marR="73152" marT="18288" marB="18288" anchor="ctr">
                     <a:solidFill>
                       <a:srgbClr val="161D1A"/>
                     </a:solidFill>
@@ -13002,7 +16224,7 @@
                       </a:r>
                     </a:p>
                   </a:txBody>
-                  <a:tcPr marL="109728" marR="73152" marT="27432" marB="27432" anchor="ctr">
+                  <a:tcPr marL="128016" marR="73152" marT="18288" marB="18288" anchor="ctr">
                     <a:solidFill>
                       <a:srgbClr val="161D1A"/>
                     </a:solidFill>
@@ -13025,14 +16247,14 @@
                       </a:r>
                     </a:p>
                   </a:txBody>
-                  <a:tcPr marL="109728" marR="73152" marT="27432" marB="27432" anchor="ctr">
+                  <a:tcPr marL="128016" marR="73152" marT="18288" marB="18288" anchor="ctr">
                     <a:solidFill>
                       <a:srgbClr val="161D1A"/>
                     </a:solidFill>
                   </a:tcPr>
                 </a:tc>
               </a:tr>
-              <a:tr h="566928">
+              <a:tr h="548640">
                 <a:tc>
                   <a:txBody>
                     <a:bodyPr/>
@@ -13050,7 +16272,7 @@
                       </a:r>
                     </a:p>
                   </a:txBody>
-                  <a:tcPr marL="109728" marR="73152" marT="27432" marB="27432" anchor="ctr">
+                  <a:tcPr marL="128016" marR="73152" marT="18288" marB="18288" anchor="ctr">
                     <a:solidFill>
                       <a:srgbClr val="111714"/>
                     </a:solidFill>
@@ -13073,7 +16295,7 @@
                       </a:r>
                     </a:p>
                   </a:txBody>
-                  <a:tcPr marL="109728" marR="73152" marT="27432" marB="27432" anchor="ctr">
+                  <a:tcPr marL="128016" marR="73152" marT="18288" marB="18288" anchor="ctr">
                     <a:solidFill>
                       <a:srgbClr val="111714"/>
                     </a:solidFill>
@@ -13096,7 +16318,7 @@
                       </a:r>
                     </a:p>
                   </a:txBody>
-                  <a:tcPr marL="109728" marR="73152" marT="27432" marB="27432" anchor="ctr">
+                  <a:tcPr marL="128016" marR="73152" marT="18288" marB="18288" anchor="ctr">
                     <a:solidFill>
                       <a:srgbClr val="111714"/>
                     </a:solidFill>
@@ -13119,7 +16341,7 @@
                       </a:r>
                     </a:p>
                   </a:txBody>
-                  <a:tcPr marL="109728" marR="73152" marT="27432" marB="27432" anchor="ctr">
+                  <a:tcPr marL="128016" marR="73152" marT="18288" marB="18288" anchor="ctr">
                     <a:solidFill>
                       <a:srgbClr val="111714"/>
                     </a:solidFill>
@@ -13132,13 +16354,13 @@
       </p:graphicFrame>
       <p:sp>
         <p:nvSpPr>
-          <p:cNvPr id="9" name="TextBox 8"/>
+          <p:cNvPr id="13" name="TextBox 12"/>
           <p:cNvSpPr txBox="1"/>
           <p:nvPr/>
         </p:nvSpPr>
         <p:spPr>
           <a:xfrm>
-            <a:off x="822960" y="5486400"/>
+            <a:off x="822960" y="5550408"/>
             <a:ext cx="10515600" cy="548640"/>
           </a:xfrm>
           <a:prstGeom prst="rect">
@@ -13179,7 +16401,7 @@
                 </a:solidFill>
                 <a:latin typeface="Segoe UI"/>
               </a:rPr>
-              <a:t>Total models 9.1 MB + ONNX Runtime ≈ 12.6 MB add to the Datalake APK, inside the 20 MB brief budget.</a:t>
+              <a:t>Models 9.1 MB + ONNX Runtime ≈ 12.6 MB added to the Datalake APK, inside the 20 MB brief budget.</a:t>
             </a:r>
           </a:p>
         </p:txBody>
@@ -13256,13 +16478,101 @@
       </p:sp>
       <p:sp>
         <p:nvSpPr>
-          <p:cNvPr id="3" name="TextBox 2"/>
+          <p:cNvPr id="3" name="Rectangle 2"/>
+          <p:cNvSpPr/>
+          <p:nvPr/>
+        </p:nvSpPr>
+        <p:spPr>
+          <a:xfrm>
+            <a:off x="822960" y="6291072"/>
+            <a:ext cx="10515600" cy="10972"/>
+          </a:xfrm>
+          <a:prstGeom prst="rect">
+            <a:avLst/>
+          </a:prstGeom>
+          <a:solidFill>
+            <a:srgbClr val="22302B"/>
+          </a:solidFill>
+          <a:ln>
+            <a:noFill/>
+          </a:ln>
+          <a:effectLst/>
+        </p:spPr>
+        <p:style>
+          <a:lnRef idx="1">
+            <a:schemeClr val="accent1"/>
+          </a:lnRef>
+          <a:fillRef idx="3">
+            <a:schemeClr val="accent1"/>
+          </a:fillRef>
+          <a:effectRef idx="2">
+            <a:schemeClr val="accent1"/>
+          </a:effectRef>
+          <a:fontRef idx="minor">
+            <a:schemeClr val="lt1"/>
+          </a:fontRef>
+        </p:style>
+        <p:txBody>
+          <a:bodyPr rtlCol="0" anchor="ctr"/>
+          <a:lstStyle/>
+          <a:p>
+            <a:pPr algn="ctr"/>
+          </a:p>
+        </p:txBody>
+      </p:sp>
+      <p:sp>
+        <p:nvSpPr>
+          <p:cNvPr id="4" name="Rectangle 3"/>
+          <p:cNvSpPr/>
+          <p:nvPr/>
+        </p:nvSpPr>
+        <p:spPr>
+          <a:xfrm>
+            <a:off x="822960" y="6391656"/>
+            <a:ext cx="73152" cy="155448"/>
+          </a:xfrm>
+          <a:prstGeom prst="rect">
+            <a:avLst/>
+          </a:prstGeom>
+          <a:solidFill>
+            <a:srgbClr val="00E676"/>
+          </a:solidFill>
+          <a:ln>
+            <a:noFill/>
+          </a:ln>
+          <a:effectLst/>
+        </p:spPr>
+        <p:style>
+          <a:lnRef idx="1">
+            <a:schemeClr val="accent1"/>
+          </a:lnRef>
+          <a:fillRef idx="3">
+            <a:schemeClr val="accent1"/>
+          </a:fillRef>
+          <a:effectRef idx="2">
+            <a:schemeClr val="accent1"/>
+          </a:effectRef>
+          <a:fontRef idx="minor">
+            <a:schemeClr val="lt1"/>
+          </a:fontRef>
+        </p:style>
+        <p:txBody>
+          <a:bodyPr rtlCol="0" anchor="ctr"/>
+          <a:lstStyle/>
+          <a:p>
+            <a:pPr algn="ctr"/>
+          </a:p>
+        </p:txBody>
+      </p:sp>
+      <p:sp>
+        <p:nvSpPr>
+          <p:cNvPr id="5" name="TextBox 4"/>
           <p:cNvSpPr txBox="1"/>
           <p:nvPr/>
         </p:nvSpPr>
         <p:spPr>
           <a:xfrm>
-            <a:off x="822960" y="6355080"/>
+            <a:off x="1005840" y="6364224"/>
             <a:ext cx="7315200" cy="365760"/>
           </a:xfrm>
           <a:prstGeom prst="rect">
@@ -13310,14 +16620,14 @@
       </p:sp>
       <p:sp>
         <p:nvSpPr>
-          <p:cNvPr id="4" name="TextBox 3"/>
+          <p:cNvPr id="6" name="TextBox 5"/>
           <p:cNvSpPr txBox="1"/>
           <p:nvPr/>
         </p:nvSpPr>
         <p:spPr>
           <a:xfrm>
-            <a:off x="10637215" y="6355080"/>
-            <a:ext cx="822960" cy="365760"/>
+            <a:off x="10454335" y="6364224"/>
+            <a:ext cx="1005840" cy="365760"/>
           </a:xfrm>
           <a:prstGeom prst="rect">
             <a:avLst/>
@@ -13355,14 +16665,58 @@
       </p:sp>
       <p:sp>
         <p:nvSpPr>
-          <p:cNvPr id="5" name="TextBox 4"/>
+          <p:cNvPr id="7" name="Rectangle 6"/>
+          <p:cNvSpPr/>
+          <p:nvPr/>
+        </p:nvSpPr>
+        <p:spPr>
+          <a:xfrm>
+            <a:off x="822960" y="576072"/>
+            <a:ext cx="64008" cy="182880"/>
+          </a:xfrm>
+          <a:prstGeom prst="rect">
+            <a:avLst/>
+          </a:prstGeom>
+          <a:solidFill>
+            <a:srgbClr val="00E676"/>
+          </a:solidFill>
+          <a:ln>
+            <a:noFill/>
+          </a:ln>
+          <a:effectLst/>
+        </p:spPr>
+        <p:style>
+          <a:lnRef idx="1">
+            <a:schemeClr val="accent1"/>
+          </a:lnRef>
+          <a:fillRef idx="3">
+            <a:schemeClr val="accent1"/>
+          </a:fillRef>
+          <a:effectRef idx="2">
+            <a:schemeClr val="accent1"/>
+          </a:effectRef>
+          <a:fontRef idx="minor">
+            <a:schemeClr val="lt1"/>
+          </a:fontRef>
+        </p:style>
+        <p:txBody>
+          <a:bodyPr rtlCol="0" anchor="ctr"/>
+          <a:lstStyle/>
+          <a:p>
+            <a:pPr algn="ctr"/>
+          </a:p>
+        </p:txBody>
+      </p:sp>
+      <p:sp>
+        <p:nvSpPr>
+          <p:cNvPr id="8" name="TextBox 7"/>
           <p:cNvSpPr txBox="1"/>
           <p:nvPr/>
         </p:nvSpPr>
         <p:spPr>
           <a:xfrm>
-            <a:off x="822960" y="566928"/>
-            <a:ext cx="10515600" cy="274320"/>
+            <a:off x="1024128" y="548640"/>
+            <a:ext cx="10332720" cy="274320"/>
           </a:xfrm>
           <a:prstGeom prst="rect">
             <a:avLst/>
@@ -13400,13 +16754,13 @@
       </p:sp>
       <p:sp>
         <p:nvSpPr>
-          <p:cNvPr id="6" name="TextBox 5"/>
+          <p:cNvPr id="9" name="TextBox 8"/>
           <p:cNvSpPr txBox="1"/>
           <p:nvPr/>
         </p:nvSpPr>
         <p:spPr>
           <a:xfrm>
-            <a:off x="822960" y="950976"/>
+            <a:off x="804672" y="950976"/>
             <a:ext cx="10607040" cy="914400"/>
           </a:xfrm>
           <a:prstGeom prst="rect">
@@ -13445,14 +16799,14 @@
       </p:sp>
       <p:sp>
         <p:nvSpPr>
-          <p:cNvPr id="7" name="Rectangle 6"/>
+          <p:cNvPr id="10" name="Rectangle 9"/>
           <p:cNvSpPr/>
           <p:nvPr/>
         </p:nvSpPr>
         <p:spPr>
           <a:xfrm>
-            <a:off x="841248" y="1664208"/>
-            <a:ext cx="640080" cy="41148"/>
+            <a:off x="841248" y="1627632"/>
+            <a:ext cx="603504" cy="45720"/>
           </a:xfrm>
           <a:prstGeom prst="rect">
             <a:avLst/>
@@ -13489,14 +16843,58 @@
       </p:sp>
       <p:sp>
         <p:nvSpPr>
-          <p:cNvPr id="8" name="Rounded Rectangle 7"/>
+          <p:cNvPr id="11" name="Rectangle 10"/>
           <p:cNvSpPr/>
           <p:nvPr/>
         </p:nvSpPr>
         <p:spPr>
           <a:xfrm>
-            <a:off x="822960" y="1874519"/>
-            <a:ext cx="5166360" cy="3383280"/>
+            <a:off x="822960" y="1664208"/>
+            <a:ext cx="10515600" cy="10972"/>
+          </a:xfrm>
+          <a:prstGeom prst="rect">
+            <a:avLst/>
+          </a:prstGeom>
+          <a:solidFill>
+            <a:srgbClr val="22302B"/>
+          </a:solidFill>
+          <a:ln>
+            <a:noFill/>
+          </a:ln>
+          <a:effectLst/>
+        </p:spPr>
+        <p:style>
+          <a:lnRef idx="1">
+            <a:schemeClr val="accent1"/>
+          </a:lnRef>
+          <a:fillRef idx="3">
+            <a:schemeClr val="accent1"/>
+          </a:fillRef>
+          <a:effectRef idx="2">
+            <a:schemeClr val="accent1"/>
+          </a:effectRef>
+          <a:fontRef idx="minor">
+            <a:schemeClr val="lt1"/>
+          </a:fontRef>
+        </p:style>
+        <p:txBody>
+          <a:bodyPr rtlCol="0" anchor="ctr"/>
+          <a:lstStyle/>
+          <a:p>
+            <a:pPr algn="ctr"/>
+          </a:p>
+        </p:txBody>
+      </p:sp>
+      <p:sp>
+        <p:nvSpPr>
+          <p:cNvPr id="12" name="Rounded Rectangle 11"/>
+          <p:cNvSpPr/>
+          <p:nvPr/>
+        </p:nvSpPr>
+        <p:spPr>
+          <a:xfrm>
+            <a:off x="822960" y="1956816"/>
+            <a:ext cx="5166360" cy="3246120"/>
           </a:xfrm>
           <a:prstGeom prst="roundRect">
             <a:avLst/>
@@ -13535,14 +16933,58 @@
       </p:sp>
       <p:sp>
         <p:nvSpPr>
-          <p:cNvPr id="9" name="TextBox 8"/>
+          <p:cNvPr id="13" name="Rectangle 12"/>
+          <p:cNvSpPr/>
+          <p:nvPr/>
+        </p:nvSpPr>
+        <p:spPr>
+          <a:xfrm>
+            <a:off x="1024128" y="2176272"/>
+            <a:ext cx="292608" cy="64008"/>
+          </a:xfrm>
+          <a:prstGeom prst="rect">
+            <a:avLst/>
+          </a:prstGeom>
+          <a:solidFill>
+            <a:srgbClr val="4FC3F7"/>
+          </a:solidFill>
+          <a:ln>
+            <a:noFill/>
+          </a:ln>
+          <a:effectLst/>
+        </p:spPr>
+        <p:style>
+          <a:lnRef idx="1">
+            <a:schemeClr val="accent1"/>
+          </a:lnRef>
+          <a:fillRef idx="3">
+            <a:schemeClr val="accent1"/>
+          </a:fillRef>
+          <a:effectRef idx="2">
+            <a:schemeClr val="accent1"/>
+          </a:effectRef>
+          <a:fontRef idx="minor">
+            <a:schemeClr val="lt1"/>
+          </a:fontRef>
+        </p:style>
+        <p:txBody>
+          <a:bodyPr rtlCol="0" anchor="ctr"/>
+          <a:lstStyle/>
+          <a:p>
+            <a:pPr algn="ctr"/>
+          </a:p>
+        </p:txBody>
+      </p:sp>
+      <p:sp>
+        <p:nvSpPr>
+          <p:cNvPr id="14" name="TextBox 13"/>
           <p:cNvSpPr txBox="1"/>
           <p:nvPr/>
         </p:nvSpPr>
         <p:spPr>
           <a:xfrm>
-            <a:off x="1051560" y="2103120"/>
-            <a:ext cx="4754880" cy="457200"/>
+            <a:off x="1024128" y="2322576"/>
+            <a:ext cx="4764024" cy="365760"/>
           </a:xfrm>
           <a:prstGeom prst="rect">
             <a:avLst/>
@@ -13567,7 +17009,7 @@
               </a:spcAft>
             </a:pPr>
             <a:r>
-              <a:rPr sz="1600" b="1">
+              <a:rPr sz="1400" b="1">
                 <a:solidFill>
                   <a:srgbClr val="4FC3F7"/>
                 </a:solidFill>
@@ -13580,13 +17022,13 @@
       </p:sp>
       <p:sp>
         <p:nvSpPr>
-          <p:cNvPr id="10" name="TextBox 9"/>
+          <p:cNvPr id="15" name="TextBox 14"/>
           <p:cNvSpPr txBox="1"/>
           <p:nvPr/>
         </p:nvSpPr>
         <p:spPr>
           <a:xfrm>
-            <a:off x="1051560" y="2697480"/>
+            <a:off x="1051560" y="2807208"/>
             <a:ext cx="4754880" cy="4572000"/>
           </a:xfrm>
           <a:prstGeom prst="rect">
@@ -13727,14 +17169,14 @@
       </p:sp>
       <p:sp>
         <p:nvSpPr>
-          <p:cNvPr id="11" name="Rounded Rectangle 10"/>
+          <p:cNvPr id="16" name="Rounded Rectangle 15"/>
           <p:cNvSpPr/>
           <p:nvPr/>
         </p:nvSpPr>
         <p:spPr>
           <a:xfrm>
-            <a:off x="6172200" y="1874519"/>
-            <a:ext cx="5166360" cy="3383280"/>
+            <a:off x="6172200" y="1956816"/>
+            <a:ext cx="5166360" cy="3246120"/>
           </a:xfrm>
           <a:prstGeom prst="roundRect">
             <a:avLst/>
@@ -13773,14 +17215,58 @@
       </p:sp>
       <p:sp>
         <p:nvSpPr>
-          <p:cNvPr id="12" name="TextBox 11"/>
+          <p:cNvPr id="17" name="Rectangle 16"/>
+          <p:cNvSpPr/>
+          <p:nvPr/>
+        </p:nvSpPr>
+        <p:spPr>
+          <a:xfrm>
+            <a:off x="6373368" y="2176272"/>
+            <a:ext cx="292608" cy="64008"/>
+          </a:xfrm>
+          <a:prstGeom prst="rect">
+            <a:avLst/>
+          </a:prstGeom>
+          <a:solidFill>
+            <a:srgbClr val="00E676"/>
+          </a:solidFill>
+          <a:ln>
+            <a:noFill/>
+          </a:ln>
+          <a:effectLst/>
+        </p:spPr>
+        <p:style>
+          <a:lnRef idx="1">
+            <a:schemeClr val="accent1"/>
+          </a:lnRef>
+          <a:fillRef idx="3">
+            <a:schemeClr val="accent1"/>
+          </a:fillRef>
+          <a:effectRef idx="2">
+            <a:schemeClr val="accent1"/>
+          </a:effectRef>
+          <a:fontRef idx="minor">
+            <a:schemeClr val="lt1"/>
+          </a:fontRef>
+        </p:style>
+        <p:txBody>
+          <a:bodyPr rtlCol="0" anchor="ctr"/>
+          <a:lstStyle/>
+          <a:p>
+            <a:pPr algn="ctr"/>
+          </a:p>
+        </p:txBody>
+      </p:sp>
+      <p:sp>
+        <p:nvSpPr>
+          <p:cNvPr id="18" name="TextBox 17"/>
           <p:cNvSpPr txBox="1"/>
           <p:nvPr/>
         </p:nvSpPr>
         <p:spPr>
           <a:xfrm>
-            <a:off x="6400800" y="2103120"/>
-            <a:ext cx="4754880" cy="457200"/>
+            <a:off x="6373368" y="2322576"/>
+            <a:ext cx="4764024" cy="365760"/>
           </a:xfrm>
           <a:prstGeom prst="rect">
             <a:avLst/>
@@ -13805,7 +17291,7 @@
               </a:spcAft>
             </a:pPr>
             <a:r>
-              <a:rPr sz="1600" b="1">
+              <a:rPr sz="1400" b="1">
                 <a:solidFill>
                   <a:srgbClr val="00E676"/>
                 </a:solidFill>
@@ -13818,13 +17304,13 @@
       </p:sp>
       <p:sp>
         <p:nvSpPr>
-          <p:cNvPr id="13" name="TextBox 12"/>
+          <p:cNvPr id="19" name="TextBox 18"/>
           <p:cNvSpPr txBox="1"/>
           <p:nvPr/>
         </p:nvSpPr>
         <p:spPr>
           <a:xfrm>
-            <a:off x="6400800" y="2697480"/>
+            <a:off x="6400800" y="2807208"/>
             <a:ext cx="4754880" cy="4572000"/>
           </a:xfrm>
           <a:prstGeom prst="rect">
@@ -13965,14 +17451,60 @@
       </p:sp>
       <p:sp>
         <p:nvSpPr>
-          <p:cNvPr id="14" name="TextBox 13"/>
+          <p:cNvPr id="20" name="Rounded Rectangle 19"/>
+          <p:cNvSpPr/>
+          <p:nvPr/>
+        </p:nvSpPr>
+        <p:spPr>
+          <a:xfrm>
+            <a:off x="822960" y="5458968"/>
+            <a:ext cx="10515600" cy="566928"/>
+          </a:xfrm>
+          <a:prstGeom prst="roundRect">
+            <a:avLst/>
+          </a:prstGeom>
+          <a:solidFill>
+            <a:srgbClr val="161D1A"/>
+          </a:solidFill>
+          <a:ln w="15875">
+            <a:solidFill>
+              <a:srgbClr val="2F423B"/>
+            </a:solidFill>
+          </a:ln>
+          <a:effectLst/>
+        </p:spPr>
+        <p:style>
+          <a:lnRef idx="1">
+            <a:schemeClr val="accent1"/>
+          </a:lnRef>
+          <a:fillRef idx="3">
+            <a:schemeClr val="accent1"/>
+          </a:fillRef>
+          <a:effectRef idx="2">
+            <a:schemeClr val="accent1"/>
+          </a:effectRef>
+          <a:fontRef idx="minor">
+            <a:schemeClr val="lt1"/>
+          </a:fontRef>
+        </p:style>
+        <p:txBody>
+          <a:bodyPr rtlCol="0" anchor="ctr"/>
+          <a:lstStyle/>
+          <a:p>
+            <a:pPr algn="ctr"/>
+          </a:p>
+        </p:txBody>
+      </p:sp>
+      <p:sp>
+        <p:nvSpPr>
+          <p:cNvPr id="21" name="TextBox 20"/>
           <p:cNvSpPr txBox="1"/>
           <p:nvPr/>
         </p:nvSpPr>
         <p:spPr>
           <a:xfrm>
-            <a:off x="822960" y="5440680"/>
-            <a:ext cx="10515600" cy="457200"/>
+            <a:off x="1097280" y="5458968"/>
+            <a:ext cx="10058400" cy="566928"/>
           </a:xfrm>
           <a:prstGeom prst="rect">
             <a:avLst/>
@@ -13980,7 +17512,7 @@
           <a:noFill/>
         </p:spPr>
         <p:txBody>
-          <a:bodyPr wrap="square" anchor="t" lIns="0" rIns="0" tIns="0" bIns="0">
+          <a:bodyPr wrap="square" anchor="ctr" lIns="0" rIns="0" tIns="0" bIns="0">
             <a:spAutoFit/>
           </a:bodyPr>
           <a:lstStyle/>
@@ -14003,7 +17535,7 @@
                 </a:solidFill>
                 <a:latin typeface="Consolas"/>
               </a:rPr>
-              <a:t>GATE:  </a:t>
+              <a:t>GATE   </a:t>
             </a:r>
             <a:r>
               <a:rPr sz="1400" b="0">
@@ -14089,13 +17621,101 @@
       </p:sp>
       <p:sp>
         <p:nvSpPr>
-          <p:cNvPr id="3" name="TextBox 2"/>
+          <p:cNvPr id="3" name="Rectangle 2"/>
+          <p:cNvSpPr/>
+          <p:nvPr/>
+        </p:nvSpPr>
+        <p:spPr>
+          <a:xfrm>
+            <a:off x="822960" y="6291072"/>
+            <a:ext cx="10515600" cy="10972"/>
+          </a:xfrm>
+          <a:prstGeom prst="rect">
+            <a:avLst/>
+          </a:prstGeom>
+          <a:solidFill>
+            <a:srgbClr val="22302B"/>
+          </a:solidFill>
+          <a:ln>
+            <a:noFill/>
+          </a:ln>
+          <a:effectLst/>
+        </p:spPr>
+        <p:style>
+          <a:lnRef idx="1">
+            <a:schemeClr val="accent1"/>
+          </a:lnRef>
+          <a:fillRef idx="3">
+            <a:schemeClr val="accent1"/>
+          </a:fillRef>
+          <a:effectRef idx="2">
+            <a:schemeClr val="accent1"/>
+          </a:effectRef>
+          <a:fontRef idx="minor">
+            <a:schemeClr val="lt1"/>
+          </a:fontRef>
+        </p:style>
+        <p:txBody>
+          <a:bodyPr rtlCol="0" anchor="ctr"/>
+          <a:lstStyle/>
+          <a:p>
+            <a:pPr algn="ctr"/>
+          </a:p>
+        </p:txBody>
+      </p:sp>
+      <p:sp>
+        <p:nvSpPr>
+          <p:cNvPr id="4" name="Rectangle 3"/>
+          <p:cNvSpPr/>
+          <p:nvPr/>
+        </p:nvSpPr>
+        <p:spPr>
+          <a:xfrm>
+            <a:off x="822960" y="6391656"/>
+            <a:ext cx="73152" cy="155448"/>
+          </a:xfrm>
+          <a:prstGeom prst="rect">
+            <a:avLst/>
+          </a:prstGeom>
+          <a:solidFill>
+            <a:srgbClr val="00E676"/>
+          </a:solidFill>
+          <a:ln>
+            <a:noFill/>
+          </a:ln>
+          <a:effectLst/>
+        </p:spPr>
+        <p:style>
+          <a:lnRef idx="1">
+            <a:schemeClr val="accent1"/>
+          </a:lnRef>
+          <a:fillRef idx="3">
+            <a:schemeClr val="accent1"/>
+          </a:fillRef>
+          <a:effectRef idx="2">
+            <a:schemeClr val="accent1"/>
+          </a:effectRef>
+          <a:fontRef idx="minor">
+            <a:schemeClr val="lt1"/>
+          </a:fontRef>
+        </p:style>
+        <p:txBody>
+          <a:bodyPr rtlCol="0" anchor="ctr"/>
+          <a:lstStyle/>
+          <a:p>
+            <a:pPr algn="ctr"/>
+          </a:p>
+        </p:txBody>
+      </p:sp>
+      <p:sp>
+        <p:nvSpPr>
+          <p:cNvPr id="5" name="TextBox 4"/>
           <p:cNvSpPr txBox="1"/>
           <p:nvPr/>
         </p:nvSpPr>
         <p:spPr>
           <a:xfrm>
-            <a:off x="822960" y="6355080"/>
+            <a:off x="1005840" y="6364224"/>
             <a:ext cx="7315200" cy="365760"/>
           </a:xfrm>
           <a:prstGeom prst="rect">
@@ -14143,14 +17763,14 @@
       </p:sp>
       <p:sp>
         <p:nvSpPr>
-          <p:cNvPr id="4" name="TextBox 3"/>
+          <p:cNvPr id="6" name="TextBox 5"/>
           <p:cNvSpPr txBox="1"/>
           <p:nvPr/>
         </p:nvSpPr>
         <p:spPr>
           <a:xfrm>
-            <a:off x="10637215" y="6355080"/>
-            <a:ext cx="822960" cy="365760"/>
+            <a:off x="10454335" y="6364224"/>
+            <a:ext cx="1005840" cy="365760"/>
           </a:xfrm>
           <a:prstGeom prst="rect">
             <a:avLst/>
@@ -14188,14 +17808,58 @@
       </p:sp>
       <p:sp>
         <p:nvSpPr>
-          <p:cNvPr id="5" name="TextBox 4"/>
+          <p:cNvPr id="7" name="Rectangle 6"/>
+          <p:cNvSpPr/>
+          <p:nvPr/>
+        </p:nvSpPr>
+        <p:spPr>
+          <a:xfrm>
+            <a:off x="822960" y="576072"/>
+            <a:ext cx="64008" cy="182880"/>
+          </a:xfrm>
+          <a:prstGeom prst="rect">
+            <a:avLst/>
+          </a:prstGeom>
+          <a:solidFill>
+            <a:srgbClr val="00E676"/>
+          </a:solidFill>
+          <a:ln>
+            <a:noFill/>
+          </a:ln>
+          <a:effectLst/>
+        </p:spPr>
+        <p:style>
+          <a:lnRef idx="1">
+            <a:schemeClr val="accent1"/>
+          </a:lnRef>
+          <a:fillRef idx="3">
+            <a:schemeClr val="accent1"/>
+          </a:fillRef>
+          <a:effectRef idx="2">
+            <a:schemeClr val="accent1"/>
+          </a:effectRef>
+          <a:fontRef idx="minor">
+            <a:schemeClr val="lt1"/>
+          </a:fontRef>
+        </p:style>
+        <p:txBody>
+          <a:bodyPr rtlCol="0" anchor="ctr"/>
+          <a:lstStyle/>
+          <a:p>
+            <a:pPr algn="ctr"/>
+          </a:p>
+        </p:txBody>
+      </p:sp>
+      <p:sp>
+        <p:nvSpPr>
+          <p:cNvPr id="8" name="TextBox 7"/>
           <p:cNvSpPr txBox="1"/>
           <p:nvPr/>
         </p:nvSpPr>
         <p:spPr>
           <a:xfrm>
-            <a:off x="822960" y="566928"/>
-            <a:ext cx="10515600" cy="274320"/>
+            <a:off x="1024128" y="548640"/>
+            <a:ext cx="10332720" cy="274320"/>
           </a:xfrm>
           <a:prstGeom prst="rect">
             <a:avLst/>
@@ -14233,13 +17897,13 @@
       </p:sp>
       <p:sp>
         <p:nvSpPr>
-          <p:cNvPr id="6" name="TextBox 5"/>
+          <p:cNvPr id="9" name="TextBox 8"/>
           <p:cNvSpPr txBox="1"/>
           <p:nvPr/>
         </p:nvSpPr>
         <p:spPr>
           <a:xfrm>
-            <a:off x="822960" y="950976"/>
+            <a:off x="804672" y="950976"/>
             <a:ext cx="10607040" cy="914400"/>
           </a:xfrm>
           <a:prstGeom prst="rect">
@@ -14278,14 +17942,14 @@
       </p:sp>
       <p:sp>
         <p:nvSpPr>
-          <p:cNvPr id="7" name="Rectangle 6"/>
+          <p:cNvPr id="10" name="Rectangle 9"/>
           <p:cNvSpPr/>
           <p:nvPr/>
         </p:nvSpPr>
         <p:spPr>
           <a:xfrm>
-            <a:off x="841248" y="1664208"/>
-            <a:ext cx="640080" cy="41148"/>
+            <a:off x="841248" y="1627632"/>
+            <a:ext cx="603504" cy="45720"/>
           </a:xfrm>
           <a:prstGeom prst="rect">
             <a:avLst/>
@@ -14322,13 +17986,57 @@
       </p:sp>
       <p:sp>
         <p:nvSpPr>
-          <p:cNvPr id="8" name="TextBox 7"/>
+          <p:cNvPr id="11" name="Rectangle 10"/>
+          <p:cNvSpPr/>
+          <p:nvPr/>
+        </p:nvSpPr>
+        <p:spPr>
+          <a:xfrm>
+            <a:off x="822960" y="1664208"/>
+            <a:ext cx="10515600" cy="10972"/>
+          </a:xfrm>
+          <a:prstGeom prst="rect">
+            <a:avLst/>
+          </a:prstGeom>
+          <a:solidFill>
+            <a:srgbClr val="22302B"/>
+          </a:solidFill>
+          <a:ln>
+            <a:noFill/>
+          </a:ln>
+          <a:effectLst/>
+        </p:spPr>
+        <p:style>
+          <a:lnRef idx="1">
+            <a:schemeClr val="accent1"/>
+          </a:lnRef>
+          <a:fillRef idx="3">
+            <a:schemeClr val="accent1"/>
+          </a:fillRef>
+          <a:effectRef idx="2">
+            <a:schemeClr val="accent1"/>
+          </a:effectRef>
+          <a:fontRef idx="minor">
+            <a:schemeClr val="lt1"/>
+          </a:fontRef>
+        </p:style>
+        <p:txBody>
+          <a:bodyPr rtlCol="0" anchor="ctr"/>
+          <a:lstStyle/>
+          <a:p>
+            <a:pPr algn="ctr"/>
+          </a:p>
+        </p:txBody>
+      </p:sp>
+      <p:sp>
+        <p:nvSpPr>
+          <p:cNvPr id="12" name="TextBox 11"/>
           <p:cNvSpPr txBox="1"/>
           <p:nvPr/>
         </p:nvSpPr>
         <p:spPr>
           <a:xfrm>
-            <a:off x="822960" y="1874519"/>
+            <a:off x="822960" y="1938528"/>
             <a:ext cx="10607040" cy="4572000"/>
           </a:xfrm>
           <a:prstGeom prst="rect">
@@ -14615,13 +18323,101 @@
       </p:sp>
       <p:sp>
         <p:nvSpPr>
-          <p:cNvPr id="3" name="TextBox 2"/>
+          <p:cNvPr id="3" name="Rectangle 2"/>
+          <p:cNvSpPr/>
+          <p:nvPr/>
+        </p:nvSpPr>
+        <p:spPr>
+          <a:xfrm>
+            <a:off x="822960" y="6291072"/>
+            <a:ext cx="10515600" cy="10972"/>
+          </a:xfrm>
+          <a:prstGeom prst="rect">
+            <a:avLst/>
+          </a:prstGeom>
+          <a:solidFill>
+            <a:srgbClr val="22302B"/>
+          </a:solidFill>
+          <a:ln>
+            <a:noFill/>
+          </a:ln>
+          <a:effectLst/>
+        </p:spPr>
+        <p:style>
+          <a:lnRef idx="1">
+            <a:schemeClr val="accent1"/>
+          </a:lnRef>
+          <a:fillRef idx="3">
+            <a:schemeClr val="accent1"/>
+          </a:fillRef>
+          <a:effectRef idx="2">
+            <a:schemeClr val="accent1"/>
+          </a:effectRef>
+          <a:fontRef idx="minor">
+            <a:schemeClr val="lt1"/>
+          </a:fontRef>
+        </p:style>
+        <p:txBody>
+          <a:bodyPr rtlCol="0" anchor="ctr"/>
+          <a:lstStyle/>
+          <a:p>
+            <a:pPr algn="ctr"/>
+          </a:p>
+        </p:txBody>
+      </p:sp>
+      <p:sp>
+        <p:nvSpPr>
+          <p:cNvPr id="4" name="Rectangle 3"/>
+          <p:cNvSpPr/>
+          <p:nvPr/>
+        </p:nvSpPr>
+        <p:spPr>
+          <a:xfrm>
+            <a:off x="822960" y="6391656"/>
+            <a:ext cx="73152" cy="155448"/>
+          </a:xfrm>
+          <a:prstGeom prst="rect">
+            <a:avLst/>
+          </a:prstGeom>
+          <a:solidFill>
+            <a:srgbClr val="00E676"/>
+          </a:solidFill>
+          <a:ln>
+            <a:noFill/>
+          </a:ln>
+          <a:effectLst/>
+        </p:spPr>
+        <p:style>
+          <a:lnRef idx="1">
+            <a:schemeClr val="accent1"/>
+          </a:lnRef>
+          <a:fillRef idx="3">
+            <a:schemeClr val="accent1"/>
+          </a:fillRef>
+          <a:effectRef idx="2">
+            <a:schemeClr val="accent1"/>
+          </a:effectRef>
+          <a:fontRef idx="minor">
+            <a:schemeClr val="lt1"/>
+          </a:fontRef>
+        </p:style>
+        <p:txBody>
+          <a:bodyPr rtlCol="0" anchor="ctr"/>
+          <a:lstStyle/>
+          <a:p>
+            <a:pPr algn="ctr"/>
+          </a:p>
+        </p:txBody>
+      </p:sp>
+      <p:sp>
+        <p:nvSpPr>
+          <p:cNvPr id="5" name="TextBox 4"/>
           <p:cNvSpPr txBox="1"/>
           <p:nvPr/>
         </p:nvSpPr>
         <p:spPr>
           <a:xfrm>
-            <a:off x="822960" y="6355080"/>
+            <a:off x="1005840" y="6364224"/>
             <a:ext cx="7315200" cy="365760"/>
           </a:xfrm>
           <a:prstGeom prst="rect">
@@ -14669,14 +18465,14 @@
       </p:sp>
       <p:sp>
         <p:nvSpPr>
-          <p:cNvPr id="4" name="TextBox 3"/>
+          <p:cNvPr id="6" name="TextBox 5"/>
           <p:cNvSpPr txBox="1"/>
           <p:nvPr/>
         </p:nvSpPr>
         <p:spPr>
           <a:xfrm>
-            <a:off x="10637215" y="6355080"/>
-            <a:ext cx="822960" cy="365760"/>
+            <a:off x="10454335" y="6364224"/>
+            <a:ext cx="1005840" cy="365760"/>
           </a:xfrm>
           <a:prstGeom prst="rect">
             <a:avLst/>
@@ -14714,14 +18510,58 @@
       </p:sp>
       <p:sp>
         <p:nvSpPr>
-          <p:cNvPr id="5" name="TextBox 4"/>
+          <p:cNvPr id="7" name="Rectangle 6"/>
+          <p:cNvSpPr/>
+          <p:nvPr/>
+        </p:nvSpPr>
+        <p:spPr>
+          <a:xfrm>
+            <a:off x="822960" y="576072"/>
+            <a:ext cx="64008" cy="182880"/>
+          </a:xfrm>
+          <a:prstGeom prst="rect">
+            <a:avLst/>
+          </a:prstGeom>
+          <a:solidFill>
+            <a:srgbClr val="00E676"/>
+          </a:solidFill>
+          <a:ln>
+            <a:noFill/>
+          </a:ln>
+          <a:effectLst/>
+        </p:spPr>
+        <p:style>
+          <a:lnRef idx="1">
+            <a:schemeClr val="accent1"/>
+          </a:lnRef>
+          <a:fillRef idx="3">
+            <a:schemeClr val="accent1"/>
+          </a:fillRef>
+          <a:effectRef idx="2">
+            <a:schemeClr val="accent1"/>
+          </a:effectRef>
+          <a:fontRef idx="minor">
+            <a:schemeClr val="lt1"/>
+          </a:fontRef>
+        </p:style>
+        <p:txBody>
+          <a:bodyPr rtlCol="0" anchor="ctr"/>
+          <a:lstStyle/>
+          <a:p>
+            <a:pPr algn="ctr"/>
+          </a:p>
+        </p:txBody>
+      </p:sp>
+      <p:sp>
+        <p:nvSpPr>
+          <p:cNvPr id="8" name="TextBox 7"/>
           <p:cNvSpPr txBox="1"/>
           <p:nvPr/>
         </p:nvSpPr>
         <p:spPr>
           <a:xfrm>
-            <a:off x="822960" y="566928"/>
-            <a:ext cx="10515600" cy="274320"/>
+            <a:off x="1024128" y="548640"/>
+            <a:ext cx="10332720" cy="274320"/>
           </a:xfrm>
           <a:prstGeom prst="rect">
             <a:avLst/>
@@ -14759,13 +18599,13 @@
       </p:sp>
       <p:sp>
         <p:nvSpPr>
-          <p:cNvPr id="6" name="TextBox 5"/>
+          <p:cNvPr id="9" name="TextBox 8"/>
           <p:cNvSpPr txBox="1"/>
           <p:nvPr/>
         </p:nvSpPr>
         <p:spPr>
           <a:xfrm>
-            <a:off x="822960" y="950976"/>
+            <a:off x="804672" y="950976"/>
             <a:ext cx="10607040" cy="914400"/>
           </a:xfrm>
           <a:prstGeom prst="rect">
@@ -14804,14 +18644,14 @@
       </p:sp>
       <p:sp>
         <p:nvSpPr>
-          <p:cNvPr id="7" name="Rectangle 6"/>
+          <p:cNvPr id="10" name="Rectangle 9"/>
           <p:cNvSpPr/>
           <p:nvPr/>
         </p:nvSpPr>
         <p:spPr>
           <a:xfrm>
-            <a:off x="841248" y="1664208"/>
-            <a:ext cx="640080" cy="41148"/>
+            <a:off x="841248" y="1627632"/>
+            <a:ext cx="603504" cy="45720"/>
           </a:xfrm>
           <a:prstGeom prst="rect">
             <a:avLst/>
@@ -14848,14 +18688,58 @@
       </p:sp>
       <p:sp>
         <p:nvSpPr>
-          <p:cNvPr id="8" name="Rounded Rectangle 7"/>
+          <p:cNvPr id="11" name="Rectangle 10"/>
           <p:cNvSpPr/>
           <p:nvPr/>
         </p:nvSpPr>
         <p:spPr>
           <a:xfrm>
-            <a:off x="822960" y="1874519"/>
-            <a:ext cx="5166360" cy="3200400"/>
+            <a:off x="822960" y="1664208"/>
+            <a:ext cx="10515600" cy="10972"/>
+          </a:xfrm>
+          <a:prstGeom prst="rect">
+            <a:avLst/>
+          </a:prstGeom>
+          <a:solidFill>
+            <a:srgbClr val="22302B"/>
+          </a:solidFill>
+          <a:ln>
+            <a:noFill/>
+          </a:ln>
+          <a:effectLst/>
+        </p:spPr>
+        <p:style>
+          <a:lnRef idx="1">
+            <a:schemeClr val="accent1"/>
+          </a:lnRef>
+          <a:fillRef idx="3">
+            <a:schemeClr val="accent1"/>
+          </a:fillRef>
+          <a:effectRef idx="2">
+            <a:schemeClr val="accent1"/>
+          </a:effectRef>
+          <a:fontRef idx="minor">
+            <a:schemeClr val="lt1"/>
+          </a:fontRef>
+        </p:style>
+        <p:txBody>
+          <a:bodyPr rtlCol="0" anchor="ctr"/>
+          <a:lstStyle/>
+          <a:p>
+            <a:pPr algn="ctr"/>
+          </a:p>
+        </p:txBody>
+      </p:sp>
+      <p:sp>
+        <p:nvSpPr>
+          <p:cNvPr id="12" name="Rounded Rectangle 11"/>
+          <p:cNvSpPr/>
+          <p:nvPr/>
+        </p:nvSpPr>
+        <p:spPr>
+          <a:xfrm>
+            <a:off x="822960" y="1956816"/>
+            <a:ext cx="5166360" cy="3154680"/>
           </a:xfrm>
           <a:prstGeom prst="roundRect">
             <a:avLst/>
@@ -14894,14 +18778,58 @@
       </p:sp>
       <p:sp>
         <p:nvSpPr>
-          <p:cNvPr id="9" name="TextBox 8"/>
+          <p:cNvPr id="13" name="Rectangle 12"/>
+          <p:cNvSpPr/>
+          <p:nvPr/>
+        </p:nvSpPr>
+        <p:spPr>
+          <a:xfrm>
+            <a:off x="1024128" y="2176272"/>
+            <a:ext cx="292608" cy="64008"/>
+          </a:xfrm>
+          <a:prstGeom prst="rect">
+            <a:avLst/>
+          </a:prstGeom>
+          <a:solidFill>
+            <a:srgbClr val="00E676"/>
+          </a:solidFill>
+          <a:ln>
+            <a:noFill/>
+          </a:ln>
+          <a:effectLst/>
+        </p:spPr>
+        <p:style>
+          <a:lnRef idx="1">
+            <a:schemeClr val="accent1"/>
+          </a:lnRef>
+          <a:fillRef idx="3">
+            <a:schemeClr val="accent1"/>
+          </a:fillRef>
+          <a:effectRef idx="2">
+            <a:schemeClr val="accent1"/>
+          </a:effectRef>
+          <a:fontRef idx="minor">
+            <a:schemeClr val="lt1"/>
+          </a:fontRef>
+        </p:style>
+        <p:txBody>
+          <a:bodyPr rtlCol="0" anchor="ctr"/>
+          <a:lstStyle/>
+          <a:p>
+            <a:pPr algn="ctr"/>
+          </a:p>
+        </p:txBody>
+      </p:sp>
+      <p:sp>
+        <p:nvSpPr>
+          <p:cNvPr id="14" name="TextBox 13"/>
           <p:cNvSpPr txBox="1"/>
           <p:nvPr/>
         </p:nvSpPr>
         <p:spPr>
           <a:xfrm>
-            <a:off x="1051560" y="2075688"/>
-            <a:ext cx="4754880" cy="457200"/>
+            <a:off x="1024128" y="2322576"/>
+            <a:ext cx="4764024" cy="365760"/>
           </a:xfrm>
           <a:prstGeom prst="rect">
             <a:avLst/>
@@ -14926,7 +18854,7 @@
               </a:spcAft>
             </a:pPr>
             <a:r>
-              <a:rPr sz="1500" b="1">
+              <a:rPr sz="1400" b="1">
                 <a:solidFill>
                   <a:srgbClr val="00E676"/>
                 </a:solidFill>
@@ -14939,13 +18867,13 @@
       </p:sp>
       <p:sp>
         <p:nvSpPr>
-          <p:cNvPr id="10" name="TextBox 9"/>
+          <p:cNvPr id="15" name="TextBox 14"/>
           <p:cNvSpPr txBox="1"/>
           <p:nvPr/>
         </p:nvSpPr>
         <p:spPr>
           <a:xfrm>
-            <a:off x="1051560" y="2651760"/>
+            <a:off x="1051560" y="2761488"/>
             <a:ext cx="4754880" cy="4572000"/>
           </a:xfrm>
           <a:prstGeom prst="rect">
@@ -14986,7 +18914,7 @@
                 </a:solidFill>
                 <a:latin typeface="Segoe UI"/>
               </a:rPr>
-              <a:t>SQLite: face_embeddings (permanent, encrypted)</a:t>
+              <a:t>SQLite: face_embeddings (encrypted, permanent)</a:t>
             </a:r>
           </a:p>
           <a:p>
@@ -15048,21 +18976,21 @@
                 </a:solidFill>
                 <a:latin typeface="Segoe UI"/>
               </a:rPr>
-              <a:t>Enroll · authenticate · log, all offline</a:t>
-            </a:r>
-          </a:p>
-        </p:txBody>
-      </p:sp>
-      <p:sp>
-        <p:nvSpPr>
-          <p:cNvPr id="11" name="Rounded Rectangle 10"/>
+              <a:t>Enrol · authenticate · log, all offline</a:t>
+            </a:r>
+          </a:p>
+        </p:txBody>
+      </p:sp>
+      <p:sp>
+        <p:nvSpPr>
+          <p:cNvPr id="16" name="Rounded Rectangle 15"/>
           <p:cNvSpPr/>
           <p:nvPr/>
         </p:nvSpPr>
         <p:spPr>
           <a:xfrm>
-            <a:off x="6172200" y="1874519"/>
-            <a:ext cx="5166360" cy="3200400"/>
+            <a:off x="6172200" y="1956816"/>
+            <a:ext cx="5166360" cy="3154680"/>
           </a:xfrm>
           <a:prstGeom prst="roundRect">
             <a:avLst/>
@@ -15101,14 +19029,58 @@
       </p:sp>
       <p:sp>
         <p:nvSpPr>
-          <p:cNvPr id="12" name="TextBox 11"/>
+          <p:cNvPr id="17" name="Rectangle 16"/>
+          <p:cNvSpPr/>
+          <p:nvPr/>
+        </p:nvSpPr>
+        <p:spPr>
+          <a:xfrm>
+            <a:off x="6373368" y="2176272"/>
+            <a:ext cx="292608" cy="64008"/>
+          </a:xfrm>
+          <a:prstGeom prst="rect">
+            <a:avLst/>
+          </a:prstGeom>
+          <a:solidFill>
+            <a:srgbClr val="FFB300"/>
+          </a:solidFill>
+          <a:ln>
+            <a:noFill/>
+          </a:ln>
+          <a:effectLst/>
+        </p:spPr>
+        <p:style>
+          <a:lnRef idx="1">
+            <a:schemeClr val="accent1"/>
+          </a:lnRef>
+          <a:fillRef idx="3">
+            <a:schemeClr val="accent1"/>
+          </a:fillRef>
+          <a:effectRef idx="2">
+            <a:schemeClr val="accent1"/>
+          </a:effectRef>
+          <a:fontRef idx="minor">
+            <a:schemeClr val="lt1"/>
+          </a:fontRef>
+        </p:style>
+        <p:txBody>
+          <a:bodyPr rtlCol="0" anchor="ctr"/>
+          <a:lstStyle/>
+          <a:p>
+            <a:pPr algn="ctr"/>
+          </a:p>
+        </p:txBody>
+      </p:sp>
+      <p:sp>
+        <p:nvSpPr>
+          <p:cNvPr id="18" name="TextBox 17"/>
           <p:cNvSpPr txBox="1"/>
           <p:nvPr/>
         </p:nvSpPr>
         <p:spPr>
           <a:xfrm>
-            <a:off x="6400800" y="2075688"/>
-            <a:ext cx="4754880" cy="457200"/>
+            <a:off x="6373368" y="2322576"/>
+            <a:ext cx="4764024" cy="365760"/>
           </a:xfrm>
           <a:prstGeom prst="rect">
             <a:avLst/>
@@ -15133,7 +19105,7 @@
               </a:spcAft>
             </a:pPr>
             <a:r>
-              <a:rPr sz="1500" b="1">
+              <a:rPr sz="1400" b="1">
                 <a:solidFill>
                   <a:srgbClr val="FFB300"/>
                 </a:solidFill>
@@ -15146,13 +19118,13 @@
       </p:sp>
       <p:sp>
         <p:nvSpPr>
-          <p:cNvPr id="13" name="TextBox 12"/>
+          <p:cNvPr id="19" name="TextBox 18"/>
           <p:cNvSpPr txBox="1"/>
           <p:nvPr/>
         </p:nvSpPr>
         <p:spPr>
           <a:xfrm>
-            <a:off x="6400800" y="2651760"/>
+            <a:off x="6400800" y="2761488"/>
             <a:ext cx="4754880" cy="4572000"/>
           </a:xfrm>
           <a:prstGeom prst="rect">
@@ -15293,13 +19265,13 @@
       </p:sp>
       <p:sp>
         <p:nvSpPr>
-          <p:cNvPr id="14" name="TextBox 13"/>
+          <p:cNvPr id="20" name="TextBox 19"/>
           <p:cNvSpPr txBox="1"/>
           <p:nvPr/>
         </p:nvSpPr>
         <p:spPr>
           <a:xfrm>
-            <a:off x="822960" y="5257800"/>
+            <a:off x="822960" y="5303520"/>
             <a:ext cx="10515600" cy="365760"/>
           </a:xfrm>
           <a:prstGeom prst="rect">

--- a/submission/OfflineID_Hackathon7.pptx
+++ b/submission/OfflineID_Hackathon7.pptx
@@ -5,24 +5,25 @@
     <p:sldMasterId id="2147483648" r:id="rId1"/>
   </p:sldMasterIdLst>
   <p:sldIdLst>
-    <p:sldId id="256" r:id="rId7"/>
-    <p:sldId id="257" r:id="rId8"/>
-    <p:sldId id="258" r:id="rId9"/>
-    <p:sldId id="259" r:id="rId10"/>
-    <p:sldId id="260" r:id="rId11"/>
-    <p:sldId id="261" r:id="rId12"/>
-    <p:sldId id="262" r:id="rId13"/>
-    <p:sldId id="263" r:id="rId14"/>
-    <p:sldId id="264" r:id="rId15"/>
-    <p:sldId id="265" r:id="rId16"/>
-    <p:sldId id="266" r:id="rId17"/>
-    <p:sldId id="267" r:id="rId18"/>
-    <p:sldId id="268" r:id="rId19"/>
-    <p:sldId id="269" r:id="rId20"/>
-    <p:sldId id="270" r:id="rId21"/>
-    <p:sldId id="271" r:id="rId22"/>
+    <p:sldId id="256" r:id="rId2"/>
+    <p:sldId id="257" r:id="rId3"/>
+    <p:sldId id="258" r:id="rId4"/>
+    <p:sldId id="259" r:id="rId5"/>
+    <p:sldId id="260" r:id="rId6"/>
+    <p:sldId id="261" r:id="rId7"/>
+    <p:sldId id="262" r:id="rId8"/>
+    <p:sldId id="263" r:id="rId9"/>
+    <p:sldId id="264" r:id="rId10"/>
+    <p:sldId id="265" r:id="rId11"/>
+    <p:sldId id="266" r:id="rId12"/>
+    <p:sldId id="267" r:id="rId13"/>
+    <p:sldId id="268" r:id="rId14"/>
+    <p:sldId id="269" r:id="rId15"/>
+    <p:sldId id="270" r:id="rId16"/>
+    <p:sldId id="271" r:id="rId17"/>
+    <p:sldId id="272" r:id="rId18"/>
   </p:sldIdLst>
-  <p:sldSz cx="12191695" cy="6858000" type="screen4x3"/>
+  <p:sldSz cx="12192000" cy="6858000"/>
   <p:notesSz cx="6858000" cy="9144000"/>
   <p:defaultTextStyle>
     <a:defPPr>
@@ -119,6 +120,22 @@
       </a:defRPr>
     </a:lvl9pPr>
   </p:defaultTextStyle>
+  <p:extLst>
+    <p:ext uri="{EFAFB233-063F-42B5-8137-9DF3F51BA10A}">
+      <p15:sldGuideLst xmlns:p15="http://schemas.microsoft.com/office/powerpoint/2012/main">
+        <p15:guide id="1" orient="horz" pos="2160">
+          <p15:clr>
+            <a:srgbClr val="A4A3A4"/>
+          </p15:clr>
+        </p15:guide>
+        <p15:guide id="2" pos="2880">
+          <p15:clr>
+            <a:srgbClr val="A4A3A4"/>
+          </p15:clr>
+        </p15:guide>
+      </p15:sldGuideLst>
+    </p:ext>
+  </p:extLst>
 </p:presentation>
 </file>
 
@@ -160,10 +177,9 @@
           <a:lstStyle/>
           <a:p>
             <a:r>
-              <a:rPr lang="en-US" smtClean="0"/>
+              <a:rPr lang="en-US"/>
               <a:t>Click to edit Master title style</a:t>
             </a:r>
-            <a:endParaRPr lang="en-US"/>
           </a:p>
         </p:txBody>
       </p:sp>
@@ -279,10 +295,9 @@
           </a:lstStyle>
           <a:p>
             <a:r>
-              <a:rPr lang="en-US" smtClean="0"/>
+              <a:rPr lang="en-US"/>
               <a:t>Click to edit Master subtitle style</a:t>
             </a:r>
-            <a:endParaRPr lang="en-US"/>
           </a:p>
         </p:txBody>
       </p:sp>
@@ -303,7 +318,7 @@
           <a:p>
             <a:fld id="{5BCAD085-E8A6-8845-BD4E-CB4CCA059FC4}" type="datetimeFigureOut">
               <a:rPr lang="en-US" smtClean="0"/>
-              <a:t>1/27/13</a:t>
+              <a:t>5/30/2026</a:t>
             </a:fld>
             <a:endParaRPr lang="en-US"/>
           </a:p>
@@ -397,10 +412,9 @@
           <a:lstStyle/>
           <a:p>
             <a:r>
-              <a:rPr lang="en-US" smtClean="0"/>
+              <a:rPr lang="en-US"/>
               <a:t>Click to edit Master title style</a:t>
             </a:r>
-            <a:endParaRPr lang="en-US"/>
           </a:p>
         </p:txBody>
       </p:sp>
@@ -421,38 +435,37 @@
           <a:p>
             <a:pPr lvl="0"/>
             <a:r>
-              <a:rPr lang="en-US" smtClean="0"/>
+              <a:rPr lang="en-US"/>
               <a:t>Click to edit Master text styles</a:t>
             </a:r>
           </a:p>
           <a:p>
             <a:pPr lvl="1"/>
             <a:r>
-              <a:rPr lang="en-US" smtClean="0"/>
+              <a:rPr lang="en-US"/>
               <a:t>Second level</a:t>
             </a:r>
           </a:p>
           <a:p>
             <a:pPr lvl="2"/>
             <a:r>
-              <a:rPr lang="en-US" smtClean="0"/>
+              <a:rPr lang="en-US"/>
               <a:t>Third level</a:t>
             </a:r>
           </a:p>
           <a:p>
             <a:pPr lvl="3"/>
             <a:r>
-              <a:rPr lang="en-US" smtClean="0"/>
+              <a:rPr lang="en-US"/>
               <a:t>Fourth level</a:t>
             </a:r>
           </a:p>
           <a:p>
             <a:pPr lvl="4"/>
             <a:r>
-              <a:rPr lang="en-US" smtClean="0"/>
+              <a:rPr lang="en-US"/>
               <a:t>Fifth level</a:t>
             </a:r>
-            <a:endParaRPr lang="en-US"/>
           </a:p>
         </p:txBody>
       </p:sp>
@@ -473,7 +486,7 @@
           <a:p>
             <a:fld id="{5BCAD085-E8A6-8845-BD4E-CB4CCA059FC4}" type="datetimeFigureOut">
               <a:rPr lang="en-US" smtClean="0"/>
-              <a:t>1/27/13</a:t>
+              <a:t>5/30/2026</a:t>
             </a:fld>
             <a:endParaRPr lang="en-US"/>
           </a:p>
@@ -572,10 +585,9 @@
           <a:lstStyle/>
           <a:p>
             <a:r>
-              <a:rPr lang="en-US" smtClean="0"/>
+              <a:rPr lang="en-US"/>
               <a:t>Click to edit Master title style</a:t>
             </a:r>
-            <a:endParaRPr lang="en-US"/>
           </a:p>
         </p:txBody>
       </p:sp>
@@ -601,38 +613,37 @@
           <a:p>
             <a:pPr lvl="0"/>
             <a:r>
-              <a:rPr lang="en-US" smtClean="0"/>
+              <a:rPr lang="en-US"/>
               <a:t>Click to edit Master text styles</a:t>
             </a:r>
           </a:p>
           <a:p>
             <a:pPr lvl="1"/>
             <a:r>
-              <a:rPr lang="en-US" smtClean="0"/>
+              <a:rPr lang="en-US"/>
               <a:t>Second level</a:t>
             </a:r>
           </a:p>
           <a:p>
             <a:pPr lvl="2"/>
             <a:r>
-              <a:rPr lang="en-US" smtClean="0"/>
+              <a:rPr lang="en-US"/>
               <a:t>Third level</a:t>
             </a:r>
           </a:p>
           <a:p>
             <a:pPr lvl="3"/>
             <a:r>
-              <a:rPr lang="en-US" smtClean="0"/>
+              <a:rPr lang="en-US"/>
               <a:t>Fourth level</a:t>
             </a:r>
           </a:p>
           <a:p>
             <a:pPr lvl="4"/>
             <a:r>
-              <a:rPr lang="en-US" smtClean="0"/>
+              <a:rPr lang="en-US"/>
               <a:t>Fifth level</a:t>
             </a:r>
-            <a:endParaRPr lang="en-US"/>
           </a:p>
         </p:txBody>
       </p:sp>
@@ -653,7 +664,7 @@
           <a:p>
             <a:fld id="{5BCAD085-E8A6-8845-BD4E-CB4CCA059FC4}" type="datetimeFigureOut">
               <a:rPr lang="en-US" smtClean="0"/>
-              <a:t>1/27/13</a:t>
+              <a:t>5/30/2026</a:t>
             </a:fld>
             <a:endParaRPr lang="en-US"/>
           </a:p>
@@ -747,10 +758,9 @@
           <a:lstStyle/>
           <a:p>
             <a:r>
-              <a:rPr lang="en-US" smtClean="0"/>
+              <a:rPr lang="en-US"/>
               <a:t>Click to edit Master title style</a:t>
             </a:r>
-            <a:endParaRPr lang="en-US"/>
           </a:p>
         </p:txBody>
       </p:sp>
@@ -771,38 +781,37 @@
           <a:p>
             <a:pPr lvl="0"/>
             <a:r>
-              <a:rPr lang="en-US" smtClean="0"/>
+              <a:rPr lang="en-US"/>
               <a:t>Click to edit Master text styles</a:t>
             </a:r>
           </a:p>
           <a:p>
             <a:pPr lvl="1"/>
             <a:r>
-              <a:rPr lang="en-US" smtClean="0"/>
+              <a:rPr lang="en-US"/>
               <a:t>Second level</a:t>
             </a:r>
           </a:p>
           <a:p>
             <a:pPr lvl="2"/>
             <a:r>
-              <a:rPr lang="en-US" smtClean="0"/>
+              <a:rPr lang="en-US"/>
               <a:t>Third level</a:t>
             </a:r>
           </a:p>
           <a:p>
             <a:pPr lvl="3"/>
             <a:r>
-              <a:rPr lang="en-US" smtClean="0"/>
+              <a:rPr lang="en-US"/>
               <a:t>Fourth level</a:t>
             </a:r>
           </a:p>
           <a:p>
             <a:pPr lvl="4"/>
             <a:r>
-              <a:rPr lang="en-US" smtClean="0"/>
+              <a:rPr lang="en-US"/>
               <a:t>Fifth level</a:t>
             </a:r>
-            <a:endParaRPr lang="en-US"/>
           </a:p>
         </p:txBody>
       </p:sp>
@@ -823,7 +832,7 @@
           <a:p>
             <a:fld id="{5BCAD085-E8A6-8845-BD4E-CB4CCA059FC4}" type="datetimeFigureOut">
               <a:rPr lang="en-US" smtClean="0"/>
-              <a:t>1/27/13</a:t>
+              <a:t>5/30/2026</a:t>
             </a:fld>
             <a:endParaRPr lang="en-US"/>
           </a:p>
@@ -926,10 +935,9 @@
           </a:lstStyle>
           <a:p>
             <a:r>
-              <a:rPr lang="en-US" smtClean="0"/>
+              <a:rPr lang="en-US"/>
               <a:t>Click to edit Master title style</a:t>
             </a:r>
-            <a:endParaRPr lang="en-US"/>
           </a:p>
         </p:txBody>
       </p:sp>
@@ -1046,7 +1054,7 @@
           <a:p>
             <a:pPr lvl="0"/>
             <a:r>
-              <a:rPr lang="en-US" smtClean="0"/>
+              <a:rPr lang="en-US"/>
               <a:t>Click to edit Master text styles</a:t>
             </a:r>
           </a:p>
@@ -1069,7 +1077,7 @@
           <a:p>
             <a:fld id="{5BCAD085-E8A6-8845-BD4E-CB4CCA059FC4}" type="datetimeFigureOut">
               <a:rPr lang="en-US" smtClean="0"/>
-              <a:t>1/27/13</a:t>
+              <a:t>5/30/2026</a:t>
             </a:fld>
             <a:endParaRPr lang="en-US"/>
           </a:p>
@@ -1163,10 +1171,9 @@
           <a:lstStyle/>
           <a:p>
             <a:r>
-              <a:rPr lang="en-US" smtClean="0"/>
+              <a:rPr lang="en-US"/>
               <a:t>Click to edit Master title style</a:t>
             </a:r>
-            <a:endParaRPr lang="en-US"/>
           </a:p>
         </p:txBody>
       </p:sp>
@@ -1220,38 +1227,37 @@
           <a:p>
             <a:pPr lvl="0"/>
             <a:r>
-              <a:rPr lang="en-US" smtClean="0"/>
+              <a:rPr lang="en-US"/>
               <a:t>Click to edit Master text styles</a:t>
             </a:r>
           </a:p>
           <a:p>
             <a:pPr lvl="1"/>
             <a:r>
-              <a:rPr lang="en-US" smtClean="0"/>
+              <a:rPr lang="en-US"/>
               <a:t>Second level</a:t>
             </a:r>
           </a:p>
           <a:p>
             <a:pPr lvl="2"/>
             <a:r>
-              <a:rPr lang="en-US" smtClean="0"/>
+              <a:rPr lang="en-US"/>
               <a:t>Third level</a:t>
             </a:r>
           </a:p>
           <a:p>
             <a:pPr lvl="3"/>
             <a:r>
-              <a:rPr lang="en-US" smtClean="0"/>
+              <a:rPr lang="en-US"/>
               <a:t>Fourth level</a:t>
             </a:r>
           </a:p>
           <a:p>
             <a:pPr lvl="4"/>
             <a:r>
-              <a:rPr lang="en-US" smtClean="0"/>
+              <a:rPr lang="en-US"/>
               <a:t>Fifth level</a:t>
             </a:r>
-            <a:endParaRPr lang="en-US"/>
           </a:p>
         </p:txBody>
       </p:sp>
@@ -1305,38 +1311,37 @@
           <a:p>
             <a:pPr lvl="0"/>
             <a:r>
-              <a:rPr lang="en-US" smtClean="0"/>
+              <a:rPr lang="en-US"/>
               <a:t>Click to edit Master text styles</a:t>
             </a:r>
           </a:p>
           <a:p>
             <a:pPr lvl="1"/>
             <a:r>
-              <a:rPr lang="en-US" smtClean="0"/>
+              <a:rPr lang="en-US"/>
               <a:t>Second level</a:t>
             </a:r>
           </a:p>
           <a:p>
             <a:pPr lvl="2"/>
             <a:r>
-              <a:rPr lang="en-US" smtClean="0"/>
+              <a:rPr lang="en-US"/>
               <a:t>Third level</a:t>
             </a:r>
           </a:p>
           <a:p>
             <a:pPr lvl="3"/>
             <a:r>
-              <a:rPr lang="en-US" smtClean="0"/>
+              <a:rPr lang="en-US"/>
               <a:t>Fourth level</a:t>
             </a:r>
           </a:p>
           <a:p>
             <a:pPr lvl="4"/>
             <a:r>
-              <a:rPr lang="en-US" smtClean="0"/>
+              <a:rPr lang="en-US"/>
               <a:t>Fifth level</a:t>
             </a:r>
-            <a:endParaRPr lang="en-US"/>
           </a:p>
         </p:txBody>
       </p:sp>
@@ -1357,7 +1362,7 @@
           <a:p>
             <a:fld id="{5BCAD085-E8A6-8845-BD4E-CB4CCA059FC4}" type="datetimeFigureOut">
               <a:rPr lang="en-US" smtClean="0"/>
-              <a:t>1/27/13</a:t>
+              <a:t>5/30/2026</a:t>
             </a:fld>
             <a:endParaRPr lang="en-US"/>
           </a:p>
@@ -1455,10 +1460,9 @@
           </a:lstStyle>
           <a:p>
             <a:r>
-              <a:rPr lang="en-US" smtClean="0"/>
+              <a:rPr lang="en-US"/>
               <a:t>Click to edit Master title style</a:t>
             </a:r>
-            <a:endParaRPr lang="en-US"/>
           </a:p>
         </p:txBody>
       </p:sp>
@@ -1521,7 +1525,7 @@
           <a:p>
             <a:pPr lvl="0"/>
             <a:r>
-              <a:rPr lang="en-US" smtClean="0"/>
+              <a:rPr lang="en-US"/>
               <a:t>Click to edit Master text styles</a:t>
             </a:r>
           </a:p>
@@ -1577,38 +1581,37 @@
           <a:p>
             <a:pPr lvl="0"/>
             <a:r>
-              <a:rPr lang="en-US" smtClean="0"/>
+              <a:rPr lang="en-US"/>
               <a:t>Click to edit Master text styles</a:t>
             </a:r>
           </a:p>
           <a:p>
             <a:pPr lvl="1"/>
             <a:r>
-              <a:rPr lang="en-US" smtClean="0"/>
+              <a:rPr lang="en-US"/>
               <a:t>Second level</a:t>
             </a:r>
           </a:p>
           <a:p>
             <a:pPr lvl="2"/>
             <a:r>
-              <a:rPr lang="en-US" smtClean="0"/>
+              <a:rPr lang="en-US"/>
               <a:t>Third level</a:t>
             </a:r>
           </a:p>
           <a:p>
             <a:pPr lvl="3"/>
             <a:r>
-              <a:rPr lang="en-US" smtClean="0"/>
+              <a:rPr lang="en-US"/>
               <a:t>Fourth level</a:t>
             </a:r>
           </a:p>
           <a:p>
             <a:pPr lvl="4"/>
             <a:r>
-              <a:rPr lang="en-US" smtClean="0"/>
+              <a:rPr lang="en-US"/>
               <a:t>Fifth level</a:t>
             </a:r>
-            <a:endParaRPr lang="en-US"/>
           </a:p>
         </p:txBody>
       </p:sp>
@@ -1671,7 +1674,7 @@
           <a:p>
             <a:pPr lvl="0"/>
             <a:r>
-              <a:rPr lang="en-US" smtClean="0"/>
+              <a:rPr lang="en-US"/>
               <a:t>Click to edit Master text styles</a:t>
             </a:r>
           </a:p>
@@ -1727,38 +1730,37 @@
           <a:p>
             <a:pPr lvl="0"/>
             <a:r>
-              <a:rPr lang="en-US" smtClean="0"/>
+              <a:rPr lang="en-US"/>
               <a:t>Click to edit Master text styles</a:t>
             </a:r>
           </a:p>
           <a:p>
             <a:pPr lvl="1"/>
             <a:r>
-              <a:rPr lang="en-US" smtClean="0"/>
+              <a:rPr lang="en-US"/>
               <a:t>Second level</a:t>
             </a:r>
           </a:p>
           <a:p>
             <a:pPr lvl="2"/>
             <a:r>
-              <a:rPr lang="en-US" smtClean="0"/>
+              <a:rPr lang="en-US"/>
               <a:t>Third level</a:t>
             </a:r>
           </a:p>
           <a:p>
             <a:pPr lvl="3"/>
             <a:r>
-              <a:rPr lang="en-US" smtClean="0"/>
+              <a:rPr lang="en-US"/>
               <a:t>Fourth level</a:t>
             </a:r>
           </a:p>
           <a:p>
             <a:pPr lvl="4"/>
             <a:r>
-              <a:rPr lang="en-US" smtClean="0"/>
+              <a:rPr lang="en-US"/>
               <a:t>Fifth level</a:t>
             </a:r>
-            <a:endParaRPr lang="en-US"/>
           </a:p>
         </p:txBody>
       </p:sp>
@@ -1779,7 +1781,7 @@
           <a:p>
             <a:fld id="{5BCAD085-E8A6-8845-BD4E-CB4CCA059FC4}" type="datetimeFigureOut">
               <a:rPr lang="en-US" smtClean="0"/>
-              <a:t>1/27/13</a:t>
+              <a:t>5/30/2026</a:t>
             </a:fld>
             <a:endParaRPr lang="en-US"/>
           </a:p>
@@ -1873,10 +1875,9 @@
           <a:lstStyle/>
           <a:p>
             <a:r>
-              <a:rPr lang="en-US" smtClean="0"/>
+              <a:rPr lang="en-US"/>
               <a:t>Click to edit Master title style</a:t>
             </a:r>
-            <a:endParaRPr lang="en-US"/>
           </a:p>
         </p:txBody>
       </p:sp>
@@ -1897,7 +1898,7 @@
           <a:p>
             <a:fld id="{5BCAD085-E8A6-8845-BD4E-CB4CCA059FC4}" type="datetimeFigureOut">
               <a:rPr lang="en-US" smtClean="0"/>
-              <a:t>1/27/13</a:t>
+              <a:t>5/30/2026</a:t>
             </a:fld>
             <a:endParaRPr lang="en-US"/>
           </a:p>
@@ -1992,7 +1993,7 @@
           <a:p>
             <a:fld id="{5BCAD085-E8A6-8845-BD4E-CB4CCA059FC4}" type="datetimeFigureOut">
               <a:rPr lang="en-US" smtClean="0"/>
-              <a:t>1/27/13</a:t>
+              <a:t>5/30/2026</a:t>
             </a:fld>
             <a:endParaRPr lang="en-US"/>
           </a:p>
@@ -2095,10 +2096,9 @@
           </a:lstStyle>
           <a:p>
             <a:r>
-              <a:rPr lang="en-US" smtClean="0"/>
+              <a:rPr lang="en-US"/>
               <a:t>Click to edit Master title style</a:t>
             </a:r>
-            <a:endParaRPr lang="en-US"/>
           </a:p>
         </p:txBody>
       </p:sp>
@@ -2152,38 +2152,37 @@
           <a:p>
             <a:pPr lvl="0"/>
             <a:r>
-              <a:rPr lang="en-US" smtClean="0"/>
+              <a:rPr lang="en-US"/>
               <a:t>Click to edit Master text styles</a:t>
             </a:r>
           </a:p>
           <a:p>
             <a:pPr lvl="1"/>
             <a:r>
-              <a:rPr lang="en-US" smtClean="0"/>
+              <a:rPr lang="en-US"/>
               <a:t>Second level</a:t>
             </a:r>
           </a:p>
           <a:p>
             <a:pPr lvl="2"/>
             <a:r>
-              <a:rPr lang="en-US" smtClean="0"/>
+              <a:rPr lang="en-US"/>
               <a:t>Third level</a:t>
             </a:r>
           </a:p>
           <a:p>
             <a:pPr lvl="3"/>
             <a:r>
-              <a:rPr lang="en-US" smtClean="0"/>
+              <a:rPr lang="en-US"/>
               <a:t>Fourth level</a:t>
             </a:r>
           </a:p>
           <a:p>
             <a:pPr lvl="4"/>
             <a:r>
-              <a:rPr lang="en-US" smtClean="0"/>
+              <a:rPr lang="en-US"/>
               <a:t>Fifth level</a:t>
             </a:r>
-            <a:endParaRPr lang="en-US"/>
           </a:p>
         </p:txBody>
       </p:sp>
@@ -2246,7 +2245,7 @@
           <a:p>
             <a:pPr lvl="0"/>
             <a:r>
-              <a:rPr lang="en-US" smtClean="0"/>
+              <a:rPr lang="en-US"/>
               <a:t>Click to edit Master text styles</a:t>
             </a:r>
           </a:p>
@@ -2269,7 +2268,7 @@
           <a:p>
             <a:fld id="{5BCAD085-E8A6-8845-BD4E-CB4CCA059FC4}" type="datetimeFigureOut">
               <a:rPr lang="en-US" smtClean="0"/>
-              <a:t>1/27/13</a:t>
+              <a:t>5/30/2026</a:t>
             </a:fld>
             <a:endParaRPr lang="en-US"/>
           </a:p>
@@ -2372,10 +2371,9 @@
           </a:lstStyle>
           <a:p>
             <a:r>
-              <a:rPr lang="en-US" smtClean="0"/>
+              <a:rPr lang="en-US"/>
               <a:t>Click to edit Master title style</a:t>
             </a:r>
-            <a:endParaRPr lang="en-US"/>
           </a:p>
         </p:txBody>
       </p:sp>
@@ -2499,7 +2497,7 @@
           <a:p>
             <a:pPr lvl="0"/>
             <a:r>
-              <a:rPr lang="en-US" smtClean="0"/>
+              <a:rPr lang="en-US"/>
               <a:t>Click to edit Master text styles</a:t>
             </a:r>
           </a:p>
@@ -2522,7 +2520,7 @@
           <a:p>
             <a:fld id="{5BCAD085-E8A6-8845-BD4E-CB4CCA059FC4}" type="datetimeFigureOut">
               <a:rPr lang="en-US" smtClean="0"/>
-              <a:t>1/27/13</a:t>
+              <a:t>5/30/2026</a:t>
             </a:fld>
             <a:endParaRPr lang="en-US"/>
           </a:p>
@@ -2631,10 +2629,9 @@
           <a:lstStyle/>
           <a:p>
             <a:r>
-              <a:rPr lang="en-US" smtClean="0"/>
+              <a:rPr lang="en-US"/>
               <a:t>Click to edit Master title style</a:t>
             </a:r>
-            <a:endParaRPr lang="en-US"/>
           </a:p>
         </p:txBody>
       </p:sp>
@@ -2665,38 +2662,37 @@
           <a:p>
             <a:pPr lvl="0"/>
             <a:r>
-              <a:rPr lang="en-US" smtClean="0"/>
+              <a:rPr lang="en-US"/>
               <a:t>Click to edit Master text styles</a:t>
             </a:r>
           </a:p>
           <a:p>
             <a:pPr lvl="1"/>
             <a:r>
-              <a:rPr lang="en-US" smtClean="0"/>
+              <a:rPr lang="en-US"/>
               <a:t>Second level</a:t>
             </a:r>
           </a:p>
           <a:p>
             <a:pPr lvl="2"/>
             <a:r>
-              <a:rPr lang="en-US" smtClean="0"/>
+              <a:rPr lang="en-US"/>
               <a:t>Third level</a:t>
             </a:r>
           </a:p>
           <a:p>
             <a:pPr lvl="3"/>
             <a:r>
-              <a:rPr lang="en-US" smtClean="0"/>
+              <a:rPr lang="en-US"/>
               <a:t>Fourth level</a:t>
             </a:r>
           </a:p>
           <a:p>
             <a:pPr lvl="4"/>
             <a:r>
-              <a:rPr lang="en-US" smtClean="0"/>
+              <a:rPr lang="en-US"/>
               <a:t>Fifth level</a:t>
             </a:r>
-            <a:endParaRPr lang="en-US"/>
           </a:p>
         </p:txBody>
       </p:sp>
@@ -2735,7 +2731,7 @@
           <a:p>
             <a:fld id="{5BCAD085-E8A6-8845-BD4E-CB4CCA059FC4}" type="datetimeFigureOut">
               <a:rPr lang="en-US" smtClean="0"/>
-              <a:t>1/27/13</a:t>
+              <a:t>5/30/2026</a:t>
             </a:fld>
             <a:endParaRPr lang="en-US"/>
           </a:p>
@@ -3094,7 +3090,7 @@
 </file>
 
 <file path=ppt/slides/slide1.xml><?xml version="1.0" encoding="utf-8"?>
-<p:sld xmlns:a="http://schemas.openxmlformats.org/drawingml/2006/main" xmlns:p="http://schemas.openxmlformats.org/presentationml/2006/main" xmlns:r="http://schemas.openxmlformats.org/officeDocument/2006/relationships">
+<p:sld xmlns:a="http://schemas.openxmlformats.org/drawingml/2006/main" xmlns:r="http://schemas.openxmlformats.org/officeDocument/2006/relationships" xmlns:p="http://schemas.openxmlformats.org/presentationml/2006/main">
   <p:cSld>
     <p:bg>
       <p:bgPr>
@@ -3110,7 +3106,14 @@
         <p:cNvGrpSpPr/>
         <p:nvPr/>
       </p:nvGrpSpPr>
-      <p:grpSpPr/>
+      <p:grpSpPr>
+        <a:xfrm>
+          <a:off x="0" y="0"/>
+          <a:ext cx="0" cy="0"/>
+          <a:chOff x="0" y="0"/>
+          <a:chExt cx="0" cy="0"/>
+        </a:xfrm>
+      </p:grpSpPr>
       <p:sp>
         <p:nvSpPr>
           <p:cNvPr id="2" name="Rectangle 1"/>
@@ -3152,6 +3155,7 @@
           <a:lstStyle/>
           <a:p>
             <a:pPr algn="ctr"/>
+            <a:endParaRPr/>
           </a:p>
         </p:txBody>
       </p:sp>
@@ -3196,6 +3200,7 @@
           <a:lstStyle/>
           <a:p>
             <a:pPr algn="ctr"/>
+            <a:endParaRPr/>
           </a:p>
         </p:txBody>
       </p:sp>
@@ -3240,6 +3245,7 @@
           <a:lstStyle/>
           <a:p>
             <a:pPr algn="ctr"/>
+            <a:endParaRPr/>
           </a:p>
         </p:txBody>
       </p:sp>
@@ -3284,6 +3290,7 @@
           <a:lstStyle/>
           <a:p>
             <a:pPr algn="ctr"/>
+            <a:endParaRPr/>
           </a:p>
         </p:txBody>
       </p:sp>
@@ -3328,6 +3335,7 @@
           <a:lstStyle/>
           <a:p>
             <a:pPr algn="ctr"/>
+            <a:endParaRPr/>
           </a:p>
         </p:txBody>
       </p:sp>
@@ -3348,7 +3356,7 @@
           <a:noFill/>
         </p:spPr>
         <p:txBody>
-          <a:bodyPr wrap="square" anchor="t" lIns="0" rIns="0" tIns="0" bIns="0">
+          <a:bodyPr wrap="square" lIns="0" tIns="0" rIns="0" bIns="0" anchor="t">
             <a:spAutoFit/>
           </a:bodyPr>
           <a:lstStyle/>
@@ -3365,7 +3373,7 @@
               </a:spcAft>
             </a:pPr>
             <a:r>
-              <a:rPr sz="1400" b="1">
+              <a:rPr sz="1400" b="1" dirty="0">
                 <a:solidFill>
                   <a:srgbClr val="00E676"/>
                 </a:solidFill>
@@ -3393,7 +3401,7 @@
           <a:noFill/>
         </p:spPr>
         <p:txBody>
-          <a:bodyPr wrap="square" anchor="t" lIns="0" rIns="0" tIns="0" bIns="0">
+          <a:bodyPr wrap="square" lIns="0" tIns="0" rIns="0" bIns="0" anchor="t">
             <a:spAutoFit/>
           </a:bodyPr>
           <a:lstStyle/>
@@ -3410,7 +3418,7 @@
               </a:spcAft>
             </a:pPr>
             <a:r>
-              <a:rPr sz="7600" b="1">
+              <a:rPr sz="7600" b="1" dirty="0">
                 <a:solidFill>
                   <a:srgbClr val="EAF3EF"/>
                 </a:solidFill>
@@ -3462,6 +3470,7 @@
           <a:lstStyle/>
           <a:p>
             <a:pPr algn="ctr"/>
+            <a:endParaRPr/>
           </a:p>
         </p:txBody>
       </p:sp>
@@ -3482,7 +3491,7 @@
           <a:noFill/>
         </p:spPr>
         <p:txBody>
-          <a:bodyPr wrap="square" anchor="t" lIns="0" rIns="0" tIns="0" bIns="0">
+          <a:bodyPr wrap="square" lIns="0" tIns="0" rIns="0" bIns="0" anchor="t">
             <a:spAutoFit/>
           </a:bodyPr>
           <a:lstStyle/>
@@ -3499,7 +3508,7 @@
               </a:spcAft>
             </a:pPr>
             <a:r>
-              <a:rPr sz="2200" b="0">
+              <a:rPr sz="2200" b="0" dirty="0">
                 <a:solidFill>
                   <a:srgbClr val="8DA39B"/>
                 </a:solidFill>
@@ -3521,7 +3530,7 @@
               </a:spcAft>
             </a:pPr>
             <a:r>
-              <a:rPr sz="2200" b="0">
+              <a:rPr sz="2200" b="0" dirty="0">
                 <a:solidFill>
                   <a:srgbClr val="8DA39B"/>
                 </a:solidFill>
@@ -3569,7 +3578,7 @@
           </a:fontRef>
         </p:style>
         <p:txBody>
-          <a:bodyPr rtlCol="0" anchor="ctr" tIns="0" bIns="0"/>
+          <a:bodyPr tIns="0" bIns="0" rtlCol="0" anchor="ctr"/>
           <a:lstStyle/>
           <a:p>
             <a:pPr algn="ctr"/>
@@ -3622,7 +3631,7 @@
           </a:fontRef>
         </p:style>
         <p:txBody>
-          <a:bodyPr rtlCol="0" anchor="ctr" tIns="0" bIns="0"/>
+          <a:bodyPr tIns="0" bIns="0" rtlCol="0" anchor="ctr"/>
           <a:lstStyle/>
           <a:p>
             <a:pPr algn="ctr"/>
@@ -3675,7 +3684,7 @@
           </a:fontRef>
         </p:style>
         <p:txBody>
-          <a:bodyPr rtlCol="0" anchor="ctr" tIns="0" bIns="0"/>
+          <a:bodyPr tIns="0" bIns="0" rtlCol="0" anchor="ctr"/>
           <a:lstStyle/>
           <a:p>
             <a:pPr algn="ctr"/>
@@ -3728,7 +3737,7 @@
           </a:fontRef>
         </p:style>
         <p:txBody>
-          <a:bodyPr rtlCol="0" anchor="ctr" tIns="0" bIns="0"/>
+          <a:bodyPr tIns="0" bIns="0" rtlCol="0" anchor="ctr"/>
           <a:lstStyle/>
           <a:p>
             <a:pPr algn="ctr"/>
@@ -3785,6 +3794,7 @@
           <a:lstStyle/>
           <a:p>
             <a:pPr algn="ctr"/>
+            <a:endParaRPr/>
           </a:p>
         </p:txBody>
       </p:sp>
@@ -3805,7 +3815,7 @@
           <a:noFill/>
         </p:spPr>
         <p:txBody>
-          <a:bodyPr wrap="square" anchor="t" lIns="0" rIns="0" tIns="0" bIns="0">
+          <a:bodyPr wrap="square" lIns="0" tIns="0" rIns="0" bIns="0" anchor="t">
             <a:spAutoFit/>
           </a:bodyPr>
           <a:lstStyle/>
@@ -3837,7 +3847,7 @@
                 </a:solidFill>
                 <a:latin typeface="Segoe UI"/>
               </a:rPr>
-              <a:t>   ·   Datalake 3.0 integration module   ·   v1.0.0</a:t>
+              <a:t>   ·   Datalake 3.0 integration module   ·   v1.1.0</a:t>
             </a:r>
           </a:p>
         </p:txBody>
@@ -3851,7 +3861,7 @@
 </file>
 
 <file path=ppt/slides/slide10.xml><?xml version="1.0" encoding="utf-8"?>
-<p:sld xmlns:a="http://schemas.openxmlformats.org/drawingml/2006/main" xmlns:p="http://schemas.openxmlformats.org/presentationml/2006/main" xmlns:r="http://schemas.openxmlformats.org/officeDocument/2006/relationships">
+<p:sld xmlns:a="http://schemas.openxmlformats.org/drawingml/2006/main" xmlns:r="http://schemas.openxmlformats.org/officeDocument/2006/relationships" xmlns:p="http://schemas.openxmlformats.org/presentationml/2006/main">
   <p:cSld>
     <p:bg>
       <p:bgPr>
@@ -3867,7 +3877,14 @@
         <p:cNvGrpSpPr/>
         <p:nvPr/>
       </p:nvGrpSpPr>
-      <p:grpSpPr/>
+      <p:grpSpPr>
+        <a:xfrm>
+          <a:off x="0" y="0"/>
+          <a:ext cx="0" cy="0"/>
+          <a:chOff x="0" y="0"/>
+          <a:chExt cx="0" cy="0"/>
+        </a:xfrm>
+      </p:grpSpPr>
       <p:sp>
         <p:nvSpPr>
           <p:cNvPr id="2" name="Rectangle 1"/>
@@ -3909,6 +3926,7 @@
           <a:lstStyle/>
           <a:p>
             <a:pPr algn="ctr"/>
+            <a:endParaRPr/>
           </a:p>
         </p:txBody>
       </p:sp>
@@ -3953,6 +3971,7 @@
           <a:lstStyle/>
           <a:p>
             <a:pPr algn="ctr"/>
+            <a:endParaRPr/>
           </a:p>
         </p:txBody>
       </p:sp>
@@ -3997,6 +4016,7 @@
           <a:lstStyle/>
           <a:p>
             <a:pPr algn="ctr"/>
+            <a:endParaRPr/>
           </a:p>
         </p:txBody>
       </p:sp>
@@ -4017,7 +4037,7 @@
           <a:noFill/>
         </p:spPr>
         <p:txBody>
-          <a:bodyPr wrap="square" anchor="t" lIns="0" rIns="0" tIns="0" bIns="0">
+          <a:bodyPr wrap="square" lIns="0" tIns="0" rIns="0" bIns="0" anchor="t">
             <a:spAutoFit/>
           </a:bodyPr>
           <a:lstStyle/>
@@ -4071,7 +4091,7 @@
           <a:noFill/>
         </p:spPr>
         <p:txBody>
-          <a:bodyPr wrap="square" anchor="t" lIns="0" rIns="0" tIns="0" bIns="0">
+          <a:bodyPr wrap="square" lIns="0" tIns="0" rIns="0" bIns="0" anchor="t">
             <a:spAutoFit/>
           </a:bodyPr>
           <a:lstStyle/>
@@ -4140,6 +4160,7 @@
           <a:lstStyle/>
           <a:p>
             <a:pPr algn="ctr"/>
+            <a:endParaRPr/>
           </a:p>
         </p:txBody>
       </p:sp>
@@ -4160,7 +4181,7 @@
           <a:noFill/>
         </p:spPr>
         <p:txBody>
-          <a:bodyPr wrap="square" anchor="t" lIns="0" rIns="0" tIns="0" bIns="0">
+          <a:bodyPr wrap="square" lIns="0" tIns="0" rIns="0" bIns="0" anchor="t">
             <a:spAutoFit/>
           </a:bodyPr>
           <a:lstStyle/>
@@ -4205,7 +4226,7 @@
           <a:noFill/>
         </p:spPr>
         <p:txBody>
-          <a:bodyPr wrap="square" anchor="t" lIns="0" rIns="0" tIns="0" bIns="0">
+          <a:bodyPr wrap="square" lIns="0" tIns="0" rIns="0" bIns="0" anchor="t">
             <a:spAutoFit/>
           </a:bodyPr>
           <a:lstStyle/>
@@ -4274,6 +4295,7 @@
           <a:lstStyle/>
           <a:p>
             <a:pPr algn="ctr"/>
+            <a:endParaRPr/>
           </a:p>
         </p:txBody>
       </p:sp>
@@ -4318,6 +4340,7 @@
           <a:lstStyle/>
           <a:p>
             <a:pPr algn="ctr"/>
+            <a:endParaRPr/>
           </a:p>
         </p:txBody>
       </p:sp>
@@ -4364,6 +4387,7 @@
           <a:lstStyle/>
           <a:p>
             <a:pPr algn="ctr"/>
+            <a:endParaRPr/>
           </a:p>
         </p:txBody>
       </p:sp>
@@ -4384,7 +4408,7 @@
           <a:noFill/>
         </p:spPr>
         <p:txBody>
-          <a:bodyPr wrap="square" anchor="t" lIns="0" rIns="0" tIns="0" bIns="0">
+          <a:bodyPr wrap="square" lIns="0" tIns="0" rIns="0" bIns="0" anchor="t">
             <a:spAutoFit/>
           </a:bodyPr>
           <a:lstStyle/>
@@ -4499,6 +4523,7 @@
           <a:lstStyle/>
           <a:p>
             <a:pPr algn="ctr"/>
+            <a:endParaRPr/>
           </a:p>
         </p:txBody>
       </p:sp>
@@ -4519,7 +4544,7 @@
           <a:noFill/>
         </p:spPr>
         <p:txBody>
-          <a:bodyPr wrap="square" anchor="t" lIns="0" rIns="0" tIns="0" bIns="0">
+          <a:bodyPr wrap="square" lIns="0" tIns="0" rIns="0" bIns="0" anchor="t">
             <a:spAutoFit/>
           </a:bodyPr>
           <a:lstStyle/>
@@ -4634,6 +4659,7 @@
           <a:lstStyle/>
           <a:p>
             <a:pPr algn="ctr"/>
+            <a:endParaRPr/>
           </a:p>
         </p:txBody>
       </p:sp>
@@ -4654,7 +4680,7 @@
           <a:noFill/>
         </p:spPr>
         <p:txBody>
-          <a:bodyPr wrap="square" anchor="t" lIns="0" rIns="0" tIns="0" bIns="0">
+          <a:bodyPr wrap="square" lIns="0" tIns="0" rIns="0" bIns="0" anchor="t">
             <a:spAutoFit/>
           </a:bodyPr>
           <a:lstStyle/>
@@ -4769,6 +4795,7 @@
           <a:lstStyle/>
           <a:p>
             <a:pPr algn="ctr"/>
+            <a:endParaRPr/>
           </a:p>
         </p:txBody>
       </p:sp>
@@ -4789,7 +4816,7 @@
           <a:noFill/>
         </p:spPr>
         <p:txBody>
-          <a:bodyPr wrap="square" anchor="t" lIns="0" rIns="0" tIns="0" bIns="0">
+          <a:bodyPr wrap="square" lIns="0" tIns="0" rIns="0" bIns="0" anchor="t">
             <a:spAutoFit/>
           </a:bodyPr>
           <a:lstStyle/>
@@ -4880,10 +4907,34 @@
                 <a:tableStyleId>{5C22544A-7EE6-4342-B048-85BDC9FD1C3A}</a:tableStyleId>
               </a:tblPr>
               <a:tblGrid>
-                <a:gridCol w="4206240"/>
-                <a:gridCol w="1828800"/>
-                <a:gridCol w="2331720"/>
-                <a:gridCol w="2148840"/>
+                <a:gridCol w="4206240">
+                  <a:extLst>
+                    <a:ext uri="{9D8B030D-6E8A-4147-A177-3AD203B41FA5}">
+                      <a16:colId xmlns:a16="http://schemas.microsoft.com/office/drawing/2014/main" val="20000"/>
+                    </a:ext>
+                  </a:extLst>
+                </a:gridCol>
+                <a:gridCol w="1828800">
+                  <a:extLst>
+                    <a:ext uri="{9D8B030D-6E8A-4147-A177-3AD203B41FA5}">
+                      <a16:colId xmlns:a16="http://schemas.microsoft.com/office/drawing/2014/main" val="20001"/>
+                    </a:ext>
+                  </a:extLst>
+                </a:gridCol>
+                <a:gridCol w="2331720">
+                  <a:extLst>
+                    <a:ext uri="{9D8B030D-6E8A-4147-A177-3AD203B41FA5}">
+                      <a16:colId xmlns:a16="http://schemas.microsoft.com/office/drawing/2014/main" val="20002"/>
+                    </a:ext>
+                  </a:extLst>
+                </a:gridCol>
+                <a:gridCol w="2148840">
+                  <a:extLst>
+                    <a:ext uri="{9D8B030D-6E8A-4147-A177-3AD203B41FA5}">
+                      <a16:colId xmlns:a16="http://schemas.microsoft.com/office/drawing/2014/main" val="20003"/>
+                    </a:ext>
+                  </a:extLst>
+                </a:gridCol>
               </a:tblGrid>
               <a:tr h="420624">
                 <a:tc>
@@ -4978,6 +5029,11 @@
                     </a:solidFill>
                   </a:tcPr>
                 </a:tc>
+                <a:extLst>
+                  <a:ext uri="{0D108BD9-81ED-4DB2-BD59-A6C34878D82A}">
+                    <a16:rowId xmlns:a16="http://schemas.microsoft.com/office/drawing/2014/main" val="10000"/>
+                  </a:ext>
+                </a:extLst>
               </a:tr>
               <a:tr h="402336">
                 <a:tc>
@@ -5072,6 +5128,11 @@
                     </a:solidFill>
                   </a:tcPr>
                 </a:tc>
+                <a:extLst>
+                  <a:ext uri="{0D108BD9-81ED-4DB2-BD59-A6C34878D82A}">
+                    <a16:rowId xmlns:a16="http://schemas.microsoft.com/office/drawing/2014/main" val="10001"/>
+                  </a:ext>
+                </a:extLst>
               </a:tr>
               <a:tr h="402336">
                 <a:tc>
@@ -5166,6 +5227,11 @@
                     </a:solidFill>
                   </a:tcPr>
                 </a:tc>
+                <a:extLst>
+                  <a:ext uri="{0D108BD9-81ED-4DB2-BD59-A6C34878D82A}">
+                    <a16:rowId xmlns:a16="http://schemas.microsoft.com/office/drawing/2014/main" val="10002"/>
+                  </a:ext>
+                </a:extLst>
               </a:tr>
               <a:tr h="402336">
                 <a:tc>
@@ -5260,6 +5326,11 @@
                     </a:solidFill>
                   </a:tcPr>
                 </a:tc>
+                <a:extLst>
+                  <a:ext uri="{0D108BD9-81ED-4DB2-BD59-A6C34878D82A}">
+                    <a16:rowId xmlns:a16="http://schemas.microsoft.com/office/drawing/2014/main" val="10003"/>
+                  </a:ext>
+                </a:extLst>
               </a:tr>
             </a:tbl>
           </a:graphicData>
@@ -5282,7 +5353,7 @@
           <a:noFill/>
         </p:spPr>
         <p:txBody>
-          <a:bodyPr wrap="square" anchor="t" lIns="0" rIns="0" tIns="0" bIns="0">
+          <a:bodyPr wrap="square" lIns="0" tIns="0" rIns="0" bIns="0" anchor="t">
             <a:spAutoFit/>
           </a:bodyPr>
           <a:lstStyle/>
@@ -5341,7 +5412,7 @@
 </file>
 
 <file path=ppt/slides/slide11.xml><?xml version="1.0" encoding="utf-8"?>
-<p:sld xmlns:a="http://schemas.openxmlformats.org/drawingml/2006/main" xmlns:p="http://schemas.openxmlformats.org/presentationml/2006/main" xmlns:r="http://schemas.openxmlformats.org/officeDocument/2006/relationships">
+<p:sld xmlns:a="http://schemas.openxmlformats.org/drawingml/2006/main" xmlns:r="http://schemas.openxmlformats.org/officeDocument/2006/relationships" xmlns:p="http://schemas.openxmlformats.org/presentationml/2006/main">
   <p:cSld>
     <p:bg>
       <p:bgPr>
@@ -5357,7 +5428,14 @@
         <p:cNvGrpSpPr/>
         <p:nvPr/>
       </p:nvGrpSpPr>
-      <p:grpSpPr/>
+      <p:grpSpPr>
+        <a:xfrm>
+          <a:off x="0" y="0"/>
+          <a:ext cx="0" cy="0"/>
+          <a:chOff x="0" y="0"/>
+          <a:chExt cx="0" cy="0"/>
+        </a:xfrm>
+      </p:grpSpPr>
       <p:sp>
         <p:nvSpPr>
           <p:cNvPr id="2" name="Rectangle 1"/>
@@ -5399,6 +5477,7 @@
           <a:lstStyle/>
           <a:p>
             <a:pPr algn="ctr"/>
+            <a:endParaRPr/>
           </a:p>
         </p:txBody>
       </p:sp>
@@ -5443,6 +5522,7 @@
           <a:lstStyle/>
           <a:p>
             <a:pPr algn="ctr"/>
+            <a:endParaRPr/>
           </a:p>
         </p:txBody>
       </p:sp>
@@ -5487,6 +5567,7 @@
           <a:lstStyle/>
           <a:p>
             <a:pPr algn="ctr"/>
+            <a:endParaRPr/>
           </a:p>
         </p:txBody>
       </p:sp>
@@ -5507,7 +5588,7 @@
           <a:noFill/>
         </p:spPr>
         <p:txBody>
-          <a:bodyPr wrap="square" anchor="t" lIns="0" rIns="0" tIns="0" bIns="0">
+          <a:bodyPr wrap="square" lIns="0" tIns="0" rIns="0" bIns="0" anchor="t">
             <a:spAutoFit/>
           </a:bodyPr>
           <a:lstStyle/>
@@ -5561,7 +5642,7 @@
           <a:noFill/>
         </p:spPr>
         <p:txBody>
-          <a:bodyPr wrap="square" anchor="t" lIns="0" rIns="0" tIns="0" bIns="0">
+          <a:bodyPr wrap="square" lIns="0" tIns="0" rIns="0" bIns="0" anchor="t">
             <a:spAutoFit/>
           </a:bodyPr>
           <a:lstStyle/>
@@ -5630,6 +5711,7 @@
           <a:lstStyle/>
           <a:p>
             <a:pPr algn="ctr"/>
+            <a:endParaRPr/>
           </a:p>
         </p:txBody>
       </p:sp>
@@ -5650,7 +5732,7 @@
           <a:noFill/>
         </p:spPr>
         <p:txBody>
-          <a:bodyPr wrap="square" anchor="t" lIns="0" rIns="0" tIns="0" bIns="0">
+          <a:bodyPr wrap="square" lIns="0" tIns="0" rIns="0" bIns="0" anchor="t">
             <a:spAutoFit/>
           </a:bodyPr>
           <a:lstStyle/>
@@ -5695,7 +5777,7 @@
           <a:noFill/>
         </p:spPr>
         <p:txBody>
-          <a:bodyPr wrap="square" anchor="t" lIns="0" rIns="0" tIns="0" bIns="0">
+          <a:bodyPr wrap="square" lIns="0" tIns="0" rIns="0" bIns="0" anchor="t">
             <a:spAutoFit/>
           </a:bodyPr>
           <a:lstStyle/>
@@ -5764,6 +5846,7 @@
           <a:lstStyle/>
           <a:p>
             <a:pPr algn="ctr"/>
+            <a:endParaRPr/>
           </a:p>
         </p:txBody>
       </p:sp>
@@ -5808,6 +5891,7 @@
           <a:lstStyle/>
           <a:p>
             <a:pPr algn="ctr"/>
+            <a:endParaRPr/>
           </a:p>
         </p:txBody>
       </p:sp>
@@ -5854,6 +5938,7 @@
           <a:lstStyle/>
           <a:p>
             <a:pPr algn="ctr"/>
+            <a:endParaRPr/>
           </a:p>
         </p:txBody>
       </p:sp>
@@ -5898,6 +5983,7 @@
           <a:lstStyle/>
           <a:p>
             <a:pPr algn="ctr"/>
+            <a:endParaRPr/>
           </a:p>
         </p:txBody>
       </p:sp>
@@ -5918,7 +6004,7 @@
           <a:noFill/>
         </p:spPr>
         <p:txBody>
-          <a:bodyPr wrap="square" anchor="ctr" lIns="0" rIns="0" tIns="0" bIns="0">
+          <a:bodyPr wrap="square" lIns="0" tIns="0" rIns="0" bIns="0" anchor="ctr">
             <a:spAutoFit/>
           </a:bodyPr>
           <a:lstStyle/>
@@ -6009,6 +6095,7 @@
           <a:lstStyle/>
           <a:p>
             <a:pPr algn="ctr"/>
+            <a:endParaRPr/>
           </a:p>
         </p:txBody>
       </p:sp>
@@ -6055,6 +6142,7 @@
           <a:lstStyle/>
           <a:p>
             <a:pPr algn="ctr"/>
+            <a:endParaRPr/>
           </a:p>
         </p:txBody>
       </p:sp>
@@ -6099,6 +6187,7 @@
           <a:lstStyle/>
           <a:p>
             <a:pPr algn="ctr"/>
+            <a:endParaRPr/>
           </a:p>
         </p:txBody>
       </p:sp>
@@ -6119,7 +6208,7 @@
           <a:noFill/>
         </p:spPr>
         <p:txBody>
-          <a:bodyPr wrap="square" anchor="ctr" lIns="0" rIns="0" tIns="0" bIns="0">
+          <a:bodyPr wrap="square" lIns="0" tIns="0" rIns="0" bIns="0" anchor="ctr">
             <a:spAutoFit/>
           </a:bodyPr>
           <a:lstStyle/>
@@ -6210,6 +6299,7 @@
           <a:lstStyle/>
           <a:p>
             <a:pPr algn="ctr"/>
+            <a:endParaRPr/>
           </a:p>
         </p:txBody>
       </p:sp>
@@ -6256,6 +6346,7 @@
           <a:lstStyle/>
           <a:p>
             <a:pPr algn="ctr"/>
+            <a:endParaRPr/>
           </a:p>
         </p:txBody>
       </p:sp>
@@ -6300,6 +6391,7 @@
           <a:lstStyle/>
           <a:p>
             <a:pPr algn="ctr"/>
+            <a:endParaRPr/>
           </a:p>
         </p:txBody>
       </p:sp>
@@ -6320,7 +6412,7 @@
           <a:noFill/>
         </p:spPr>
         <p:txBody>
-          <a:bodyPr wrap="square" anchor="ctr" lIns="0" rIns="0" tIns="0" bIns="0">
+          <a:bodyPr wrap="square" lIns="0" tIns="0" rIns="0" bIns="0" anchor="ctr">
             <a:spAutoFit/>
           </a:bodyPr>
           <a:lstStyle/>
@@ -6411,6 +6503,7 @@
           <a:lstStyle/>
           <a:p>
             <a:pPr algn="ctr"/>
+            <a:endParaRPr/>
           </a:p>
         </p:txBody>
       </p:sp>
@@ -6457,6 +6550,7 @@
           <a:lstStyle/>
           <a:p>
             <a:pPr algn="ctr"/>
+            <a:endParaRPr/>
           </a:p>
         </p:txBody>
       </p:sp>
@@ -6501,6 +6595,7 @@
           <a:lstStyle/>
           <a:p>
             <a:pPr algn="ctr"/>
+            <a:endParaRPr/>
           </a:p>
         </p:txBody>
       </p:sp>
@@ -6521,7 +6616,7 @@
           <a:noFill/>
         </p:spPr>
         <p:txBody>
-          <a:bodyPr wrap="square" anchor="ctr" lIns="0" rIns="0" tIns="0" bIns="0">
+          <a:bodyPr wrap="square" lIns="0" tIns="0" rIns="0" bIns="0" anchor="ctr">
             <a:spAutoFit/>
           </a:bodyPr>
           <a:lstStyle/>
@@ -6612,6 +6707,7 @@
           <a:lstStyle/>
           <a:p>
             <a:pPr algn="ctr"/>
+            <a:endParaRPr/>
           </a:p>
         </p:txBody>
       </p:sp>
@@ -6658,6 +6754,7 @@
           <a:lstStyle/>
           <a:p>
             <a:pPr algn="ctr"/>
+            <a:endParaRPr/>
           </a:p>
         </p:txBody>
       </p:sp>
@@ -6702,6 +6799,7 @@
           <a:lstStyle/>
           <a:p>
             <a:pPr algn="ctr"/>
+            <a:endParaRPr/>
           </a:p>
         </p:txBody>
       </p:sp>
@@ -6722,7 +6820,7 @@
           <a:noFill/>
         </p:spPr>
         <p:txBody>
-          <a:bodyPr wrap="square" anchor="ctr" lIns="0" rIns="0" tIns="0" bIns="0">
+          <a:bodyPr wrap="square" lIns="0" tIns="0" rIns="0" bIns="0" anchor="ctr">
             <a:spAutoFit/>
           </a:bodyPr>
           <a:lstStyle/>
@@ -6781,7 +6879,7 @@
 </file>
 
 <file path=ppt/slides/slide12.xml><?xml version="1.0" encoding="utf-8"?>
-<p:sld xmlns:a="http://schemas.openxmlformats.org/drawingml/2006/main" xmlns:p="http://schemas.openxmlformats.org/presentationml/2006/main" xmlns:r="http://schemas.openxmlformats.org/officeDocument/2006/relationships">
+<p:sld xmlns:a="http://schemas.openxmlformats.org/drawingml/2006/main" xmlns:r="http://schemas.openxmlformats.org/officeDocument/2006/relationships" xmlns:p="http://schemas.openxmlformats.org/presentationml/2006/main">
   <p:cSld>
     <p:bg>
       <p:bgPr>
@@ -6797,7 +6895,14 @@
         <p:cNvGrpSpPr/>
         <p:nvPr/>
       </p:nvGrpSpPr>
-      <p:grpSpPr/>
+      <p:grpSpPr>
+        <a:xfrm>
+          <a:off x="0" y="0"/>
+          <a:ext cx="0" cy="0"/>
+          <a:chOff x="0" y="0"/>
+          <a:chExt cx="0" cy="0"/>
+        </a:xfrm>
+      </p:grpSpPr>
       <p:sp>
         <p:nvSpPr>
           <p:cNvPr id="2" name="Rectangle 1"/>
@@ -6839,6 +6944,7 @@
           <a:lstStyle/>
           <a:p>
             <a:pPr algn="ctr"/>
+            <a:endParaRPr/>
           </a:p>
         </p:txBody>
       </p:sp>
@@ -6883,6 +6989,7 @@
           <a:lstStyle/>
           <a:p>
             <a:pPr algn="ctr"/>
+            <a:endParaRPr/>
           </a:p>
         </p:txBody>
       </p:sp>
@@ -6927,6 +7034,7 @@
           <a:lstStyle/>
           <a:p>
             <a:pPr algn="ctr"/>
+            <a:endParaRPr/>
           </a:p>
         </p:txBody>
       </p:sp>
@@ -6947,7 +7055,7 @@
           <a:noFill/>
         </p:spPr>
         <p:txBody>
-          <a:bodyPr wrap="square" anchor="t" lIns="0" rIns="0" tIns="0" bIns="0">
+          <a:bodyPr wrap="square" lIns="0" tIns="0" rIns="0" bIns="0" anchor="t">
             <a:spAutoFit/>
           </a:bodyPr>
           <a:lstStyle/>
@@ -7001,7 +7109,7 @@
           <a:noFill/>
         </p:spPr>
         <p:txBody>
-          <a:bodyPr wrap="square" anchor="t" lIns="0" rIns="0" tIns="0" bIns="0">
+          <a:bodyPr wrap="square" lIns="0" tIns="0" rIns="0" bIns="0" anchor="t">
             <a:spAutoFit/>
           </a:bodyPr>
           <a:lstStyle/>
@@ -7070,6 +7178,7 @@
           <a:lstStyle/>
           <a:p>
             <a:pPr algn="ctr"/>
+            <a:endParaRPr/>
           </a:p>
         </p:txBody>
       </p:sp>
@@ -7090,7 +7199,7 @@
           <a:noFill/>
         </p:spPr>
         <p:txBody>
-          <a:bodyPr wrap="square" anchor="t" lIns="0" rIns="0" tIns="0" bIns="0">
+          <a:bodyPr wrap="square" lIns="0" tIns="0" rIns="0" bIns="0" anchor="t">
             <a:spAutoFit/>
           </a:bodyPr>
           <a:lstStyle/>
@@ -7135,7 +7244,7 @@
           <a:noFill/>
         </p:spPr>
         <p:txBody>
-          <a:bodyPr wrap="square" anchor="t" lIns="0" rIns="0" tIns="0" bIns="0">
+          <a:bodyPr wrap="square" lIns="0" tIns="0" rIns="0" bIns="0" anchor="t">
             <a:spAutoFit/>
           </a:bodyPr>
           <a:lstStyle/>
@@ -7204,6 +7313,7 @@
           <a:lstStyle/>
           <a:p>
             <a:pPr algn="ctr"/>
+            <a:endParaRPr/>
           </a:p>
         </p:txBody>
       </p:sp>
@@ -7248,6 +7358,7 @@
           <a:lstStyle/>
           <a:p>
             <a:pPr algn="ctr"/>
+            <a:endParaRPr/>
           </a:p>
         </p:txBody>
       </p:sp>
@@ -7268,7 +7379,7 @@
           <a:noFill/>
         </p:spPr>
         <p:txBody>
-          <a:bodyPr wrap="square" anchor="t" lIns="0" rIns="0" tIns="0" bIns="0">
+          <a:bodyPr wrap="square" lIns="0" tIns="0" rIns="0" bIns="0" anchor="t">
             <a:spAutoFit/>
           </a:bodyPr>
           <a:lstStyle/>
@@ -7517,6 +7628,7 @@
           <a:lstStyle/>
           <a:p>
             <a:pPr algn="ctr"/>
+            <a:endParaRPr/>
           </a:p>
         </p:txBody>
       </p:sp>
@@ -7561,6 +7673,7 @@
           <a:lstStyle/>
           <a:p>
             <a:pPr algn="ctr"/>
+            <a:endParaRPr/>
           </a:p>
         </p:txBody>
       </p:sp>
@@ -7581,7 +7694,7 @@
           <a:noFill/>
         </p:spPr>
         <p:txBody>
-          <a:bodyPr wrap="square" anchor="ctr" lIns="0" rIns="0" tIns="0" bIns="0">
+          <a:bodyPr wrap="square" lIns="0" tIns="0" rIns="0" bIns="0" anchor="ctr">
             <a:spAutoFit/>
           </a:bodyPr>
           <a:lstStyle/>
@@ -7636,7 +7749,7 @@
 </file>
 
 <file path=ppt/slides/slide13.xml><?xml version="1.0" encoding="utf-8"?>
-<p:sld xmlns:a="http://schemas.openxmlformats.org/drawingml/2006/main" xmlns:p="http://schemas.openxmlformats.org/presentationml/2006/main" xmlns:r="http://schemas.openxmlformats.org/officeDocument/2006/relationships">
+<p:sld xmlns:a="http://schemas.openxmlformats.org/drawingml/2006/main" xmlns:r="http://schemas.openxmlformats.org/officeDocument/2006/relationships" xmlns:p="http://schemas.openxmlformats.org/presentationml/2006/main">
   <p:cSld>
     <p:bg>
       <p:bgPr>
@@ -7652,7 +7765,14 @@
         <p:cNvGrpSpPr/>
         <p:nvPr/>
       </p:nvGrpSpPr>
-      <p:grpSpPr/>
+      <p:grpSpPr>
+        <a:xfrm>
+          <a:off x="0" y="0"/>
+          <a:ext cx="0" cy="0"/>
+          <a:chOff x="0" y="0"/>
+          <a:chExt cx="0" cy="0"/>
+        </a:xfrm>
+      </p:grpSpPr>
       <p:sp>
         <p:nvSpPr>
           <p:cNvPr id="2" name="Rectangle 1"/>
@@ -7694,6 +7814,7 @@
           <a:lstStyle/>
           <a:p>
             <a:pPr algn="ctr"/>
+            <a:endParaRPr/>
           </a:p>
         </p:txBody>
       </p:sp>
@@ -7738,6 +7859,7 @@
           <a:lstStyle/>
           <a:p>
             <a:pPr algn="ctr"/>
+            <a:endParaRPr/>
           </a:p>
         </p:txBody>
       </p:sp>
@@ -7782,6 +7904,7 @@
           <a:lstStyle/>
           <a:p>
             <a:pPr algn="ctr"/>
+            <a:endParaRPr/>
           </a:p>
         </p:txBody>
       </p:sp>
@@ -7802,7 +7925,7 @@
           <a:noFill/>
         </p:spPr>
         <p:txBody>
-          <a:bodyPr wrap="square" anchor="t" lIns="0" rIns="0" tIns="0" bIns="0">
+          <a:bodyPr wrap="square" lIns="0" tIns="0" rIns="0" bIns="0" anchor="t">
             <a:spAutoFit/>
           </a:bodyPr>
           <a:lstStyle/>
@@ -7856,7 +7979,7 @@
           <a:noFill/>
         </p:spPr>
         <p:txBody>
-          <a:bodyPr wrap="square" anchor="t" lIns="0" rIns="0" tIns="0" bIns="0">
+          <a:bodyPr wrap="square" lIns="0" tIns="0" rIns="0" bIns="0" anchor="t">
             <a:spAutoFit/>
           </a:bodyPr>
           <a:lstStyle/>
@@ -7925,6 +8048,7 @@
           <a:lstStyle/>
           <a:p>
             <a:pPr algn="ctr"/>
+            <a:endParaRPr/>
           </a:p>
         </p:txBody>
       </p:sp>
@@ -7945,7 +8069,7 @@
           <a:noFill/>
         </p:spPr>
         <p:txBody>
-          <a:bodyPr wrap="square" anchor="t" lIns="0" rIns="0" tIns="0" bIns="0">
+          <a:bodyPr wrap="square" lIns="0" tIns="0" rIns="0" bIns="0" anchor="t">
             <a:spAutoFit/>
           </a:bodyPr>
           <a:lstStyle/>
@@ -7990,7 +8114,7 @@
           <a:noFill/>
         </p:spPr>
         <p:txBody>
-          <a:bodyPr wrap="square" anchor="t" lIns="0" rIns="0" tIns="0" bIns="0">
+          <a:bodyPr wrap="square" lIns="0" tIns="0" rIns="0" bIns="0" anchor="t">
             <a:spAutoFit/>
           </a:bodyPr>
           <a:lstStyle/>
@@ -8059,6 +8183,7 @@
           <a:lstStyle/>
           <a:p>
             <a:pPr algn="ctr"/>
+            <a:endParaRPr/>
           </a:p>
         </p:txBody>
       </p:sp>
@@ -8103,6 +8228,7 @@
           <a:lstStyle/>
           <a:p>
             <a:pPr algn="ctr"/>
+            <a:endParaRPr/>
           </a:p>
         </p:txBody>
       </p:sp>
@@ -8123,7 +8249,7 @@
           <a:noFill/>
         </p:spPr>
         <p:txBody>
-          <a:bodyPr wrap="square" anchor="t" lIns="0" rIns="0" tIns="0" bIns="0">
+          <a:bodyPr wrap="square" lIns="0" tIns="0" rIns="0" bIns="0" anchor="t">
             <a:spAutoFit/>
           </a:bodyPr>
           <a:lstStyle/>
@@ -8338,7 +8464,7 @@
 </file>
 
 <file path=ppt/slides/slide14.xml><?xml version="1.0" encoding="utf-8"?>
-<p:sld xmlns:a="http://schemas.openxmlformats.org/drawingml/2006/main" xmlns:p="http://schemas.openxmlformats.org/presentationml/2006/main" xmlns:r="http://schemas.openxmlformats.org/officeDocument/2006/relationships">
+<p:sld xmlns:a="http://schemas.openxmlformats.org/drawingml/2006/main" xmlns:r="http://schemas.openxmlformats.org/officeDocument/2006/relationships" xmlns:p="http://schemas.openxmlformats.org/presentationml/2006/main">
   <p:cSld>
     <p:bg>
       <p:bgPr>
@@ -8354,7 +8480,14 @@
         <p:cNvGrpSpPr/>
         <p:nvPr/>
       </p:nvGrpSpPr>
-      <p:grpSpPr/>
+      <p:grpSpPr>
+        <a:xfrm>
+          <a:off x="0" y="0"/>
+          <a:ext cx="0" cy="0"/>
+          <a:chOff x="0" y="0"/>
+          <a:chExt cx="0" cy="0"/>
+        </a:xfrm>
+      </p:grpSpPr>
       <p:sp>
         <p:nvSpPr>
           <p:cNvPr id="2" name="Rectangle 1"/>
@@ -8396,6 +8529,7 @@
           <a:lstStyle/>
           <a:p>
             <a:pPr algn="ctr"/>
+            <a:endParaRPr/>
           </a:p>
         </p:txBody>
       </p:sp>
@@ -8440,6 +8574,7 @@
           <a:lstStyle/>
           <a:p>
             <a:pPr algn="ctr"/>
+            <a:endParaRPr/>
           </a:p>
         </p:txBody>
       </p:sp>
@@ -8484,6 +8619,7 @@
           <a:lstStyle/>
           <a:p>
             <a:pPr algn="ctr"/>
+            <a:endParaRPr/>
           </a:p>
         </p:txBody>
       </p:sp>
@@ -8504,7 +8640,7 @@
           <a:noFill/>
         </p:spPr>
         <p:txBody>
-          <a:bodyPr wrap="square" anchor="t" lIns="0" rIns="0" tIns="0" bIns="0">
+          <a:bodyPr wrap="square" lIns="0" tIns="0" rIns="0" bIns="0" anchor="t">
             <a:spAutoFit/>
           </a:bodyPr>
           <a:lstStyle/>
@@ -8558,7 +8694,7 @@
           <a:noFill/>
         </p:spPr>
         <p:txBody>
-          <a:bodyPr wrap="square" anchor="t" lIns="0" rIns="0" tIns="0" bIns="0">
+          <a:bodyPr wrap="square" lIns="0" tIns="0" rIns="0" bIns="0" anchor="t">
             <a:spAutoFit/>
           </a:bodyPr>
           <a:lstStyle/>
@@ -8627,6 +8763,7 @@
           <a:lstStyle/>
           <a:p>
             <a:pPr algn="ctr"/>
+            <a:endParaRPr/>
           </a:p>
         </p:txBody>
       </p:sp>
@@ -8647,7 +8784,7 @@
           <a:noFill/>
         </p:spPr>
         <p:txBody>
-          <a:bodyPr wrap="square" anchor="t" lIns="0" rIns="0" tIns="0" bIns="0">
+          <a:bodyPr wrap="square" lIns="0" tIns="0" rIns="0" bIns="0" anchor="t">
             <a:spAutoFit/>
           </a:bodyPr>
           <a:lstStyle/>
@@ -8692,7 +8829,7 @@
           <a:noFill/>
         </p:spPr>
         <p:txBody>
-          <a:bodyPr wrap="square" anchor="t" lIns="0" rIns="0" tIns="0" bIns="0">
+          <a:bodyPr wrap="square" lIns="0" tIns="0" rIns="0" bIns="0" anchor="t">
             <a:spAutoFit/>
           </a:bodyPr>
           <a:lstStyle/>
@@ -8761,6 +8898,7 @@
           <a:lstStyle/>
           <a:p>
             <a:pPr algn="ctr"/>
+            <a:endParaRPr/>
           </a:p>
         </p:txBody>
       </p:sp>
@@ -8805,6 +8943,7 @@
           <a:lstStyle/>
           <a:p>
             <a:pPr algn="ctr"/>
+            <a:endParaRPr/>
           </a:p>
         </p:txBody>
       </p:sp>
@@ -8825,7 +8964,7 @@
           <a:noFill/>
         </p:spPr>
         <p:txBody>
-          <a:bodyPr wrap="square" anchor="t" lIns="0" rIns="0" tIns="0" bIns="0">
+          <a:bodyPr wrap="square" lIns="0" tIns="0" rIns="0" bIns="0" anchor="t">
             <a:spAutoFit/>
           </a:bodyPr>
           <a:lstStyle/>
@@ -9040,7 +9179,7 @@
 </file>
 
 <file path=ppt/slides/slide15.xml><?xml version="1.0" encoding="utf-8"?>
-<p:sld xmlns:a="http://schemas.openxmlformats.org/drawingml/2006/main" xmlns:p="http://schemas.openxmlformats.org/presentationml/2006/main" xmlns:r="http://schemas.openxmlformats.org/officeDocument/2006/relationships">
+<p:sld xmlns:a="http://schemas.openxmlformats.org/drawingml/2006/main" xmlns:r="http://schemas.openxmlformats.org/officeDocument/2006/relationships" xmlns:p="http://schemas.openxmlformats.org/presentationml/2006/main">
   <p:cSld>
     <p:bg>
       <p:bgPr>
@@ -9056,7 +9195,14 @@
         <p:cNvGrpSpPr/>
         <p:nvPr/>
       </p:nvGrpSpPr>
-      <p:grpSpPr/>
+      <p:grpSpPr>
+        <a:xfrm>
+          <a:off x="0" y="0"/>
+          <a:ext cx="0" cy="0"/>
+          <a:chOff x="0" y="0"/>
+          <a:chExt cx="0" cy="0"/>
+        </a:xfrm>
+      </p:grpSpPr>
       <p:sp>
         <p:nvSpPr>
           <p:cNvPr id="2" name="Rectangle 1"/>
@@ -9098,6 +9244,7 @@
           <a:lstStyle/>
           <a:p>
             <a:pPr algn="ctr"/>
+            <a:endParaRPr/>
           </a:p>
         </p:txBody>
       </p:sp>
@@ -9142,6 +9289,7 @@
           <a:lstStyle/>
           <a:p>
             <a:pPr algn="ctr"/>
+            <a:endParaRPr/>
           </a:p>
         </p:txBody>
       </p:sp>
@@ -9186,6 +9334,7 @@
           <a:lstStyle/>
           <a:p>
             <a:pPr algn="ctr"/>
+            <a:endParaRPr/>
           </a:p>
         </p:txBody>
       </p:sp>
@@ -9206,7 +9355,7 @@
           <a:noFill/>
         </p:spPr>
         <p:txBody>
-          <a:bodyPr wrap="square" anchor="t" lIns="0" rIns="0" tIns="0" bIns="0">
+          <a:bodyPr wrap="square" lIns="0" tIns="0" rIns="0" bIns="0" anchor="t">
             <a:spAutoFit/>
           </a:bodyPr>
           <a:lstStyle/>
@@ -9260,7 +9409,7 @@
           <a:noFill/>
         </p:spPr>
         <p:txBody>
-          <a:bodyPr wrap="square" anchor="t" lIns="0" rIns="0" tIns="0" bIns="0">
+          <a:bodyPr wrap="square" lIns="0" tIns="0" rIns="0" bIns="0" anchor="t">
             <a:spAutoFit/>
           </a:bodyPr>
           <a:lstStyle/>
@@ -9329,6 +9478,7 @@
           <a:lstStyle/>
           <a:p>
             <a:pPr algn="ctr"/>
+            <a:endParaRPr/>
           </a:p>
         </p:txBody>
       </p:sp>
@@ -9349,7 +9499,7 @@
           <a:noFill/>
         </p:spPr>
         <p:txBody>
-          <a:bodyPr wrap="square" anchor="t" lIns="0" rIns="0" tIns="0" bIns="0">
+          <a:bodyPr wrap="square" lIns="0" tIns="0" rIns="0" bIns="0" anchor="t">
             <a:spAutoFit/>
           </a:bodyPr>
           <a:lstStyle/>
@@ -9394,7 +9544,7 @@
           <a:noFill/>
         </p:spPr>
         <p:txBody>
-          <a:bodyPr wrap="square" anchor="t" lIns="0" rIns="0" tIns="0" bIns="0">
+          <a:bodyPr wrap="square" lIns="0" tIns="0" rIns="0" bIns="0" anchor="t">
             <a:spAutoFit/>
           </a:bodyPr>
           <a:lstStyle/>
@@ -9463,6 +9613,7 @@
           <a:lstStyle/>
           <a:p>
             <a:pPr algn="ctr"/>
+            <a:endParaRPr/>
           </a:p>
         </p:txBody>
       </p:sp>
@@ -9507,6 +9658,7 @@
           <a:lstStyle/>
           <a:p>
             <a:pPr algn="ctr"/>
+            <a:endParaRPr/>
           </a:p>
         </p:txBody>
       </p:sp>
@@ -9529,9 +9681,27 @@
                 <a:tableStyleId>{5C22544A-7EE6-4342-B048-85BDC9FD1C3A}</a:tableStyleId>
               </a:tblPr>
               <a:tblGrid>
-                <a:gridCol w="4206240"/>
-                <a:gridCol w="1280160"/>
-                <a:gridCol w="5029200"/>
+                <a:gridCol w="4206240">
+                  <a:extLst>
+                    <a:ext uri="{9D8B030D-6E8A-4147-A177-3AD203B41FA5}">
+                      <a16:colId xmlns:a16="http://schemas.microsoft.com/office/drawing/2014/main" val="20000"/>
+                    </a:ext>
+                  </a:extLst>
+                </a:gridCol>
+                <a:gridCol w="1280160">
+                  <a:extLst>
+                    <a:ext uri="{9D8B030D-6E8A-4147-A177-3AD203B41FA5}">
+                      <a16:colId xmlns:a16="http://schemas.microsoft.com/office/drawing/2014/main" val="20001"/>
+                    </a:ext>
+                  </a:extLst>
+                </a:gridCol>
+                <a:gridCol w="5029200">
+                  <a:extLst>
+                    <a:ext uri="{9D8B030D-6E8A-4147-A177-3AD203B41FA5}">
+                      <a16:colId xmlns:a16="http://schemas.microsoft.com/office/drawing/2014/main" val="20002"/>
+                    </a:ext>
+                  </a:extLst>
+                </a:gridCol>
               </a:tblGrid>
               <a:tr h="475488">
                 <a:tc>
@@ -9603,6 +9773,11 @@
                     </a:solidFill>
                   </a:tcPr>
                 </a:tc>
+                <a:extLst>
+                  <a:ext uri="{0D108BD9-81ED-4DB2-BD59-A6C34878D82A}">
+                    <a16:rowId xmlns:a16="http://schemas.microsoft.com/office/drawing/2014/main" val="10000"/>
+                  </a:ext>
+                </a:extLst>
               </a:tr>
               <a:tr h="621792">
                 <a:tc>
@@ -9674,6 +9849,11 @@
                     </a:solidFill>
                   </a:tcPr>
                 </a:tc>
+                <a:extLst>
+                  <a:ext uri="{0D108BD9-81ED-4DB2-BD59-A6C34878D82A}">
+                    <a16:rowId xmlns:a16="http://schemas.microsoft.com/office/drawing/2014/main" val="10001"/>
+                  </a:ext>
+                </a:extLst>
               </a:tr>
               <a:tr h="621792">
                 <a:tc>
@@ -9745,6 +9925,11 @@
                     </a:solidFill>
                   </a:tcPr>
                 </a:tc>
+                <a:extLst>
+                  <a:ext uri="{0D108BD9-81ED-4DB2-BD59-A6C34878D82A}">
+                    <a16:rowId xmlns:a16="http://schemas.microsoft.com/office/drawing/2014/main" val="10002"/>
+                  </a:ext>
+                </a:extLst>
               </a:tr>
               <a:tr h="621792">
                 <a:tc>
@@ -9816,6 +10001,11 @@
                     </a:solidFill>
                   </a:tcPr>
                 </a:tc>
+                <a:extLst>
+                  <a:ext uri="{0D108BD9-81ED-4DB2-BD59-A6C34878D82A}">
+                    <a16:rowId xmlns:a16="http://schemas.microsoft.com/office/drawing/2014/main" val="10003"/>
+                  </a:ext>
+                </a:extLst>
               </a:tr>
               <a:tr h="621792">
                 <a:tc>
@@ -9887,6 +10077,11 @@
                     </a:solidFill>
                   </a:tcPr>
                 </a:tc>
+                <a:extLst>
+                  <a:ext uri="{0D108BD9-81ED-4DB2-BD59-A6C34878D82A}">
+                    <a16:rowId xmlns:a16="http://schemas.microsoft.com/office/drawing/2014/main" val="10004"/>
+                  </a:ext>
+                </a:extLst>
               </a:tr>
             </a:tbl>
           </a:graphicData>
@@ -9909,7 +10104,7 @@
           <a:noFill/>
         </p:spPr>
         <p:txBody>
-          <a:bodyPr wrap="square" anchor="t" lIns="0" rIns="0" tIns="0" bIns="0">
+          <a:bodyPr wrap="square" lIns="0" tIns="0" rIns="0" bIns="0" anchor="t">
             <a:spAutoFit/>
           </a:bodyPr>
           <a:lstStyle/>
@@ -9946,7 +10141,7 @@
 </file>
 
 <file path=ppt/slides/slide16.xml><?xml version="1.0" encoding="utf-8"?>
-<p:sld xmlns:a="http://schemas.openxmlformats.org/drawingml/2006/main" xmlns:p="http://schemas.openxmlformats.org/presentationml/2006/main" xmlns:r="http://schemas.openxmlformats.org/officeDocument/2006/relationships">
+<p:sld xmlns:a="http://schemas.openxmlformats.org/drawingml/2006/main" xmlns:r="http://schemas.openxmlformats.org/officeDocument/2006/relationships" xmlns:p="http://schemas.openxmlformats.org/presentationml/2006/main">
   <p:cSld>
     <p:bg>
       <p:bgPr>
@@ -9962,7 +10157,14 @@
         <p:cNvGrpSpPr/>
         <p:nvPr/>
       </p:nvGrpSpPr>
-      <p:grpSpPr/>
+      <p:grpSpPr>
+        <a:xfrm>
+          <a:off x="0" y="0"/>
+          <a:ext cx="0" cy="0"/>
+          <a:chOff x="0" y="0"/>
+          <a:chExt cx="0" cy="0"/>
+        </a:xfrm>
+      </p:grpSpPr>
       <p:sp>
         <p:nvSpPr>
           <p:cNvPr id="2" name="Rectangle 1"/>
@@ -10004,6 +10206,7 @@
           <a:lstStyle/>
           <a:p>
             <a:pPr algn="ctr"/>
+            <a:endParaRPr/>
           </a:p>
         </p:txBody>
       </p:sp>
@@ -10048,6 +10251,7 @@
           <a:lstStyle/>
           <a:p>
             <a:pPr algn="ctr"/>
+            <a:endParaRPr/>
           </a:p>
         </p:txBody>
       </p:sp>
@@ -10092,6 +10296,7 @@
           <a:lstStyle/>
           <a:p>
             <a:pPr algn="ctr"/>
+            <a:endParaRPr/>
           </a:p>
         </p:txBody>
       </p:sp>
@@ -10136,6 +10341,7 @@
           <a:lstStyle/>
           <a:p>
             <a:pPr algn="ctr"/>
+            <a:endParaRPr/>
           </a:p>
         </p:txBody>
       </p:sp>
@@ -10180,6 +10386,7 @@
           <a:lstStyle/>
           <a:p>
             <a:pPr algn="ctr"/>
+            <a:endParaRPr/>
           </a:p>
         </p:txBody>
       </p:sp>
@@ -10200,7 +10407,7 @@
           <a:noFill/>
         </p:spPr>
         <p:txBody>
-          <a:bodyPr wrap="square" anchor="t" lIns="0" rIns="0" tIns="0" bIns="0">
+          <a:bodyPr wrap="square" lIns="0" tIns="0" rIns="0" bIns="0" anchor="t">
             <a:spAutoFit/>
           </a:bodyPr>
           <a:lstStyle/>
@@ -10245,7 +10452,7 @@
           <a:noFill/>
         </p:spPr>
         <p:txBody>
-          <a:bodyPr wrap="square" anchor="t" lIns="0" rIns="0" tIns="0" bIns="0">
+          <a:bodyPr wrap="square" lIns="0" tIns="0" rIns="0" bIns="0" anchor="t">
             <a:spAutoFit/>
           </a:bodyPr>
           <a:lstStyle/>
@@ -10262,7 +10469,7 @@
               </a:spcAft>
             </a:pPr>
             <a:r>
-              <a:rPr sz="3400" b="1">
+              <a:rPr sz="3400" b="1" dirty="0">
                 <a:solidFill>
                   <a:srgbClr val="EAF3EF"/>
                 </a:solidFill>
@@ -10284,7 +10491,7 @@
               </a:spcAft>
             </a:pPr>
             <a:r>
-              <a:rPr sz="3400" b="1">
+              <a:rPr sz="3400" b="1" dirty="0">
                 <a:solidFill>
                   <a:srgbClr val="EAF3EF"/>
                 </a:solidFill>
@@ -10336,6 +10543,7 @@
           <a:lstStyle/>
           <a:p>
             <a:pPr algn="ctr"/>
+            <a:endParaRPr/>
           </a:p>
         </p:txBody>
       </p:sp>
@@ -10356,7 +10564,7 @@
           <a:noFill/>
         </p:spPr>
         <p:txBody>
-          <a:bodyPr wrap="square" anchor="t" lIns="0" rIns="0" tIns="0" bIns="0">
+          <a:bodyPr wrap="square" lIns="0" tIns="0" rIns="0" bIns="0" anchor="t">
             <a:spAutoFit/>
           </a:bodyPr>
           <a:lstStyle/>
@@ -10401,7 +10609,7 @@
           <a:noFill/>
         </p:spPr>
         <p:txBody>
-          <a:bodyPr wrap="square" anchor="t" lIns="0" rIns="0" tIns="0" bIns="0">
+          <a:bodyPr wrap="square" lIns="0" tIns="0" rIns="0" bIns="0" anchor="t">
             <a:spAutoFit/>
           </a:bodyPr>
           <a:lstStyle/>
@@ -10418,7 +10626,7 @@
               </a:spcAft>
             </a:pPr>
             <a:r>
-              <a:rPr sz="1300" b="1">
+              <a:rPr sz="1300" b="1" dirty="0">
                 <a:solidFill>
                   <a:srgbClr val="5C726A"/>
                 </a:solidFill>
@@ -10427,14 +10635,47 @@
               <a:t>Source    </a:t>
             </a:r>
             <a:r>
-              <a:rPr sz="1300" b="0">
+              <a:rPr sz="1300" b="0" dirty="0">
                 <a:solidFill>
                   <a:srgbClr val="00E676"/>
                 </a:solidFill>
                 <a:latin typeface="Consolas"/>
               </a:rPr>
-              <a:t>github.com/moneytosms/offlineid</a:t>
-            </a:r>
+              <a:t>github.com/</a:t>
+            </a:r>
+            <a:r>
+              <a:rPr sz="1300" b="0" dirty="0" err="1">
+                <a:solidFill>
+                  <a:srgbClr val="00E676"/>
+                </a:solidFill>
+                <a:latin typeface="Consolas"/>
+              </a:rPr>
+              <a:t>moneytosms</a:t>
+            </a:r>
+            <a:r>
+              <a:rPr sz="1300" b="0" dirty="0">
+                <a:solidFill>
+                  <a:srgbClr val="00E676"/>
+                </a:solidFill>
+                <a:latin typeface="Consolas"/>
+              </a:rPr>
+              <a:t>/</a:t>
+            </a:r>
+            <a:r>
+              <a:rPr sz="1300" b="0" dirty="0" err="1">
+                <a:solidFill>
+                  <a:srgbClr val="00E676"/>
+                </a:solidFill>
+                <a:latin typeface="Consolas"/>
+              </a:rPr>
+              <a:t>offlineid</a:t>
+            </a:r>
+            <a:endParaRPr sz="1300" b="0" dirty="0">
+              <a:solidFill>
+                <a:srgbClr val="00E676"/>
+              </a:solidFill>
+              <a:latin typeface="Consolas"/>
+            </a:endParaRPr>
           </a:p>
           <a:p>
             <a:pPr algn="l">
@@ -10449,7 +10690,7 @@
               </a:spcAft>
             </a:pPr>
             <a:r>
-              <a:rPr sz="1300" b="1">
+              <a:rPr sz="1300" b="1" dirty="0">
                 <a:solidFill>
                   <a:srgbClr val="5C726A"/>
                 </a:solidFill>
@@ -10458,27 +10699,363 @@
               <a:t>Release   </a:t>
             </a:r>
             <a:r>
-              <a:rPr sz="1300" b="0">
+              <a:rPr sz="1300" b="0" dirty="0">
                 <a:solidFill>
                   <a:srgbClr val="00E676"/>
                 </a:solidFill>
                 <a:latin typeface="Consolas"/>
               </a:rPr>
-              <a:t>github.com/moneytosms/offlineid/releases/tag/v1.0.0</a:t>
-            </a:r>
-          </a:p>
-        </p:txBody>
-      </p:sp>
-      <p:sp>
-        <p:nvSpPr>
-          <p:cNvPr id="12" name="TextBox 11"/>
+              <a:t>github.com/</a:t>
+            </a:r>
+            <a:r>
+              <a:rPr sz="1300" b="0" dirty="0" err="1">
+                <a:solidFill>
+                  <a:srgbClr val="00E676"/>
+                </a:solidFill>
+                <a:latin typeface="Consolas"/>
+              </a:rPr>
+              <a:t>moneytosms</a:t>
+            </a:r>
+            <a:r>
+              <a:rPr sz="1300" b="0" dirty="0">
+                <a:solidFill>
+                  <a:srgbClr val="00E676"/>
+                </a:solidFill>
+                <a:latin typeface="Consolas"/>
+              </a:rPr>
+              <a:t>/</a:t>
+            </a:r>
+            <a:r>
+              <a:rPr sz="1300" b="0" dirty="0" err="1">
+                <a:solidFill>
+                  <a:srgbClr val="00E676"/>
+                </a:solidFill>
+                <a:latin typeface="Consolas"/>
+              </a:rPr>
+              <a:t>offlineid</a:t>
+            </a:r>
+            <a:r>
+              <a:rPr sz="1300" b="0" dirty="0">
+                <a:solidFill>
+                  <a:srgbClr val="00E676"/>
+                </a:solidFill>
+                <a:latin typeface="Consolas"/>
+              </a:rPr>
+              <a:t>/releases/tag/v1.1.0</a:t>
+            </a:r>
+          </a:p>
+        </p:txBody>
+      </p:sp>
+    </p:spTree>
+  </p:cSld>
+  <p:clrMapOvr>
+    <a:masterClrMapping/>
+  </p:clrMapOvr>
+</p:sld>
+</file>
+
+<file path=ppt/slides/slide17.xml><?xml version="1.0" encoding="utf-8"?>
+<p:sld xmlns:a="http://schemas.openxmlformats.org/drawingml/2006/main" xmlns:r="http://schemas.openxmlformats.org/officeDocument/2006/relationships" xmlns:p="http://schemas.openxmlformats.org/presentationml/2006/main">
+  <p:cSld>
+    <p:bg>
+      <p:bgPr>
+        <a:solidFill>
+          <a:srgbClr val="0A0E0D"/>
+        </a:solidFill>
+        <a:effectLst/>
+      </p:bgPr>
+    </p:bg>
+    <p:spTree>
+      <p:nvGrpSpPr>
+        <p:cNvPr id="1" name="">
+          <a:extLst>
+            <a:ext uri="{FF2B5EF4-FFF2-40B4-BE49-F238E27FC236}">
+              <a16:creationId xmlns:a16="http://schemas.microsoft.com/office/drawing/2014/main" id="{FEFD81DD-C49B-E7E0-8728-F83D1B42BA7F}"/>
+            </a:ext>
+          </a:extLst>
+        </p:cNvPr>
+        <p:cNvGrpSpPr/>
+        <p:nvPr/>
+      </p:nvGrpSpPr>
+      <p:grpSpPr>
+        <a:xfrm>
+          <a:off x="0" y="0"/>
+          <a:ext cx="0" cy="0"/>
+          <a:chOff x="0" y="0"/>
+          <a:chExt cx="0" cy="0"/>
+        </a:xfrm>
+      </p:grpSpPr>
+      <p:sp>
+        <p:nvSpPr>
+          <p:cNvPr id="2" name="Rectangle 1">
+            <a:extLst>
+              <a:ext uri="{FF2B5EF4-FFF2-40B4-BE49-F238E27FC236}">
+                <a16:creationId xmlns:a16="http://schemas.microsoft.com/office/drawing/2014/main" id="{E4A7094E-049C-1451-1A34-C8B3C84A2ECF}"/>
+              </a:ext>
+            </a:extLst>
+          </p:cNvPr>
+          <p:cNvSpPr/>
+          <p:nvPr/>
+        </p:nvSpPr>
+        <p:spPr>
+          <a:xfrm>
+            <a:off x="0" y="0"/>
+            <a:ext cx="109728" cy="6858000"/>
+          </a:xfrm>
+          <a:prstGeom prst="rect">
+            <a:avLst/>
+          </a:prstGeom>
+          <a:solidFill>
+            <a:srgbClr val="00E676"/>
+          </a:solidFill>
+          <a:ln>
+            <a:noFill/>
+          </a:ln>
+          <a:effectLst/>
+        </p:spPr>
+        <p:style>
+          <a:lnRef idx="1">
+            <a:schemeClr val="accent1"/>
+          </a:lnRef>
+          <a:fillRef idx="3">
+            <a:schemeClr val="accent1"/>
+          </a:fillRef>
+          <a:effectRef idx="2">
+            <a:schemeClr val="accent1"/>
+          </a:effectRef>
+          <a:fontRef idx="minor">
+            <a:schemeClr val="lt1"/>
+          </a:fontRef>
+        </p:style>
+        <p:txBody>
+          <a:bodyPr rtlCol="0" anchor="ctr"/>
+          <a:lstStyle/>
+          <a:p>
+            <a:pPr algn="ctr"/>
+            <a:endParaRPr/>
+          </a:p>
+        </p:txBody>
+      </p:sp>
+      <p:sp>
+        <p:nvSpPr>
+          <p:cNvPr id="3" name="Rectangle 2">
+            <a:extLst>
+              <a:ext uri="{FF2B5EF4-FFF2-40B4-BE49-F238E27FC236}">
+                <a16:creationId xmlns:a16="http://schemas.microsoft.com/office/drawing/2014/main" id="{0B69AFA6-AF8B-202A-50CF-9CD965EE53B0}"/>
+              </a:ext>
+            </a:extLst>
+          </p:cNvPr>
+          <p:cNvSpPr/>
+          <p:nvPr/>
+        </p:nvSpPr>
+        <p:spPr>
+          <a:xfrm>
+            <a:off x="0" y="6748272"/>
+            <a:ext cx="12191695" cy="109728"/>
+          </a:xfrm>
+          <a:prstGeom prst="rect">
+            <a:avLst/>
+          </a:prstGeom>
+          <a:solidFill>
+            <a:srgbClr val="00E676"/>
+          </a:solidFill>
+          <a:ln>
+            <a:noFill/>
+          </a:ln>
+          <a:effectLst/>
+        </p:spPr>
+        <p:style>
+          <a:lnRef idx="1">
+            <a:schemeClr val="accent1"/>
+          </a:lnRef>
+          <a:fillRef idx="3">
+            <a:schemeClr val="accent1"/>
+          </a:fillRef>
+          <a:effectRef idx="2">
+            <a:schemeClr val="accent1"/>
+          </a:effectRef>
+          <a:fontRef idx="minor">
+            <a:schemeClr val="lt1"/>
+          </a:fontRef>
+        </p:style>
+        <p:txBody>
+          <a:bodyPr rtlCol="0" anchor="ctr"/>
+          <a:lstStyle/>
+          <a:p>
+            <a:pPr algn="ctr"/>
+            <a:endParaRPr/>
+          </a:p>
+        </p:txBody>
+      </p:sp>
+      <p:sp>
+        <p:nvSpPr>
+          <p:cNvPr id="4" name="Rectangle 3">
+            <a:extLst>
+              <a:ext uri="{FF2B5EF4-FFF2-40B4-BE49-F238E27FC236}">
+                <a16:creationId xmlns:a16="http://schemas.microsoft.com/office/drawing/2014/main" id="{70BDB871-AE93-4C87-9B09-73A96081E460}"/>
+              </a:ext>
+            </a:extLst>
+          </p:cNvPr>
+          <p:cNvSpPr/>
+          <p:nvPr/>
+        </p:nvSpPr>
+        <p:spPr>
+          <a:xfrm>
+            <a:off x="11185855" y="6748272"/>
+            <a:ext cx="1005840" cy="109728"/>
+          </a:xfrm>
+          <a:prstGeom prst="rect">
+            <a:avLst/>
+          </a:prstGeom>
+          <a:solidFill>
+            <a:srgbClr val="00E676"/>
+          </a:solidFill>
+          <a:ln>
+            <a:noFill/>
+          </a:ln>
+          <a:effectLst/>
+        </p:spPr>
+        <p:style>
+          <a:lnRef idx="1">
+            <a:schemeClr val="accent1"/>
+          </a:lnRef>
+          <a:fillRef idx="3">
+            <a:schemeClr val="accent1"/>
+          </a:fillRef>
+          <a:effectRef idx="2">
+            <a:schemeClr val="accent1"/>
+          </a:effectRef>
+          <a:fontRef idx="minor">
+            <a:schemeClr val="lt1"/>
+          </a:fontRef>
+        </p:style>
+        <p:txBody>
+          <a:bodyPr rtlCol="0" anchor="ctr"/>
+          <a:lstStyle/>
+          <a:p>
+            <a:pPr algn="ctr"/>
+            <a:endParaRPr/>
+          </a:p>
+        </p:txBody>
+      </p:sp>
+      <p:sp>
+        <p:nvSpPr>
+          <p:cNvPr id="5" name="Rectangle 4">
+            <a:extLst>
+              <a:ext uri="{FF2B5EF4-FFF2-40B4-BE49-F238E27FC236}">
+                <a16:creationId xmlns:a16="http://schemas.microsoft.com/office/drawing/2014/main" id="{A58686CB-EAC9-2BB3-84F3-54F6760DD7BD}"/>
+              </a:ext>
+            </a:extLst>
+          </p:cNvPr>
+          <p:cNvSpPr/>
+          <p:nvPr/>
+        </p:nvSpPr>
+        <p:spPr>
+          <a:xfrm>
+            <a:off x="12081967" y="5852160"/>
+            <a:ext cx="109728" cy="1005840"/>
+          </a:xfrm>
+          <a:prstGeom prst="rect">
+            <a:avLst/>
+          </a:prstGeom>
+          <a:solidFill>
+            <a:srgbClr val="00E676"/>
+          </a:solidFill>
+          <a:ln>
+            <a:noFill/>
+          </a:ln>
+          <a:effectLst/>
+        </p:spPr>
+        <p:style>
+          <a:lnRef idx="1">
+            <a:schemeClr val="accent1"/>
+          </a:lnRef>
+          <a:fillRef idx="3">
+            <a:schemeClr val="accent1"/>
+          </a:fillRef>
+          <a:effectRef idx="2">
+            <a:schemeClr val="accent1"/>
+          </a:effectRef>
+          <a:fontRef idx="minor">
+            <a:schemeClr val="lt1"/>
+          </a:fontRef>
+        </p:style>
+        <p:txBody>
+          <a:bodyPr rtlCol="0" anchor="ctr"/>
+          <a:lstStyle/>
+          <a:p>
+            <a:pPr algn="ctr"/>
+            <a:endParaRPr/>
+          </a:p>
+        </p:txBody>
+      </p:sp>
+      <p:sp>
+        <p:nvSpPr>
+          <p:cNvPr id="6" name="Rectangle 5">
+            <a:extLst>
+              <a:ext uri="{FF2B5EF4-FFF2-40B4-BE49-F238E27FC236}">
+                <a16:creationId xmlns:a16="http://schemas.microsoft.com/office/drawing/2014/main" id="{361DB518-F8EA-3E14-CA99-751BC951045E}"/>
+              </a:ext>
+            </a:extLst>
+          </p:cNvPr>
+          <p:cNvSpPr/>
+          <p:nvPr/>
+        </p:nvSpPr>
+        <p:spPr>
+          <a:xfrm flipH="1">
+            <a:off x="850392" y="502920"/>
+            <a:ext cx="45719" cy="310896"/>
+          </a:xfrm>
+          <a:prstGeom prst="rect">
+            <a:avLst/>
+          </a:prstGeom>
+          <a:solidFill>
+            <a:srgbClr val="00E676"/>
+          </a:solidFill>
+          <a:ln>
+            <a:noFill/>
+          </a:ln>
+          <a:effectLst/>
+        </p:spPr>
+        <p:style>
+          <a:lnRef idx="1">
+            <a:schemeClr val="accent1"/>
+          </a:lnRef>
+          <a:fillRef idx="3">
+            <a:schemeClr val="accent1"/>
+          </a:fillRef>
+          <a:effectRef idx="2">
+            <a:schemeClr val="accent1"/>
+          </a:effectRef>
+          <a:fontRef idx="minor">
+            <a:schemeClr val="lt1"/>
+          </a:fontRef>
+        </p:style>
+        <p:txBody>
+          <a:bodyPr rtlCol="0" anchor="ctr"/>
+          <a:lstStyle/>
+          <a:p>
+            <a:pPr algn="ctr"/>
+            <a:endParaRPr/>
+          </a:p>
+        </p:txBody>
+      </p:sp>
+      <p:sp>
+        <p:nvSpPr>
+          <p:cNvPr id="7" name="TextBox 6">
+            <a:extLst>
+              <a:ext uri="{FF2B5EF4-FFF2-40B4-BE49-F238E27FC236}">
+                <a16:creationId xmlns:a16="http://schemas.microsoft.com/office/drawing/2014/main" id="{D29F3190-1125-BA1A-762B-97BAEB12EDB5}"/>
+              </a:ext>
+            </a:extLst>
+          </p:cNvPr>
           <p:cNvSpPr txBox="1"/>
           <p:nvPr/>
         </p:nvSpPr>
         <p:spPr>
           <a:xfrm>
-            <a:off x="822960" y="5897880"/>
-            <a:ext cx="10515600" cy="457200"/>
+            <a:off x="1024128" y="502920"/>
+            <a:ext cx="10515600" cy="246221"/>
           </a:xfrm>
           <a:prstGeom prst="rect">
             <a:avLst/>
@@ -10486,7 +11063,7 @@
           <a:noFill/>
         </p:spPr>
         <p:txBody>
-          <a:bodyPr wrap="square" anchor="t" lIns="0" rIns="0" tIns="0" bIns="0">
+          <a:bodyPr wrap="square" lIns="0" tIns="0" rIns="0" bIns="0" anchor="t">
             <a:spAutoFit/>
           </a:bodyPr>
           <a:lstStyle/>
@@ -10503,18 +11080,294 @@
               </a:spcAft>
             </a:pPr>
             <a:r>
-              <a:rPr sz="1500" b="1">
+              <a:rPr sz="1600" b="1" dirty="0">
+                <a:solidFill>
+                  <a:srgbClr val="00E676"/>
+                </a:solidFill>
+                <a:latin typeface="Consolas"/>
+              </a:rPr>
+              <a:t>OFFLINE·ID</a:t>
+            </a:r>
+          </a:p>
+        </p:txBody>
+      </p:sp>
+      <p:sp>
+        <p:nvSpPr>
+          <p:cNvPr id="9" name="Rectangle 8">
+            <a:extLst>
+              <a:ext uri="{FF2B5EF4-FFF2-40B4-BE49-F238E27FC236}">
+                <a16:creationId xmlns:a16="http://schemas.microsoft.com/office/drawing/2014/main" id="{FDF1D2F2-4DFA-F45F-7BC3-DAB593B885A3}"/>
+              </a:ext>
+            </a:extLst>
+          </p:cNvPr>
+          <p:cNvSpPr/>
+          <p:nvPr/>
+        </p:nvSpPr>
+        <p:spPr>
+          <a:xfrm>
+            <a:off x="822960" y="922877"/>
+            <a:ext cx="1828800" cy="45720"/>
+          </a:xfrm>
+          <a:prstGeom prst="rect">
+            <a:avLst/>
+          </a:prstGeom>
+          <a:solidFill>
+            <a:srgbClr val="00E676"/>
+          </a:solidFill>
+          <a:ln>
+            <a:noFill/>
+          </a:ln>
+          <a:effectLst/>
+        </p:spPr>
+        <p:style>
+          <a:lnRef idx="1">
+            <a:schemeClr val="accent1"/>
+          </a:lnRef>
+          <a:fillRef idx="3">
+            <a:schemeClr val="accent1"/>
+          </a:fillRef>
+          <a:effectRef idx="2">
+            <a:schemeClr val="accent1"/>
+          </a:effectRef>
+          <a:fontRef idx="minor">
+            <a:schemeClr val="lt1"/>
+          </a:fontRef>
+        </p:style>
+        <p:txBody>
+          <a:bodyPr rtlCol="0" anchor="ctr"/>
+          <a:lstStyle/>
+          <a:p>
+            <a:pPr algn="ctr"/>
+            <a:endParaRPr/>
+          </a:p>
+        </p:txBody>
+      </p:sp>
+      <p:sp>
+        <p:nvSpPr>
+          <p:cNvPr id="12" name="TextBox 11">
+            <a:extLst>
+              <a:ext uri="{FF2B5EF4-FFF2-40B4-BE49-F238E27FC236}">
+                <a16:creationId xmlns:a16="http://schemas.microsoft.com/office/drawing/2014/main" id="{102FB7E6-F9E4-843C-B021-15991EDB5227}"/>
+              </a:ext>
+            </a:extLst>
+          </p:cNvPr>
+          <p:cNvSpPr txBox="1"/>
+          <p:nvPr/>
+        </p:nvSpPr>
+        <p:spPr>
+          <a:xfrm>
+            <a:off x="822960" y="5897880"/>
+            <a:ext cx="10515600" cy="512961"/>
+          </a:xfrm>
+          <a:prstGeom prst="rect">
+            <a:avLst/>
+          </a:prstGeom>
+          <a:noFill/>
+        </p:spPr>
+        <p:txBody>
+          <a:bodyPr wrap="square" lIns="0" tIns="0" rIns="0" bIns="0" anchor="t">
+            <a:spAutoFit/>
+          </a:bodyPr>
+          <a:lstStyle/>
+          <a:p>
+            <a:pPr algn="l">
+              <a:lnSpc>
+                <a:spcPct val="100000"/>
+              </a:lnSpc>
+              <a:spcBef>
+                <a:spcPts val="0"/>
+              </a:spcBef>
+              <a:spcAft>
+                <a:spcPts val="400"/>
+              </a:spcAft>
+            </a:pPr>
+            <a:r>
+              <a:rPr sz="1500" b="1" dirty="0">
                 <a:solidFill>
                   <a:srgbClr val="EAF3EF"/>
                 </a:solidFill>
                 <a:latin typeface="Segoe UI"/>
               </a:rPr>
-              <a:t>Thank you   ·   Q &amp; A</a:t>
+              <a:t>Thank you   ·</a:t>
+            </a:r>
+            <a:endParaRPr lang="en-IN" sz="1500" b="1" dirty="0">
+              <a:solidFill>
+                <a:srgbClr val="EAF3EF"/>
+              </a:solidFill>
+              <a:latin typeface="Segoe UI"/>
+            </a:endParaRPr>
+          </a:p>
+          <a:p>
+            <a:pPr algn="l">
+              <a:lnSpc>
+                <a:spcPct val="100000"/>
+              </a:lnSpc>
+              <a:spcBef>
+                <a:spcPts val="0"/>
+              </a:spcBef>
+              <a:spcAft>
+                <a:spcPts val="400"/>
+              </a:spcAft>
+            </a:pPr>
+            <a:endParaRPr sz="1500" b="1" dirty="0">
+              <a:solidFill>
+                <a:srgbClr val="EAF3EF"/>
+              </a:solidFill>
+              <a:latin typeface="Segoe UI"/>
+            </a:endParaRPr>
+          </a:p>
+        </p:txBody>
+      </p:sp>
+      <p:sp>
+        <p:nvSpPr>
+          <p:cNvPr id="13" name="TextBox 12">
+            <a:extLst>
+              <a:ext uri="{FF2B5EF4-FFF2-40B4-BE49-F238E27FC236}">
+                <a16:creationId xmlns:a16="http://schemas.microsoft.com/office/drawing/2014/main" id="{E60432CB-E180-5F2B-22DE-57A20E3F4419}"/>
+              </a:ext>
+            </a:extLst>
+          </p:cNvPr>
+          <p:cNvSpPr txBox="1"/>
+          <p:nvPr/>
+        </p:nvSpPr>
+        <p:spPr>
+          <a:xfrm>
+            <a:off x="822960" y="1207008"/>
+            <a:ext cx="5905527" cy="615553"/>
+          </a:xfrm>
+          <a:prstGeom prst="rect">
+            <a:avLst/>
+          </a:prstGeom>
+          <a:noFill/>
+        </p:spPr>
+        <p:txBody>
+          <a:bodyPr wrap="none" rtlCol="0">
+            <a:spAutoFit/>
+          </a:bodyPr>
+          <a:lstStyle/>
+          <a:p>
+            <a:r>
+              <a:rPr lang="en-IN" sz="3400" u="sng" dirty="0">
+                <a:solidFill>
+                  <a:schemeClr val="bg2"/>
+                </a:solidFill>
+                <a:latin typeface="Segoe UI" panose="020B0502040204020203" pitchFamily="34" charset="0"/>
+                <a:cs typeface="Segoe UI" panose="020B0502040204020203" pitchFamily="34" charset="0"/>
+              </a:rPr>
+              <a:t>Submitted by: Team </a:t>
+            </a:r>
+            <a:r>
+              <a:rPr lang="en-IN" sz="3400" b="1" i="1" u="sng" dirty="0">
+                <a:solidFill>
+                  <a:schemeClr val="bg2"/>
+                </a:solidFill>
+                <a:latin typeface="Segoe UI" panose="020B0502040204020203" pitchFamily="34" charset="0"/>
+                <a:cs typeface="Segoe UI" panose="020B0502040204020203" pitchFamily="34" charset="0"/>
+              </a:rPr>
+              <a:t>Optional</a:t>
+            </a:r>
+          </a:p>
+        </p:txBody>
+      </p:sp>
+      <p:sp>
+        <p:nvSpPr>
+          <p:cNvPr id="14" name="TextBox 13">
+            <a:extLst>
+              <a:ext uri="{FF2B5EF4-FFF2-40B4-BE49-F238E27FC236}">
+                <a16:creationId xmlns:a16="http://schemas.microsoft.com/office/drawing/2014/main" id="{50504ED5-A037-F7B0-64D5-776075208A21}"/>
+              </a:ext>
+            </a:extLst>
+          </p:cNvPr>
+          <p:cNvSpPr txBox="1"/>
+          <p:nvPr/>
+        </p:nvSpPr>
+        <p:spPr>
+          <a:xfrm>
+            <a:off x="2031339" y="2303954"/>
+            <a:ext cx="7232904" cy="2062103"/>
+          </a:xfrm>
+          <a:prstGeom prst="rect">
+            <a:avLst/>
+          </a:prstGeom>
+          <a:noFill/>
+        </p:spPr>
+        <p:txBody>
+          <a:bodyPr wrap="square" rtlCol="0">
+            <a:spAutoFit/>
+          </a:bodyPr>
+          <a:lstStyle/>
+          <a:p>
+            <a:pPr marL="342900" indent="-342900">
+              <a:buFont typeface="+mj-lt"/>
+              <a:buAutoNum type="arabicPeriod"/>
+            </a:pPr>
+            <a:r>
+              <a:rPr lang="en-IN" sz="3200" dirty="0">
+                <a:solidFill>
+                  <a:schemeClr val="bg1"/>
+                </a:solidFill>
+                <a:latin typeface="Segoe UI" panose="020B0502040204020203" pitchFamily="34" charset="0"/>
+                <a:cs typeface="Segoe UI" panose="020B0502040204020203" pitchFamily="34" charset="0"/>
+              </a:rPr>
+              <a:t>Srimoneyshankar Ajith</a:t>
+            </a:r>
+          </a:p>
+          <a:p>
+            <a:pPr marL="342900" indent="-342900">
+              <a:buFont typeface="+mj-lt"/>
+              <a:buAutoNum type="arabicPeriod"/>
+            </a:pPr>
+            <a:r>
+              <a:rPr lang="en-IN" sz="3200" dirty="0">
+                <a:solidFill>
+                  <a:schemeClr val="bg1"/>
+                </a:solidFill>
+                <a:latin typeface="Segoe UI" panose="020B0502040204020203" pitchFamily="34" charset="0"/>
+                <a:cs typeface="Segoe UI" panose="020B0502040204020203" pitchFamily="34" charset="0"/>
+              </a:rPr>
+              <a:t>Akshay V.S</a:t>
+            </a:r>
+          </a:p>
+          <a:p>
+            <a:pPr marL="342900" indent="-342900">
+              <a:buFont typeface="+mj-lt"/>
+              <a:buAutoNum type="arabicPeriod"/>
+            </a:pPr>
+            <a:r>
+              <a:rPr lang="en-IN" sz="3200" dirty="0">
+                <a:solidFill>
+                  <a:schemeClr val="bg1"/>
+                </a:solidFill>
+                <a:latin typeface="Segoe UI" panose="020B0502040204020203" pitchFamily="34" charset="0"/>
+                <a:cs typeface="Segoe UI" panose="020B0502040204020203" pitchFamily="34" charset="0"/>
+              </a:rPr>
+              <a:t>Nidhi Rakesh</a:t>
+            </a:r>
+          </a:p>
+          <a:p>
+            <a:pPr marL="342900" indent="-342900">
+              <a:buFont typeface="+mj-lt"/>
+              <a:buAutoNum type="arabicPeriod"/>
+            </a:pPr>
+            <a:r>
+              <a:rPr lang="en-IN" sz="3200" dirty="0">
+                <a:solidFill>
+                  <a:schemeClr val="bg1"/>
+                </a:solidFill>
+                <a:latin typeface="Segoe UI" panose="020B0502040204020203" pitchFamily="34" charset="0"/>
+                <a:cs typeface="Segoe UI" panose="020B0502040204020203" pitchFamily="34" charset="0"/>
+              </a:rPr>
+              <a:t>Bharadwaj B Chand</a:t>
             </a:r>
           </a:p>
         </p:txBody>
       </p:sp>
     </p:spTree>
+    <p:extLst>
+      <p:ext uri="{BB962C8B-B14F-4D97-AF65-F5344CB8AC3E}">
+        <p14:creationId xmlns:p14="http://schemas.microsoft.com/office/powerpoint/2010/main" val="2597690401"/>
+      </p:ext>
+    </p:extLst>
   </p:cSld>
   <p:clrMapOvr>
     <a:masterClrMapping/>
@@ -10523,7 +11376,7 @@
 </file>
 
 <file path=ppt/slides/slide2.xml><?xml version="1.0" encoding="utf-8"?>
-<p:sld xmlns:a="http://schemas.openxmlformats.org/drawingml/2006/main" xmlns:p="http://schemas.openxmlformats.org/presentationml/2006/main" xmlns:r="http://schemas.openxmlformats.org/officeDocument/2006/relationships">
+<p:sld xmlns:a="http://schemas.openxmlformats.org/drawingml/2006/main" xmlns:r="http://schemas.openxmlformats.org/officeDocument/2006/relationships" xmlns:p="http://schemas.openxmlformats.org/presentationml/2006/main">
   <p:cSld>
     <p:bg>
       <p:bgPr>
@@ -10539,7 +11392,14 @@
         <p:cNvGrpSpPr/>
         <p:nvPr/>
       </p:nvGrpSpPr>
-      <p:grpSpPr/>
+      <p:grpSpPr>
+        <a:xfrm>
+          <a:off x="0" y="0"/>
+          <a:ext cx="0" cy="0"/>
+          <a:chOff x="0" y="0"/>
+          <a:chExt cx="0" cy="0"/>
+        </a:xfrm>
+      </p:grpSpPr>
       <p:sp>
         <p:nvSpPr>
           <p:cNvPr id="2" name="Rectangle 1"/>
@@ -10581,6 +11441,7 @@
           <a:lstStyle/>
           <a:p>
             <a:pPr algn="ctr"/>
+            <a:endParaRPr/>
           </a:p>
         </p:txBody>
       </p:sp>
@@ -10625,6 +11486,7 @@
           <a:lstStyle/>
           <a:p>
             <a:pPr algn="ctr"/>
+            <a:endParaRPr/>
           </a:p>
         </p:txBody>
       </p:sp>
@@ -10669,6 +11531,7 @@
           <a:lstStyle/>
           <a:p>
             <a:pPr algn="ctr"/>
+            <a:endParaRPr/>
           </a:p>
         </p:txBody>
       </p:sp>
@@ -10689,7 +11552,7 @@
           <a:noFill/>
         </p:spPr>
         <p:txBody>
-          <a:bodyPr wrap="square" anchor="t" lIns="0" rIns="0" tIns="0" bIns="0">
+          <a:bodyPr wrap="square" lIns="0" tIns="0" rIns="0" bIns="0" anchor="t">
             <a:spAutoFit/>
           </a:bodyPr>
           <a:lstStyle/>
@@ -10743,7 +11606,7 @@
           <a:noFill/>
         </p:spPr>
         <p:txBody>
-          <a:bodyPr wrap="square" anchor="t" lIns="0" rIns="0" tIns="0" bIns="0">
+          <a:bodyPr wrap="square" lIns="0" tIns="0" rIns="0" bIns="0" anchor="t">
             <a:spAutoFit/>
           </a:bodyPr>
           <a:lstStyle/>
@@ -10812,6 +11675,7 @@
           <a:lstStyle/>
           <a:p>
             <a:pPr algn="ctr"/>
+            <a:endParaRPr/>
           </a:p>
         </p:txBody>
       </p:sp>
@@ -10832,7 +11696,7 @@
           <a:noFill/>
         </p:spPr>
         <p:txBody>
-          <a:bodyPr wrap="square" anchor="t" lIns="0" rIns="0" tIns="0" bIns="0">
+          <a:bodyPr wrap="square" lIns="0" tIns="0" rIns="0" bIns="0" anchor="t">
             <a:spAutoFit/>
           </a:bodyPr>
           <a:lstStyle/>
@@ -10877,7 +11741,7 @@
           <a:noFill/>
         </p:spPr>
         <p:txBody>
-          <a:bodyPr wrap="square" anchor="t" lIns="0" rIns="0" tIns="0" bIns="0">
+          <a:bodyPr wrap="square" lIns="0" tIns="0" rIns="0" bIns="0" anchor="t">
             <a:spAutoFit/>
           </a:bodyPr>
           <a:lstStyle/>
@@ -10946,6 +11810,7 @@
           <a:lstStyle/>
           <a:p>
             <a:pPr algn="ctr"/>
+            <a:endParaRPr/>
           </a:p>
         </p:txBody>
       </p:sp>
@@ -10990,6 +11855,7 @@
           <a:lstStyle/>
           <a:p>
             <a:pPr algn="ctr"/>
+            <a:endParaRPr/>
           </a:p>
         </p:txBody>
       </p:sp>
@@ -11010,7 +11876,7 @@
           <a:noFill/>
         </p:spPr>
         <p:txBody>
-          <a:bodyPr wrap="square" anchor="t" lIns="0" rIns="0" tIns="0" bIns="0">
+          <a:bodyPr wrap="square" lIns="0" tIns="0" rIns="0" bIns="0" anchor="t">
             <a:spAutoFit/>
           </a:bodyPr>
           <a:lstStyle/>
@@ -11259,6 +12125,7 @@
           <a:lstStyle/>
           <a:p>
             <a:pPr algn="ctr"/>
+            <a:endParaRPr/>
           </a:p>
         </p:txBody>
       </p:sp>
@@ -11303,6 +12170,7 @@
           <a:lstStyle/>
           <a:p>
             <a:pPr algn="ctr"/>
+            <a:endParaRPr/>
           </a:p>
         </p:txBody>
       </p:sp>
@@ -11323,7 +12191,7 @@
           <a:noFill/>
         </p:spPr>
         <p:txBody>
-          <a:bodyPr wrap="square" anchor="ctr" lIns="0" rIns="0" tIns="0" bIns="0">
+          <a:bodyPr wrap="square" lIns="0" tIns="0" rIns="0" bIns="0" anchor="ctr">
             <a:spAutoFit/>
           </a:bodyPr>
           <a:lstStyle/>
@@ -11369,7 +12237,7 @@
 </file>
 
 <file path=ppt/slides/slide3.xml><?xml version="1.0" encoding="utf-8"?>
-<p:sld xmlns:a="http://schemas.openxmlformats.org/drawingml/2006/main" xmlns:p="http://schemas.openxmlformats.org/presentationml/2006/main" xmlns:r="http://schemas.openxmlformats.org/officeDocument/2006/relationships">
+<p:sld xmlns:a="http://schemas.openxmlformats.org/drawingml/2006/main" xmlns:r="http://schemas.openxmlformats.org/officeDocument/2006/relationships" xmlns:p="http://schemas.openxmlformats.org/presentationml/2006/main">
   <p:cSld>
     <p:bg>
       <p:bgPr>
@@ -11385,7 +12253,14 @@
         <p:cNvGrpSpPr/>
         <p:nvPr/>
       </p:nvGrpSpPr>
-      <p:grpSpPr/>
+      <p:grpSpPr>
+        <a:xfrm>
+          <a:off x="0" y="0"/>
+          <a:ext cx="0" cy="0"/>
+          <a:chOff x="0" y="0"/>
+          <a:chExt cx="0" cy="0"/>
+        </a:xfrm>
+      </p:grpSpPr>
       <p:sp>
         <p:nvSpPr>
           <p:cNvPr id="2" name="Rectangle 1"/>
@@ -11427,6 +12302,7 @@
           <a:lstStyle/>
           <a:p>
             <a:pPr algn="ctr"/>
+            <a:endParaRPr/>
           </a:p>
         </p:txBody>
       </p:sp>
@@ -11471,6 +12347,7 @@
           <a:lstStyle/>
           <a:p>
             <a:pPr algn="ctr"/>
+            <a:endParaRPr/>
           </a:p>
         </p:txBody>
       </p:sp>
@@ -11515,6 +12392,7 @@
           <a:lstStyle/>
           <a:p>
             <a:pPr algn="ctr"/>
+            <a:endParaRPr/>
           </a:p>
         </p:txBody>
       </p:sp>
@@ -11535,7 +12413,7 @@
           <a:noFill/>
         </p:spPr>
         <p:txBody>
-          <a:bodyPr wrap="square" anchor="t" lIns="0" rIns="0" tIns="0" bIns="0">
+          <a:bodyPr wrap="square" lIns="0" tIns="0" rIns="0" bIns="0" anchor="t">
             <a:spAutoFit/>
           </a:bodyPr>
           <a:lstStyle/>
@@ -11589,7 +12467,7 @@
           <a:noFill/>
         </p:spPr>
         <p:txBody>
-          <a:bodyPr wrap="square" anchor="t" lIns="0" rIns="0" tIns="0" bIns="0">
+          <a:bodyPr wrap="square" lIns="0" tIns="0" rIns="0" bIns="0" anchor="t">
             <a:spAutoFit/>
           </a:bodyPr>
           <a:lstStyle/>
@@ -11658,6 +12536,7 @@
           <a:lstStyle/>
           <a:p>
             <a:pPr algn="ctr"/>
+            <a:endParaRPr/>
           </a:p>
         </p:txBody>
       </p:sp>
@@ -11678,7 +12557,7 @@
           <a:noFill/>
         </p:spPr>
         <p:txBody>
-          <a:bodyPr wrap="square" anchor="t" lIns="0" rIns="0" tIns="0" bIns="0">
+          <a:bodyPr wrap="square" lIns="0" tIns="0" rIns="0" bIns="0" anchor="t">
             <a:spAutoFit/>
           </a:bodyPr>
           <a:lstStyle/>
@@ -11723,7 +12602,7 @@
           <a:noFill/>
         </p:spPr>
         <p:txBody>
-          <a:bodyPr wrap="square" anchor="t" lIns="0" rIns="0" tIns="0" bIns="0">
+          <a:bodyPr wrap="square" lIns="0" tIns="0" rIns="0" bIns="0" anchor="t">
             <a:spAutoFit/>
           </a:bodyPr>
           <a:lstStyle/>
@@ -11792,6 +12671,7 @@
           <a:lstStyle/>
           <a:p>
             <a:pPr algn="ctr"/>
+            <a:endParaRPr/>
           </a:p>
         </p:txBody>
       </p:sp>
@@ -11836,6 +12716,7 @@
           <a:lstStyle/>
           <a:p>
             <a:pPr algn="ctr"/>
+            <a:endParaRPr/>
           </a:p>
         </p:txBody>
       </p:sp>
@@ -11856,7 +12737,7 @@
           <a:noFill/>
         </p:spPr>
         <p:txBody>
-          <a:bodyPr wrap="square" anchor="t" lIns="0" rIns="0" tIns="0" bIns="0">
+          <a:bodyPr wrap="square" lIns="0" tIns="0" rIns="0" bIns="0" anchor="t">
             <a:spAutoFit/>
           </a:bodyPr>
           <a:lstStyle/>
@@ -11963,6 +12844,7 @@
           <a:lstStyle/>
           <a:p>
             <a:pPr algn="ctr"/>
+            <a:endParaRPr/>
           </a:p>
         </p:txBody>
       </p:sp>
@@ -12007,6 +12889,7 @@
           <a:lstStyle/>
           <a:p>
             <a:pPr algn="ctr"/>
+            <a:endParaRPr/>
           </a:p>
         </p:txBody>
       </p:sp>
@@ -12027,7 +12910,7 @@
           <a:noFill/>
         </p:spPr>
         <p:txBody>
-          <a:bodyPr wrap="square" anchor="t" lIns="0" rIns="0" tIns="0" bIns="0">
+          <a:bodyPr wrap="square" lIns="0" tIns="0" rIns="0" bIns="0" anchor="t">
             <a:spAutoFit/>
           </a:bodyPr>
           <a:lstStyle/>
@@ -12121,6 +13004,7 @@
           <a:lstStyle/>
           <a:p>
             <a:pPr algn="ctr"/>
+            <a:endParaRPr/>
           </a:p>
         </p:txBody>
       </p:sp>
@@ -12165,6 +13049,7 @@
           <a:lstStyle/>
           <a:p>
             <a:pPr algn="ctr"/>
+            <a:endParaRPr/>
           </a:p>
         </p:txBody>
       </p:sp>
@@ -12185,7 +13070,7 @@
           <a:noFill/>
         </p:spPr>
         <p:txBody>
-          <a:bodyPr wrap="square" anchor="t" lIns="0" rIns="0" tIns="0" bIns="0">
+          <a:bodyPr wrap="square" lIns="0" tIns="0" rIns="0" bIns="0" anchor="t">
             <a:spAutoFit/>
           </a:bodyPr>
           <a:lstStyle/>
@@ -12279,6 +13164,7 @@
           <a:lstStyle/>
           <a:p>
             <a:pPr algn="ctr"/>
+            <a:endParaRPr/>
           </a:p>
         </p:txBody>
       </p:sp>
@@ -12323,6 +13209,7 @@
           <a:lstStyle/>
           <a:p>
             <a:pPr algn="ctr"/>
+            <a:endParaRPr/>
           </a:p>
         </p:txBody>
       </p:sp>
@@ -12343,7 +13230,7 @@
           <a:noFill/>
         </p:spPr>
         <p:txBody>
-          <a:bodyPr wrap="square" anchor="t" lIns="0" rIns="0" tIns="0" bIns="0">
+          <a:bodyPr wrap="square" lIns="0" tIns="0" rIns="0" bIns="0" anchor="t">
             <a:spAutoFit/>
           </a:bodyPr>
           <a:lstStyle/>
@@ -12437,6 +13324,7 @@
           <a:lstStyle/>
           <a:p>
             <a:pPr algn="ctr"/>
+            <a:endParaRPr/>
           </a:p>
         </p:txBody>
       </p:sp>
@@ -12481,6 +13369,7 @@
           <a:lstStyle/>
           <a:p>
             <a:pPr algn="ctr"/>
+            <a:endParaRPr/>
           </a:p>
         </p:txBody>
       </p:sp>
@@ -12501,7 +13390,7 @@
           <a:noFill/>
         </p:spPr>
         <p:txBody>
-          <a:bodyPr wrap="square" anchor="t" lIns="0" rIns="0" tIns="0" bIns="0">
+          <a:bodyPr wrap="square" lIns="0" tIns="0" rIns="0" bIns="0" anchor="t">
             <a:spAutoFit/>
           </a:bodyPr>
           <a:lstStyle/>
@@ -12561,7 +13450,7 @@
 </file>
 
 <file path=ppt/slides/slide4.xml><?xml version="1.0" encoding="utf-8"?>
-<p:sld xmlns:a="http://schemas.openxmlformats.org/drawingml/2006/main" xmlns:p="http://schemas.openxmlformats.org/presentationml/2006/main" xmlns:r="http://schemas.openxmlformats.org/officeDocument/2006/relationships">
+<p:sld xmlns:a="http://schemas.openxmlformats.org/drawingml/2006/main" xmlns:r="http://schemas.openxmlformats.org/officeDocument/2006/relationships" xmlns:p="http://schemas.openxmlformats.org/presentationml/2006/main">
   <p:cSld>
     <p:bg>
       <p:bgPr>
@@ -12577,7 +13466,14 @@
         <p:cNvGrpSpPr/>
         <p:nvPr/>
       </p:nvGrpSpPr>
-      <p:grpSpPr/>
+      <p:grpSpPr>
+        <a:xfrm>
+          <a:off x="0" y="0"/>
+          <a:ext cx="0" cy="0"/>
+          <a:chOff x="0" y="0"/>
+          <a:chExt cx="0" cy="0"/>
+        </a:xfrm>
+      </p:grpSpPr>
       <p:sp>
         <p:nvSpPr>
           <p:cNvPr id="2" name="Rectangle 1"/>
@@ -12619,6 +13515,7 @@
           <a:lstStyle/>
           <a:p>
             <a:pPr algn="ctr"/>
+            <a:endParaRPr/>
           </a:p>
         </p:txBody>
       </p:sp>
@@ -12663,6 +13560,7 @@
           <a:lstStyle/>
           <a:p>
             <a:pPr algn="ctr"/>
+            <a:endParaRPr/>
           </a:p>
         </p:txBody>
       </p:sp>
@@ -12707,6 +13605,7 @@
           <a:lstStyle/>
           <a:p>
             <a:pPr algn="ctr"/>
+            <a:endParaRPr/>
           </a:p>
         </p:txBody>
       </p:sp>
@@ -12727,7 +13626,7 @@
           <a:noFill/>
         </p:spPr>
         <p:txBody>
-          <a:bodyPr wrap="square" anchor="t" lIns="0" rIns="0" tIns="0" bIns="0">
+          <a:bodyPr wrap="square" lIns="0" tIns="0" rIns="0" bIns="0" anchor="t">
             <a:spAutoFit/>
           </a:bodyPr>
           <a:lstStyle/>
@@ -12781,7 +13680,7 @@
           <a:noFill/>
         </p:spPr>
         <p:txBody>
-          <a:bodyPr wrap="square" anchor="t" lIns="0" rIns="0" tIns="0" bIns="0">
+          <a:bodyPr wrap="square" lIns="0" tIns="0" rIns="0" bIns="0" anchor="t">
             <a:spAutoFit/>
           </a:bodyPr>
           <a:lstStyle/>
@@ -12850,6 +13749,7 @@
           <a:lstStyle/>
           <a:p>
             <a:pPr algn="ctr"/>
+            <a:endParaRPr/>
           </a:p>
         </p:txBody>
       </p:sp>
@@ -12870,7 +13770,7 @@
           <a:noFill/>
         </p:spPr>
         <p:txBody>
-          <a:bodyPr wrap="square" anchor="t" lIns="0" rIns="0" tIns="0" bIns="0">
+          <a:bodyPr wrap="square" lIns="0" tIns="0" rIns="0" bIns="0" anchor="t">
             <a:spAutoFit/>
           </a:bodyPr>
           <a:lstStyle/>
@@ -12915,7 +13815,7 @@
           <a:noFill/>
         </p:spPr>
         <p:txBody>
-          <a:bodyPr wrap="square" anchor="t" lIns="0" rIns="0" tIns="0" bIns="0">
+          <a:bodyPr wrap="square" lIns="0" tIns="0" rIns="0" bIns="0" anchor="t">
             <a:spAutoFit/>
           </a:bodyPr>
           <a:lstStyle/>
@@ -12984,6 +13884,7 @@
           <a:lstStyle/>
           <a:p>
             <a:pPr algn="ctr"/>
+            <a:endParaRPr/>
           </a:p>
         </p:txBody>
       </p:sp>
@@ -13028,6 +13929,7 @@
           <a:lstStyle/>
           <a:p>
             <a:pPr algn="ctr"/>
+            <a:endParaRPr/>
           </a:p>
         </p:txBody>
       </p:sp>
@@ -13074,6 +13976,7 @@
           <a:lstStyle/>
           <a:p>
             <a:pPr algn="ctr"/>
+            <a:endParaRPr/>
           </a:p>
         </p:txBody>
       </p:sp>
@@ -13118,6 +14021,7 @@
           <a:lstStyle/>
           <a:p>
             <a:pPr algn="ctr"/>
+            <a:endParaRPr/>
           </a:p>
         </p:txBody>
       </p:sp>
@@ -13138,7 +14042,7 @@
           <a:noFill/>
         </p:spPr>
         <p:txBody>
-          <a:bodyPr wrap="square" anchor="ctr" lIns="0" rIns="0" tIns="0" bIns="0">
+          <a:bodyPr wrap="square" lIns="0" tIns="0" rIns="0" bIns="0" anchor="ctr">
             <a:spAutoFit/>
           </a:bodyPr>
           <a:lstStyle/>
@@ -13229,6 +14133,7 @@
           <a:lstStyle/>
           <a:p>
             <a:pPr algn="ctr"/>
+            <a:endParaRPr/>
           </a:p>
         </p:txBody>
       </p:sp>
@@ -13275,6 +14180,7 @@
           <a:lstStyle/>
           <a:p>
             <a:pPr algn="ctr"/>
+            <a:endParaRPr/>
           </a:p>
         </p:txBody>
       </p:sp>
@@ -13319,6 +14225,7 @@
           <a:lstStyle/>
           <a:p>
             <a:pPr algn="ctr"/>
+            <a:endParaRPr/>
           </a:p>
         </p:txBody>
       </p:sp>
@@ -13339,7 +14246,7 @@
           <a:noFill/>
         </p:spPr>
         <p:txBody>
-          <a:bodyPr wrap="square" anchor="ctr" lIns="0" rIns="0" tIns="0" bIns="0">
+          <a:bodyPr wrap="square" lIns="0" tIns="0" rIns="0" bIns="0" anchor="ctr">
             <a:spAutoFit/>
           </a:bodyPr>
           <a:lstStyle/>
@@ -13430,6 +14337,7 @@
           <a:lstStyle/>
           <a:p>
             <a:pPr algn="ctr"/>
+            <a:endParaRPr/>
           </a:p>
         </p:txBody>
       </p:sp>
@@ -13476,6 +14384,7 @@
           <a:lstStyle/>
           <a:p>
             <a:pPr algn="ctr"/>
+            <a:endParaRPr/>
           </a:p>
         </p:txBody>
       </p:sp>
@@ -13520,6 +14429,7 @@
           <a:lstStyle/>
           <a:p>
             <a:pPr algn="ctr"/>
+            <a:endParaRPr/>
           </a:p>
         </p:txBody>
       </p:sp>
@@ -13540,7 +14450,7 @@
           <a:noFill/>
         </p:spPr>
         <p:txBody>
-          <a:bodyPr wrap="square" anchor="ctr" lIns="0" rIns="0" tIns="0" bIns="0">
+          <a:bodyPr wrap="square" lIns="0" tIns="0" rIns="0" bIns="0" anchor="ctr">
             <a:spAutoFit/>
           </a:bodyPr>
           <a:lstStyle/>
@@ -13631,6 +14541,7 @@
           <a:lstStyle/>
           <a:p>
             <a:pPr algn="ctr"/>
+            <a:endParaRPr/>
           </a:p>
         </p:txBody>
       </p:sp>
@@ -13677,6 +14588,7 @@
           <a:lstStyle/>
           <a:p>
             <a:pPr algn="ctr"/>
+            <a:endParaRPr/>
           </a:p>
         </p:txBody>
       </p:sp>
@@ -13721,6 +14633,7 @@
           <a:lstStyle/>
           <a:p>
             <a:pPr algn="ctr"/>
+            <a:endParaRPr/>
           </a:p>
         </p:txBody>
       </p:sp>
@@ -13741,7 +14654,7 @@
           <a:noFill/>
         </p:spPr>
         <p:txBody>
-          <a:bodyPr wrap="square" anchor="ctr" lIns="0" rIns="0" tIns="0" bIns="0">
+          <a:bodyPr wrap="square" lIns="0" tIns="0" rIns="0" bIns="0" anchor="ctr">
             <a:spAutoFit/>
           </a:bodyPr>
           <a:lstStyle/>
@@ -13832,6 +14745,7 @@
           <a:lstStyle/>
           <a:p>
             <a:pPr algn="ctr"/>
+            <a:endParaRPr/>
           </a:p>
         </p:txBody>
       </p:sp>
@@ -13878,6 +14792,7 @@
           <a:lstStyle/>
           <a:p>
             <a:pPr algn="ctr"/>
+            <a:endParaRPr/>
           </a:p>
         </p:txBody>
       </p:sp>
@@ -13922,6 +14837,7 @@
           <a:lstStyle/>
           <a:p>
             <a:pPr algn="ctr"/>
+            <a:endParaRPr/>
           </a:p>
         </p:txBody>
       </p:sp>
@@ -13942,7 +14858,7 @@
           <a:noFill/>
         </p:spPr>
         <p:txBody>
-          <a:bodyPr wrap="square" anchor="ctr" lIns="0" rIns="0" tIns="0" bIns="0">
+          <a:bodyPr wrap="square" lIns="0" tIns="0" rIns="0" bIns="0" anchor="ctr">
             <a:spAutoFit/>
           </a:bodyPr>
           <a:lstStyle/>
@@ -14033,6 +14949,7 @@
           <a:lstStyle/>
           <a:p>
             <a:pPr algn="ctr"/>
+            <a:endParaRPr/>
           </a:p>
         </p:txBody>
       </p:sp>
@@ -14079,6 +14996,7 @@
           <a:lstStyle/>
           <a:p>
             <a:pPr algn="ctr"/>
+            <a:endParaRPr/>
           </a:p>
         </p:txBody>
       </p:sp>
@@ -14123,6 +15041,7 @@
           <a:lstStyle/>
           <a:p>
             <a:pPr algn="ctr"/>
+            <a:endParaRPr/>
           </a:p>
         </p:txBody>
       </p:sp>
@@ -14143,7 +15062,7 @@
           <a:noFill/>
         </p:spPr>
         <p:txBody>
-          <a:bodyPr wrap="square" anchor="ctr" lIns="0" rIns="0" tIns="0" bIns="0">
+          <a:bodyPr wrap="square" lIns="0" tIns="0" rIns="0" bIns="0" anchor="ctr">
             <a:spAutoFit/>
           </a:bodyPr>
           <a:lstStyle/>
@@ -14202,7 +15121,7 @@
 </file>
 
 <file path=ppt/slides/slide5.xml><?xml version="1.0" encoding="utf-8"?>
-<p:sld xmlns:a="http://schemas.openxmlformats.org/drawingml/2006/main" xmlns:p="http://schemas.openxmlformats.org/presentationml/2006/main" xmlns:r="http://schemas.openxmlformats.org/officeDocument/2006/relationships">
+<p:sld xmlns:a="http://schemas.openxmlformats.org/drawingml/2006/main" xmlns:r="http://schemas.openxmlformats.org/officeDocument/2006/relationships" xmlns:p="http://schemas.openxmlformats.org/presentationml/2006/main">
   <p:cSld>
     <p:bg>
       <p:bgPr>
@@ -14218,7 +15137,14 @@
         <p:cNvGrpSpPr/>
         <p:nvPr/>
       </p:nvGrpSpPr>
-      <p:grpSpPr/>
+      <p:grpSpPr>
+        <a:xfrm>
+          <a:off x="0" y="0"/>
+          <a:ext cx="0" cy="0"/>
+          <a:chOff x="0" y="0"/>
+          <a:chExt cx="0" cy="0"/>
+        </a:xfrm>
+      </p:grpSpPr>
       <p:sp>
         <p:nvSpPr>
           <p:cNvPr id="2" name="Rectangle 1"/>
@@ -14260,6 +15186,7 @@
           <a:lstStyle/>
           <a:p>
             <a:pPr algn="ctr"/>
+            <a:endParaRPr/>
           </a:p>
         </p:txBody>
       </p:sp>
@@ -14304,6 +15231,7 @@
           <a:lstStyle/>
           <a:p>
             <a:pPr algn="ctr"/>
+            <a:endParaRPr/>
           </a:p>
         </p:txBody>
       </p:sp>
@@ -14348,6 +15276,7 @@
           <a:lstStyle/>
           <a:p>
             <a:pPr algn="ctr"/>
+            <a:endParaRPr/>
           </a:p>
         </p:txBody>
       </p:sp>
@@ -14368,7 +15297,7 @@
           <a:noFill/>
         </p:spPr>
         <p:txBody>
-          <a:bodyPr wrap="square" anchor="t" lIns="0" rIns="0" tIns="0" bIns="0">
+          <a:bodyPr wrap="square" lIns="0" tIns="0" rIns="0" bIns="0" anchor="t">
             <a:spAutoFit/>
           </a:bodyPr>
           <a:lstStyle/>
@@ -14422,7 +15351,7 @@
           <a:noFill/>
         </p:spPr>
         <p:txBody>
-          <a:bodyPr wrap="square" anchor="t" lIns="0" rIns="0" tIns="0" bIns="0">
+          <a:bodyPr wrap="square" lIns="0" tIns="0" rIns="0" bIns="0" anchor="t">
             <a:spAutoFit/>
           </a:bodyPr>
           <a:lstStyle/>
@@ -14491,6 +15420,7 @@
           <a:lstStyle/>
           <a:p>
             <a:pPr algn="ctr"/>
+            <a:endParaRPr/>
           </a:p>
         </p:txBody>
       </p:sp>
@@ -14511,7 +15441,7 @@
           <a:noFill/>
         </p:spPr>
         <p:txBody>
-          <a:bodyPr wrap="square" anchor="t" lIns="0" rIns="0" tIns="0" bIns="0">
+          <a:bodyPr wrap="square" lIns="0" tIns="0" rIns="0" bIns="0" anchor="t">
             <a:spAutoFit/>
           </a:bodyPr>
           <a:lstStyle/>
@@ -14556,7 +15486,7 @@
           <a:noFill/>
         </p:spPr>
         <p:txBody>
-          <a:bodyPr wrap="square" anchor="t" lIns="0" rIns="0" tIns="0" bIns="0">
+          <a:bodyPr wrap="square" lIns="0" tIns="0" rIns="0" bIns="0" anchor="t">
             <a:spAutoFit/>
           </a:bodyPr>
           <a:lstStyle/>
@@ -14625,6 +15555,7 @@
           <a:lstStyle/>
           <a:p>
             <a:pPr algn="ctr"/>
+            <a:endParaRPr/>
           </a:p>
         </p:txBody>
       </p:sp>
@@ -14669,6 +15600,7 @@
           <a:lstStyle/>
           <a:p>
             <a:pPr algn="ctr"/>
+            <a:endParaRPr/>
           </a:p>
         </p:txBody>
       </p:sp>
@@ -14715,6 +15647,7 @@
           <a:lstStyle/>
           <a:p>
             <a:pPr algn="ctr"/>
+            <a:endParaRPr/>
           </a:p>
         </p:txBody>
       </p:sp>
@@ -14759,6 +15692,7 @@
           <a:lstStyle/>
           <a:p>
             <a:pPr algn="ctr"/>
+            <a:endParaRPr/>
           </a:p>
         </p:txBody>
       </p:sp>
@@ -14779,7 +15713,7 @@
           <a:noFill/>
         </p:spPr>
         <p:txBody>
-          <a:bodyPr wrap="square" anchor="t" lIns="0" rIns="0" tIns="0" bIns="0">
+          <a:bodyPr wrap="square" lIns="0" tIns="0" rIns="0" bIns="0" anchor="t">
             <a:spAutoFit/>
           </a:bodyPr>
           <a:lstStyle/>
@@ -14846,7 +15780,7 @@
           <a:noFill/>
         </p:spPr>
         <p:txBody>
-          <a:bodyPr wrap="square" anchor="t" lIns="0" rIns="0" tIns="0" bIns="0">
+          <a:bodyPr wrap="square" lIns="0" tIns="0" rIns="0" bIns="0" anchor="t">
             <a:spAutoFit/>
           </a:bodyPr>
           <a:lstStyle/>
@@ -14918,6 +15852,7 @@
           <a:lstStyle/>
           <a:p>
             <a:pPr algn="ctr"/>
+            <a:endParaRPr/>
           </a:p>
         </p:txBody>
       </p:sp>
@@ -14962,6 +15897,7 @@
           <a:lstStyle/>
           <a:p>
             <a:pPr algn="ctr"/>
+            <a:endParaRPr/>
           </a:p>
         </p:txBody>
       </p:sp>
@@ -14982,7 +15918,7 @@
           <a:noFill/>
         </p:spPr>
         <p:txBody>
-          <a:bodyPr wrap="square" anchor="t" lIns="0" rIns="0" tIns="0" bIns="0">
+          <a:bodyPr wrap="square" lIns="0" tIns="0" rIns="0" bIns="0" anchor="t">
             <a:spAutoFit/>
           </a:bodyPr>
           <a:lstStyle/>
@@ -15049,7 +15985,7 @@
           <a:noFill/>
         </p:spPr>
         <p:txBody>
-          <a:bodyPr wrap="square" anchor="t" lIns="0" rIns="0" tIns="0" bIns="0">
+          <a:bodyPr wrap="square" lIns="0" tIns="0" rIns="0" bIns="0" anchor="t">
             <a:spAutoFit/>
           </a:bodyPr>
           <a:lstStyle/>
@@ -15121,6 +16057,7 @@
           <a:lstStyle/>
           <a:p>
             <a:pPr algn="ctr"/>
+            <a:endParaRPr/>
           </a:p>
         </p:txBody>
       </p:sp>
@@ -15165,6 +16102,7 @@
           <a:lstStyle/>
           <a:p>
             <a:pPr algn="ctr"/>
+            <a:endParaRPr/>
           </a:p>
         </p:txBody>
       </p:sp>
@@ -15185,7 +16123,7 @@
           <a:noFill/>
         </p:spPr>
         <p:txBody>
-          <a:bodyPr wrap="square" anchor="t" lIns="0" rIns="0" tIns="0" bIns="0">
+          <a:bodyPr wrap="square" lIns="0" tIns="0" rIns="0" bIns="0" anchor="t">
             <a:spAutoFit/>
           </a:bodyPr>
           <a:lstStyle/>
@@ -15252,7 +16190,7 @@
           <a:noFill/>
         </p:spPr>
         <p:txBody>
-          <a:bodyPr wrap="square" anchor="t" lIns="0" rIns="0" tIns="0" bIns="0">
+          <a:bodyPr wrap="square" lIns="0" tIns="0" rIns="0" bIns="0" anchor="t">
             <a:spAutoFit/>
           </a:bodyPr>
           <a:lstStyle/>
@@ -15290,7 +16228,7 @@
 </file>
 
 <file path=ppt/slides/slide6.xml><?xml version="1.0" encoding="utf-8"?>
-<p:sld xmlns:a="http://schemas.openxmlformats.org/drawingml/2006/main" xmlns:p="http://schemas.openxmlformats.org/presentationml/2006/main" xmlns:r="http://schemas.openxmlformats.org/officeDocument/2006/relationships">
+<p:sld xmlns:a="http://schemas.openxmlformats.org/drawingml/2006/main" xmlns:r="http://schemas.openxmlformats.org/officeDocument/2006/relationships" xmlns:p="http://schemas.openxmlformats.org/presentationml/2006/main">
   <p:cSld>
     <p:bg>
       <p:bgPr>
@@ -15306,7 +16244,14 @@
         <p:cNvGrpSpPr/>
         <p:nvPr/>
       </p:nvGrpSpPr>
-      <p:grpSpPr/>
+      <p:grpSpPr>
+        <a:xfrm>
+          <a:off x="0" y="0"/>
+          <a:ext cx="0" cy="0"/>
+          <a:chOff x="0" y="0"/>
+          <a:chExt cx="0" cy="0"/>
+        </a:xfrm>
+      </p:grpSpPr>
       <p:sp>
         <p:nvSpPr>
           <p:cNvPr id="2" name="Rectangle 1"/>
@@ -15348,6 +16293,7 @@
           <a:lstStyle/>
           <a:p>
             <a:pPr algn="ctr"/>
+            <a:endParaRPr/>
           </a:p>
         </p:txBody>
       </p:sp>
@@ -15392,6 +16338,7 @@
           <a:lstStyle/>
           <a:p>
             <a:pPr algn="ctr"/>
+            <a:endParaRPr/>
           </a:p>
         </p:txBody>
       </p:sp>
@@ -15436,6 +16383,7 @@
           <a:lstStyle/>
           <a:p>
             <a:pPr algn="ctr"/>
+            <a:endParaRPr/>
           </a:p>
         </p:txBody>
       </p:sp>
@@ -15456,7 +16404,7 @@
           <a:noFill/>
         </p:spPr>
         <p:txBody>
-          <a:bodyPr wrap="square" anchor="t" lIns="0" rIns="0" tIns="0" bIns="0">
+          <a:bodyPr wrap="square" lIns="0" tIns="0" rIns="0" bIns="0" anchor="t">
             <a:spAutoFit/>
           </a:bodyPr>
           <a:lstStyle/>
@@ -15510,7 +16458,7 @@
           <a:noFill/>
         </p:spPr>
         <p:txBody>
-          <a:bodyPr wrap="square" anchor="t" lIns="0" rIns="0" tIns="0" bIns="0">
+          <a:bodyPr wrap="square" lIns="0" tIns="0" rIns="0" bIns="0" anchor="t">
             <a:spAutoFit/>
           </a:bodyPr>
           <a:lstStyle/>
@@ -15579,6 +16527,7 @@
           <a:lstStyle/>
           <a:p>
             <a:pPr algn="ctr"/>
+            <a:endParaRPr/>
           </a:p>
         </p:txBody>
       </p:sp>
@@ -15599,7 +16548,7 @@
           <a:noFill/>
         </p:spPr>
         <p:txBody>
-          <a:bodyPr wrap="square" anchor="t" lIns="0" rIns="0" tIns="0" bIns="0">
+          <a:bodyPr wrap="square" lIns="0" tIns="0" rIns="0" bIns="0" anchor="t">
             <a:spAutoFit/>
           </a:bodyPr>
           <a:lstStyle/>
@@ -15644,7 +16593,7 @@
           <a:noFill/>
         </p:spPr>
         <p:txBody>
-          <a:bodyPr wrap="square" anchor="t" lIns="0" rIns="0" tIns="0" bIns="0">
+          <a:bodyPr wrap="square" lIns="0" tIns="0" rIns="0" bIns="0" anchor="t">
             <a:spAutoFit/>
           </a:bodyPr>
           <a:lstStyle/>
@@ -15713,6 +16662,7 @@
           <a:lstStyle/>
           <a:p>
             <a:pPr algn="ctr"/>
+            <a:endParaRPr/>
           </a:p>
         </p:txBody>
       </p:sp>
@@ -15757,6 +16707,7 @@
           <a:lstStyle/>
           <a:p>
             <a:pPr algn="ctr"/>
+            <a:endParaRPr/>
           </a:p>
         </p:txBody>
       </p:sp>
@@ -15779,10 +16730,34 @@
                 <a:tableStyleId>{5C22544A-7EE6-4342-B048-85BDC9FD1C3A}</a:tableStyleId>
               </a:tblPr>
               <a:tblGrid>
-                <a:gridCol w="1828800"/>
-                <a:gridCol w="3108960"/>
-                <a:gridCol w="1554480"/>
-                <a:gridCol w="4023360"/>
+                <a:gridCol w="1828800">
+                  <a:extLst>
+                    <a:ext uri="{9D8B030D-6E8A-4147-A177-3AD203B41FA5}">
+                      <a16:colId xmlns:a16="http://schemas.microsoft.com/office/drawing/2014/main" val="20000"/>
+                    </a:ext>
+                  </a:extLst>
+                </a:gridCol>
+                <a:gridCol w="3108960">
+                  <a:extLst>
+                    <a:ext uri="{9D8B030D-6E8A-4147-A177-3AD203B41FA5}">
+                      <a16:colId xmlns:a16="http://schemas.microsoft.com/office/drawing/2014/main" val="20001"/>
+                    </a:ext>
+                  </a:extLst>
+                </a:gridCol>
+                <a:gridCol w="1554480">
+                  <a:extLst>
+                    <a:ext uri="{9D8B030D-6E8A-4147-A177-3AD203B41FA5}">
+                      <a16:colId xmlns:a16="http://schemas.microsoft.com/office/drawing/2014/main" val="20002"/>
+                    </a:ext>
+                  </a:extLst>
+                </a:gridCol>
+                <a:gridCol w="4023360">
+                  <a:extLst>
+                    <a:ext uri="{9D8B030D-6E8A-4147-A177-3AD203B41FA5}">
+                      <a16:colId xmlns:a16="http://schemas.microsoft.com/office/drawing/2014/main" val="20003"/>
+                    </a:ext>
+                  </a:extLst>
+                </a:gridCol>
               </a:tblGrid>
               <a:tr h="457200">
                 <a:tc>
@@ -15877,6 +16852,11 @@
                     </a:solidFill>
                   </a:tcPr>
                 </a:tc>
+                <a:extLst>
+                  <a:ext uri="{0D108BD9-81ED-4DB2-BD59-A6C34878D82A}">
+                    <a16:rowId xmlns:a16="http://schemas.microsoft.com/office/drawing/2014/main" val="10000"/>
+                  </a:ext>
+                </a:extLst>
               </a:tr>
               <a:tr h="548640">
                 <a:tc>
@@ -15971,6 +16951,11 @@
                     </a:solidFill>
                   </a:tcPr>
                 </a:tc>
+                <a:extLst>
+                  <a:ext uri="{0D108BD9-81ED-4DB2-BD59-A6C34878D82A}">
+                    <a16:rowId xmlns:a16="http://schemas.microsoft.com/office/drawing/2014/main" val="10001"/>
+                  </a:ext>
+                </a:extLst>
               </a:tr>
               <a:tr h="548640">
                 <a:tc>
@@ -16065,6 +17050,11 @@
                     </a:solidFill>
                   </a:tcPr>
                 </a:tc>
+                <a:extLst>
+                  <a:ext uri="{0D108BD9-81ED-4DB2-BD59-A6C34878D82A}">
+                    <a16:rowId xmlns:a16="http://schemas.microsoft.com/office/drawing/2014/main" val="10002"/>
+                  </a:ext>
+                </a:extLst>
               </a:tr>
               <a:tr h="548640">
                 <a:tc>
@@ -16159,6 +17149,11 @@
                     </a:solidFill>
                   </a:tcPr>
                 </a:tc>
+                <a:extLst>
+                  <a:ext uri="{0D108BD9-81ED-4DB2-BD59-A6C34878D82A}">
+                    <a16:rowId xmlns:a16="http://schemas.microsoft.com/office/drawing/2014/main" val="10003"/>
+                  </a:ext>
+                </a:extLst>
               </a:tr>
               <a:tr h="548640">
                 <a:tc>
@@ -16253,6 +17248,11 @@
                     </a:solidFill>
                   </a:tcPr>
                 </a:tc>
+                <a:extLst>
+                  <a:ext uri="{0D108BD9-81ED-4DB2-BD59-A6C34878D82A}">
+                    <a16:rowId xmlns:a16="http://schemas.microsoft.com/office/drawing/2014/main" val="10004"/>
+                  </a:ext>
+                </a:extLst>
               </a:tr>
               <a:tr h="548640">
                 <a:tc>
@@ -16347,6 +17347,11 @@
                     </a:solidFill>
                   </a:tcPr>
                 </a:tc>
+                <a:extLst>
+                  <a:ext uri="{0D108BD9-81ED-4DB2-BD59-A6C34878D82A}">
+                    <a16:rowId xmlns:a16="http://schemas.microsoft.com/office/drawing/2014/main" val="10005"/>
+                  </a:ext>
+                </a:extLst>
               </a:tr>
             </a:tbl>
           </a:graphicData>
@@ -16369,7 +17374,7 @@
           <a:noFill/>
         </p:spPr>
         <p:txBody>
-          <a:bodyPr wrap="square" anchor="t" lIns="0" rIns="0" tIns="0" bIns="0">
+          <a:bodyPr wrap="square" lIns="0" tIns="0" rIns="0" bIns="0" anchor="t">
             <a:spAutoFit/>
           </a:bodyPr>
           <a:lstStyle/>
@@ -16415,7 +17420,7 @@
 </file>
 
 <file path=ppt/slides/slide7.xml><?xml version="1.0" encoding="utf-8"?>
-<p:sld xmlns:a="http://schemas.openxmlformats.org/drawingml/2006/main" xmlns:p="http://schemas.openxmlformats.org/presentationml/2006/main" xmlns:r="http://schemas.openxmlformats.org/officeDocument/2006/relationships">
+<p:sld xmlns:a="http://schemas.openxmlformats.org/drawingml/2006/main" xmlns:r="http://schemas.openxmlformats.org/officeDocument/2006/relationships" xmlns:p="http://schemas.openxmlformats.org/presentationml/2006/main">
   <p:cSld>
     <p:bg>
       <p:bgPr>
@@ -16431,7 +17436,14 @@
         <p:cNvGrpSpPr/>
         <p:nvPr/>
       </p:nvGrpSpPr>
-      <p:grpSpPr/>
+      <p:grpSpPr>
+        <a:xfrm>
+          <a:off x="0" y="0"/>
+          <a:ext cx="0" cy="0"/>
+          <a:chOff x="0" y="0"/>
+          <a:chExt cx="0" cy="0"/>
+        </a:xfrm>
+      </p:grpSpPr>
       <p:sp>
         <p:nvSpPr>
           <p:cNvPr id="2" name="Rectangle 1"/>
@@ -16473,6 +17485,7 @@
           <a:lstStyle/>
           <a:p>
             <a:pPr algn="ctr"/>
+            <a:endParaRPr/>
           </a:p>
         </p:txBody>
       </p:sp>
@@ -16517,6 +17530,7 @@
           <a:lstStyle/>
           <a:p>
             <a:pPr algn="ctr"/>
+            <a:endParaRPr/>
           </a:p>
         </p:txBody>
       </p:sp>
@@ -16561,6 +17575,7 @@
           <a:lstStyle/>
           <a:p>
             <a:pPr algn="ctr"/>
+            <a:endParaRPr/>
           </a:p>
         </p:txBody>
       </p:sp>
@@ -16581,7 +17596,7 @@
           <a:noFill/>
         </p:spPr>
         <p:txBody>
-          <a:bodyPr wrap="square" anchor="t" lIns="0" rIns="0" tIns="0" bIns="0">
+          <a:bodyPr wrap="square" lIns="0" tIns="0" rIns="0" bIns="0" anchor="t">
             <a:spAutoFit/>
           </a:bodyPr>
           <a:lstStyle/>
@@ -16635,7 +17650,7 @@
           <a:noFill/>
         </p:spPr>
         <p:txBody>
-          <a:bodyPr wrap="square" anchor="t" lIns="0" rIns="0" tIns="0" bIns="0">
+          <a:bodyPr wrap="square" lIns="0" tIns="0" rIns="0" bIns="0" anchor="t">
             <a:spAutoFit/>
           </a:bodyPr>
           <a:lstStyle/>
@@ -16704,6 +17719,7 @@
           <a:lstStyle/>
           <a:p>
             <a:pPr algn="ctr"/>
+            <a:endParaRPr/>
           </a:p>
         </p:txBody>
       </p:sp>
@@ -16724,7 +17740,7 @@
           <a:noFill/>
         </p:spPr>
         <p:txBody>
-          <a:bodyPr wrap="square" anchor="t" lIns="0" rIns="0" tIns="0" bIns="0">
+          <a:bodyPr wrap="square" lIns="0" tIns="0" rIns="0" bIns="0" anchor="t">
             <a:spAutoFit/>
           </a:bodyPr>
           <a:lstStyle/>
@@ -16769,7 +17785,7 @@
           <a:noFill/>
         </p:spPr>
         <p:txBody>
-          <a:bodyPr wrap="square" anchor="t" lIns="0" rIns="0" tIns="0" bIns="0">
+          <a:bodyPr wrap="square" lIns="0" tIns="0" rIns="0" bIns="0" anchor="t">
             <a:spAutoFit/>
           </a:bodyPr>
           <a:lstStyle/>
@@ -16838,6 +17854,7 @@
           <a:lstStyle/>
           <a:p>
             <a:pPr algn="ctr"/>
+            <a:endParaRPr/>
           </a:p>
         </p:txBody>
       </p:sp>
@@ -16882,6 +17899,7 @@
           <a:lstStyle/>
           <a:p>
             <a:pPr algn="ctr"/>
+            <a:endParaRPr/>
           </a:p>
         </p:txBody>
       </p:sp>
@@ -16928,6 +17946,7 @@
           <a:lstStyle/>
           <a:p>
             <a:pPr algn="ctr"/>
+            <a:endParaRPr/>
           </a:p>
         </p:txBody>
       </p:sp>
@@ -16972,6 +17991,7 @@
           <a:lstStyle/>
           <a:p>
             <a:pPr algn="ctr"/>
+            <a:endParaRPr/>
           </a:p>
         </p:txBody>
       </p:sp>
@@ -16992,7 +18012,7 @@
           <a:noFill/>
         </p:spPr>
         <p:txBody>
-          <a:bodyPr wrap="square" anchor="t" lIns="0" rIns="0" tIns="0" bIns="0">
+          <a:bodyPr wrap="square" lIns="0" tIns="0" rIns="0" bIns="0" anchor="t">
             <a:spAutoFit/>
           </a:bodyPr>
           <a:lstStyle/>
@@ -17037,7 +18057,7 @@
           <a:noFill/>
         </p:spPr>
         <p:txBody>
-          <a:bodyPr wrap="square" anchor="t" lIns="0" rIns="0" tIns="0" bIns="0">
+          <a:bodyPr wrap="square" lIns="0" tIns="0" rIns="0" bIns="0" anchor="t">
             <a:spAutoFit/>
           </a:bodyPr>
           <a:lstStyle/>
@@ -17210,6 +18230,7 @@
           <a:lstStyle/>
           <a:p>
             <a:pPr algn="ctr"/>
+            <a:endParaRPr/>
           </a:p>
         </p:txBody>
       </p:sp>
@@ -17254,6 +18275,7 @@
           <a:lstStyle/>
           <a:p>
             <a:pPr algn="ctr"/>
+            <a:endParaRPr/>
           </a:p>
         </p:txBody>
       </p:sp>
@@ -17274,7 +18296,7 @@
           <a:noFill/>
         </p:spPr>
         <p:txBody>
-          <a:bodyPr wrap="square" anchor="t" lIns="0" rIns="0" tIns="0" bIns="0">
+          <a:bodyPr wrap="square" lIns="0" tIns="0" rIns="0" bIns="0" anchor="t">
             <a:spAutoFit/>
           </a:bodyPr>
           <a:lstStyle/>
@@ -17319,7 +18341,7 @@
           <a:noFill/>
         </p:spPr>
         <p:txBody>
-          <a:bodyPr wrap="square" anchor="t" lIns="0" rIns="0" tIns="0" bIns="0">
+          <a:bodyPr wrap="square" lIns="0" tIns="0" rIns="0" bIns="0" anchor="t">
             <a:spAutoFit/>
           </a:bodyPr>
           <a:lstStyle/>
@@ -17492,6 +18514,7 @@
           <a:lstStyle/>
           <a:p>
             <a:pPr algn="ctr"/>
+            <a:endParaRPr/>
           </a:p>
         </p:txBody>
       </p:sp>
@@ -17512,7 +18535,7 @@
           <a:noFill/>
         </p:spPr>
         <p:txBody>
-          <a:bodyPr wrap="square" anchor="ctr" lIns="0" rIns="0" tIns="0" bIns="0">
+          <a:bodyPr wrap="square" lIns="0" tIns="0" rIns="0" bIns="0" anchor="ctr">
             <a:spAutoFit/>
           </a:bodyPr>
           <a:lstStyle/>
@@ -17558,7 +18581,7 @@
 </file>
 
 <file path=ppt/slides/slide8.xml><?xml version="1.0" encoding="utf-8"?>
-<p:sld xmlns:a="http://schemas.openxmlformats.org/drawingml/2006/main" xmlns:p="http://schemas.openxmlformats.org/presentationml/2006/main" xmlns:r="http://schemas.openxmlformats.org/officeDocument/2006/relationships">
+<p:sld xmlns:a="http://schemas.openxmlformats.org/drawingml/2006/main" xmlns:r="http://schemas.openxmlformats.org/officeDocument/2006/relationships" xmlns:p="http://schemas.openxmlformats.org/presentationml/2006/main">
   <p:cSld>
     <p:bg>
       <p:bgPr>
@@ -17574,7 +18597,14 @@
         <p:cNvGrpSpPr/>
         <p:nvPr/>
       </p:nvGrpSpPr>
-      <p:grpSpPr/>
+      <p:grpSpPr>
+        <a:xfrm>
+          <a:off x="0" y="0"/>
+          <a:ext cx="0" cy="0"/>
+          <a:chOff x="0" y="0"/>
+          <a:chExt cx="0" cy="0"/>
+        </a:xfrm>
+      </p:grpSpPr>
       <p:sp>
         <p:nvSpPr>
           <p:cNvPr id="2" name="Rectangle 1"/>
@@ -17616,6 +18646,7 @@
           <a:lstStyle/>
           <a:p>
             <a:pPr algn="ctr"/>
+            <a:endParaRPr/>
           </a:p>
         </p:txBody>
       </p:sp>
@@ -17660,6 +18691,7 @@
           <a:lstStyle/>
           <a:p>
             <a:pPr algn="ctr"/>
+            <a:endParaRPr/>
           </a:p>
         </p:txBody>
       </p:sp>
@@ -17704,6 +18736,7 @@
           <a:lstStyle/>
           <a:p>
             <a:pPr algn="ctr"/>
+            <a:endParaRPr/>
           </a:p>
         </p:txBody>
       </p:sp>
@@ -17724,7 +18757,7 @@
           <a:noFill/>
         </p:spPr>
         <p:txBody>
-          <a:bodyPr wrap="square" anchor="t" lIns="0" rIns="0" tIns="0" bIns="0">
+          <a:bodyPr wrap="square" lIns="0" tIns="0" rIns="0" bIns="0" anchor="t">
             <a:spAutoFit/>
           </a:bodyPr>
           <a:lstStyle/>
@@ -17778,7 +18811,7 @@
           <a:noFill/>
         </p:spPr>
         <p:txBody>
-          <a:bodyPr wrap="square" anchor="t" lIns="0" rIns="0" tIns="0" bIns="0">
+          <a:bodyPr wrap="square" lIns="0" tIns="0" rIns="0" bIns="0" anchor="t">
             <a:spAutoFit/>
           </a:bodyPr>
           <a:lstStyle/>
@@ -17847,6 +18880,7 @@
           <a:lstStyle/>
           <a:p>
             <a:pPr algn="ctr"/>
+            <a:endParaRPr/>
           </a:p>
         </p:txBody>
       </p:sp>
@@ -17867,7 +18901,7 @@
           <a:noFill/>
         </p:spPr>
         <p:txBody>
-          <a:bodyPr wrap="square" anchor="t" lIns="0" rIns="0" tIns="0" bIns="0">
+          <a:bodyPr wrap="square" lIns="0" tIns="0" rIns="0" bIns="0" anchor="t">
             <a:spAutoFit/>
           </a:bodyPr>
           <a:lstStyle/>
@@ -17912,7 +18946,7 @@
           <a:noFill/>
         </p:spPr>
         <p:txBody>
-          <a:bodyPr wrap="square" anchor="t" lIns="0" rIns="0" tIns="0" bIns="0">
+          <a:bodyPr wrap="square" lIns="0" tIns="0" rIns="0" bIns="0" anchor="t">
             <a:spAutoFit/>
           </a:bodyPr>
           <a:lstStyle/>
@@ -17981,6 +19015,7 @@
           <a:lstStyle/>
           <a:p>
             <a:pPr algn="ctr"/>
+            <a:endParaRPr/>
           </a:p>
         </p:txBody>
       </p:sp>
@@ -18025,6 +19060,7 @@
           <a:lstStyle/>
           <a:p>
             <a:pPr algn="ctr"/>
+            <a:endParaRPr/>
           </a:p>
         </p:txBody>
       </p:sp>
@@ -18045,7 +19081,7 @@
           <a:noFill/>
         </p:spPr>
         <p:txBody>
-          <a:bodyPr wrap="square" anchor="t" lIns="0" rIns="0" tIns="0" bIns="0">
+          <a:bodyPr wrap="square" lIns="0" tIns="0" rIns="0" bIns="0" anchor="t">
             <a:spAutoFit/>
           </a:bodyPr>
           <a:lstStyle/>
@@ -18260,7 +19296,7 @@
 </file>
 
 <file path=ppt/slides/slide9.xml><?xml version="1.0" encoding="utf-8"?>
-<p:sld xmlns:a="http://schemas.openxmlformats.org/drawingml/2006/main" xmlns:p="http://schemas.openxmlformats.org/presentationml/2006/main" xmlns:r="http://schemas.openxmlformats.org/officeDocument/2006/relationships">
+<p:sld xmlns:a="http://schemas.openxmlformats.org/drawingml/2006/main" xmlns:r="http://schemas.openxmlformats.org/officeDocument/2006/relationships" xmlns:p="http://schemas.openxmlformats.org/presentationml/2006/main">
   <p:cSld>
     <p:bg>
       <p:bgPr>
@@ -18276,7 +19312,14 @@
         <p:cNvGrpSpPr/>
         <p:nvPr/>
       </p:nvGrpSpPr>
-      <p:grpSpPr/>
+      <p:grpSpPr>
+        <a:xfrm>
+          <a:off x="0" y="0"/>
+          <a:ext cx="0" cy="0"/>
+          <a:chOff x="0" y="0"/>
+          <a:chExt cx="0" cy="0"/>
+        </a:xfrm>
+      </p:grpSpPr>
       <p:sp>
         <p:nvSpPr>
           <p:cNvPr id="2" name="Rectangle 1"/>
@@ -18318,6 +19361,7 @@
           <a:lstStyle/>
           <a:p>
             <a:pPr algn="ctr"/>
+            <a:endParaRPr/>
           </a:p>
         </p:txBody>
       </p:sp>
@@ -18362,6 +19406,7 @@
           <a:lstStyle/>
           <a:p>
             <a:pPr algn="ctr"/>
+            <a:endParaRPr/>
           </a:p>
         </p:txBody>
       </p:sp>
@@ -18406,6 +19451,7 @@
           <a:lstStyle/>
           <a:p>
             <a:pPr algn="ctr"/>
+            <a:endParaRPr/>
           </a:p>
         </p:txBody>
       </p:sp>
@@ -18426,7 +19472,7 @@
           <a:noFill/>
         </p:spPr>
         <p:txBody>
-          <a:bodyPr wrap="square" anchor="t" lIns="0" rIns="0" tIns="0" bIns="0">
+          <a:bodyPr wrap="square" lIns="0" tIns="0" rIns="0" bIns="0" anchor="t">
             <a:spAutoFit/>
           </a:bodyPr>
           <a:lstStyle/>
@@ -18480,7 +19526,7 @@
           <a:noFill/>
         </p:spPr>
         <p:txBody>
-          <a:bodyPr wrap="square" anchor="t" lIns="0" rIns="0" tIns="0" bIns="0">
+          <a:bodyPr wrap="square" lIns="0" tIns="0" rIns="0" bIns="0" anchor="t">
             <a:spAutoFit/>
           </a:bodyPr>
           <a:lstStyle/>
@@ -18549,6 +19595,7 @@
           <a:lstStyle/>
           <a:p>
             <a:pPr algn="ctr"/>
+            <a:endParaRPr/>
           </a:p>
         </p:txBody>
       </p:sp>
@@ -18569,7 +19616,7 @@
           <a:noFill/>
         </p:spPr>
         <p:txBody>
-          <a:bodyPr wrap="square" anchor="t" lIns="0" rIns="0" tIns="0" bIns="0">
+          <a:bodyPr wrap="square" lIns="0" tIns="0" rIns="0" bIns="0" anchor="t">
             <a:spAutoFit/>
           </a:bodyPr>
           <a:lstStyle/>
@@ -18614,7 +19661,7 @@
           <a:noFill/>
         </p:spPr>
         <p:txBody>
-          <a:bodyPr wrap="square" anchor="t" lIns="0" rIns="0" tIns="0" bIns="0">
+          <a:bodyPr wrap="square" lIns="0" tIns="0" rIns="0" bIns="0" anchor="t">
             <a:spAutoFit/>
           </a:bodyPr>
           <a:lstStyle/>
@@ -18683,6 +19730,7 @@
           <a:lstStyle/>
           <a:p>
             <a:pPr algn="ctr"/>
+            <a:endParaRPr/>
           </a:p>
         </p:txBody>
       </p:sp>
@@ -18727,6 +19775,7 @@
           <a:lstStyle/>
           <a:p>
             <a:pPr algn="ctr"/>
+            <a:endParaRPr/>
           </a:p>
         </p:txBody>
       </p:sp>
@@ -18773,6 +19822,7 @@
           <a:lstStyle/>
           <a:p>
             <a:pPr algn="ctr"/>
+            <a:endParaRPr/>
           </a:p>
         </p:txBody>
       </p:sp>
@@ -18817,6 +19867,7 @@
           <a:lstStyle/>
           <a:p>
             <a:pPr algn="ctr"/>
+            <a:endParaRPr/>
           </a:p>
         </p:txBody>
       </p:sp>
@@ -18837,7 +19888,7 @@
           <a:noFill/>
         </p:spPr>
         <p:txBody>
-          <a:bodyPr wrap="square" anchor="t" lIns="0" rIns="0" tIns="0" bIns="0">
+          <a:bodyPr wrap="square" lIns="0" tIns="0" rIns="0" bIns="0" anchor="t">
             <a:spAutoFit/>
           </a:bodyPr>
           <a:lstStyle/>
@@ -18882,7 +19933,7 @@
           <a:noFill/>
         </p:spPr>
         <p:txBody>
-          <a:bodyPr wrap="square" anchor="t" lIns="0" rIns="0" tIns="0" bIns="0">
+          <a:bodyPr wrap="square" lIns="0" tIns="0" rIns="0" bIns="0" anchor="t">
             <a:spAutoFit/>
           </a:bodyPr>
           <a:lstStyle/>
@@ -19024,6 +20075,7 @@
           <a:lstStyle/>
           <a:p>
             <a:pPr algn="ctr"/>
+            <a:endParaRPr/>
           </a:p>
         </p:txBody>
       </p:sp>
@@ -19068,6 +20120,7 @@
           <a:lstStyle/>
           <a:p>
             <a:pPr algn="ctr"/>
+            <a:endParaRPr/>
           </a:p>
         </p:txBody>
       </p:sp>
@@ -19088,7 +20141,7 @@
           <a:noFill/>
         </p:spPr>
         <p:txBody>
-          <a:bodyPr wrap="square" anchor="t" lIns="0" rIns="0" tIns="0" bIns="0">
+          <a:bodyPr wrap="square" lIns="0" tIns="0" rIns="0" bIns="0" anchor="t">
             <a:spAutoFit/>
           </a:bodyPr>
           <a:lstStyle/>
@@ -19133,7 +20186,7 @@
           <a:noFill/>
         </p:spPr>
         <p:txBody>
-          <a:bodyPr wrap="square" anchor="t" lIns="0" rIns="0" tIns="0" bIns="0">
+          <a:bodyPr wrap="square" lIns="0" tIns="0" rIns="0" bIns="0" anchor="t">
             <a:spAutoFit/>
           </a:bodyPr>
           <a:lstStyle/>
@@ -19280,7 +20333,7 @@
           <a:noFill/>
         </p:spPr>
         <p:txBody>
-          <a:bodyPr wrap="square" anchor="t" lIns="0" rIns="0" tIns="0" bIns="0">
+          <a:bodyPr wrap="square" lIns="0" tIns="0" rIns="0" bIns="0" anchor="t">
             <a:spAutoFit/>
           </a:bodyPr>
           <a:lstStyle/>

--- a/submission/OfflineID_Hackathon7.pptx
+++ b/submission/OfflineID_Hackathon7.pptx
@@ -3095,7 +3095,7 @@
     <p:bg>
       <p:bgPr>
         <a:solidFill>
-          <a:srgbClr val="0A0E0D"/>
+          <a:srgbClr val="0D1226"/>
         </a:solidFill>
         <a:effectLst/>
       </p:bgPr>
@@ -3129,10 +3129,10 @@
             <a:avLst/>
           </a:prstGeom>
           <a:solidFill>
-            <a:srgbClr val="00E676"/>
+            <a:srgbClr val="22C55E"/>
           </a:solidFill>
           <a:ln>
-            <a:noFill/>
+            <a:solidFill/>
           </a:ln>
           <a:effectLst/>
         </p:spPr>
@@ -3174,10 +3174,10 @@
             <a:avLst/>
           </a:prstGeom>
           <a:solidFill>
-            <a:srgbClr val="00E676"/>
+            <a:srgbClr val="22C55E"/>
           </a:solidFill>
           <a:ln>
-            <a:noFill/>
+            <a:solidFill/>
           </a:ln>
           <a:effectLst/>
         </p:spPr>
@@ -3219,10 +3219,10 @@
             <a:avLst/>
           </a:prstGeom>
           <a:solidFill>
-            <a:srgbClr val="00E676"/>
+            <a:srgbClr val="22C55E"/>
           </a:solidFill>
           <a:ln>
-            <a:noFill/>
+            <a:solidFill/>
           </a:ln>
           <a:effectLst/>
         </p:spPr>
@@ -3264,10 +3264,10 @@
             <a:avLst/>
           </a:prstGeom>
           <a:solidFill>
-            <a:srgbClr val="00E676"/>
+            <a:srgbClr val="22C55E"/>
           </a:solidFill>
           <a:ln>
-            <a:noFill/>
+            <a:solidFill/>
           </a:ln>
           <a:effectLst/>
         </p:spPr>
@@ -3309,10 +3309,10 @@
             <a:avLst/>
           </a:prstGeom>
           <a:solidFill>
-            <a:srgbClr val="00E676"/>
+            <a:srgbClr val="22C55E"/>
           </a:solidFill>
           <a:ln>
-            <a:noFill/>
+            <a:solidFill/>
           </a:ln>
           <a:effectLst/>
         </p:spPr>
@@ -3354,6 +3354,9 @@
             <a:avLst/>
           </a:prstGeom>
           <a:noFill/>
+          <a:ln>
+            <a:solidFill/>
+          </a:ln>
         </p:spPr>
         <p:txBody>
           <a:bodyPr wrap="square" lIns="0" tIns="0" rIns="0" bIns="0" anchor="t">
@@ -3375,7 +3378,7 @@
             <a:r>
               <a:rPr sz="1400" b="1" dirty="0">
                 <a:solidFill>
-                  <a:srgbClr val="00E676"/>
+                  <a:srgbClr val="22C55E"/>
                 </a:solidFill>
                 <a:latin typeface="Consolas"/>
               </a:rPr>
@@ -3399,6 +3402,9 @@
             <a:avLst/>
           </a:prstGeom>
           <a:noFill/>
+          <a:ln>
+            <a:solidFill/>
+          </a:ln>
         </p:spPr>
         <p:txBody>
           <a:bodyPr wrap="square" lIns="0" tIns="0" rIns="0" bIns="0" anchor="t">
@@ -3420,7 +3426,7 @@
             <a:r>
               <a:rPr sz="7600" b="1" dirty="0">
                 <a:solidFill>
-                  <a:srgbClr val="EAF3EF"/>
+                  <a:srgbClr val="22C55E"/>
                 </a:solidFill>
                 <a:latin typeface="Segoe UI"/>
               </a:rPr>
@@ -3444,10 +3450,10 @@
             <a:avLst/>
           </a:prstGeom>
           <a:solidFill>
-            <a:srgbClr val="00E676"/>
+            <a:srgbClr val="22C55E"/>
           </a:solidFill>
           <a:ln>
-            <a:noFill/>
+            <a:solidFill/>
           </a:ln>
           <a:effectLst/>
         </p:spPr>
@@ -3489,6 +3495,9 @@
             <a:avLst/>
           </a:prstGeom>
           <a:noFill/>
+          <a:ln>
+            <a:solidFill/>
+          </a:ln>
         </p:spPr>
         <p:txBody>
           <a:bodyPr wrap="square" lIns="0" tIns="0" rIns="0" bIns="0" anchor="t">
@@ -3510,7 +3519,7 @@
             <a:r>
               <a:rPr sz="2200" b="0" dirty="0">
                 <a:solidFill>
-                  <a:srgbClr val="8DA39B"/>
+                  <a:srgbClr val="22C55E"/>
                 </a:solidFill>
                 <a:latin typeface="Segoe UI"/>
               </a:rPr>
@@ -3532,7 +3541,7 @@
             <a:r>
               <a:rPr sz="2200" b="0" dirty="0">
                 <a:solidFill>
-                  <a:srgbClr val="8DA39B"/>
+                  <a:srgbClr val="22C55E"/>
                 </a:solidFill>
                 <a:latin typeface="Segoe UI"/>
               </a:rPr>
@@ -3558,7 +3567,7 @@
           <a:noFill/>
           <a:ln w="15875">
             <a:solidFill>
-              <a:srgbClr val="00E676"/>
+              <a:srgbClr val="38BDF8"/>
             </a:solidFill>
           </a:ln>
           <a:effectLst/>
@@ -3585,7 +3594,7 @@
             <a:r>
               <a:rPr sz="1100" b="1">
                 <a:solidFill>
-                  <a:srgbClr val="00E676"/>
+                  <a:srgbClr val="22C55E"/>
                 </a:solidFill>
                 <a:latin typeface="Consolas"/>
               </a:rPr>
@@ -3611,7 +3620,7 @@
           <a:noFill/>
           <a:ln w="15875">
             <a:solidFill>
-              <a:srgbClr val="4FC3F7"/>
+              <a:srgbClr val="38BDF8"/>
             </a:solidFill>
           </a:ln>
           <a:effectLst/>
@@ -3638,7 +3647,7 @@
             <a:r>
               <a:rPr sz="1100" b="1">
                 <a:solidFill>
-                  <a:srgbClr val="4FC3F7"/>
+                  <a:srgbClr val="38BDF8"/>
                 </a:solidFill>
                 <a:latin typeface="Consolas"/>
               </a:rPr>
@@ -3664,7 +3673,7 @@
           <a:noFill/>
           <a:ln w="15875">
             <a:solidFill>
-              <a:srgbClr val="FFB300"/>
+              <a:srgbClr val="1E2847"/>
             </a:solidFill>
           </a:ln>
           <a:effectLst/>
@@ -3691,7 +3700,7 @@
             <a:r>
               <a:rPr sz="1100" b="1">
                 <a:solidFill>
-                  <a:srgbClr val="FFB300"/>
+                  <a:srgbClr val="38BDF8"/>
                 </a:solidFill>
                 <a:latin typeface="Consolas"/>
               </a:rPr>
@@ -3717,7 +3726,7 @@
           <a:noFill/>
           <a:ln w="15875">
             <a:solidFill>
-              <a:srgbClr val="8DA39B"/>
+              <a:srgbClr val="38BDF8"/>
             </a:solidFill>
           </a:ln>
           <a:effectLst/>
@@ -3744,7 +3753,7 @@
             <a:r>
               <a:rPr sz="1100" b="1">
                 <a:solidFill>
-                  <a:srgbClr val="8DA39B"/>
+                  <a:srgbClr val="22C55E"/>
                 </a:solidFill>
                 <a:latin typeface="Consolas"/>
               </a:rPr>
@@ -3768,10 +3777,10 @@
             <a:avLst/>
           </a:prstGeom>
           <a:solidFill>
-            <a:srgbClr val="2F423B"/>
+            <a:srgbClr val="080C1A"/>
           </a:solidFill>
           <a:ln>
-            <a:noFill/>
+            <a:solidFill/>
           </a:ln>
           <a:effectLst/>
         </p:spPr>
@@ -3813,6 +3822,9 @@
             <a:avLst/>
           </a:prstGeom>
           <a:noFill/>
+          <a:ln>
+            <a:solidFill/>
+          </a:ln>
         </p:spPr>
         <p:txBody>
           <a:bodyPr wrap="square" lIns="0" tIns="0" rIns="0" bIns="0" anchor="t">
@@ -3834,7 +3846,7 @@
             <a:r>
               <a:rPr sz="1300" b="1">
                 <a:solidFill>
-                  <a:srgbClr val="EAF3EF"/>
+                  <a:srgbClr val="22C55E"/>
                 </a:solidFill>
                 <a:latin typeface="Segoe UI"/>
               </a:rPr>
@@ -3843,7 +3855,7 @@
             <a:r>
               <a:rPr sz="1300" b="0">
                 <a:solidFill>
-                  <a:srgbClr val="5C726A"/>
+                  <a:srgbClr val="22C55E"/>
                 </a:solidFill>
                 <a:latin typeface="Segoe UI"/>
               </a:rPr>
@@ -3866,7 +3878,7 @@
     <p:bg>
       <p:bgPr>
         <a:solidFill>
-          <a:srgbClr val="0A0E0D"/>
+          <a:srgbClr val="0D1226"/>
         </a:solidFill>
         <a:effectLst/>
       </p:bgPr>
@@ -3900,10 +3912,10 @@
             <a:avLst/>
           </a:prstGeom>
           <a:solidFill>
-            <a:srgbClr val="00E676"/>
+            <a:srgbClr val="22C55E"/>
           </a:solidFill>
           <a:ln>
-            <a:noFill/>
+            <a:solidFill/>
           </a:ln>
           <a:effectLst/>
         </p:spPr>
@@ -3945,10 +3957,10 @@
             <a:avLst/>
           </a:prstGeom>
           <a:solidFill>
-            <a:srgbClr val="22302B"/>
+            <a:srgbClr val="080C1A"/>
           </a:solidFill>
           <a:ln>
-            <a:noFill/>
+            <a:solidFill/>
           </a:ln>
           <a:effectLst/>
         </p:spPr>
@@ -3990,10 +4002,10 @@
             <a:avLst/>
           </a:prstGeom>
           <a:solidFill>
-            <a:srgbClr val="00E676"/>
+            <a:srgbClr val="22C55E"/>
           </a:solidFill>
           <a:ln>
-            <a:noFill/>
+            <a:solidFill/>
           </a:ln>
           <a:effectLst/>
         </p:spPr>
@@ -4035,6 +4047,9 @@
             <a:avLst/>
           </a:prstGeom>
           <a:noFill/>
+          <a:ln>
+            <a:solidFill/>
+          </a:ln>
         </p:spPr>
         <p:txBody>
           <a:bodyPr wrap="square" lIns="0" tIns="0" rIns="0" bIns="0" anchor="t">
@@ -4056,7 +4071,7 @@
             <a:r>
               <a:rPr sz="900" b="1">
                 <a:solidFill>
-                  <a:srgbClr val="5C726A"/>
+                  <a:srgbClr val="22C55E"/>
                 </a:solidFill>
                 <a:latin typeface="Consolas"/>
               </a:rPr>
@@ -4065,7 +4080,7 @@
             <a:r>
               <a:rPr sz="900" b="0">
                 <a:solidFill>
-                  <a:srgbClr val="5C726A"/>
+                  <a:srgbClr val="22C55E"/>
                 </a:solidFill>
                 <a:latin typeface="Consolas"/>
               </a:rPr>
@@ -4089,6 +4104,9 @@
             <a:avLst/>
           </a:prstGeom>
           <a:noFill/>
+          <a:ln>
+            <a:solidFill/>
+          </a:ln>
         </p:spPr>
         <p:txBody>
           <a:bodyPr wrap="square" lIns="0" tIns="0" rIns="0" bIns="0" anchor="t">
@@ -4110,7 +4128,7 @@
             <a:r>
               <a:rPr sz="900" b="0">
                 <a:solidFill>
-                  <a:srgbClr val="5C726A"/>
+                  <a:srgbClr val="22C55E"/>
                 </a:solidFill>
                 <a:latin typeface="Consolas"/>
               </a:rPr>
@@ -4134,10 +4152,10 @@
             <a:avLst/>
           </a:prstGeom>
           <a:solidFill>
-            <a:srgbClr val="00E676"/>
+            <a:srgbClr val="22C55E"/>
           </a:solidFill>
           <a:ln>
-            <a:noFill/>
+            <a:solidFill/>
           </a:ln>
           <a:effectLst/>
         </p:spPr>
@@ -4179,6 +4197,9 @@
             <a:avLst/>
           </a:prstGeom>
           <a:noFill/>
+          <a:ln>
+            <a:solidFill/>
+          </a:ln>
         </p:spPr>
         <p:txBody>
           <a:bodyPr wrap="square" lIns="0" tIns="0" rIns="0" bIns="0" anchor="t">
@@ -4200,7 +4221,7 @@
             <a:r>
               <a:rPr sz="1200" b="1">
                 <a:solidFill>
-                  <a:srgbClr val="00E676"/>
+                  <a:srgbClr val="22C55E"/>
                 </a:solidFill>
                 <a:latin typeface="Consolas"/>
               </a:rPr>
@@ -4224,6 +4245,9 @@
             <a:avLst/>
           </a:prstGeom>
           <a:noFill/>
+          <a:ln>
+            <a:solidFill/>
+          </a:ln>
         </p:spPr>
         <p:txBody>
           <a:bodyPr wrap="square" lIns="0" tIns="0" rIns="0" bIns="0" anchor="t">
@@ -4245,7 +4269,7 @@
             <a:r>
               <a:rPr sz="3000" b="1">
                 <a:solidFill>
-                  <a:srgbClr val="EAF3EF"/>
+                  <a:srgbClr val="22C55E"/>
                 </a:solidFill>
                 <a:latin typeface="Segoe UI"/>
               </a:rPr>
@@ -4269,10 +4293,10 @@
             <a:avLst/>
           </a:prstGeom>
           <a:solidFill>
-            <a:srgbClr val="00E676"/>
+            <a:srgbClr val="22C55E"/>
           </a:solidFill>
           <a:ln>
-            <a:noFill/>
+            <a:solidFill/>
           </a:ln>
           <a:effectLst/>
         </p:spPr>
@@ -4314,10 +4338,10 @@
             <a:avLst/>
           </a:prstGeom>
           <a:solidFill>
-            <a:srgbClr val="22302B"/>
+            <a:srgbClr val="080C1A"/>
           </a:solidFill>
           <a:ln>
-            <a:noFill/>
+            <a:solidFill/>
           </a:ln>
           <a:effectLst/>
         </p:spPr>
@@ -4359,11 +4383,11 @@
             <a:avLst/>
           </a:prstGeom>
           <a:solidFill>
-            <a:srgbClr val="111714"/>
+            <a:srgbClr val="080C1A"/>
           </a:solidFill>
           <a:ln w="15875">
             <a:solidFill>
-              <a:srgbClr val="2F423B"/>
+              <a:srgbClr val="1E2847"/>
             </a:solidFill>
           </a:ln>
           <a:effectLst/>
@@ -4406,6 +4430,9 @@
             <a:avLst/>
           </a:prstGeom>
           <a:noFill/>
+          <a:ln>
+            <a:solidFill/>
+          </a:ln>
         </p:spPr>
         <p:txBody>
           <a:bodyPr wrap="square" lIns="0" tIns="0" rIns="0" bIns="0" anchor="t">
@@ -4427,7 +4454,7 @@
             <a:r>
               <a:rPr sz="3000" b="1">
                 <a:solidFill>
-                  <a:srgbClr val="00E676"/>
+                  <a:srgbClr val="22C55E"/>
                 </a:solidFill>
                 <a:latin typeface="Segoe UI"/>
               </a:rPr>
@@ -4449,7 +4476,7 @@
             <a:r>
               <a:rPr sz="1100" b="1">
                 <a:solidFill>
-                  <a:srgbClr val="EAF3EF"/>
+                  <a:srgbClr val="22C55E"/>
                 </a:solidFill>
                 <a:latin typeface="Consolas"/>
               </a:rPr>
@@ -4471,7 +4498,7 @@
             <a:r>
               <a:rPr sz="1100" b="0">
                 <a:solidFill>
-                  <a:srgbClr val="5C726A"/>
+                  <a:srgbClr val="22C55E"/>
                 </a:solidFill>
                 <a:latin typeface="Consolas"/>
               </a:rPr>
@@ -4495,11 +4522,11 @@
             <a:avLst/>
           </a:prstGeom>
           <a:solidFill>
-            <a:srgbClr val="111714"/>
+            <a:srgbClr val="080C1A"/>
           </a:solidFill>
           <a:ln w="15875">
             <a:solidFill>
-              <a:srgbClr val="2F423B"/>
+              <a:srgbClr val="1E2847"/>
             </a:solidFill>
           </a:ln>
           <a:effectLst/>
@@ -4542,6 +4569,9 @@
             <a:avLst/>
           </a:prstGeom>
           <a:noFill/>
+          <a:ln>
+            <a:solidFill/>
+          </a:ln>
         </p:spPr>
         <p:txBody>
           <a:bodyPr wrap="square" lIns="0" tIns="0" rIns="0" bIns="0" anchor="t">
@@ -4563,7 +4593,7 @@
             <a:r>
               <a:rPr sz="3000" b="1">
                 <a:solidFill>
-                  <a:srgbClr val="00E676"/>
+                  <a:srgbClr val="22C55E"/>
                 </a:solidFill>
                 <a:latin typeface="Segoe UI"/>
               </a:rPr>
@@ -4585,7 +4615,7 @@
             <a:r>
               <a:rPr sz="1100" b="1">
                 <a:solidFill>
-                  <a:srgbClr val="EAF3EF"/>
+                  <a:srgbClr val="22C55E"/>
                 </a:solidFill>
                 <a:latin typeface="Consolas"/>
               </a:rPr>
@@ -4607,7 +4637,7 @@
             <a:r>
               <a:rPr sz="1100" b="0">
                 <a:solidFill>
-                  <a:srgbClr val="5C726A"/>
+                  <a:srgbClr val="22C55E"/>
                 </a:solidFill>
                 <a:latin typeface="Consolas"/>
               </a:rPr>
@@ -4631,11 +4661,11 @@
             <a:avLst/>
           </a:prstGeom>
           <a:solidFill>
-            <a:srgbClr val="111714"/>
+            <a:srgbClr val="080C1A"/>
           </a:solidFill>
           <a:ln w="15875">
             <a:solidFill>
-              <a:srgbClr val="2F423B"/>
+              <a:srgbClr val="1E2847"/>
             </a:solidFill>
           </a:ln>
           <a:effectLst/>
@@ -4678,6 +4708,9 @@
             <a:avLst/>
           </a:prstGeom>
           <a:noFill/>
+          <a:ln>
+            <a:solidFill/>
+          </a:ln>
         </p:spPr>
         <p:txBody>
           <a:bodyPr wrap="square" lIns="0" tIns="0" rIns="0" bIns="0" anchor="t">
@@ -4699,7 +4732,7 @@
             <a:r>
               <a:rPr sz="3000" b="1">
                 <a:solidFill>
-                  <a:srgbClr val="00E676"/>
+                  <a:srgbClr val="22C55E"/>
                 </a:solidFill>
                 <a:latin typeface="Segoe UI"/>
               </a:rPr>
@@ -4721,7 +4754,7 @@
             <a:r>
               <a:rPr sz="1100" b="1">
                 <a:solidFill>
-                  <a:srgbClr val="EAF3EF"/>
+                  <a:srgbClr val="22C55E"/>
                 </a:solidFill>
                 <a:latin typeface="Consolas"/>
               </a:rPr>
@@ -4743,7 +4776,7 @@
             <a:r>
               <a:rPr sz="1100" b="0">
                 <a:solidFill>
-                  <a:srgbClr val="5C726A"/>
+                  <a:srgbClr val="22C55E"/>
                 </a:solidFill>
                 <a:latin typeface="Consolas"/>
               </a:rPr>
@@ -4767,11 +4800,11 @@
             <a:avLst/>
           </a:prstGeom>
           <a:solidFill>
-            <a:srgbClr val="111714"/>
+            <a:srgbClr val="080C1A"/>
           </a:solidFill>
           <a:ln w="15875">
             <a:solidFill>
-              <a:srgbClr val="2F423B"/>
+              <a:srgbClr val="1E2847"/>
             </a:solidFill>
           </a:ln>
           <a:effectLst/>
@@ -4814,6 +4847,9 @@
             <a:avLst/>
           </a:prstGeom>
           <a:noFill/>
+          <a:ln>
+            <a:solidFill/>
+          </a:ln>
         </p:spPr>
         <p:txBody>
           <a:bodyPr wrap="square" lIns="0" tIns="0" rIns="0" bIns="0" anchor="t">
@@ -4835,7 +4871,7 @@
             <a:r>
               <a:rPr sz="3000" b="1">
                 <a:solidFill>
-                  <a:srgbClr val="00E676"/>
+                  <a:srgbClr val="22C55E"/>
                 </a:solidFill>
                 <a:latin typeface="Segoe UI"/>
               </a:rPr>
@@ -4857,7 +4893,7 @@
             <a:r>
               <a:rPr sz="1100" b="1">
                 <a:solidFill>
-                  <a:srgbClr val="EAF3EF"/>
+                  <a:srgbClr val="22C55E"/>
                 </a:solidFill>
                 <a:latin typeface="Consolas"/>
               </a:rPr>
@@ -4879,7 +4915,7 @@
             <a:r>
               <a:rPr sz="1100" b="0">
                 <a:solidFill>
-                  <a:srgbClr val="5C726A"/>
+                  <a:srgbClr val="22C55E"/>
                 </a:solidFill>
                 <a:latin typeface="Consolas"/>
               </a:rPr>
@@ -4946,7 +4982,7 @@
                       <a:r>
                         <a:rPr sz="1250" b="1">
                           <a:solidFill>
-                            <a:srgbClr val="00E676"/>
+                            <a:srgbClr val="22C55E"/>
                           </a:solidFill>
                           <a:latin typeface="Segoe UI"/>
                         </a:rPr>
@@ -4956,7 +4992,7 @@
                   </a:txBody>
                   <a:tcPr marL="128016" marR="73152" marT="18288" marB="18288" anchor="ctr">
                     <a:solidFill>
-                      <a:srgbClr val="0B3D2A"/>
+                      <a:srgbClr val="080C1A"/>
                     </a:solidFill>
                   </a:tcPr>
                 </a:tc>
@@ -4969,7 +5005,7 @@
                       <a:r>
                         <a:rPr sz="1250" b="1">
                           <a:solidFill>
-                            <a:srgbClr val="00E676"/>
+                            <a:srgbClr val="22C55E"/>
                           </a:solidFill>
                           <a:latin typeface="Segoe UI"/>
                         </a:rPr>
@@ -4979,7 +5015,7 @@
                   </a:txBody>
                   <a:tcPr marL="128016" marR="73152" marT="18288" marB="18288" anchor="ctr">
                     <a:solidFill>
-                      <a:srgbClr val="0B3D2A"/>
+                      <a:srgbClr val="080C1A"/>
                     </a:solidFill>
                   </a:tcPr>
                 </a:tc>
@@ -4992,7 +5028,7 @@
                       <a:r>
                         <a:rPr sz="1250" b="1">
                           <a:solidFill>
-                            <a:srgbClr val="00E676"/>
+                            <a:srgbClr val="22C55E"/>
                           </a:solidFill>
                           <a:latin typeface="Segoe UI"/>
                         </a:rPr>
@@ -5002,7 +5038,7 @@
                   </a:txBody>
                   <a:tcPr marL="128016" marR="73152" marT="18288" marB="18288" anchor="ctr">
                     <a:solidFill>
-                      <a:srgbClr val="0B3D2A"/>
+                      <a:srgbClr val="080C1A"/>
                     </a:solidFill>
                   </a:tcPr>
                 </a:tc>
@@ -5015,7 +5051,7 @@
                       <a:r>
                         <a:rPr sz="1250" b="1">
                           <a:solidFill>
-                            <a:srgbClr val="00E676"/>
+                            <a:srgbClr val="22C55E"/>
                           </a:solidFill>
                           <a:latin typeface="Segoe UI"/>
                         </a:rPr>
@@ -5025,7 +5061,7 @@
                   </a:txBody>
                   <a:tcPr marL="128016" marR="73152" marT="18288" marB="18288" anchor="ctr">
                     <a:solidFill>
-                      <a:srgbClr val="0B3D2A"/>
+                      <a:srgbClr val="080C1A"/>
                     </a:solidFill>
                   </a:tcPr>
                 </a:tc>
@@ -5045,7 +5081,7 @@
                       <a:r>
                         <a:rPr sz="1250" b="1">
                           <a:solidFill>
-                            <a:srgbClr val="EAF3EF"/>
+                            <a:srgbClr val="22C55E"/>
                           </a:solidFill>
                           <a:latin typeface="Segoe UI"/>
                         </a:rPr>
@@ -5055,7 +5091,7 @@
                   </a:txBody>
                   <a:tcPr marL="128016" marR="73152" marT="18288" marB="18288" anchor="ctr">
                     <a:solidFill>
-                      <a:srgbClr val="111714"/>
+                      <a:srgbClr val="080C1A"/>
                     </a:solidFill>
                   </a:tcPr>
                 </a:tc>
@@ -5068,7 +5104,7 @@
                       <a:r>
                         <a:rPr sz="1250" b="0">
                           <a:solidFill>
-                            <a:srgbClr val="8DA39B"/>
+                            <a:srgbClr val="22C55E"/>
                           </a:solidFill>
                           <a:latin typeface="Consolas"/>
                         </a:rPr>
@@ -5078,7 +5114,7 @@
                   </a:txBody>
                   <a:tcPr marL="128016" marR="73152" marT="18288" marB="18288" anchor="ctr">
                     <a:solidFill>
-                      <a:srgbClr val="111714"/>
+                      <a:srgbClr val="080C1A"/>
                     </a:solidFill>
                   </a:tcPr>
                 </a:tc>
@@ -5091,7 +5127,7 @@
                       <a:r>
                         <a:rPr sz="1250" b="0">
                           <a:solidFill>
-                            <a:srgbClr val="8DA39B"/>
+                            <a:srgbClr val="22C55E"/>
                           </a:solidFill>
                           <a:latin typeface="Consolas"/>
                         </a:rPr>
@@ -5101,7 +5137,7 @@
                   </a:txBody>
                   <a:tcPr marL="128016" marR="73152" marT="18288" marB="18288" anchor="ctr">
                     <a:solidFill>
-                      <a:srgbClr val="111714"/>
+                      <a:srgbClr val="080C1A"/>
                     </a:solidFill>
                   </a:tcPr>
                 </a:tc>
@@ -5114,7 +5150,7 @@
                       <a:r>
                         <a:rPr sz="1250" b="0">
                           <a:solidFill>
-                            <a:srgbClr val="8DA39B"/>
+                            <a:srgbClr val="22C55E"/>
                           </a:solidFill>
                           <a:latin typeface="Consolas"/>
                         </a:rPr>
@@ -5124,7 +5160,7 @@
                   </a:txBody>
                   <a:tcPr marL="128016" marR="73152" marT="18288" marB="18288" anchor="ctr">
                     <a:solidFill>
-                      <a:srgbClr val="111714"/>
+                      <a:srgbClr val="080C1A"/>
                     </a:solidFill>
                   </a:tcPr>
                 </a:tc>
@@ -5144,7 +5180,7 @@
                       <a:r>
                         <a:rPr sz="1250" b="1">
                           <a:solidFill>
-                            <a:srgbClr val="EAF3EF"/>
+                            <a:srgbClr val="22C55E"/>
                           </a:solidFill>
                           <a:latin typeface="Segoe UI"/>
                         </a:rPr>
@@ -5154,7 +5190,7 @@
                   </a:txBody>
                   <a:tcPr marL="128016" marR="73152" marT="18288" marB="18288" anchor="ctr">
                     <a:solidFill>
-                      <a:srgbClr val="161D1A"/>
+                      <a:srgbClr val="080C1A"/>
                     </a:solidFill>
                   </a:tcPr>
                 </a:tc>
@@ -5167,7 +5203,7 @@
                       <a:r>
                         <a:rPr sz="1250" b="0">
                           <a:solidFill>
-                            <a:srgbClr val="8DA39B"/>
+                            <a:srgbClr val="22C55E"/>
                           </a:solidFill>
                           <a:latin typeface="Consolas"/>
                         </a:rPr>
@@ -5177,7 +5213,7 @@
                   </a:txBody>
                   <a:tcPr marL="128016" marR="73152" marT="18288" marB="18288" anchor="ctr">
                     <a:solidFill>
-                      <a:srgbClr val="161D1A"/>
+                      <a:srgbClr val="080C1A"/>
                     </a:solidFill>
                   </a:tcPr>
                 </a:tc>
@@ -5190,7 +5226,7 @@
                       <a:r>
                         <a:rPr sz="1250" b="0">
                           <a:solidFill>
-                            <a:srgbClr val="8DA39B"/>
+                            <a:srgbClr val="22C55E"/>
                           </a:solidFill>
                           <a:latin typeface="Consolas"/>
                         </a:rPr>
@@ -5200,7 +5236,7 @@
                   </a:txBody>
                   <a:tcPr marL="128016" marR="73152" marT="18288" marB="18288" anchor="ctr">
                     <a:solidFill>
-                      <a:srgbClr val="161D1A"/>
+                      <a:srgbClr val="080C1A"/>
                     </a:solidFill>
                   </a:tcPr>
                 </a:tc>
@@ -5213,7 +5249,7 @@
                       <a:r>
                         <a:rPr sz="1250" b="0">
                           <a:solidFill>
-                            <a:srgbClr val="8DA39B"/>
+                            <a:srgbClr val="22C55E"/>
                           </a:solidFill>
                           <a:latin typeface="Consolas"/>
                         </a:rPr>
@@ -5223,7 +5259,7 @@
                   </a:txBody>
                   <a:tcPr marL="128016" marR="73152" marT="18288" marB="18288" anchor="ctr">
                     <a:solidFill>
-                      <a:srgbClr val="161D1A"/>
+                      <a:srgbClr val="080C1A"/>
                     </a:solidFill>
                   </a:tcPr>
                 </a:tc>
@@ -5243,7 +5279,7 @@
                       <a:r>
                         <a:rPr sz="1250" b="1">
                           <a:solidFill>
-                            <a:srgbClr val="EAF3EF"/>
+                            <a:srgbClr val="22C55E"/>
                           </a:solidFill>
                           <a:latin typeface="Segoe UI"/>
                         </a:rPr>
@@ -5253,7 +5289,7 @@
                   </a:txBody>
                   <a:tcPr marL="128016" marR="73152" marT="18288" marB="18288" anchor="ctr">
                     <a:solidFill>
-                      <a:srgbClr val="111714"/>
+                      <a:srgbClr val="080C1A"/>
                     </a:solidFill>
                   </a:tcPr>
                 </a:tc>
@@ -5266,7 +5302,7 @@
                       <a:r>
                         <a:rPr sz="1250" b="0">
                           <a:solidFill>
-                            <a:srgbClr val="8DA39B"/>
+                            <a:srgbClr val="22C55E"/>
                           </a:solidFill>
                           <a:latin typeface="Consolas"/>
                         </a:rPr>
@@ -5276,7 +5312,7 @@
                   </a:txBody>
                   <a:tcPr marL="128016" marR="73152" marT="18288" marB="18288" anchor="ctr">
                     <a:solidFill>
-                      <a:srgbClr val="111714"/>
+                      <a:srgbClr val="080C1A"/>
                     </a:solidFill>
                   </a:tcPr>
                 </a:tc>
@@ -5289,7 +5325,7 @@
                       <a:r>
                         <a:rPr sz="1250" b="0">
                           <a:solidFill>
-                            <a:srgbClr val="8DA39B"/>
+                            <a:srgbClr val="22C55E"/>
                           </a:solidFill>
                           <a:latin typeface="Consolas"/>
                         </a:rPr>
@@ -5299,7 +5335,7 @@
                   </a:txBody>
                   <a:tcPr marL="128016" marR="73152" marT="18288" marB="18288" anchor="ctr">
                     <a:solidFill>
-                      <a:srgbClr val="111714"/>
+                      <a:srgbClr val="080C1A"/>
                     </a:solidFill>
                   </a:tcPr>
                 </a:tc>
@@ -5312,7 +5348,7 @@
                       <a:r>
                         <a:rPr sz="1250" b="0">
                           <a:solidFill>
-                            <a:srgbClr val="8DA39B"/>
+                            <a:srgbClr val="22C55E"/>
                           </a:solidFill>
                           <a:latin typeface="Consolas"/>
                         </a:rPr>
@@ -5322,7 +5358,7 @@
                   </a:txBody>
                   <a:tcPr marL="128016" marR="73152" marT="18288" marB="18288" anchor="ctr">
                     <a:solidFill>
-                      <a:srgbClr val="111714"/>
+                      <a:srgbClr val="080C1A"/>
                     </a:solidFill>
                   </a:tcPr>
                 </a:tc>
@@ -5351,6 +5387,9 @@
             <a:avLst/>
           </a:prstGeom>
           <a:noFill/>
+          <a:ln>
+            <a:solidFill/>
+          </a:ln>
         </p:spPr>
         <p:txBody>
           <a:bodyPr wrap="square" lIns="0" tIns="0" rIns="0" bIns="0" anchor="t">
@@ -5372,7 +5411,7 @@
             <a:r>
               <a:rPr sz="1200" b="0">
                 <a:solidFill>
-                  <a:srgbClr val="8DA39B"/>
+                  <a:srgbClr val="22C55E"/>
                 </a:solidFill>
                 <a:latin typeface="Segoe UI"/>
               </a:rPr>
@@ -5394,7 +5433,7 @@
             <a:r>
               <a:rPr sz="1200" b="0">
                 <a:solidFill>
-                  <a:srgbClr val="8DA39B"/>
+                  <a:srgbClr val="22C55E"/>
                 </a:solidFill>
                 <a:latin typeface="Segoe UI"/>
               </a:rPr>
@@ -5417,7 +5456,7 @@
     <p:bg>
       <p:bgPr>
         <a:solidFill>
-          <a:srgbClr val="0A0E0D"/>
+          <a:srgbClr val="0D1226"/>
         </a:solidFill>
         <a:effectLst/>
       </p:bgPr>
@@ -5451,10 +5490,10 @@
             <a:avLst/>
           </a:prstGeom>
           <a:solidFill>
-            <a:srgbClr val="00E676"/>
+            <a:srgbClr val="22C55E"/>
           </a:solidFill>
           <a:ln>
-            <a:noFill/>
+            <a:solidFill/>
           </a:ln>
           <a:effectLst/>
         </p:spPr>
@@ -5496,10 +5535,10 @@
             <a:avLst/>
           </a:prstGeom>
           <a:solidFill>
-            <a:srgbClr val="22302B"/>
+            <a:srgbClr val="080C1A"/>
           </a:solidFill>
           <a:ln>
-            <a:noFill/>
+            <a:solidFill/>
           </a:ln>
           <a:effectLst/>
         </p:spPr>
@@ -5541,10 +5580,10 @@
             <a:avLst/>
           </a:prstGeom>
           <a:solidFill>
-            <a:srgbClr val="00E676"/>
+            <a:srgbClr val="22C55E"/>
           </a:solidFill>
           <a:ln>
-            <a:noFill/>
+            <a:solidFill/>
           </a:ln>
           <a:effectLst/>
         </p:spPr>
@@ -5586,6 +5625,9 @@
             <a:avLst/>
           </a:prstGeom>
           <a:noFill/>
+          <a:ln>
+            <a:solidFill/>
+          </a:ln>
         </p:spPr>
         <p:txBody>
           <a:bodyPr wrap="square" lIns="0" tIns="0" rIns="0" bIns="0" anchor="t">
@@ -5607,7 +5649,7 @@
             <a:r>
               <a:rPr sz="900" b="1">
                 <a:solidFill>
-                  <a:srgbClr val="5C726A"/>
+                  <a:srgbClr val="22C55E"/>
                 </a:solidFill>
                 <a:latin typeface="Consolas"/>
               </a:rPr>
@@ -5616,7 +5658,7 @@
             <a:r>
               <a:rPr sz="900" b="0">
                 <a:solidFill>
-                  <a:srgbClr val="5C726A"/>
+                  <a:srgbClr val="22C55E"/>
                 </a:solidFill>
                 <a:latin typeface="Consolas"/>
               </a:rPr>
@@ -5640,6 +5682,9 @@
             <a:avLst/>
           </a:prstGeom>
           <a:noFill/>
+          <a:ln>
+            <a:solidFill/>
+          </a:ln>
         </p:spPr>
         <p:txBody>
           <a:bodyPr wrap="square" lIns="0" tIns="0" rIns="0" bIns="0" anchor="t">
@@ -5661,7 +5706,7 @@
             <a:r>
               <a:rPr sz="900" b="0">
                 <a:solidFill>
-                  <a:srgbClr val="5C726A"/>
+                  <a:srgbClr val="22C55E"/>
                 </a:solidFill>
                 <a:latin typeface="Consolas"/>
               </a:rPr>
@@ -5685,10 +5730,10 @@
             <a:avLst/>
           </a:prstGeom>
           <a:solidFill>
-            <a:srgbClr val="00E676"/>
+            <a:srgbClr val="22C55E"/>
           </a:solidFill>
           <a:ln>
-            <a:noFill/>
+            <a:solidFill/>
           </a:ln>
           <a:effectLst/>
         </p:spPr>
@@ -5730,6 +5775,9 @@
             <a:avLst/>
           </a:prstGeom>
           <a:noFill/>
+          <a:ln>
+            <a:solidFill/>
+          </a:ln>
         </p:spPr>
         <p:txBody>
           <a:bodyPr wrap="square" lIns="0" tIns="0" rIns="0" bIns="0" anchor="t">
@@ -5751,7 +5799,7 @@
             <a:r>
               <a:rPr sz="1200" b="1">
                 <a:solidFill>
-                  <a:srgbClr val="00E676"/>
+                  <a:srgbClr val="22C55E"/>
                 </a:solidFill>
                 <a:latin typeface="Consolas"/>
               </a:rPr>
@@ -5775,6 +5823,9 @@
             <a:avLst/>
           </a:prstGeom>
           <a:noFill/>
+          <a:ln>
+            <a:solidFill/>
+          </a:ln>
         </p:spPr>
         <p:txBody>
           <a:bodyPr wrap="square" lIns="0" tIns="0" rIns="0" bIns="0" anchor="t">
@@ -5796,7 +5847,7 @@
             <a:r>
               <a:rPr sz="3000" b="1">
                 <a:solidFill>
-                  <a:srgbClr val="EAF3EF"/>
+                  <a:srgbClr val="22C55E"/>
                 </a:solidFill>
                 <a:latin typeface="Segoe UI"/>
               </a:rPr>
@@ -5820,10 +5871,10 @@
             <a:avLst/>
           </a:prstGeom>
           <a:solidFill>
-            <a:srgbClr val="00E676"/>
+            <a:srgbClr val="22C55E"/>
           </a:solidFill>
           <a:ln>
-            <a:noFill/>
+            <a:solidFill/>
           </a:ln>
           <a:effectLst/>
         </p:spPr>
@@ -5865,10 +5916,10 @@
             <a:avLst/>
           </a:prstGeom>
           <a:solidFill>
-            <a:srgbClr val="22302B"/>
+            <a:srgbClr val="080C1A"/>
           </a:solidFill>
           <a:ln>
-            <a:noFill/>
+            <a:solidFill/>
           </a:ln>
           <a:effectLst/>
         </p:spPr>
@@ -5910,11 +5961,11 @@
             <a:avLst/>
           </a:prstGeom>
           <a:solidFill>
-            <a:srgbClr val="111714"/>
+            <a:srgbClr val="080C1A"/>
           </a:solidFill>
           <a:ln w="15875">
             <a:solidFill>
-              <a:srgbClr val="00E676"/>
+              <a:srgbClr val="38BDF8"/>
             </a:solidFill>
           </a:ln>
           <a:effectLst/>
@@ -5957,10 +6008,10 @@
             <a:avLst/>
           </a:prstGeom>
           <a:solidFill>
-            <a:srgbClr val="00E676"/>
+            <a:srgbClr val="22C55E"/>
           </a:solidFill>
           <a:ln>
-            <a:noFill/>
+            <a:solidFill/>
           </a:ln>
           <a:effectLst/>
         </p:spPr>
@@ -6002,6 +6053,9 @@
             <a:avLst/>
           </a:prstGeom>
           <a:noFill/>
+          <a:ln>
+            <a:solidFill/>
+          </a:ln>
         </p:spPr>
         <p:txBody>
           <a:bodyPr wrap="square" lIns="0" tIns="0" rIns="0" bIns="0" anchor="ctr">
@@ -6023,7 +6077,7 @@
             <a:r>
               <a:rPr sz="1400" b="1">
                 <a:solidFill>
-                  <a:srgbClr val="EAF3EF"/>
+                  <a:srgbClr val="22C55E"/>
                 </a:solidFill>
                 <a:latin typeface="Segoe UI"/>
               </a:rPr>
@@ -6045,7 +6099,7 @@
             <a:r>
               <a:rPr sz="1050" b="0">
                 <a:solidFill>
-                  <a:srgbClr val="8DA39B"/>
+                  <a:srgbClr val="22C55E"/>
                 </a:solidFill>
                 <a:latin typeface="Consolas"/>
               </a:rPr>
@@ -6069,10 +6123,10 @@
             <a:avLst/>
           </a:prstGeom>
           <a:solidFill>
-            <a:srgbClr val="00E676"/>
+            <a:srgbClr val="22C55E"/>
           </a:solidFill>
           <a:ln>
-            <a:noFill/>
+            <a:solidFill/>
           </a:ln>
           <a:effectLst/>
         </p:spPr>
@@ -6114,11 +6168,11 @@
             <a:avLst/>
           </a:prstGeom>
           <a:solidFill>
-            <a:srgbClr val="111714"/>
+            <a:srgbClr val="080C1A"/>
           </a:solidFill>
           <a:ln w="15875">
             <a:solidFill>
-              <a:srgbClr val="4FC3F7"/>
+              <a:srgbClr val="38BDF8"/>
             </a:solidFill>
           </a:ln>
           <a:effectLst/>
@@ -6161,10 +6215,10 @@
             <a:avLst/>
           </a:prstGeom>
           <a:solidFill>
-            <a:srgbClr val="4FC3F7"/>
+            <a:srgbClr val="080C1A"/>
           </a:solidFill>
           <a:ln>
-            <a:noFill/>
+            <a:solidFill/>
           </a:ln>
           <a:effectLst/>
         </p:spPr>
@@ -6206,6 +6260,9 @@
             <a:avLst/>
           </a:prstGeom>
           <a:noFill/>
+          <a:ln>
+            <a:solidFill/>
+          </a:ln>
         </p:spPr>
         <p:txBody>
           <a:bodyPr wrap="square" lIns="0" tIns="0" rIns="0" bIns="0" anchor="ctr">
@@ -6227,7 +6284,7 @@
             <a:r>
               <a:rPr sz="1400" b="1">
                 <a:solidFill>
-                  <a:srgbClr val="EAF3EF"/>
+                  <a:srgbClr val="22C55E"/>
                 </a:solidFill>
                 <a:latin typeface="Segoe UI"/>
               </a:rPr>
@@ -6249,7 +6306,7 @@
             <a:r>
               <a:rPr sz="1050" b="0">
                 <a:solidFill>
-                  <a:srgbClr val="8DA39B"/>
+                  <a:srgbClr val="22C55E"/>
                 </a:solidFill>
                 <a:latin typeface="Consolas"/>
               </a:rPr>
@@ -6273,10 +6330,10 @@
             <a:avLst/>
           </a:prstGeom>
           <a:solidFill>
-            <a:srgbClr val="4FC3F7"/>
+            <a:srgbClr val="080C1A"/>
           </a:solidFill>
           <a:ln>
-            <a:noFill/>
+            <a:solidFill/>
           </a:ln>
           <a:effectLst/>
         </p:spPr>
@@ -6318,11 +6375,11 @@
             <a:avLst/>
           </a:prstGeom>
           <a:solidFill>
-            <a:srgbClr val="111714"/>
+            <a:srgbClr val="080C1A"/>
           </a:solidFill>
           <a:ln w="15875">
             <a:solidFill>
-              <a:srgbClr val="4FC3F7"/>
+              <a:srgbClr val="38BDF8"/>
             </a:solidFill>
           </a:ln>
           <a:effectLst/>
@@ -6365,10 +6422,10 @@
             <a:avLst/>
           </a:prstGeom>
           <a:solidFill>
-            <a:srgbClr val="4FC3F7"/>
+            <a:srgbClr val="080C1A"/>
           </a:solidFill>
           <a:ln>
-            <a:noFill/>
+            <a:solidFill/>
           </a:ln>
           <a:effectLst/>
         </p:spPr>
@@ -6410,6 +6467,9 @@
             <a:avLst/>
           </a:prstGeom>
           <a:noFill/>
+          <a:ln>
+            <a:solidFill/>
+          </a:ln>
         </p:spPr>
         <p:txBody>
           <a:bodyPr wrap="square" lIns="0" tIns="0" rIns="0" bIns="0" anchor="ctr">
@@ -6431,7 +6491,7 @@
             <a:r>
               <a:rPr sz="1400" b="1">
                 <a:solidFill>
-                  <a:srgbClr val="EAF3EF"/>
+                  <a:srgbClr val="22C55E"/>
                 </a:solidFill>
                 <a:latin typeface="Segoe UI"/>
               </a:rPr>
@@ -6453,7 +6513,7 @@
             <a:r>
               <a:rPr sz="1050" b="0">
                 <a:solidFill>
-                  <a:srgbClr val="8DA39B"/>
+                  <a:srgbClr val="22C55E"/>
                 </a:solidFill>
                 <a:latin typeface="Consolas"/>
               </a:rPr>
@@ -6477,10 +6537,10 @@
             <a:avLst/>
           </a:prstGeom>
           <a:solidFill>
-            <a:srgbClr val="4FC3F7"/>
+            <a:srgbClr val="080C1A"/>
           </a:solidFill>
           <a:ln>
-            <a:noFill/>
+            <a:solidFill/>
           </a:ln>
           <a:effectLst/>
         </p:spPr>
@@ -6522,11 +6582,11 @@
             <a:avLst/>
           </a:prstGeom>
           <a:solidFill>
-            <a:srgbClr val="111714"/>
+            <a:srgbClr val="080C1A"/>
           </a:solidFill>
           <a:ln w="15875">
             <a:solidFill>
-              <a:srgbClr val="00E676"/>
+              <a:srgbClr val="38BDF8"/>
             </a:solidFill>
           </a:ln>
           <a:effectLst/>
@@ -6569,10 +6629,10 @@
             <a:avLst/>
           </a:prstGeom>
           <a:solidFill>
-            <a:srgbClr val="00E676"/>
+            <a:srgbClr val="22C55E"/>
           </a:solidFill>
           <a:ln>
-            <a:noFill/>
+            <a:solidFill/>
           </a:ln>
           <a:effectLst/>
         </p:spPr>
@@ -6614,6 +6674,9 @@
             <a:avLst/>
           </a:prstGeom>
           <a:noFill/>
+          <a:ln>
+            <a:solidFill/>
+          </a:ln>
         </p:spPr>
         <p:txBody>
           <a:bodyPr wrap="square" lIns="0" tIns="0" rIns="0" bIns="0" anchor="ctr">
@@ -6635,7 +6698,7 @@
             <a:r>
               <a:rPr sz="1400" b="1">
                 <a:solidFill>
-                  <a:srgbClr val="EAF3EF"/>
+                  <a:srgbClr val="22C55E"/>
                 </a:solidFill>
                 <a:latin typeface="Segoe UI"/>
               </a:rPr>
@@ -6657,7 +6720,7 @@
             <a:r>
               <a:rPr sz="1050" b="0">
                 <a:solidFill>
-                  <a:srgbClr val="8DA39B"/>
+                  <a:srgbClr val="22C55E"/>
                 </a:solidFill>
                 <a:latin typeface="Consolas"/>
               </a:rPr>
@@ -6681,10 +6744,10 @@
             <a:avLst/>
           </a:prstGeom>
           <a:solidFill>
-            <a:srgbClr val="00E676"/>
+            <a:srgbClr val="22C55E"/>
           </a:solidFill>
           <a:ln>
-            <a:noFill/>
+            <a:solidFill/>
           </a:ln>
           <a:effectLst/>
         </p:spPr>
@@ -6726,11 +6789,11 @@
             <a:avLst/>
           </a:prstGeom>
           <a:solidFill>
-            <a:srgbClr val="111714"/>
+            <a:srgbClr val="080C1A"/>
           </a:solidFill>
           <a:ln w="15875">
             <a:solidFill>
-              <a:srgbClr val="FFB300"/>
+              <a:srgbClr val="1E2847"/>
             </a:solidFill>
           </a:ln>
           <a:effectLst/>
@@ -6773,10 +6836,10 @@
             <a:avLst/>
           </a:prstGeom>
           <a:solidFill>
-            <a:srgbClr val="FFB300"/>
+            <a:srgbClr val="080C1A"/>
           </a:solidFill>
           <a:ln>
-            <a:noFill/>
+            <a:solidFill/>
           </a:ln>
           <a:effectLst/>
         </p:spPr>
@@ -6818,6 +6881,9 @@
             <a:avLst/>
           </a:prstGeom>
           <a:noFill/>
+          <a:ln>
+            <a:solidFill/>
+          </a:ln>
         </p:spPr>
         <p:txBody>
           <a:bodyPr wrap="square" lIns="0" tIns="0" rIns="0" bIns="0" anchor="ctr">
@@ -6839,7 +6905,7 @@
             <a:r>
               <a:rPr sz="1400" b="1">
                 <a:solidFill>
-                  <a:srgbClr val="EAF3EF"/>
+                  <a:srgbClr val="22C55E"/>
                 </a:solidFill>
                 <a:latin typeface="Segoe UI"/>
               </a:rPr>
@@ -6861,7 +6927,7 @@
             <a:r>
               <a:rPr sz="1050" b="0">
                 <a:solidFill>
-                  <a:srgbClr val="8DA39B"/>
+                  <a:srgbClr val="22C55E"/>
                 </a:solidFill>
                 <a:latin typeface="Consolas"/>
               </a:rPr>
@@ -6884,7 +6950,7 @@
     <p:bg>
       <p:bgPr>
         <a:solidFill>
-          <a:srgbClr val="0A0E0D"/>
+          <a:srgbClr val="0D1226"/>
         </a:solidFill>
         <a:effectLst/>
       </p:bgPr>
@@ -6918,10 +6984,10 @@
             <a:avLst/>
           </a:prstGeom>
           <a:solidFill>
-            <a:srgbClr val="00E676"/>
+            <a:srgbClr val="22C55E"/>
           </a:solidFill>
           <a:ln>
-            <a:noFill/>
+            <a:solidFill/>
           </a:ln>
           <a:effectLst/>
         </p:spPr>
@@ -6963,10 +7029,10 @@
             <a:avLst/>
           </a:prstGeom>
           <a:solidFill>
-            <a:srgbClr val="22302B"/>
+            <a:srgbClr val="080C1A"/>
           </a:solidFill>
           <a:ln>
-            <a:noFill/>
+            <a:solidFill/>
           </a:ln>
           <a:effectLst/>
         </p:spPr>
@@ -7008,10 +7074,10 @@
             <a:avLst/>
           </a:prstGeom>
           <a:solidFill>
-            <a:srgbClr val="00E676"/>
+            <a:srgbClr val="22C55E"/>
           </a:solidFill>
           <a:ln>
-            <a:noFill/>
+            <a:solidFill/>
           </a:ln>
           <a:effectLst/>
         </p:spPr>
@@ -7053,6 +7119,9 @@
             <a:avLst/>
           </a:prstGeom>
           <a:noFill/>
+          <a:ln>
+            <a:solidFill/>
+          </a:ln>
         </p:spPr>
         <p:txBody>
           <a:bodyPr wrap="square" lIns="0" tIns="0" rIns="0" bIns="0" anchor="t">
@@ -7074,7 +7143,7 @@
             <a:r>
               <a:rPr sz="900" b="1">
                 <a:solidFill>
-                  <a:srgbClr val="5C726A"/>
+                  <a:srgbClr val="22C55E"/>
                 </a:solidFill>
                 <a:latin typeface="Consolas"/>
               </a:rPr>
@@ -7083,7 +7152,7 @@
             <a:r>
               <a:rPr sz="900" b="0">
                 <a:solidFill>
-                  <a:srgbClr val="5C726A"/>
+                  <a:srgbClr val="22C55E"/>
                 </a:solidFill>
                 <a:latin typeface="Consolas"/>
               </a:rPr>
@@ -7107,6 +7176,9 @@
             <a:avLst/>
           </a:prstGeom>
           <a:noFill/>
+          <a:ln>
+            <a:solidFill/>
+          </a:ln>
         </p:spPr>
         <p:txBody>
           <a:bodyPr wrap="square" lIns="0" tIns="0" rIns="0" bIns="0" anchor="t">
@@ -7128,7 +7200,7 @@
             <a:r>
               <a:rPr sz="900" b="0">
                 <a:solidFill>
-                  <a:srgbClr val="5C726A"/>
+                  <a:srgbClr val="22C55E"/>
                 </a:solidFill>
                 <a:latin typeface="Consolas"/>
               </a:rPr>
@@ -7152,10 +7224,10 @@
             <a:avLst/>
           </a:prstGeom>
           <a:solidFill>
-            <a:srgbClr val="00E676"/>
+            <a:srgbClr val="22C55E"/>
           </a:solidFill>
           <a:ln>
-            <a:noFill/>
+            <a:solidFill/>
           </a:ln>
           <a:effectLst/>
         </p:spPr>
@@ -7197,6 +7269,9 @@
             <a:avLst/>
           </a:prstGeom>
           <a:noFill/>
+          <a:ln>
+            <a:solidFill/>
+          </a:ln>
         </p:spPr>
         <p:txBody>
           <a:bodyPr wrap="square" lIns="0" tIns="0" rIns="0" bIns="0" anchor="t">
@@ -7218,7 +7293,7 @@
             <a:r>
               <a:rPr sz="1200" b="1">
                 <a:solidFill>
-                  <a:srgbClr val="00E676"/>
+                  <a:srgbClr val="22C55E"/>
                 </a:solidFill>
                 <a:latin typeface="Consolas"/>
               </a:rPr>
@@ -7242,6 +7317,9 @@
             <a:avLst/>
           </a:prstGeom>
           <a:noFill/>
+          <a:ln>
+            <a:solidFill/>
+          </a:ln>
         </p:spPr>
         <p:txBody>
           <a:bodyPr wrap="square" lIns="0" tIns="0" rIns="0" bIns="0" anchor="t">
@@ -7263,7 +7341,7 @@
             <a:r>
               <a:rPr sz="3000" b="1">
                 <a:solidFill>
-                  <a:srgbClr val="EAF3EF"/>
+                  <a:srgbClr val="22C55E"/>
                 </a:solidFill>
                 <a:latin typeface="Segoe UI"/>
               </a:rPr>
@@ -7287,10 +7365,10 @@
             <a:avLst/>
           </a:prstGeom>
           <a:solidFill>
-            <a:srgbClr val="00E676"/>
+            <a:srgbClr val="22C55E"/>
           </a:solidFill>
           <a:ln>
-            <a:noFill/>
+            <a:solidFill/>
           </a:ln>
           <a:effectLst/>
         </p:spPr>
@@ -7332,10 +7410,10 @@
             <a:avLst/>
           </a:prstGeom>
           <a:solidFill>
-            <a:srgbClr val="22302B"/>
+            <a:srgbClr val="080C1A"/>
           </a:solidFill>
           <a:ln>
-            <a:noFill/>
+            <a:solidFill/>
           </a:ln>
           <a:effectLst/>
         </p:spPr>
@@ -7377,6 +7455,9 @@
             <a:avLst/>
           </a:prstGeom>
           <a:noFill/>
+          <a:ln>
+            <a:solidFill/>
+          </a:ln>
         </p:spPr>
         <p:txBody>
           <a:bodyPr wrap="square" lIns="0" tIns="0" rIns="0" bIns="0" anchor="t">
@@ -7398,7 +7479,7 @@
             <a:r>
               <a:rPr sz="1550" b="1">
                 <a:solidFill>
-                  <a:srgbClr val="00E676"/>
+                  <a:srgbClr val="22C55E"/>
                 </a:solidFill>
                 <a:latin typeface="Segoe UI"/>
               </a:rPr>
@@ -7407,7 +7488,7 @@
             <a:r>
               <a:rPr sz="1550" b="1">
                 <a:solidFill>
-                  <a:srgbClr val="EAF3EF"/>
+                  <a:srgbClr val="22C55E"/>
                 </a:solidFill>
                 <a:latin typeface="Segoe UI"/>
               </a:rPr>
@@ -7416,7 +7497,7 @@
             <a:r>
               <a:rPr sz="1550" b="0">
                 <a:solidFill>
-                  <a:srgbClr val="8DA39B"/>
+                  <a:srgbClr val="22C55E"/>
                 </a:solidFill>
                 <a:latin typeface="Segoe UI"/>
               </a:rPr>
@@ -7438,7 +7519,7 @@
             <a:r>
               <a:rPr sz="1550" b="1">
                 <a:solidFill>
-                  <a:srgbClr val="00E676"/>
+                  <a:srgbClr val="22C55E"/>
                 </a:solidFill>
                 <a:latin typeface="Segoe UI"/>
               </a:rPr>
@@ -7447,7 +7528,7 @@
             <a:r>
               <a:rPr sz="1550" b="1">
                 <a:solidFill>
-                  <a:srgbClr val="EAF3EF"/>
+                  <a:srgbClr val="22C55E"/>
                 </a:solidFill>
                 <a:latin typeface="Segoe UI"/>
               </a:rPr>
@@ -7456,7 +7537,7 @@
             <a:r>
               <a:rPr sz="1550" b="0">
                 <a:solidFill>
-                  <a:srgbClr val="8DA39B"/>
+                  <a:srgbClr val="22C55E"/>
                 </a:solidFill>
                 <a:latin typeface="Segoe UI"/>
               </a:rPr>
@@ -7478,7 +7559,7 @@
             <a:r>
               <a:rPr sz="1550" b="1">
                 <a:solidFill>
-                  <a:srgbClr val="00E676"/>
+                  <a:srgbClr val="22C55E"/>
                 </a:solidFill>
                 <a:latin typeface="Segoe UI"/>
               </a:rPr>
@@ -7487,7 +7568,7 @@
             <a:r>
               <a:rPr sz="1550" b="1">
                 <a:solidFill>
-                  <a:srgbClr val="EAF3EF"/>
+                  <a:srgbClr val="22C55E"/>
                 </a:solidFill>
                 <a:latin typeface="Segoe UI"/>
               </a:rPr>
@@ -7496,7 +7577,7 @@
             <a:r>
               <a:rPr sz="1550" b="0">
                 <a:solidFill>
-                  <a:srgbClr val="8DA39B"/>
+                  <a:srgbClr val="22C55E"/>
                 </a:solidFill>
                 <a:latin typeface="Segoe UI"/>
               </a:rPr>
@@ -7518,7 +7599,7 @@
             <a:r>
               <a:rPr sz="1550" b="1">
                 <a:solidFill>
-                  <a:srgbClr val="00E676"/>
+                  <a:srgbClr val="22C55E"/>
                 </a:solidFill>
                 <a:latin typeface="Segoe UI"/>
               </a:rPr>
@@ -7527,7 +7608,7 @@
             <a:r>
               <a:rPr sz="1550" b="1">
                 <a:solidFill>
-                  <a:srgbClr val="EAF3EF"/>
+                  <a:srgbClr val="22C55E"/>
                 </a:solidFill>
                 <a:latin typeface="Segoe UI"/>
               </a:rPr>
@@ -7536,7 +7617,7 @@
             <a:r>
               <a:rPr sz="1550" b="0">
                 <a:solidFill>
-                  <a:srgbClr val="8DA39B"/>
+                  <a:srgbClr val="22C55E"/>
                 </a:solidFill>
                 <a:latin typeface="Segoe UI"/>
               </a:rPr>
@@ -7558,7 +7639,7 @@
             <a:r>
               <a:rPr sz="1550" b="1">
                 <a:solidFill>
-                  <a:srgbClr val="00E676"/>
+                  <a:srgbClr val="22C55E"/>
                 </a:solidFill>
                 <a:latin typeface="Segoe UI"/>
               </a:rPr>
@@ -7567,7 +7648,7 @@
             <a:r>
               <a:rPr sz="1550" b="1">
                 <a:solidFill>
-                  <a:srgbClr val="EAF3EF"/>
+                  <a:srgbClr val="22C55E"/>
                 </a:solidFill>
                 <a:latin typeface="Segoe UI"/>
               </a:rPr>
@@ -7576,7 +7657,7 @@
             <a:r>
               <a:rPr sz="1550" b="0">
                 <a:solidFill>
-                  <a:srgbClr val="8DA39B"/>
+                  <a:srgbClr val="22C55E"/>
                 </a:solidFill>
                 <a:latin typeface="Segoe UI"/>
               </a:rPr>
@@ -7600,11 +7681,11 @@
             <a:avLst/>
           </a:prstGeom>
           <a:solidFill>
-            <a:srgbClr val="161D1A"/>
+            <a:srgbClr val="080C1A"/>
           </a:solidFill>
           <a:ln w="15875">
             <a:solidFill>
-              <a:srgbClr val="00E676"/>
+              <a:srgbClr val="38BDF8"/>
             </a:solidFill>
           </a:ln>
           <a:effectLst/>
@@ -7647,10 +7728,10 @@
             <a:avLst/>
           </a:prstGeom>
           <a:solidFill>
-            <a:srgbClr val="00E676"/>
+            <a:srgbClr val="22C55E"/>
           </a:solidFill>
           <a:ln>
-            <a:noFill/>
+            <a:solidFill/>
           </a:ln>
           <a:effectLst/>
         </p:spPr>
@@ -7692,6 +7773,9 @@
             <a:avLst/>
           </a:prstGeom>
           <a:noFill/>
+          <a:ln>
+            <a:solidFill/>
+          </a:ln>
         </p:spPr>
         <p:txBody>
           <a:bodyPr wrap="square" lIns="0" tIns="0" rIns="0" bIns="0" anchor="ctr">
@@ -7713,7 +7797,7 @@
             <a:r>
               <a:rPr sz="1400" b="0">
                 <a:solidFill>
-                  <a:srgbClr val="EAF3EF"/>
+                  <a:srgbClr val="22C55E"/>
                 </a:solidFill>
                 <a:latin typeface="Segoe UI"/>
               </a:rPr>
@@ -7722,7 +7806,7 @@
             <a:r>
               <a:rPr sz="1400" b="1">
                 <a:solidFill>
-                  <a:srgbClr val="00E676"/>
+                  <a:srgbClr val="22C55E"/>
                 </a:solidFill>
                 <a:latin typeface="Consolas"/>
               </a:rPr>
@@ -7731,7 +7815,7 @@
             <a:r>
               <a:rPr sz="1400" b="0">
                 <a:solidFill>
-                  <a:srgbClr val="EAF3EF"/>
+                  <a:srgbClr val="22C55E"/>
                 </a:solidFill>
                 <a:latin typeface="Segoe UI"/>
               </a:rPr>
@@ -7754,7 +7838,7 @@
     <p:bg>
       <p:bgPr>
         <a:solidFill>
-          <a:srgbClr val="0A0E0D"/>
+          <a:srgbClr val="0D1226"/>
         </a:solidFill>
         <a:effectLst/>
       </p:bgPr>
@@ -7788,10 +7872,10 @@
             <a:avLst/>
           </a:prstGeom>
           <a:solidFill>
-            <a:srgbClr val="00E676"/>
+            <a:srgbClr val="22C55E"/>
           </a:solidFill>
           <a:ln>
-            <a:noFill/>
+            <a:solidFill/>
           </a:ln>
           <a:effectLst/>
         </p:spPr>
@@ -7833,10 +7917,10 @@
             <a:avLst/>
           </a:prstGeom>
           <a:solidFill>
-            <a:srgbClr val="22302B"/>
+            <a:srgbClr val="080C1A"/>
           </a:solidFill>
           <a:ln>
-            <a:noFill/>
+            <a:solidFill/>
           </a:ln>
           <a:effectLst/>
         </p:spPr>
@@ -7878,10 +7962,10 @@
             <a:avLst/>
           </a:prstGeom>
           <a:solidFill>
-            <a:srgbClr val="00E676"/>
+            <a:srgbClr val="22C55E"/>
           </a:solidFill>
           <a:ln>
-            <a:noFill/>
+            <a:solidFill/>
           </a:ln>
           <a:effectLst/>
         </p:spPr>
@@ -7923,6 +8007,9 @@
             <a:avLst/>
           </a:prstGeom>
           <a:noFill/>
+          <a:ln>
+            <a:solidFill/>
+          </a:ln>
         </p:spPr>
         <p:txBody>
           <a:bodyPr wrap="square" lIns="0" tIns="0" rIns="0" bIns="0" anchor="t">
@@ -7944,7 +8031,7 @@
             <a:r>
               <a:rPr sz="900" b="1">
                 <a:solidFill>
-                  <a:srgbClr val="5C726A"/>
+                  <a:srgbClr val="22C55E"/>
                 </a:solidFill>
                 <a:latin typeface="Consolas"/>
               </a:rPr>
@@ -7953,7 +8040,7 @@
             <a:r>
               <a:rPr sz="900" b="0">
                 <a:solidFill>
-                  <a:srgbClr val="5C726A"/>
+                  <a:srgbClr val="22C55E"/>
                 </a:solidFill>
                 <a:latin typeface="Consolas"/>
               </a:rPr>
@@ -7977,6 +8064,9 @@
             <a:avLst/>
           </a:prstGeom>
           <a:noFill/>
+          <a:ln>
+            <a:solidFill/>
+          </a:ln>
         </p:spPr>
         <p:txBody>
           <a:bodyPr wrap="square" lIns="0" tIns="0" rIns="0" bIns="0" anchor="t">
@@ -7998,7 +8088,7 @@
             <a:r>
               <a:rPr sz="900" b="0">
                 <a:solidFill>
-                  <a:srgbClr val="5C726A"/>
+                  <a:srgbClr val="22C55E"/>
                 </a:solidFill>
                 <a:latin typeface="Consolas"/>
               </a:rPr>
@@ -8022,10 +8112,10 @@
             <a:avLst/>
           </a:prstGeom>
           <a:solidFill>
-            <a:srgbClr val="00E676"/>
+            <a:srgbClr val="22C55E"/>
           </a:solidFill>
           <a:ln>
-            <a:noFill/>
+            <a:solidFill/>
           </a:ln>
           <a:effectLst/>
         </p:spPr>
@@ -8067,6 +8157,9 @@
             <a:avLst/>
           </a:prstGeom>
           <a:noFill/>
+          <a:ln>
+            <a:solidFill/>
+          </a:ln>
         </p:spPr>
         <p:txBody>
           <a:bodyPr wrap="square" lIns="0" tIns="0" rIns="0" bIns="0" anchor="t">
@@ -8088,7 +8181,7 @@
             <a:r>
               <a:rPr sz="1200" b="1">
                 <a:solidFill>
-                  <a:srgbClr val="00E676"/>
+                  <a:srgbClr val="22C55E"/>
                 </a:solidFill>
                 <a:latin typeface="Consolas"/>
               </a:rPr>
@@ -8112,6 +8205,9 @@
             <a:avLst/>
           </a:prstGeom>
           <a:noFill/>
+          <a:ln>
+            <a:solidFill/>
+          </a:ln>
         </p:spPr>
         <p:txBody>
           <a:bodyPr wrap="square" lIns="0" tIns="0" rIns="0" bIns="0" anchor="t">
@@ -8133,7 +8229,7 @@
             <a:r>
               <a:rPr sz="3000" b="1">
                 <a:solidFill>
-                  <a:srgbClr val="EAF3EF"/>
+                  <a:srgbClr val="22C55E"/>
                 </a:solidFill>
                 <a:latin typeface="Segoe UI"/>
               </a:rPr>
@@ -8157,10 +8253,10 @@
             <a:avLst/>
           </a:prstGeom>
           <a:solidFill>
-            <a:srgbClr val="00E676"/>
+            <a:srgbClr val="22C55E"/>
           </a:solidFill>
           <a:ln>
-            <a:noFill/>
+            <a:solidFill/>
           </a:ln>
           <a:effectLst/>
         </p:spPr>
@@ -8202,10 +8298,10 @@
             <a:avLst/>
           </a:prstGeom>
           <a:solidFill>
-            <a:srgbClr val="22302B"/>
+            <a:srgbClr val="080C1A"/>
           </a:solidFill>
           <a:ln>
-            <a:noFill/>
+            <a:solidFill/>
           </a:ln>
           <a:effectLst/>
         </p:spPr>
@@ -8247,6 +8343,9 @@
             <a:avLst/>
           </a:prstGeom>
           <a:noFill/>
+          <a:ln>
+            <a:solidFill/>
+          </a:ln>
         </p:spPr>
         <p:txBody>
           <a:bodyPr wrap="square" lIns="0" tIns="0" rIns="0" bIns="0" anchor="t">
@@ -8268,7 +8367,7 @@
             <a:r>
               <a:rPr sz="1600" b="1">
                 <a:solidFill>
-                  <a:srgbClr val="00E676"/>
+                  <a:srgbClr val="22C55E"/>
                 </a:solidFill>
                 <a:latin typeface="Segoe UI"/>
               </a:rPr>
@@ -8277,7 +8376,7 @@
             <a:r>
               <a:rPr sz="1600" b="1">
                 <a:solidFill>
-                  <a:srgbClr val="EAF3EF"/>
+                  <a:srgbClr val="22C55E"/>
                 </a:solidFill>
                 <a:latin typeface="Segoe UI"/>
               </a:rPr>
@@ -8286,7 +8385,7 @@
             <a:r>
               <a:rPr sz="1600" b="0">
                 <a:solidFill>
-                  <a:srgbClr val="8DA39B"/>
+                  <a:srgbClr val="22C55E"/>
                 </a:solidFill>
                 <a:latin typeface="Segoe UI"/>
               </a:rPr>
@@ -8308,7 +8407,7 @@
             <a:r>
               <a:rPr sz="1600" b="1">
                 <a:solidFill>
-                  <a:srgbClr val="00E676"/>
+                  <a:srgbClr val="22C55E"/>
                 </a:solidFill>
                 <a:latin typeface="Segoe UI"/>
               </a:rPr>
@@ -8317,7 +8416,7 @@
             <a:r>
               <a:rPr sz="1600" b="1">
                 <a:solidFill>
-                  <a:srgbClr val="EAF3EF"/>
+                  <a:srgbClr val="22C55E"/>
                 </a:solidFill>
                 <a:latin typeface="Segoe UI"/>
               </a:rPr>
@@ -8326,7 +8425,7 @@
             <a:r>
               <a:rPr sz="1600" b="0">
                 <a:solidFill>
-                  <a:srgbClr val="8DA39B"/>
+                  <a:srgbClr val="22C55E"/>
                 </a:solidFill>
                 <a:latin typeface="Segoe UI"/>
               </a:rPr>
@@ -8348,7 +8447,7 @@
             <a:r>
               <a:rPr sz="1600" b="1">
                 <a:solidFill>
-                  <a:srgbClr val="00E676"/>
+                  <a:srgbClr val="22C55E"/>
                 </a:solidFill>
                 <a:latin typeface="Segoe UI"/>
               </a:rPr>
@@ -8357,7 +8456,7 @@
             <a:r>
               <a:rPr sz="1600" b="1">
                 <a:solidFill>
-                  <a:srgbClr val="EAF3EF"/>
+                  <a:srgbClr val="22C55E"/>
                 </a:solidFill>
                 <a:latin typeface="Segoe UI"/>
               </a:rPr>
@@ -8366,7 +8465,7 @@
             <a:r>
               <a:rPr sz="1600" b="0">
                 <a:solidFill>
-                  <a:srgbClr val="8DA39B"/>
+                  <a:srgbClr val="22C55E"/>
                 </a:solidFill>
                 <a:latin typeface="Segoe UI"/>
               </a:rPr>
@@ -8388,7 +8487,7 @@
             <a:r>
               <a:rPr sz="1600" b="1">
                 <a:solidFill>
-                  <a:srgbClr val="00E676"/>
+                  <a:srgbClr val="22C55E"/>
                 </a:solidFill>
                 <a:latin typeface="Segoe UI"/>
               </a:rPr>
@@ -8397,7 +8496,7 @@
             <a:r>
               <a:rPr sz="1600" b="1">
                 <a:solidFill>
-                  <a:srgbClr val="EAF3EF"/>
+                  <a:srgbClr val="22C55E"/>
                 </a:solidFill>
                 <a:latin typeface="Segoe UI"/>
               </a:rPr>
@@ -8406,7 +8505,7 @@
             <a:r>
               <a:rPr sz="1600" b="0">
                 <a:solidFill>
-                  <a:srgbClr val="8DA39B"/>
+                  <a:srgbClr val="22C55E"/>
                 </a:solidFill>
                 <a:latin typeface="Segoe UI"/>
               </a:rPr>
@@ -8428,7 +8527,7 @@
             <a:r>
               <a:rPr sz="1600" b="1">
                 <a:solidFill>
-                  <a:srgbClr val="00E676"/>
+                  <a:srgbClr val="22C55E"/>
                 </a:solidFill>
                 <a:latin typeface="Segoe UI"/>
               </a:rPr>
@@ -8437,7 +8536,7 @@
             <a:r>
               <a:rPr sz="1600" b="1">
                 <a:solidFill>
-                  <a:srgbClr val="EAF3EF"/>
+                  <a:srgbClr val="22C55E"/>
                 </a:solidFill>
                 <a:latin typeface="Segoe UI"/>
               </a:rPr>
@@ -8446,7 +8545,7 @@
             <a:r>
               <a:rPr sz="1600" b="0">
                 <a:solidFill>
-                  <a:srgbClr val="8DA39B"/>
+                  <a:srgbClr val="22C55E"/>
                 </a:solidFill>
                 <a:latin typeface="Segoe UI"/>
               </a:rPr>
@@ -8469,7 +8568,7 @@
     <p:bg>
       <p:bgPr>
         <a:solidFill>
-          <a:srgbClr val="0A0E0D"/>
+          <a:srgbClr val="0D1226"/>
         </a:solidFill>
         <a:effectLst/>
       </p:bgPr>
@@ -8503,10 +8602,10 @@
             <a:avLst/>
           </a:prstGeom>
           <a:solidFill>
-            <a:srgbClr val="00E676"/>
+            <a:srgbClr val="22C55E"/>
           </a:solidFill>
           <a:ln>
-            <a:noFill/>
+            <a:solidFill/>
           </a:ln>
           <a:effectLst/>
         </p:spPr>
@@ -8548,10 +8647,10 @@
             <a:avLst/>
           </a:prstGeom>
           <a:solidFill>
-            <a:srgbClr val="22302B"/>
+            <a:srgbClr val="080C1A"/>
           </a:solidFill>
           <a:ln>
-            <a:noFill/>
+            <a:solidFill/>
           </a:ln>
           <a:effectLst/>
         </p:spPr>
@@ -8593,10 +8692,10 @@
             <a:avLst/>
           </a:prstGeom>
           <a:solidFill>
-            <a:srgbClr val="00E676"/>
+            <a:srgbClr val="22C55E"/>
           </a:solidFill>
           <a:ln>
-            <a:noFill/>
+            <a:solidFill/>
           </a:ln>
           <a:effectLst/>
         </p:spPr>
@@ -8638,6 +8737,9 @@
             <a:avLst/>
           </a:prstGeom>
           <a:noFill/>
+          <a:ln>
+            <a:solidFill/>
+          </a:ln>
         </p:spPr>
         <p:txBody>
           <a:bodyPr wrap="square" lIns="0" tIns="0" rIns="0" bIns="0" anchor="t">
@@ -8659,7 +8761,7 @@
             <a:r>
               <a:rPr sz="900" b="1">
                 <a:solidFill>
-                  <a:srgbClr val="5C726A"/>
+                  <a:srgbClr val="22C55E"/>
                 </a:solidFill>
                 <a:latin typeface="Consolas"/>
               </a:rPr>
@@ -8668,7 +8770,7 @@
             <a:r>
               <a:rPr sz="900" b="0">
                 <a:solidFill>
-                  <a:srgbClr val="5C726A"/>
+                  <a:srgbClr val="22C55E"/>
                 </a:solidFill>
                 <a:latin typeface="Consolas"/>
               </a:rPr>
@@ -8692,6 +8794,9 @@
             <a:avLst/>
           </a:prstGeom>
           <a:noFill/>
+          <a:ln>
+            <a:solidFill/>
+          </a:ln>
         </p:spPr>
         <p:txBody>
           <a:bodyPr wrap="square" lIns="0" tIns="0" rIns="0" bIns="0" anchor="t">
@@ -8713,7 +8818,7 @@
             <a:r>
               <a:rPr sz="900" b="0">
                 <a:solidFill>
-                  <a:srgbClr val="5C726A"/>
+                  <a:srgbClr val="22C55E"/>
                 </a:solidFill>
                 <a:latin typeface="Consolas"/>
               </a:rPr>
@@ -8737,10 +8842,10 @@
             <a:avLst/>
           </a:prstGeom>
           <a:solidFill>
-            <a:srgbClr val="00E676"/>
+            <a:srgbClr val="22C55E"/>
           </a:solidFill>
           <a:ln>
-            <a:noFill/>
+            <a:solidFill/>
           </a:ln>
           <a:effectLst/>
         </p:spPr>
@@ -8782,6 +8887,9 @@
             <a:avLst/>
           </a:prstGeom>
           <a:noFill/>
+          <a:ln>
+            <a:solidFill/>
+          </a:ln>
         </p:spPr>
         <p:txBody>
           <a:bodyPr wrap="square" lIns="0" tIns="0" rIns="0" bIns="0" anchor="t">
@@ -8803,7 +8911,7 @@
             <a:r>
               <a:rPr sz="1200" b="1">
                 <a:solidFill>
-                  <a:srgbClr val="00E676"/>
+                  <a:srgbClr val="22C55E"/>
                 </a:solidFill>
                 <a:latin typeface="Consolas"/>
               </a:rPr>
@@ -8827,6 +8935,9 @@
             <a:avLst/>
           </a:prstGeom>
           <a:noFill/>
+          <a:ln>
+            <a:solidFill/>
+          </a:ln>
         </p:spPr>
         <p:txBody>
           <a:bodyPr wrap="square" lIns="0" tIns="0" rIns="0" bIns="0" anchor="t">
@@ -8848,7 +8959,7 @@
             <a:r>
               <a:rPr sz="3000" b="1">
                 <a:solidFill>
-                  <a:srgbClr val="EAF3EF"/>
+                  <a:srgbClr val="22C55E"/>
                 </a:solidFill>
                 <a:latin typeface="Segoe UI"/>
               </a:rPr>
@@ -8872,10 +8983,10 @@
             <a:avLst/>
           </a:prstGeom>
           <a:solidFill>
-            <a:srgbClr val="00E676"/>
+            <a:srgbClr val="22C55E"/>
           </a:solidFill>
           <a:ln>
-            <a:noFill/>
+            <a:solidFill/>
           </a:ln>
           <a:effectLst/>
         </p:spPr>
@@ -8917,10 +9028,10 @@
             <a:avLst/>
           </a:prstGeom>
           <a:solidFill>
-            <a:srgbClr val="22302B"/>
+            <a:srgbClr val="080C1A"/>
           </a:solidFill>
           <a:ln>
-            <a:noFill/>
+            <a:solidFill/>
           </a:ln>
           <a:effectLst/>
         </p:spPr>
@@ -8962,6 +9073,9 @@
             <a:avLst/>
           </a:prstGeom>
           <a:noFill/>
+          <a:ln>
+            <a:solidFill/>
+          </a:ln>
         </p:spPr>
         <p:txBody>
           <a:bodyPr wrap="square" lIns="0" tIns="0" rIns="0" bIns="0" anchor="t">
@@ -8983,7 +9097,7 @@
             <a:r>
               <a:rPr sz="1600" b="1">
                 <a:solidFill>
-                  <a:srgbClr val="00E676"/>
+                  <a:srgbClr val="22C55E"/>
                 </a:solidFill>
                 <a:latin typeface="Segoe UI"/>
               </a:rPr>
@@ -8992,7 +9106,7 @@
             <a:r>
               <a:rPr sz="1600" b="1">
                 <a:solidFill>
-                  <a:srgbClr val="EAF3EF"/>
+                  <a:srgbClr val="22C55E"/>
                 </a:solidFill>
                 <a:latin typeface="Segoe UI"/>
               </a:rPr>
@@ -9001,7 +9115,7 @@
             <a:r>
               <a:rPr sz="1600" b="0">
                 <a:solidFill>
-                  <a:srgbClr val="8DA39B"/>
+                  <a:srgbClr val="22C55E"/>
                 </a:solidFill>
                 <a:latin typeface="Segoe UI"/>
               </a:rPr>
@@ -9023,7 +9137,7 @@
             <a:r>
               <a:rPr sz="1600" b="1">
                 <a:solidFill>
-                  <a:srgbClr val="00E676"/>
+                  <a:srgbClr val="22C55E"/>
                 </a:solidFill>
                 <a:latin typeface="Segoe UI"/>
               </a:rPr>
@@ -9032,7 +9146,7 @@
             <a:r>
               <a:rPr sz="1600" b="1">
                 <a:solidFill>
-                  <a:srgbClr val="EAF3EF"/>
+                  <a:srgbClr val="22C55E"/>
                 </a:solidFill>
                 <a:latin typeface="Segoe UI"/>
               </a:rPr>
@@ -9041,7 +9155,7 @@
             <a:r>
               <a:rPr sz="1600" b="0">
                 <a:solidFill>
-                  <a:srgbClr val="8DA39B"/>
+                  <a:srgbClr val="22C55E"/>
                 </a:solidFill>
                 <a:latin typeface="Segoe UI"/>
               </a:rPr>
@@ -9063,7 +9177,7 @@
             <a:r>
               <a:rPr sz="1600" b="1">
                 <a:solidFill>
-                  <a:srgbClr val="00E676"/>
+                  <a:srgbClr val="22C55E"/>
                 </a:solidFill>
                 <a:latin typeface="Segoe UI"/>
               </a:rPr>
@@ -9072,7 +9186,7 @@
             <a:r>
               <a:rPr sz="1600" b="1">
                 <a:solidFill>
-                  <a:srgbClr val="EAF3EF"/>
+                  <a:srgbClr val="22C55E"/>
                 </a:solidFill>
                 <a:latin typeface="Segoe UI"/>
               </a:rPr>
@@ -9081,7 +9195,7 @@
             <a:r>
               <a:rPr sz="1600" b="0">
                 <a:solidFill>
-                  <a:srgbClr val="8DA39B"/>
+                  <a:srgbClr val="22C55E"/>
                 </a:solidFill>
                 <a:latin typeface="Segoe UI"/>
               </a:rPr>
@@ -9103,7 +9217,7 @@
             <a:r>
               <a:rPr sz="1600" b="1">
                 <a:solidFill>
-                  <a:srgbClr val="00E676"/>
+                  <a:srgbClr val="22C55E"/>
                 </a:solidFill>
                 <a:latin typeface="Segoe UI"/>
               </a:rPr>
@@ -9112,7 +9226,7 @@
             <a:r>
               <a:rPr sz="1600" b="1">
                 <a:solidFill>
-                  <a:srgbClr val="EAF3EF"/>
+                  <a:srgbClr val="22C55E"/>
                 </a:solidFill>
                 <a:latin typeface="Segoe UI"/>
               </a:rPr>
@@ -9121,7 +9235,7 @@
             <a:r>
               <a:rPr sz="1600" b="0">
                 <a:solidFill>
-                  <a:srgbClr val="8DA39B"/>
+                  <a:srgbClr val="22C55E"/>
                 </a:solidFill>
                 <a:latin typeface="Segoe UI"/>
               </a:rPr>
@@ -9143,7 +9257,7 @@
             <a:r>
               <a:rPr sz="1600" b="1">
                 <a:solidFill>
-                  <a:srgbClr val="00E676"/>
+                  <a:srgbClr val="22C55E"/>
                 </a:solidFill>
                 <a:latin typeface="Segoe UI"/>
               </a:rPr>
@@ -9152,7 +9266,7 @@
             <a:r>
               <a:rPr sz="1600" b="1">
                 <a:solidFill>
-                  <a:srgbClr val="EAF3EF"/>
+                  <a:srgbClr val="22C55E"/>
                 </a:solidFill>
                 <a:latin typeface="Segoe UI"/>
               </a:rPr>
@@ -9161,7 +9275,7 @@
             <a:r>
               <a:rPr sz="1600" b="0">
                 <a:solidFill>
-                  <a:srgbClr val="8DA39B"/>
+                  <a:srgbClr val="22C55E"/>
                 </a:solidFill>
                 <a:latin typeface="Segoe UI"/>
               </a:rPr>
@@ -9184,7 +9298,7 @@
     <p:bg>
       <p:bgPr>
         <a:solidFill>
-          <a:srgbClr val="0A0E0D"/>
+          <a:srgbClr val="0D1226"/>
         </a:solidFill>
         <a:effectLst/>
       </p:bgPr>
@@ -9218,10 +9332,10 @@
             <a:avLst/>
           </a:prstGeom>
           <a:solidFill>
-            <a:srgbClr val="00E676"/>
+            <a:srgbClr val="22C55E"/>
           </a:solidFill>
           <a:ln>
-            <a:noFill/>
+            <a:solidFill/>
           </a:ln>
           <a:effectLst/>
         </p:spPr>
@@ -9263,10 +9377,10 @@
             <a:avLst/>
           </a:prstGeom>
           <a:solidFill>
-            <a:srgbClr val="22302B"/>
+            <a:srgbClr val="080C1A"/>
           </a:solidFill>
           <a:ln>
-            <a:noFill/>
+            <a:solidFill/>
           </a:ln>
           <a:effectLst/>
         </p:spPr>
@@ -9308,10 +9422,10 @@
             <a:avLst/>
           </a:prstGeom>
           <a:solidFill>
-            <a:srgbClr val="00E676"/>
+            <a:srgbClr val="22C55E"/>
           </a:solidFill>
           <a:ln>
-            <a:noFill/>
+            <a:solidFill/>
           </a:ln>
           <a:effectLst/>
         </p:spPr>
@@ -9353,6 +9467,9 @@
             <a:avLst/>
           </a:prstGeom>
           <a:noFill/>
+          <a:ln>
+            <a:solidFill/>
+          </a:ln>
         </p:spPr>
         <p:txBody>
           <a:bodyPr wrap="square" lIns="0" tIns="0" rIns="0" bIns="0" anchor="t">
@@ -9374,7 +9491,7 @@
             <a:r>
               <a:rPr sz="900" b="1">
                 <a:solidFill>
-                  <a:srgbClr val="5C726A"/>
+                  <a:srgbClr val="22C55E"/>
                 </a:solidFill>
                 <a:latin typeface="Consolas"/>
               </a:rPr>
@@ -9383,7 +9500,7 @@
             <a:r>
               <a:rPr sz="900" b="0">
                 <a:solidFill>
-                  <a:srgbClr val="5C726A"/>
+                  <a:srgbClr val="22C55E"/>
                 </a:solidFill>
                 <a:latin typeface="Consolas"/>
               </a:rPr>
@@ -9407,6 +9524,9 @@
             <a:avLst/>
           </a:prstGeom>
           <a:noFill/>
+          <a:ln>
+            <a:solidFill/>
+          </a:ln>
         </p:spPr>
         <p:txBody>
           <a:bodyPr wrap="square" lIns="0" tIns="0" rIns="0" bIns="0" anchor="t">
@@ -9428,7 +9548,7 @@
             <a:r>
               <a:rPr sz="900" b="0">
                 <a:solidFill>
-                  <a:srgbClr val="5C726A"/>
+                  <a:srgbClr val="22C55E"/>
                 </a:solidFill>
                 <a:latin typeface="Consolas"/>
               </a:rPr>
@@ -9452,10 +9572,10 @@
             <a:avLst/>
           </a:prstGeom>
           <a:solidFill>
-            <a:srgbClr val="00E676"/>
+            <a:srgbClr val="22C55E"/>
           </a:solidFill>
           <a:ln>
-            <a:noFill/>
+            <a:solidFill/>
           </a:ln>
           <a:effectLst/>
         </p:spPr>
@@ -9497,6 +9617,9 @@
             <a:avLst/>
           </a:prstGeom>
           <a:noFill/>
+          <a:ln>
+            <a:solidFill/>
+          </a:ln>
         </p:spPr>
         <p:txBody>
           <a:bodyPr wrap="square" lIns="0" tIns="0" rIns="0" bIns="0" anchor="t">
@@ -9518,7 +9641,7 @@
             <a:r>
               <a:rPr sz="1200" b="1">
                 <a:solidFill>
-                  <a:srgbClr val="00E676"/>
+                  <a:srgbClr val="22C55E"/>
                 </a:solidFill>
                 <a:latin typeface="Consolas"/>
               </a:rPr>
@@ -9542,6 +9665,9 @@
             <a:avLst/>
           </a:prstGeom>
           <a:noFill/>
+          <a:ln>
+            <a:solidFill/>
+          </a:ln>
         </p:spPr>
         <p:txBody>
           <a:bodyPr wrap="square" lIns="0" tIns="0" rIns="0" bIns="0" anchor="t">
@@ -9563,7 +9689,7 @@
             <a:r>
               <a:rPr sz="3000" b="1">
                 <a:solidFill>
-                  <a:srgbClr val="EAF3EF"/>
+                  <a:srgbClr val="22C55E"/>
                 </a:solidFill>
                 <a:latin typeface="Segoe UI"/>
               </a:rPr>
@@ -9587,10 +9713,10 @@
             <a:avLst/>
           </a:prstGeom>
           <a:solidFill>
-            <a:srgbClr val="00E676"/>
+            <a:srgbClr val="22C55E"/>
           </a:solidFill>
           <a:ln>
-            <a:noFill/>
+            <a:solidFill/>
           </a:ln>
           <a:effectLst/>
         </p:spPr>
@@ -9632,10 +9758,10 @@
             <a:avLst/>
           </a:prstGeom>
           <a:solidFill>
-            <a:srgbClr val="22302B"/>
+            <a:srgbClr val="080C1A"/>
           </a:solidFill>
           <a:ln>
-            <a:noFill/>
+            <a:solidFill/>
           </a:ln>
           <a:effectLst/>
         </p:spPr>
@@ -9713,7 +9839,7 @@
                       <a:r>
                         <a:rPr sz="1350" b="1">
                           <a:solidFill>
-                            <a:srgbClr val="00E676"/>
+                            <a:srgbClr val="22C55E"/>
                           </a:solidFill>
                           <a:latin typeface="Segoe UI"/>
                         </a:rPr>
@@ -9723,7 +9849,7 @@
                   </a:txBody>
                   <a:tcPr marL="128016" marR="73152" marT="18288" marB="18288" anchor="ctr">
                     <a:solidFill>
-                      <a:srgbClr val="0B3D2A"/>
+                      <a:srgbClr val="080C1A"/>
                     </a:solidFill>
                   </a:tcPr>
                 </a:tc>
@@ -9736,7 +9862,7 @@
                       <a:r>
                         <a:rPr sz="1350" b="1">
                           <a:solidFill>
-                            <a:srgbClr val="00E676"/>
+                            <a:srgbClr val="22C55E"/>
                           </a:solidFill>
                           <a:latin typeface="Segoe UI"/>
                         </a:rPr>
@@ -9746,7 +9872,7 @@
                   </a:txBody>
                   <a:tcPr marL="128016" marR="73152" marT="18288" marB="18288" anchor="ctr">
                     <a:solidFill>
-                      <a:srgbClr val="0B3D2A"/>
+                      <a:srgbClr val="080C1A"/>
                     </a:solidFill>
                   </a:tcPr>
                 </a:tc>
@@ -9759,7 +9885,7 @@
                       <a:r>
                         <a:rPr sz="1350" b="1">
                           <a:solidFill>
-                            <a:srgbClr val="00E676"/>
+                            <a:srgbClr val="22C55E"/>
                           </a:solidFill>
                           <a:latin typeface="Segoe UI"/>
                         </a:rPr>
@@ -9769,7 +9895,7 @@
                   </a:txBody>
                   <a:tcPr marL="128016" marR="73152" marT="18288" marB="18288" anchor="ctr">
                     <a:solidFill>
-                      <a:srgbClr val="0B3D2A"/>
+                      <a:srgbClr val="080C1A"/>
                     </a:solidFill>
                   </a:tcPr>
                 </a:tc>
@@ -9789,7 +9915,7 @@
                       <a:r>
                         <a:rPr sz="1350" b="1">
                           <a:solidFill>
-                            <a:srgbClr val="EAF3EF"/>
+                            <a:srgbClr val="22C55E"/>
                           </a:solidFill>
                           <a:latin typeface="Segoe UI"/>
                         </a:rPr>
@@ -9799,7 +9925,7 @@
                   </a:txBody>
                   <a:tcPr marL="128016" marR="73152" marT="18288" marB="18288" anchor="ctr">
                     <a:solidFill>
-                      <a:srgbClr val="111714"/>
+                      <a:srgbClr val="080C1A"/>
                     </a:solidFill>
                   </a:tcPr>
                 </a:tc>
@@ -9812,7 +9938,7 @@
                       <a:r>
                         <a:rPr sz="1350" b="0">
                           <a:solidFill>
-                            <a:srgbClr val="8DA39B"/>
+                            <a:srgbClr val="22C55E"/>
                           </a:solidFill>
                           <a:latin typeface="Consolas"/>
                         </a:rPr>
@@ -9822,7 +9948,7 @@
                   </a:txBody>
                   <a:tcPr marL="128016" marR="73152" marT="18288" marB="18288" anchor="ctr">
                     <a:solidFill>
-                      <a:srgbClr val="111714"/>
+                      <a:srgbClr val="080C1A"/>
                     </a:solidFill>
                   </a:tcPr>
                 </a:tc>
@@ -9835,7 +9961,7 @@
                       <a:r>
                         <a:rPr sz="1350" b="0">
                           <a:solidFill>
-                            <a:srgbClr val="8DA39B"/>
+                            <a:srgbClr val="22C55E"/>
                           </a:solidFill>
                           <a:latin typeface="Consolas"/>
                         </a:rPr>
@@ -9845,7 +9971,7 @@
                   </a:txBody>
                   <a:tcPr marL="128016" marR="73152" marT="18288" marB="18288" anchor="ctr">
                     <a:solidFill>
-                      <a:srgbClr val="111714"/>
+                      <a:srgbClr val="080C1A"/>
                     </a:solidFill>
                   </a:tcPr>
                 </a:tc>
@@ -9865,7 +9991,7 @@
                       <a:r>
                         <a:rPr sz="1350" b="1">
                           <a:solidFill>
-                            <a:srgbClr val="EAF3EF"/>
+                            <a:srgbClr val="22C55E"/>
                           </a:solidFill>
                           <a:latin typeface="Segoe UI"/>
                         </a:rPr>
@@ -9875,7 +10001,7 @@
                   </a:txBody>
                   <a:tcPr marL="128016" marR="73152" marT="18288" marB="18288" anchor="ctr">
                     <a:solidFill>
-                      <a:srgbClr val="161D1A"/>
+                      <a:srgbClr val="080C1A"/>
                     </a:solidFill>
                   </a:tcPr>
                 </a:tc>
@@ -9888,7 +10014,7 @@
                       <a:r>
                         <a:rPr sz="1350" b="0">
                           <a:solidFill>
-                            <a:srgbClr val="8DA39B"/>
+                            <a:srgbClr val="22C55E"/>
                           </a:solidFill>
                           <a:latin typeface="Consolas"/>
                         </a:rPr>
@@ -9898,7 +10024,7 @@
                   </a:txBody>
                   <a:tcPr marL="128016" marR="73152" marT="18288" marB="18288" anchor="ctr">
                     <a:solidFill>
-                      <a:srgbClr val="161D1A"/>
+                      <a:srgbClr val="080C1A"/>
                     </a:solidFill>
                   </a:tcPr>
                 </a:tc>
@@ -9911,7 +10037,7 @@
                       <a:r>
                         <a:rPr sz="1350" b="0">
                           <a:solidFill>
-                            <a:srgbClr val="8DA39B"/>
+                            <a:srgbClr val="22C55E"/>
                           </a:solidFill>
                           <a:latin typeface="Consolas"/>
                         </a:rPr>
@@ -9921,7 +10047,7 @@
                   </a:txBody>
                   <a:tcPr marL="128016" marR="73152" marT="18288" marB="18288" anchor="ctr">
                     <a:solidFill>
-                      <a:srgbClr val="161D1A"/>
+                      <a:srgbClr val="080C1A"/>
                     </a:solidFill>
                   </a:tcPr>
                 </a:tc>
@@ -9941,7 +10067,7 @@
                       <a:r>
                         <a:rPr sz="1350" b="1">
                           <a:solidFill>
-                            <a:srgbClr val="EAF3EF"/>
+                            <a:srgbClr val="22C55E"/>
                           </a:solidFill>
                           <a:latin typeface="Segoe UI"/>
                         </a:rPr>
@@ -9951,7 +10077,7 @@
                   </a:txBody>
                   <a:tcPr marL="128016" marR="73152" marT="18288" marB="18288" anchor="ctr">
                     <a:solidFill>
-                      <a:srgbClr val="111714"/>
+                      <a:srgbClr val="080C1A"/>
                     </a:solidFill>
                   </a:tcPr>
                 </a:tc>
@@ -9964,7 +10090,7 @@
                       <a:r>
                         <a:rPr sz="1350" b="0">
                           <a:solidFill>
-                            <a:srgbClr val="8DA39B"/>
+                            <a:srgbClr val="22C55E"/>
                           </a:solidFill>
                           <a:latin typeface="Consolas"/>
                         </a:rPr>
@@ -9974,7 +10100,7 @@
                   </a:txBody>
                   <a:tcPr marL="128016" marR="73152" marT="18288" marB="18288" anchor="ctr">
                     <a:solidFill>
-                      <a:srgbClr val="111714"/>
+                      <a:srgbClr val="080C1A"/>
                     </a:solidFill>
                   </a:tcPr>
                 </a:tc>
@@ -9987,7 +10113,7 @@
                       <a:r>
                         <a:rPr sz="1350" b="0">
                           <a:solidFill>
-                            <a:srgbClr val="8DA39B"/>
+                            <a:srgbClr val="22C55E"/>
                           </a:solidFill>
                           <a:latin typeface="Consolas"/>
                         </a:rPr>
@@ -9997,7 +10123,7 @@
                   </a:txBody>
                   <a:tcPr marL="128016" marR="73152" marT="18288" marB="18288" anchor="ctr">
                     <a:solidFill>
-                      <a:srgbClr val="111714"/>
+                      <a:srgbClr val="080C1A"/>
                     </a:solidFill>
                   </a:tcPr>
                 </a:tc>
@@ -10017,7 +10143,7 @@
                       <a:r>
                         <a:rPr sz="1350" b="1">
                           <a:solidFill>
-                            <a:srgbClr val="EAF3EF"/>
+                            <a:srgbClr val="22C55E"/>
                           </a:solidFill>
                           <a:latin typeface="Segoe UI"/>
                         </a:rPr>
@@ -10027,7 +10153,7 @@
                   </a:txBody>
                   <a:tcPr marL="128016" marR="73152" marT="18288" marB="18288" anchor="ctr">
                     <a:solidFill>
-                      <a:srgbClr val="161D1A"/>
+                      <a:srgbClr val="080C1A"/>
                     </a:solidFill>
                   </a:tcPr>
                 </a:tc>
@@ -10040,7 +10166,7 @@
                       <a:r>
                         <a:rPr sz="1350" b="0">
                           <a:solidFill>
-                            <a:srgbClr val="8DA39B"/>
+                            <a:srgbClr val="22C55E"/>
                           </a:solidFill>
                           <a:latin typeface="Consolas"/>
                         </a:rPr>
@@ -10050,7 +10176,7 @@
                   </a:txBody>
                   <a:tcPr marL="128016" marR="73152" marT="18288" marB="18288" anchor="ctr">
                     <a:solidFill>
-                      <a:srgbClr val="161D1A"/>
+                      <a:srgbClr val="080C1A"/>
                     </a:solidFill>
                   </a:tcPr>
                 </a:tc>
@@ -10063,7 +10189,7 @@
                       <a:r>
                         <a:rPr sz="1350" b="0">
                           <a:solidFill>
-                            <a:srgbClr val="8DA39B"/>
+                            <a:srgbClr val="22C55E"/>
                           </a:solidFill>
                           <a:latin typeface="Consolas"/>
                         </a:rPr>
@@ -10073,7 +10199,7 @@
                   </a:txBody>
                   <a:tcPr marL="128016" marR="73152" marT="18288" marB="18288" anchor="ctr">
                     <a:solidFill>
-                      <a:srgbClr val="161D1A"/>
+                      <a:srgbClr val="080C1A"/>
                     </a:solidFill>
                   </a:tcPr>
                 </a:tc>
@@ -10102,6 +10228,9 @@
             <a:avLst/>
           </a:prstGeom>
           <a:noFill/>
+          <a:ln>
+            <a:solidFill/>
+          </a:ln>
         </p:spPr>
         <p:txBody>
           <a:bodyPr wrap="square" lIns="0" tIns="0" rIns="0" bIns="0" anchor="t">
@@ -10123,7 +10252,7 @@
             <a:r>
               <a:rPr sz="1400" b="0">
                 <a:solidFill>
-                  <a:srgbClr val="8DA39B"/>
+                  <a:srgbClr val="22C55E"/>
                 </a:solidFill>
                 <a:latin typeface="Segoe UI"/>
               </a:rPr>
@@ -10146,7 +10275,7 @@
     <p:bg>
       <p:bgPr>
         <a:solidFill>
-          <a:srgbClr val="0A0E0D"/>
+          <a:srgbClr val="0D1226"/>
         </a:solidFill>
         <a:effectLst/>
       </p:bgPr>
@@ -10180,10 +10309,10 @@
             <a:avLst/>
           </a:prstGeom>
           <a:solidFill>
-            <a:srgbClr val="00E676"/>
+            <a:srgbClr val="22C55E"/>
           </a:solidFill>
           <a:ln>
-            <a:noFill/>
+            <a:solidFill/>
           </a:ln>
           <a:effectLst/>
         </p:spPr>
@@ -10225,10 +10354,10 @@
             <a:avLst/>
           </a:prstGeom>
           <a:solidFill>
-            <a:srgbClr val="00E676"/>
+            <a:srgbClr val="22C55E"/>
           </a:solidFill>
           <a:ln>
-            <a:noFill/>
+            <a:solidFill/>
           </a:ln>
           <a:effectLst/>
         </p:spPr>
@@ -10270,10 +10399,10 @@
             <a:avLst/>
           </a:prstGeom>
           <a:solidFill>
-            <a:srgbClr val="00E676"/>
+            <a:srgbClr val="22C55E"/>
           </a:solidFill>
           <a:ln>
-            <a:noFill/>
+            <a:solidFill/>
           </a:ln>
           <a:effectLst/>
         </p:spPr>
@@ -10315,10 +10444,10 @@
             <a:avLst/>
           </a:prstGeom>
           <a:solidFill>
-            <a:srgbClr val="00E676"/>
+            <a:srgbClr val="22C55E"/>
           </a:solidFill>
           <a:ln>
-            <a:noFill/>
+            <a:solidFill/>
           </a:ln>
           <a:effectLst/>
         </p:spPr>
@@ -10360,10 +10489,10 @@
             <a:avLst/>
           </a:prstGeom>
           <a:solidFill>
-            <a:srgbClr val="00E676"/>
+            <a:srgbClr val="22C55E"/>
           </a:solidFill>
           <a:ln>
-            <a:noFill/>
+            <a:solidFill/>
           </a:ln>
           <a:effectLst/>
         </p:spPr>
@@ -10405,6 +10534,9 @@
             <a:avLst/>
           </a:prstGeom>
           <a:noFill/>
+          <a:ln>
+            <a:solidFill/>
+          </a:ln>
         </p:spPr>
         <p:txBody>
           <a:bodyPr wrap="square" lIns="0" tIns="0" rIns="0" bIns="0" anchor="t">
@@ -10426,7 +10558,7 @@
             <a:r>
               <a:rPr sz="1600" b="1">
                 <a:solidFill>
-                  <a:srgbClr val="00E676"/>
+                  <a:srgbClr val="22C55E"/>
                 </a:solidFill>
                 <a:latin typeface="Consolas"/>
               </a:rPr>
@@ -10450,6 +10582,9 @@
             <a:avLst/>
           </a:prstGeom>
           <a:noFill/>
+          <a:ln>
+            <a:solidFill/>
+          </a:ln>
         </p:spPr>
         <p:txBody>
           <a:bodyPr wrap="square" lIns="0" tIns="0" rIns="0" bIns="0" anchor="t">
@@ -10471,7 +10606,7 @@
             <a:r>
               <a:rPr sz="3400" b="1" dirty="0">
                 <a:solidFill>
-                  <a:srgbClr val="EAF3EF"/>
+                  <a:srgbClr val="22C55E"/>
                 </a:solidFill>
                 <a:latin typeface="Segoe UI"/>
               </a:rPr>
@@ -10493,7 +10628,7 @@
             <a:r>
               <a:rPr sz="3400" b="1" dirty="0">
                 <a:solidFill>
-                  <a:srgbClr val="EAF3EF"/>
+                  <a:srgbClr val="22C55E"/>
                 </a:solidFill>
                 <a:latin typeface="Segoe UI"/>
               </a:rPr>
@@ -10517,10 +10652,10 @@
             <a:avLst/>
           </a:prstGeom>
           <a:solidFill>
-            <a:srgbClr val="00E676"/>
+            <a:srgbClr val="22C55E"/>
           </a:solidFill>
           <a:ln>
-            <a:noFill/>
+            <a:solidFill/>
           </a:ln>
           <a:effectLst/>
         </p:spPr>
@@ -10562,6 +10697,9 @@
             <a:avLst/>
           </a:prstGeom>
           <a:noFill/>
+          <a:ln>
+            <a:solidFill/>
+          </a:ln>
         </p:spPr>
         <p:txBody>
           <a:bodyPr wrap="square" lIns="0" tIns="0" rIns="0" bIns="0" anchor="t">
@@ -10583,7 +10721,7 @@
             <a:r>
               <a:rPr sz="1600" b="0">
                 <a:solidFill>
-                  <a:srgbClr val="8DA39B"/>
+                  <a:srgbClr val="22C55E"/>
                 </a:solidFill>
                 <a:latin typeface="Segoe UI"/>
               </a:rPr>
@@ -10607,6 +10745,9 @@
             <a:avLst/>
           </a:prstGeom>
           <a:noFill/>
+          <a:ln>
+            <a:solidFill/>
+          </a:ln>
         </p:spPr>
         <p:txBody>
           <a:bodyPr wrap="square" lIns="0" tIns="0" rIns="0" bIns="0" anchor="t">
@@ -10628,7 +10769,7 @@
             <a:r>
               <a:rPr sz="1300" b="1" dirty="0">
                 <a:solidFill>
-                  <a:srgbClr val="5C726A"/>
+                  <a:srgbClr val="22C55E"/>
                 </a:solidFill>
                 <a:latin typeface="Consolas"/>
               </a:rPr>
@@ -10637,7 +10778,7 @@
             <a:r>
               <a:rPr sz="1300" b="0" dirty="0">
                 <a:solidFill>
-                  <a:srgbClr val="00E676"/>
+                  <a:srgbClr val="22C55E"/>
                 </a:solidFill>
                 <a:latin typeface="Consolas"/>
               </a:rPr>
@@ -10646,7 +10787,7 @@
             <a:r>
               <a:rPr sz="1300" b="0" dirty="0" err="1">
                 <a:solidFill>
-                  <a:srgbClr val="00E676"/>
+                  <a:srgbClr val="22C55E"/>
                 </a:solidFill>
                 <a:latin typeface="Consolas"/>
               </a:rPr>
@@ -10655,7 +10796,7 @@
             <a:r>
               <a:rPr sz="1300" b="0" dirty="0">
                 <a:solidFill>
-                  <a:srgbClr val="00E676"/>
+                  <a:srgbClr val="22C55E"/>
                 </a:solidFill>
                 <a:latin typeface="Consolas"/>
               </a:rPr>
@@ -10664,7 +10805,7 @@
             <a:r>
               <a:rPr sz="1300" b="0" dirty="0" err="1">
                 <a:solidFill>
-                  <a:srgbClr val="00E676"/>
+                  <a:srgbClr val="22C55E"/>
                 </a:solidFill>
                 <a:latin typeface="Consolas"/>
               </a:rPr>
@@ -10692,7 +10833,7 @@
             <a:r>
               <a:rPr sz="1300" b="1" dirty="0">
                 <a:solidFill>
-                  <a:srgbClr val="5C726A"/>
+                  <a:srgbClr val="22C55E"/>
                 </a:solidFill>
                 <a:latin typeface="Consolas"/>
               </a:rPr>
@@ -10701,7 +10842,7 @@
             <a:r>
               <a:rPr sz="1300" b="0" dirty="0">
                 <a:solidFill>
-                  <a:srgbClr val="00E676"/>
+                  <a:srgbClr val="22C55E"/>
                 </a:solidFill>
                 <a:latin typeface="Consolas"/>
               </a:rPr>
@@ -10710,7 +10851,7 @@
             <a:r>
               <a:rPr sz="1300" b="0" dirty="0" err="1">
                 <a:solidFill>
-                  <a:srgbClr val="00E676"/>
+                  <a:srgbClr val="22C55E"/>
                 </a:solidFill>
                 <a:latin typeface="Consolas"/>
               </a:rPr>
@@ -10719,7 +10860,7 @@
             <a:r>
               <a:rPr sz="1300" b="0" dirty="0">
                 <a:solidFill>
-                  <a:srgbClr val="00E676"/>
+                  <a:srgbClr val="22C55E"/>
                 </a:solidFill>
                 <a:latin typeface="Consolas"/>
               </a:rPr>
@@ -10728,7 +10869,7 @@
             <a:r>
               <a:rPr sz="1300" b="0" dirty="0" err="1">
                 <a:solidFill>
-                  <a:srgbClr val="00E676"/>
+                  <a:srgbClr val="22C55E"/>
                 </a:solidFill>
                 <a:latin typeface="Consolas"/>
               </a:rPr>
@@ -10737,7 +10878,7 @@
             <a:r>
               <a:rPr sz="1300" b="0" dirty="0">
                 <a:solidFill>
-                  <a:srgbClr val="00E676"/>
+                  <a:srgbClr val="22C55E"/>
                 </a:solidFill>
                 <a:latin typeface="Consolas"/>
               </a:rPr>
@@ -10760,7 +10901,7 @@
     <p:bg>
       <p:bgPr>
         <a:solidFill>
-          <a:srgbClr val="0A0E0D"/>
+          <a:srgbClr val="0D1226"/>
         </a:solidFill>
         <a:effectLst/>
       </p:bgPr>
@@ -10806,10 +10947,10 @@
             <a:avLst/>
           </a:prstGeom>
           <a:solidFill>
-            <a:srgbClr val="00E676"/>
+            <a:srgbClr val="22C55E"/>
           </a:solidFill>
           <a:ln>
-            <a:noFill/>
+            <a:solidFill/>
           </a:ln>
           <a:effectLst/>
         </p:spPr>
@@ -10857,10 +10998,10 @@
             <a:avLst/>
           </a:prstGeom>
           <a:solidFill>
-            <a:srgbClr val="00E676"/>
+            <a:srgbClr val="22C55E"/>
           </a:solidFill>
           <a:ln>
-            <a:noFill/>
+            <a:solidFill/>
           </a:ln>
           <a:effectLst/>
         </p:spPr>
@@ -10908,10 +11049,10 @@
             <a:avLst/>
           </a:prstGeom>
           <a:solidFill>
-            <a:srgbClr val="00E676"/>
+            <a:srgbClr val="22C55E"/>
           </a:solidFill>
           <a:ln>
-            <a:noFill/>
+            <a:solidFill/>
           </a:ln>
           <a:effectLst/>
         </p:spPr>
@@ -10959,10 +11100,10 @@
             <a:avLst/>
           </a:prstGeom>
           <a:solidFill>
-            <a:srgbClr val="00E676"/>
+            <a:srgbClr val="22C55E"/>
           </a:solidFill>
           <a:ln>
-            <a:noFill/>
+            <a:solidFill/>
           </a:ln>
           <a:effectLst/>
         </p:spPr>
@@ -11010,10 +11151,10 @@
             <a:avLst/>
           </a:prstGeom>
           <a:solidFill>
-            <a:srgbClr val="00E676"/>
+            <a:srgbClr val="22C55E"/>
           </a:solidFill>
           <a:ln>
-            <a:noFill/>
+            <a:solidFill/>
           </a:ln>
           <a:effectLst/>
         </p:spPr>
@@ -11061,6 +11202,9 @@
             <a:avLst/>
           </a:prstGeom>
           <a:noFill/>
+          <a:ln>
+            <a:solidFill/>
+          </a:ln>
         </p:spPr>
         <p:txBody>
           <a:bodyPr wrap="square" lIns="0" tIns="0" rIns="0" bIns="0" anchor="t">
@@ -11082,7 +11226,7 @@
             <a:r>
               <a:rPr sz="1600" b="1" dirty="0">
                 <a:solidFill>
-                  <a:srgbClr val="00E676"/>
+                  <a:srgbClr val="22C55E"/>
                 </a:solidFill>
                 <a:latin typeface="Consolas"/>
               </a:rPr>
@@ -11112,10 +11256,10 @@
             <a:avLst/>
           </a:prstGeom>
           <a:solidFill>
-            <a:srgbClr val="00E676"/>
+            <a:srgbClr val="22C55E"/>
           </a:solidFill>
           <a:ln>
-            <a:noFill/>
+            <a:solidFill/>
           </a:ln>
           <a:effectLst/>
         </p:spPr>
@@ -11163,6 +11307,9 @@
             <a:avLst/>
           </a:prstGeom>
           <a:noFill/>
+          <a:ln>
+            <a:solidFill/>
+          </a:ln>
         </p:spPr>
         <p:txBody>
           <a:bodyPr wrap="square" lIns="0" tIns="0" rIns="0" bIns="0" anchor="t">
@@ -11184,7 +11331,7 @@
             <a:r>
               <a:rPr sz="1500" b="1" dirty="0">
                 <a:solidFill>
-                  <a:srgbClr val="EAF3EF"/>
+                  <a:srgbClr val="22C55E"/>
                 </a:solidFill>
                 <a:latin typeface="Segoe UI"/>
               </a:rPr>
@@ -11239,6 +11386,9 @@
             <a:avLst/>
           </a:prstGeom>
           <a:noFill/>
+          <a:ln>
+            <a:solidFill/>
+          </a:ln>
         </p:spPr>
         <p:txBody>
           <a:bodyPr wrap="none" rtlCol="0">
@@ -11249,7 +11399,7 @@
             <a:r>
               <a:rPr lang="en-IN" sz="3400" u="sng" dirty="0">
                 <a:solidFill>
-                  <a:schemeClr val="bg2"/>
+                  <a:srgbClr val="38BDF8"/>
                 </a:solidFill>
                 <a:latin typeface="Segoe UI" panose="020B0502040204020203" pitchFamily="34" charset="0"/>
                 <a:cs typeface="Segoe UI" panose="020B0502040204020203" pitchFamily="34" charset="0"/>
@@ -11259,7 +11409,7 @@
             <a:r>
               <a:rPr lang="en-IN" sz="3400" b="1" i="1" u="sng" dirty="0">
                 <a:solidFill>
-                  <a:schemeClr val="bg2"/>
+                  <a:srgbClr val="38BDF8"/>
                 </a:solidFill>
                 <a:latin typeface="Segoe UI" panose="020B0502040204020203" pitchFamily="34" charset="0"/>
                 <a:cs typeface="Segoe UI" panose="020B0502040204020203" pitchFamily="34" charset="0"/>
@@ -11290,6 +11440,9 @@
             <a:avLst/>
           </a:prstGeom>
           <a:noFill/>
+          <a:ln>
+            <a:solidFill/>
+          </a:ln>
         </p:spPr>
         <p:txBody>
           <a:bodyPr wrap="square" rtlCol="0">
@@ -11304,7 +11457,7 @@
             <a:r>
               <a:rPr lang="en-IN" sz="3200" dirty="0">
                 <a:solidFill>
-                  <a:schemeClr val="bg1"/>
+                  <a:srgbClr val="38BDF8"/>
                 </a:solidFill>
                 <a:latin typeface="Segoe UI" panose="020B0502040204020203" pitchFamily="34" charset="0"/>
                 <a:cs typeface="Segoe UI" panose="020B0502040204020203" pitchFamily="34" charset="0"/>
@@ -11320,7 +11473,7 @@
             <a:r>
               <a:rPr lang="en-IN" sz="3200" dirty="0">
                 <a:solidFill>
-                  <a:schemeClr val="bg1"/>
+                  <a:srgbClr val="38BDF8"/>
                 </a:solidFill>
                 <a:latin typeface="Segoe UI" panose="020B0502040204020203" pitchFamily="34" charset="0"/>
                 <a:cs typeface="Segoe UI" panose="020B0502040204020203" pitchFamily="34" charset="0"/>
@@ -11336,7 +11489,7 @@
             <a:r>
               <a:rPr lang="en-IN" sz="3200" dirty="0">
                 <a:solidFill>
-                  <a:schemeClr val="bg1"/>
+                  <a:srgbClr val="38BDF8"/>
                 </a:solidFill>
                 <a:latin typeface="Segoe UI" panose="020B0502040204020203" pitchFamily="34" charset="0"/>
                 <a:cs typeface="Segoe UI" panose="020B0502040204020203" pitchFamily="34" charset="0"/>
@@ -11352,7 +11505,7 @@
             <a:r>
               <a:rPr lang="en-IN" sz="3200" dirty="0">
                 <a:solidFill>
-                  <a:schemeClr val="bg1"/>
+                  <a:srgbClr val="38BDF8"/>
                 </a:solidFill>
                 <a:latin typeface="Segoe UI" panose="020B0502040204020203" pitchFamily="34" charset="0"/>
                 <a:cs typeface="Segoe UI" panose="020B0502040204020203" pitchFamily="34" charset="0"/>
@@ -11381,7 +11534,7 @@
     <p:bg>
       <p:bgPr>
         <a:solidFill>
-          <a:srgbClr val="0A0E0D"/>
+          <a:srgbClr val="0D1226"/>
         </a:solidFill>
         <a:effectLst/>
       </p:bgPr>
@@ -11415,10 +11568,10 @@
             <a:avLst/>
           </a:prstGeom>
           <a:solidFill>
-            <a:srgbClr val="00E676"/>
+            <a:srgbClr val="22C55E"/>
           </a:solidFill>
           <a:ln>
-            <a:noFill/>
+            <a:solidFill/>
           </a:ln>
           <a:effectLst/>
         </p:spPr>
@@ -11460,10 +11613,10 @@
             <a:avLst/>
           </a:prstGeom>
           <a:solidFill>
-            <a:srgbClr val="22302B"/>
+            <a:srgbClr val="080C1A"/>
           </a:solidFill>
           <a:ln>
-            <a:noFill/>
+            <a:solidFill/>
           </a:ln>
           <a:effectLst/>
         </p:spPr>
@@ -11505,10 +11658,10 @@
             <a:avLst/>
           </a:prstGeom>
           <a:solidFill>
-            <a:srgbClr val="00E676"/>
+            <a:srgbClr val="22C55E"/>
           </a:solidFill>
           <a:ln>
-            <a:noFill/>
+            <a:solidFill/>
           </a:ln>
           <a:effectLst/>
         </p:spPr>
@@ -11550,6 +11703,9 @@
             <a:avLst/>
           </a:prstGeom>
           <a:noFill/>
+          <a:ln>
+            <a:solidFill/>
+          </a:ln>
         </p:spPr>
         <p:txBody>
           <a:bodyPr wrap="square" lIns="0" tIns="0" rIns="0" bIns="0" anchor="t">
@@ -11571,7 +11727,7 @@
             <a:r>
               <a:rPr sz="900" b="1">
                 <a:solidFill>
-                  <a:srgbClr val="5C726A"/>
+                  <a:srgbClr val="22C55E"/>
                 </a:solidFill>
                 <a:latin typeface="Consolas"/>
               </a:rPr>
@@ -11580,7 +11736,7 @@
             <a:r>
               <a:rPr sz="900" b="0">
                 <a:solidFill>
-                  <a:srgbClr val="5C726A"/>
+                  <a:srgbClr val="22C55E"/>
                 </a:solidFill>
                 <a:latin typeface="Consolas"/>
               </a:rPr>
@@ -11604,6 +11760,9 @@
             <a:avLst/>
           </a:prstGeom>
           <a:noFill/>
+          <a:ln>
+            <a:solidFill/>
+          </a:ln>
         </p:spPr>
         <p:txBody>
           <a:bodyPr wrap="square" lIns="0" tIns="0" rIns="0" bIns="0" anchor="t">
@@ -11625,7 +11784,7 @@
             <a:r>
               <a:rPr sz="900" b="0">
                 <a:solidFill>
-                  <a:srgbClr val="5C726A"/>
+                  <a:srgbClr val="22C55E"/>
                 </a:solidFill>
                 <a:latin typeface="Consolas"/>
               </a:rPr>
@@ -11649,10 +11808,10 @@
             <a:avLst/>
           </a:prstGeom>
           <a:solidFill>
-            <a:srgbClr val="00E676"/>
+            <a:srgbClr val="22C55E"/>
           </a:solidFill>
           <a:ln>
-            <a:noFill/>
+            <a:solidFill/>
           </a:ln>
           <a:effectLst/>
         </p:spPr>
@@ -11694,6 +11853,9 @@
             <a:avLst/>
           </a:prstGeom>
           <a:noFill/>
+          <a:ln>
+            <a:solidFill/>
+          </a:ln>
         </p:spPr>
         <p:txBody>
           <a:bodyPr wrap="square" lIns="0" tIns="0" rIns="0" bIns="0" anchor="t">
@@ -11715,7 +11877,7 @@
             <a:r>
               <a:rPr sz="1200" b="1">
                 <a:solidFill>
-                  <a:srgbClr val="00E676"/>
+                  <a:srgbClr val="22C55E"/>
                 </a:solidFill>
                 <a:latin typeface="Consolas"/>
               </a:rPr>
@@ -11739,6 +11901,9 @@
             <a:avLst/>
           </a:prstGeom>
           <a:noFill/>
+          <a:ln>
+            <a:solidFill/>
+          </a:ln>
         </p:spPr>
         <p:txBody>
           <a:bodyPr wrap="square" lIns="0" tIns="0" rIns="0" bIns="0" anchor="t">
@@ -11760,7 +11925,7 @@
             <a:r>
               <a:rPr sz="3000" b="1">
                 <a:solidFill>
-                  <a:srgbClr val="EAF3EF"/>
+                  <a:srgbClr val="22C55E"/>
                 </a:solidFill>
                 <a:latin typeface="Segoe UI"/>
               </a:rPr>
@@ -11784,10 +11949,10 @@
             <a:avLst/>
           </a:prstGeom>
           <a:solidFill>
-            <a:srgbClr val="00E676"/>
+            <a:srgbClr val="22C55E"/>
           </a:solidFill>
           <a:ln>
-            <a:noFill/>
+            <a:solidFill/>
           </a:ln>
           <a:effectLst/>
         </p:spPr>
@@ -11829,10 +11994,10 @@
             <a:avLst/>
           </a:prstGeom>
           <a:solidFill>
-            <a:srgbClr val="22302B"/>
+            <a:srgbClr val="080C1A"/>
           </a:solidFill>
           <a:ln>
-            <a:noFill/>
+            <a:solidFill/>
           </a:ln>
           <a:effectLst/>
         </p:spPr>
@@ -11874,6 +12039,9 @@
             <a:avLst/>
           </a:prstGeom>
           <a:noFill/>
+          <a:ln>
+            <a:solidFill/>
+          </a:ln>
         </p:spPr>
         <p:txBody>
           <a:bodyPr wrap="square" lIns="0" tIns="0" rIns="0" bIns="0" anchor="t">
@@ -11895,7 +12063,7 @@
             <a:r>
               <a:rPr sz="1600" b="1">
                 <a:solidFill>
-                  <a:srgbClr val="00E676"/>
+                  <a:srgbClr val="22C55E"/>
                 </a:solidFill>
                 <a:latin typeface="Segoe UI"/>
               </a:rPr>
@@ -11904,7 +12072,7 @@
             <a:r>
               <a:rPr sz="1600" b="1">
                 <a:solidFill>
-                  <a:srgbClr val="EAF3EF"/>
+                  <a:srgbClr val="22C55E"/>
                 </a:solidFill>
                 <a:latin typeface="Segoe UI"/>
               </a:rPr>
@@ -11913,7 +12081,7 @@
             <a:r>
               <a:rPr sz="1600" b="0">
                 <a:solidFill>
-                  <a:srgbClr val="8DA39B"/>
+                  <a:srgbClr val="22C55E"/>
                 </a:solidFill>
                 <a:latin typeface="Segoe UI"/>
               </a:rPr>
@@ -11935,7 +12103,7 @@
             <a:r>
               <a:rPr sz="1600" b="1">
                 <a:solidFill>
-                  <a:srgbClr val="00E676"/>
+                  <a:srgbClr val="22C55E"/>
                 </a:solidFill>
                 <a:latin typeface="Segoe UI"/>
               </a:rPr>
@@ -11944,7 +12112,7 @@
             <a:r>
               <a:rPr sz="1600" b="1">
                 <a:solidFill>
-                  <a:srgbClr val="EAF3EF"/>
+                  <a:srgbClr val="22C55E"/>
                 </a:solidFill>
                 <a:latin typeface="Segoe UI"/>
               </a:rPr>
@@ -11953,7 +12121,7 @@
             <a:r>
               <a:rPr sz="1600" b="0">
                 <a:solidFill>
-                  <a:srgbClr val="8DA39B"/>
+                  <a:srgbClr val="22C55E"/>
                 </a:solidFill>
                 <a:latin typeface="Segoe UI"/>
               </a:rPr>
@@ -11975,7 +12143,7 @@
             <a:r>
               <a:rPr sz="1600" b="1">
                 <a:solidFill>
-                  <a:srgbClr val="00E676"/>
+                  <a:srgbClr val="22C55E"/>
                 </a:solidFill>
                 <a:latin typeface="Segoe UI"/>
               </a:rPr>
@@ -11984,7 +12152,7 @@
             <a:r>
               <a:rPr sz="1600" b="1">
                 <a:solidFill>
-                  <a:srgbClr val="EAF3EF"/>
+                  <a:srgbClr val="22C55E"/>
                 </a:solidFill>
                 <a:latin typeface="Segoe UI"/>
               </a:rPr>
@@ -11993,7 +12161,7 @@
             <a:r>
               <a:rPr sz="1600" b="0">
                 <a:solidFill>
-                  <a:srgbClr val="8DA39B"/>
+                  <a:srgbClr val="22C55E"/>
                 </a:solidFill>
                 <a:latin typeface="Segoe UI"/>
               </a:rPr>
@@ -12015,7 +12183,7 @@
             <a:r>
               <a:rPr sz="1600" b="1">
                 <a:solidFill>
-                  <a:srgbClr val="00E676"/>
+                  <a:srgbClr val="22C55E"/>
                 </a:solidFill>
                 <a:latin typeface="Segoe UI"/>
               </a:rPr>
@@ -12024,7 +12192,7 @@
             <a:r>
               <a:rPr sz="1600" b="1">
                 <a:solidFill>
-                  <a:srgbClr val="EAF3EF"/>
+                  <a:srgbClr val="22C55E"/>
                 </a:solidFill>
                 <a:latin typeface="Segoe UI"/>
               </a:rPr>
@@ -12033,7 +12201,7 @@
             <a:r>
               <a:rPr sz="1600" b="0">
                 <a:solidFill>
-                  <a:srgbClr val="8DA39B"/>
+                  <a:srgbClr val="22C55E"/>
                 </a:solidFill>
                 <a:latin typeface="Segoe UI"/>
               </a:rPr>
@@ -12055,7 +12223,7 @@
             <a:r>
               <a:rPr sz="1600" b="1">
                 <a:solidFill>
-                  <a:srgbClr val="00E676"/>
+                  <a:srgbClr val="22C55E"/>
                 </a:solidFill>
                 <a:latin typeface="Segoe UI"/>
               </a:rPr>
@@ -12064,7 +12232,7 @@
             <a:r>
               <a:rPr sz="1600" b="1">
                 <a:solidFill>
-                  <a:srgbClr val="EAF3EF"/>
+                  <a:srgbClr val="22C55E"/>
                 </a:solidFill>
                 <a:latin typeface="Segoe UI"/>
               </a:rPr>
@@ -12073,7 +12241,7 @@
             <a:r>
               <a:rPr sz="1600" b="0">
                 <a:solidFill>
-                  <a:srgbClr val="8DA39B"/>
+                  <a:srgbClr val="22C55E"/>
                 </a:solidFill>
                 <a:latin typeface="Segoe UI"/>
               </a:rPr>
@@ -12097,11 +12265,11 @@
             <a:avLst/>
           </a:prstGeom>
           <a:solidFill>
-            <a:srgbClr val="161D1A"/>
+            <a:srgbClr val="080C1A"/>
           </a:solidFill>
           <a:ln w="15875">
             <a:solidFill>
-              <a:srgbClr val="2F423B"/>
+              <a:srgbClr val="1E2847"/>
             </a:solidFill>
           </a:ln>
           <a:effectLst/>
@@ -12144,10 +12312,10 @@
             <a:avLst/>
           </a:prstGeom>
           <a:solidFill>
-            <a:srgbClr val="00E676"/>
+            <a:srgbClr val="22C55E"/>
           </a:solidFill>
           <a:ln>
-            <a:noFill/>
+            <a:solidFill/>
           </a:ln>
           <a:effectLst/>
         </p:spPr>
@@ -12189,6 +12357,9 @@
             <a:avLst/>
           </a:prstGeom>
           <a:noFill/>
+          <a:ln>
+            <a:solidFill/>
+          </a:ln>
         </p:spPr>
         <p:txBody>
           <a:bodyPr wrap="square" lIns="0" tIns="0" rIns="0" bIns="0" anchor="ctr">
@@ -12210,7 +12381,7 @@
             <a:r>
               <a:rPr sz="2000" b="1">
                 <a:solidFill>
-                  <a:srgbClr val="00E676"/>
+                  <a:srgbClr val="22C55E"/>
                 </a:solidFill>
                 <a:latin typeface="Segoe UI"/>
               </a:rPr>
@@ -12219,7 +12390,7 @@
             <a:r>
               <a:rPr sz="1450" b="0">
                 <a:solidFill>
-                  <a:srgbClr val="EAF3EF"/>
+                  <a:srgbClr val="22C55E"/>
                 </a:solidFill>
                 <a:latin typeface="Segoe UI"/>
               </a:rPr>
@@ -12242,7 +12413,7 @@
     <p:bg>
       <p:bgPr>
         <a:solidFill>
-          <a:srgbClr val="0A0E0D"/>
+          <a:srgbClr val="0D1226"/>
         </a:solidFill>
         <a:effectLst/>
       </p:bgPr>
@@ -12276,10 +12447,10 @@
             <a:avLst/>
           </a:prstGeom>
           <a:solidFill>
-            <a:srgbClr val="00E676"/>
+            <a:srgbClr val="22C55E"/>
           </a:solidFill>
           <a:ln>
-            <a:noFill/>
+            <a:solidFill/>
           </a:ln>
           <a:effectLst/>
         </p:spPr>
@@ -12321,10 +12492,10 @@
             <a:avLst/>
           </a:prstGeom>
           <a:solidFill>
-            <a:srgbClr val="22302B"/>
+            <a:srgbClr val="080C1A"/>
           </a:solidFill>
           <a:ln>
-            <a:noFill/>
+            <a:solidFill/>
           </a:ln>
           <a:effectLst/>
         </p:spPr>
@@ -12366,10 +12537,10 @@
             <a:avLst/>
           </a:prstGeom>
           <a:solidFill>
-            <a:srgbClr val="00E676"/>
+            <a:srgbClr val="22C55E"/>
           </a:solidFill>
           <a:ln>
-            <a:noFill/>
+            <a:solidFill/>
           </a:ln>
           <a:effectLst/>
         </p:spPr>
@@ -12411,6 +12582,9 @@
             <a:avLst/>
           </a:prstGeom>
           <a:noFill/>
+          <a:ln>
+            <a:solidFill/>
+          </a:ln>
         </p:spPr>
         <p:txBody>
           <a:bodyPr wrap="square" lIns="0" tIns="0" rIns="0" bIns="0" anchor="t">
@@ -12432,7 +12606,7 @@
             <a:r>
               <a:rPr sz="900" b="1">
                 <a:solidFill>
-                  <a:srgbClr val="5C726A"/>
+                  <a:srgbClr val="22C55E"/>
                 </a:solidFill>
                 <a:latin typeface="Consolas"/>
               </a:rPr>
@@ -12441,7 +12615,7 @@
             <a:r>
               <a:rPr sz="900" b="0">
                 <a:solidFill>
-                  <a:srgbClr val="5C726A"/>
+                  <a:srgbClr val="22C55E"/>
                 </a:solidFill>
                 <a:latin typeface="Consolas"/>
               </a:rPr>
@@ -12465,6 +12639,9 @@
             <a:avLst/>
           </a:prstGeom>
           <a:noFill/>
+          <a:ln>
+            <a:solidFill/>
+          </a:ln>
         </p:spPr>
         <p:txBody>
           <a:bodyPr wrap="square" lIns="0" tIns="0" rIns="0" bIns="0" anchor="t">
@@ -12486,7 +12663,7 @@
             <a:r>
               <a:rPr sz="900" b="0">
                 <a:solidFill>
-                  <a:srgbClr val="5C726A"/>
+                  <a:srgbClr val="22C55E"/>
                 </a:solidFill>
                 <a:latin typeface="Consolas"/>
               </a:rPr>
@@ -12510,10 +12687,10 @@
             <a:avLst/>
           </a:prstGeom>
           <a:solidFill>
-            <a:srgbClr val="00E676"/>
+            <a:srgbClr val="22C55E"/>
           </a:solidFill>
           <a:ln>
-            <a:noFill/>
+            <a:solidFill/>
           </a:ln>
           <a:effectLst/>
         </p:spPr>
@@ -12555,6 +12732,9 @@
             <a:avLst/>
           </a:prstGeom>
           <a:noFill/>
+          <a:ln>
+            <a:solidFill/>
+          </a:ln>
         </p:spPr>
         <p:txBody>
           <a:bodyPr wrap="square" lIns="0" tIns="0" rIns="0" bIns="0" anchor="t">
@@ -12576,7 +12756,7 @@
             <a:r>
               <a:rPr sz="1200" b="1">
                 <a:solidFill>
-                  <a:srgbClr val="00E676"/>
+                  <a:srgbClr val="22C55E"/>
                 </a:solidFill>
                 <a:latin typeface="Consolas"/>
               </a:rPr>
@@ -12600,6 +12780,9 @@
             <a:avLst/>
           </a:prstGeom>
           <a:noFill/>
+          <a:ln>
+            <a:solidFill/>
+          </a:ln>
         </p:spPr>
         <p:txBody>
           <a:bodyPr wrap="square" lIns="0" tIns="0" rIns="0" bIns="0" anchor="t">
@@ -12621,7 +12804,7 @@
             <a:r>
               <a:rPr sz="3000" b="1">
                 <a:solidFill>
-                  <a:srgbClr val="EAF3EF"/>
+                  <a:srgbClr val="22C55E"/>
                 </a:solidFill>
                 <a:latin typeface="Segoe UI"/>
               </a:rPr>
@@ -12645,10 +12828,10 @@
             <a:avLst/>
           </a:prstGeom>
           <a:solidFill>
-            <a:srgbClr val="00E676"/>
+            <a:srgbClr val="22C55E"/>
           </a:solidFill>
           <a:ln>
-            <a:noFill/>
+            <a:solidFill/>
           </a:ln>
           <a:effectLst/>
         </p:spPr>
@@ -12690,10 +12873,10 @@
             <a:avLst/>
           </a:prstGeom>
           <a:solidFill>
-            <a:srgbClr val="22302B"/>
+            <a:srgbClr val="080C1A"/>
           </a:solidFill>
           <a:ln>
-            <a:noFill/>
+            <a:solidFill/>
           </a:ln>
           <a:effectLst/>
         </p:spPr>
@@ -12735,6 +12918,9 @@
             <a:avLst/>
           </a:prstGeom>
           <a:noFill/>
+          <a:ln>
+            <a:solidFill/>
+          </a:ln>
         </p:spPr>
         <p:txBody>
           <a:bodyPr wrap="square" lIns="0" tIns="0" rIns="0" bIns="0" anchor="t">
@@ -12756,7 +12942,7 @@
             <a:r>
               <a:rPr sz="1800" b="0">
                 <a:solidFill>
-                  <a:srgbClr val="EAF3EF"/>
+                  <a:srgbClr val="22C55E"/>
                 </a:solidFill>
                 <a:latin typeface="Segoe UI"/>
               </a:rPr>
@@ -12765,7 +12951,7 @@
             <a:r>
               <a:rPr sz="1800" b="1">
                 <a:solidFill>
-                  <a:srgbClr val="00E676"/>
+                  <a:srgbClr val="22C55E"/>
                 </a:solidFill>
                 <a:latin typeface="Consolas"/>
               </a:rPr>
@@ -12774,7 +12960,7 @@
             <a:r>
               <a:rPr sz="1800" b="0">
                 <a:solidFill>
-                  <a:srgbClr val="EAF3EF"/>
+                  <a:srgbClr val="22C55E"/>
                 </a:solidFill>
                 <a:latin typeface="Segoe UI"/>
               </a:rPr>
@@ -12783,7 +12969,7 @@
             <a:r>
               <a:rPr sz="1800" b="1">
                 <a:solidFill>
-                  <a:srgbClr val="00E676"/>
+                  <a:srgbClr val="22C55E"/>
                 </a:solidFill>
                 <a:latin typeface="Segoe UI"/>
               </a:rPr>
@@ -12792,7 +12978,7 @@
             <a:r>
               <a:rPr sz="1800" b="0">
                 <a:solidFill>
-                  <a:srgbClr val="EAF3EF"/>
+                  <a:srgbClr val="22C55E"/>
                 </a:solidFill>
                 <a:latin typeface="Segoe UI"/>
               </a:rPr>
@@ -12816,11 +13002,11 @@
             <a:avLst/>
           </a:prstGeom>
           <a:solidFill>
-            <a:srgbClr val="111714"/>
+            <a:srgbClr val="080C1A"/>
           </a:solidFill>
           <a:ln w="15875">
             <a:solidFill>
-              <a:srgbClr val="00E676"/>
+              <a:srgbClr val="38BDF8"/>
             </a:solidFill>
           </a:ln>
           <a:effectLst/>
@@ -12863,10 +13049,10 @@
             <a:avLst/>
           </a:prstGeom>
           <a:solidFill>
-            <a:srgbClr val="00E676"/>
+            <a:srgbClr val="22C55E"/>
           </a:solidFill>
           <a:ln>
-            <a:noFill/>
+            <a:solidFill/>
           </a:ln>
           <a:effectLst/>
         </p:spPr>
@@ -12908,6 +13094,9 @@
             <a:avLst/>
           </a:prstGeom>
           <a:noFill/>
+          <a:ln>
+            <a:solidFill/>
+          </a:ln>
         </p:spPr>
         <p:txBody>
           <a:bodyPr wrap="square" lIns="0" tIns="0" rIns="0" bIns="0" anchor="t">
@@ -12929,7 +13118,7 @@
             <a:r>
               <a:rPr sz="1500" b="1">
                 <a:solidFill>
-                  <a:srgbClr val="00E676"/>
+                  <a:srgbClr val="22C55E"/>
                 </a:solidFill>
                 <a:latin typeface="Consolas"/>
               </a:rPr>
@@ -12951,7 +13140,7 @@
             <a:r>
               <a:rPr sz="1300" b="0">
                 <a:solidFill>
-                  <a:srgbClr val="8DA39B"/>
+                  <a:srgbClr val="22C55E"/>
                 </a:solidFill>
                 <a:latin typeface="Segoe UI"/>
               </a:rPr>
@@ -12976,11 +13165,11 @@
             <a:avLst/>
           </a:prstGeom>
           <a:solidFill>
-            <a:srgbClr val="111714"/>
+            <a:srgbClr val="080C1A"/>
           </a:solidFill>
           <a:ln w="15875">
             <a:solidFill>
-              <a:srgbClr val="4FC3F7"/>
+              <a:srgbClr val="38BDF8"/>
             </a:solidFill>
           </a:ln>
           <a:effectLst/>
@@ -13023,10 +13212,10 @@
             <a:avLst/>
           </a:prstGeom>
           <a:solidFill>
-            <a:srgbClr val="4FC3F7"/>
+            <a:srgbClr val="080C1A"/>
           </a:solidFill>
           <a:ln>
-            <a:noFill/>
+            <a:solidFill/>
           </a:ln>
           <a:effectLst/>
         </p:spPr>
@@ -13068,6 +13257,9 @@
             <a:avLst/>
           </a:prstGeom>
           <a:noFill/>
+          <a:ln>
+            <a:solidFill/>
+          </a:ln>
         </p:spPr>
         <p:txBody>
           <a:bodyPr wrap="square" lIns="0" tIns="0" rIns="0" bIns="0" anchor="t">
@@ -13089,7 +13281,7 @@
             <a:r>
               <a:rPr sz="1500" b="1">
                 <a:solidFill>
-                  <a:srgbClr val="4FC3F7"/>
+                  <a:srgbClr val="38BDF8"/>
                 </a:solidFill>
                 <a:latin typeface="Consolas"/>
               </a:rPr>
@@ -13111,7 +13303,7 @@
             <a:r>
               <a:rPr sz="1300" b="0">
                 <a:solidFill>
-                  <a:srgbClr val="8DA39B"/>
+                  <a:srgbClr val="22C55E"/>
                 </a:solidFill>
                 <a:latin typeface="Segoe UI"/>
               </a:rPr>
@@ -13136,11 +13328,11 @@
             <a:avLst/>
           </a:prstGeom>
           <a:solidFill>
-            <a:srgbClr val="111714"/>
+            <a:srgbClr val="080C1A"/>
           </a:solidFill>
           <a:ln w="15875">
             <a:solidFill>
-              <a:srgbClr val="FFB300"/>
+              <a:srgbClr val="1E2847"/>
             </a:solidFill>
           </a:ln>
           <a:effectLst/>
@@ -13183,10 +13375,10 @@
             <a:avLst/>
           </a:prstGeom>
           <a:solidFill>
-            <a:srgbClr val="FFB300"/>
+            <a:srgbClr val="080C1A"/>
           </a:solidFill>
           <a:ln>
-            <a:noFill/>
+            <a:solidFill/>
           </a:ln>
           <a:effectLst/>
         </p:spPr>
@@ -13228,6 +13420,9 @@
             <a:avLst/>
           </a:prstGeom>
           <a:noFill/>
+          <a:ln>
+            <a:solidFill/>
+          </a:ln>
         </p:spPr>
         <p:txBody>
           <a:bodyPr wrap="square" lIns="0" tIns="0" rIns="0" bIns="0" anchor="t">
@@ -13249,7 +13444,7 @@
             <a:r>
               <a:rPr sz="1500" b="1">
                 <a:solidFill>
-                  <a:srgbClr val="FFB300"/>
+                  <a:srgbClr val="38BDF8"/>
                 </a:solidFill>
                 <a:latin typeface="Consolas"/>
               </a:rPr>
@@ -13271,7 +13466,7 @@
             <a:r>
               <a:rPr sz="1300" b="0">
                 <a:solidFill>
-                  <a:srgbClr val="8DA39B"/>
+                  <a:srgbClr val="22C55E"/>
                 </a:solidFill>
                 <a:latin typeface="Segoe UI"/>
               </a:rPr>
@@ -13296,11 +13491,11 @@
             <a:avLst/>
           </a:prstGeom>
           <a:solidFill>
-            <a:srgbClr val="111714"/>
+            <a:srgbClr val="080C1A"/>
           </a:solidFill>
           <a:ln w="15875">
             <a:solidFill>
-              <a:srgbClr val="00E676"/>
+              <a:srgbClr val="38BDF8"/>
             </a:solidFill>
           </a:ln>
           <a:effectLst/>
@@ -13343,10 +13538,10 @@
             <a:avLst/>
           </a:prstGeom>
           <a:solidFill>
-            <a:srgbClr val="00E676"/>
+            <a:srgbClr val="22C55E"/>
           </a:solidFill>
           <a:ln>
-            <a:noFill/>
+            <a:solidFill/>
           </a:ln>
           <a:effectLst/>
         </p:spPr>
@@ -13388,6 +13583,9 @@
             <a:avLst/>
           </a:prstGeom>
           <a:noFill/>
+          <a:ln>
+            <a:solidFill/>
+          </a:ln>
         </p:spPr>
         <p:txBody>
           <a:bodyPr wrap="square" lIns="0" tIns="0" rIns="0" bIns="0" anchor="t">
@@ -13409,7 +13607,7 @@
             <a:r>
               <a:rPr sz="1500" b="1">
                 <a:solidFill>
-                  <a:srgbClr val="00E676"/>
+                  <a:srgbClr val="22C55E"/>
                 </a:solidFill>
                 <a:latin typeface="Consolas"/>
               </a:rPr>
@@ -13431,7 +13629,7 @@
             <a:r>
               <a:rPr sz="1300" b="0">
                 <a:solidFill>
-                  <a:srgbClr val="8DA39B"/>
+                  <a:srgbClr val="22C55E"/>
                 </a:solidFill>
                 <a:latin typeface="Segoe UI"/>
               </a:rPr>
@@ -13455,7 +13653,7 @@
     <p:bg>
       <p:bgPr>
         <a:solidFill>
-          <a:srgbClr val="0A0E0D"/>
+          <a:srgbClr val="0D1226"/>
         </a:solidFill>
         <a:effectLst/>
       </p:bgPr>
@@ -13489,10 +13687,10 @@
             <a:avLst/>
           </a:prstGeom>
           <a:solidFill>
-            <a:srgbClr val="00E676"/>
+            <a:srgbClr val="22C55E"/>
           </a:solidFill>
           <a:ln>
-            <a:noFill/>
+            <a:solidFill/>
           </a:ln>
           <a:effectLst/>
         </p:spPr>
@@ -13534,10 +13732,10 @@
             <a:avLst/>
           </a:prstGeom>
           <a:solidFill>
-            <a:srgbClr val="22302B"/>
+            <a:srgbClr val="080C1A"/>
           </a:solidFill>
           <a:ln>
-            <a:noFill/>
+            <a:solidFill/>
           </a:ln>
           <a:effectLst/>
         </p:spPr>
@@ -13579,10 +13777,10 @@
             <a:avLst/>
           </a:prstGeom>
           <a:solidFill>
-            <a:srgbClr val="00E676"/>
+            <a:srgbClr val="22C55E"/>
           </a:solidFill>
           <a:ln>
-            <a:noFill/>
+            <a:solidFill/>
           </a:ln>
           <a:effectLst/>
         </p:spPr>
@@ -13624,6 +13822,9 @@
             <a:avLst/>
           </a:prstGeom>
           <a:noFill/>
+          <a:ln>
+            <a:solidFill/>
+          </a:ln>
         </p:spPr>
         <p:txBody>
           <a:bodyPr wrap="square" lIns="0" tIns="0" rIns="0" bIns="0" anchor="t">
@@ -13645,7 +13846,7 @@
             <a:r>
               <a:rPr sz="900" b="1">
                 <a:solidFill>
-                  <a:srgbClr val="5C726A"/>
+                  <a:srgbClr val="22C55E"/>
                 </a:solidFill>
                 <a:latin typeface="Consolas"/>
               </a:rPr>
@@ -13654,7 +13855,7 @@
             <a:r>
               <a:rPr sz="900" b="0">
                 <a:solidFill>
-                  <a:srgbClr val="5C726A"/>
+                  <a:srgbClr val="22C55E"/>
                 </a:solidFill>
                 <a:latin typeface="Consolas"/>
               </a:rPr>
@@ -13678,6 +13879,9 @@
             <a:avLst/>
           </a:prstGeom>
           <a:noFill/>
+          <a:ln>
+            <a:solidFill/>
+          </a:ln>
         </p:spPr>
         <p:txBody>
           <a:bodyPr wrap="square" lIns="0" tIns="0" rIns="0" bIns="0" anchor="t">
@@ -13699,7 +13903,7 @@
             <a:r>
               <a:rPr sz="900" b="0">
                 <a:solidFill>
-                  <a:srgbClr val="5C726A"/>
+                  <a:srgbClr val="22C55E"/>
                 </a:solidFill>
                 <a:latin typeface="Consolas"/>
               </a:rPr>
@@ -13723,10 +13927,10 @@
             <a:avLst/>
           </a:prstGeom>
           <a:solidFill>
-            <a:srgbClr val="00E676"/>
+            <a:srgbClr val="22C55E"/>
           </a:solidFill>
           <a:ln>
-            <a:noFill/>
+            <a:solidFill/>
           </a:ln>
           <a:effectLst/>
         </p:spPr>
@@ -13768,6 +13972,9 @@
             <a:avLst/>
           </a:prstGeom>
           <a:noFill/>
+          <a:ln>
+            <a:solidFill/>
+          </a:ln>
         </p:spPr>
         <p:txBody>
           <a:bodyPr wrap="square" lIns="0" tIns="0" rIns="0" bIns="0" anchor="t">
@@ -13789,7 +13996,7 @@
             <a:r>
               <a:rPr sz="1200" b="1">
                 <a:solidFill>
-                  <a:srgbClr val="00E676"/>
+                  <a:srgbClr val="22C55E"/>
                 </a:solidFill>
                 <a:latin typeface="Consolas"/>
               </a:rPr>
@@ -13813,6 +14020,9 @@
             <a:avLst/>
           </a:prstGeom>
           <a:noFill/>
+          <a:ln>
+            <a:solidFill/>
+          </a:ln>
         </p:spPr>
         <p:txBody>
           <a:bodyPr wrap="square" lIns="0" tIns="0" rIns="0" bIns="0" anchor="t">
@@ -13834,7 +14044,7 @@
             <a:r>
               <a:rPr sz="3000" b="1">
                 <a:solidFill>
-                  <a:srgbClr val="EAF3EF"/>
+                  <a:srgbClr val="22C55E"/>
                 </a:solidFill>
                 <a:latin typeface="Segoe UI"/>
               </a:rPr>
@@ -13858,10 +14068,10 @@
             <a:avLst/>
           </a:prstGeom>
           <a:solidFill>
-            <a:srgbClr val="00E676"/>
+            <a:srgbClr val="22C55E"/>
           </a:solidFill>
           <a:ln>
-            <a:noFill/>
+            <a:solidFill/>
           </a:ln>
           <a:effectLst/>
         </p:spPr>
@@ -13903,10 +14113,10 @@
             <a:avLst/>
           </a:prstGeom>
           <a:solidFill>
-            <a:srgbClr val="22302B"/>
+            <a:srgbClr val="080C1A"/>
           </a:solidFill>
           <a:ln>
-            <a:noFill/>
+            <a:solidFill/>
           </a:ln>
           <a:effectLst/>
         </p:spPr>
@@ -13948,11 +14158,11 @@
             <a:avLst/>
           </a:prstGeom>
           <a:solidFill>
-            <a:srgbClr val="111714"/>
+            <a:srgbClr val="080C1A"/>
           </a:solidFill>
           <a:ln w="15875">
             <a:solidFill>
-              <a:srgbClr val="00E676"/>
+              <a:srgbClr val="38BDF8"/>
             </a:solidFill>
           </a:ln>
           <a:effectLst/>
@@ -13995,10 +14205,10 @@
             <a:avLst/>
           </a:prstGeom>
           <a:solidFill>
-            <a:srgbClr val="00E676"/>
+            <a:srgbClr val="22C55E"/>
           </a:solidFill>
           <a:ln>
-            <a:noFill/>
+            <a:solidFill/>
           </a:ln>
           <a:effectLst/>
         </p:spPr>
@@ -14040,6 +14250,9 @@
             <a:avLst/>
           </a:prstGeom>
           <a:noFill/>
+          <a:ln>
+            <a:solidFill/>
+          </a:ln>
         </p:spPr>
         <p:txBody>
           <a:bodyPr wrap="square" lIns="0" tIns="0" rIns="0" bIns="0" anchor="ctr">
@@ -14061,7 +14274,7 @@
             <a:r>
               <a:rPr sz="1400" b="1">
                 <a:solidFill>
-                  <a:srgbClr val="EAF3EF"/>
+                  <a:srgbClr val="22C55E"/>
                 </a:solidFill>
                 <a:latin typeface="Segoe UI"/>
               </a:rPr>
@@ -14083,7 +14296,7 @@
             <a:r>
               <a:rPr sz="1050" b="0">
                 <a:solidFill>
-                  <a:srgbClr val="8DA39B"/>
+                  <a:srgbClr val="22C55E"/>
                 </a:solidFill>
                 <a:latin typeface="Consolas"/>
               </a:rPr>
@@ -14107,10 +14320,10 @@
             <a:avLst/>
           </a:prstGeom>
           <a:solidFill>
-            <a:srgbClr val="00E676"/>
+            <a:srgbClr val="22C55E"/>
           </a:solidFill>
           <a:ln>
-            <a:noFill/>
+            <a:solidFill/>
           </a:ln>
           <a:effectLst/>
         </p:spPr>
@@ -14152,11 +14365,11 @@
             <a:avLst/>
           </a:prstGeom>
           <a:solidFill>
-            <a:srgbClr val="111714"/>
+            <a:srgbClr val="080C1A"/>
           </a:solidFill>
           <a:ln w="15875">
             <a:solidFill>
-              <a:srgbClr val="4FC3F7"/>
+              <a:srgbClr val="38BDF8"/>
             </a:solidFill>
           </a:ln>
           <a:effectLst/>
@@ -14199,10 +14412,10 @@
             <a:avLst/>
           </a:prstGeom>
           <a:solidFill>
-            <a:srgbClr val="4FC3F7"/>
+            <a:srgbClr val="080C1A"/>
           </a:solidFill>
           <a:ln>
-            <a:noFill/>
+            <a:solidFill/>
           </a:ln>
           <a:effectLst/>
         </p:spPr>
@@ -14244,6 +14457,9 @@
             <a:avLst/>
           </a:prstGeom>
           <a:noFill/>
+          <a:ln>
+            <a:solidFill/>
+          </a:ln>
         </p:spPr>
         <p:txBody>
           <a:bodyPr wrap="square" lIns="0" tIns="0" rIns="0" bIns="0" anchor="ctr">
@@ -14265,7 +14481,7 @@
             <a:r>
               <a:rPr sz="1400" b="1">
                 <a:solidFill>
-                  <a:srgbClr val="EAF3EF"/>
+                  <a:srgbClr val="22C55E"/>
                 </a:solidFill>
                 <a:latin typeface="Segoe UI"/>
               </a:rPr>
@@ -14287,7 +14503,7 @@
             <a:r>
               <a:rPr sz="1050" b="0">
                 <a:solidFill>
-                  <a:srgbClr val="8DA39B"/>
+                  <a:srgbClr val="22C55E"/>
                 </a:solidFill>
                 <a:latin typeface="Consolas"/>
               </a:rPr>
@@ -14311,10 +14527,10 @@
             <a:avLst/>
           </a:prstGeom>
           <a:solidFill>
-            <a:srgbClr val="4FC3F7"/>
+            <a:srgbClr val="080C1A"/>
           </a:solidFill>
           <a:ln>
-            <a:noFill/>
+            <a:solidFill/>
           </a:ln>
           <a:effectLst/>
         </p:spPr>
@@ -14356,11 +14572,11 @@
             <a:avLst/>
           </a:prstGeom>
           <a:solidFill>
-            <a:srgbClr val="111714"/>
+            <a:srgbClr val="080C1A"/>
           </a:solidFill>
           <a:ln w="15875">
             <a:solidFill>
-              <a:srgbClr val="4FC3F7"/>
+              <a:srgbClr val="38BDF8"/>
             </a:solidFill>
           </a:ln>
           <a:effectLst/>
@@ -14403,10 +14619,10 @@
             <a:avLst/>
           </a:prstGeom>
           <a:solidFill>
-            <a:srgbClr val="4FC3F7"/>
+            <a:srgbClr val="080C1A"/>
           </a:solidFill>
           <a:ln>
-            <a:noFill/>
+            <a:solidFill/>
           </a:ln>
           <a:effectLst/>
         </p:spPr>
@@ -14448,6 +14664,9 @@
             <a:avLst/>
           </a:prstGeom>
           <a:noFill/>
+          <a:ln>
+            <a:solidFill/>
+          </a:ln>
         </p:spPr>
         <p:txBody>
           <a:bodyPr wrap="square" lIns="0" tIns="0" rIns="0" bIns="0" anchor="ctr">
@@ -14469,7 +14688,7 @@
             <a:r>
               <a:rPr sz="1400" b="1">
                 <a:solidFill>
-                  <a:srgbClr val="EAF3EF"/>
+                  <a:srgbClr val="22C55E"/>
                 </a:solidFill>
                 <a:latin typeface="Segoe UI"/>
               </a:rPr>
@@ -14491,7 +14710,7 @@
             <a:r>
               <a:rPr sz="1050" b="0">
                 <a:solidFill>
-                  <a:srgbClr val="8DA39B"/>
+                  <a:srgbClr val="22C55E"/>
                 </a:solidFill>
                 <a:latin typeface="Consolas"/>
               </a:rPr>
@@ -14515,10 +14734,10 @@
             <a:avLst/>
           </a:prstGeom>
           <a:solidFill>
-            <a:srgbClr val="4FC3F7"/>
+            <a:srgbClr val="080C1A"/>
           </a:solidFill>
           <a:ln>
-            <a:noFill/>
+            <a:solidFill/>
           </a:ln>
           <a:effectLst/>
         </p:spPr>
@@ -14560,11 +14779,11 @@
             <a:avLst/>
           </a:prstGeom>
           <a:solidFill>
-            <a:srgbClr val="111714"/>
+            <a:srgbClr val="080C1A"/>
           </a:solidFill>
           <a:ln w="15875">
             <a:solidFill>
-              <a:srgbClr val="00E676"/>
+              <a:srgbClr val="38BDF8"/>
             </a:solidFill>
           </a:ln>
           <a:effectLst/>
@@ -14607,10 +14826,10 @@
             <a:avLst/>
           </a:prstGeom>
           <a:solidFill>
-            <a:srgbClr val="00E676"/>
+            <a:srgbClr val="22C55E"/>
           </a:solidFill>
           <a:ln>
-            <a:noFill/>
+            <a:solidFill/>
           </a:ln>
           <a:effectLst/>
         </p:spPr>
@@ -14652,6 +14871,9 @@
             <a:avLst/>
           </a:prstGeom>
           <a:noFill/>
+          <a:ln>
+            <a:solidFill/>
+          </a:ln>
         </p:spPr>
         <p:txBody>
           <a:bodyPr wrap="square" lIns="0" tIns="0" rIns="0" bIns="0" anchor="ctr">
@@ -14673,7 +14895,7 @@
             <a:r>
               <a:rPr sz="1400" b="1">
                 <a:solidFill>
-                  <a:srgbClr val="EAF3EF"/>
+                  <a:srgbClr val="22C55E"/>
                 </a:solidFill>
                 <a:latin typeface="Segoe UI"/>
               </a:rPr>
@@ -14695,7 +14917,7 @@
             <a:r>
               <a:rPr sz="1050" b="0">
                 <a:solidFill>
-                  <a:srgbClr val="8DA39B"/>
+                  <a:srgbClr val="22C55E"/>
                 </a:solidFill>
                 <a:latin typeface="Consolas"/>
               </a:rPr>
@@ -14719,10 +14941,10 @@
             <a:avLst/>
           </a:prstGeom>
           <a:solidFill>
-            <a:srgbClr val="00E676"/>
+            <a:srgbClr val="22C55E"/>
           </a:solidFill>
           <a:ln>
-            <a:noFill/>
+            <a:solidFill/>
           </a:ln>
           <a:effectLst/>
         </p:spPr>
@@ -14764,11 +14986,11 @@
             <a:avLst/>
           </a:prstGeom>
           <a:solidFill>
-            <a:srgbClr val="111714"/>
+            <a:srgbClr val="080C1A"/>
           </a:solidFill>
           <a:ln w="15875">
             <a:solidFill>
-              <a:srgbClr val="00E676"/>
+              <a:srgbClr val="38BDF8"/>
             </a:solidFill>
           </a:ln>
           <a:effectLst/>
@@ -14811,10 +15033,10 @@
             <a:avLst/>
           </a:prstGeom>
           <a:solidFill>
-            <a:srgbClr val="00E676"/>
+            <a:srgbClr val="22C55E"/>
           </a:solidFill>
           <a:ln>
-            <a:noFill/>
+            <a:solidFill/>
           </a:ln>
           <a:effectLst/>
         </p:spPr>
@@ -14856,6 +15078,9 @@
             <a:avLst/>
           </a:prstGeom>
           <a:noFill/>
+          <a:ln>
+            <a:solidFill/>
+          </a:ln>
         </p:spPr>
         <p:txBody>
           <a:bodyPr wrap="square" lIns="0" tIns="0" rIns="0" bIns="0" anchor="ctr">
@@ -14877,7 +15102,7 @@
             <a:r>
               <a:rPr sz="1400" b="1">
                 <a:solidFill>
-                  <a:srgbClr val="EAF3EF"/>
+                  <a:srgbClr val="22C55E"/>
                 </a:solidFill>
                 <a:latin typeface="Segoe UI"/>
               </a:rPr>
@@ -14899,7 +15124,7 @@
             <a:r>
               <a:rPr sz="1050" b="0">
                 <a:solidFill>
-                  <a:srgbClr val="8DA39B"/>
+                  <a:srgbClr val="22C55E"/>
                 </a:solidFill>
                 <a:latin typeface="Consolas"/>
               </a:rPr>
@@ -14923,10 +15148,10 @@
             <a:avLst/>
           </a:prstGeom>
           <a:solidFill>
-            <a:srgbClr val="00E676"/>
+            <a:srgbClr val="22C55E"/>
           </a:solidFill>
           <a:ln>
-            <a:noFill/>
+            <a:solidFill/>
           </a:ln>
           <a:effectLst/>
         </p:spPr>
@@ -14968,11 +15193,11 @@
             <a:avLst/>
           </a:prstGeom>
           <a:solidFill>
-            <a:srgbClr val="111714"/>
+            <a:srgbClr val="080C1A"/>
           </a:solidFill>
           <a:ln w="15875">
             <a:solidFill>
-              <a:srgbClr val="FFB300"/>
+              <a:srgbClr val="1E2847"/>
             </a:solidFill>
           </a:ln>
           <a:effectLst/>
@@ -15015,10 +15240,10 @@
             <a:avLst/>
           </a:prstGeom>
           <a:solidFill>
-            <a:srgbClr val="FFB300"/>
+            <a:srgbClr val="080C1A"/>
           </a:solidFill>
           <a:ln>
-            <a:noFill/>
+            <a:solidFill/>
           </a:ln>
           <a:effectLst/>
         </p:spPr>
@@ -15060,6 +15285,9 @@
             <a:avLst/>
           </a:prstGeom>
           <a:noFill/>
+          <a:ln>
+            <a:solidFill/>
+          </a:ln>
         </p:spPr>
         <p:txBody>
           <a:bodyPr wrap="square" lIns="0" tIns="0" rIns="0" bIns="0" anchor="ctr">
@@ -15081,7 +15309,7 @@
             <a:r>
               <a:rPr sz="1400" b="1">
                 <a:solidFill>
-                  <a:srgbClr val="EAF3EF"/>
+                  <a:srgbClr val="22C55E"/>
                 </a:solidFill>
                 <a:latin typeface="Segoe UI"/>
               </a:rPr>
@@ -15103,7 +15331,7 @@
             <a:r>
               <a:rPr sz="1050" b="0">
                 <a:solidFill>
-                  <a:srgbClr val="8DA39B"/>
+                  <a:srgbClr val="22C55E"/>
                 </a:solidFill>
                 <a:latin typeface="Consolas"/>
               </a:rPr>
@@ -15126,7 +15354,7 @@
     <p:bg>
       <p:bgPr>
         <a:solidFill>
-          <a:srgbClr val="0A0E0D"/>
+          <a:srgbClr val="0D1226"/>
         </a:solidFill>
         <a:effectLst/>
       </p:bgPr>
@@ -15160,10 +15388,10 @@
             <a:avLst/>
           </a:prstGeom>
           <a:solidFill>
-            <a:srgbClr val="00E676"/>
+            <a:srgbClr val="22C55E"/>
           </a:solidFill>
           <a:ln>
-            <a:noFill/>
+            <a:solidFill/>
           </a:ln>
           <a:effectLst/>
         </p:spPr>
@@ -15205,10 +15433,10 @@
             <a:avLst/>
           </a:prstGeom>
           <a:solidFill>
-            <a:srgbClr val="22302B"/>
+            <a:srgbClr val="080C1A"/>
           </a:solidFill>
           <a:ln>
-            <a:noFill/>
+            <a:solidFill/>
           </a:ln>
           <a:effectLst/>
         </p:spPr>
@@ -15250,10 +15478,10 @@
             <a:avLst/>
           </a:prstGeom>
           <a:solidFill>
-            <a:srgbClr val="00E676"/>
+            <a:srgbClr val="22C55E"/>
           </a:solidFill>
           <a:ln>
-            <a:noFill/>
+            <a:solidFill/>
           </a:ln>
           <a:effectLst/>
         </p:spPr>
@@ -15295,6 +15523,9 @@
             <a:avLst/>
           </a:prstGeom>
           <a:noFill/>
+          <a:ln>
+            <a:solidFill/>
+          </a:ln>
         </p:spPr>
         <p:txBody>
           <a:bodyPr wrap="square" lIns="0" tIns="0" rIns="0" bIns="0" anchor="t">
@@ -15316,7 +15547,7 @@
             <a:r>
               <a:rPr sz="900" b="1">
                 <a:solidFill>
-                  <a:srgbClr val="5C726A"/>
+                  <a:srgbClr val="22C55E"/>
                 </a:solidFill>
                 <a:latin typeface="Consolas"/>
               </a:rPr>
@@ -15325,7 +15556,7 @@
             <a:r>
               <a:rPr sz="900" b="0">
                 <a:solidFill>
-                  <a:srgbClr val="5C726A"/>
+                  <a:srgbClr val="22C55E"/>
                 </a:solidFill>
                 <a:latin typeface="Consolas"/>
               </a:rPr>
@@ -15349,6 +15580,9 @@
             <a:avLst/>
           </a:prstGeom>
           <a:noFill/>
+          <a:ln>
+            <a:solidFill/>
+          </a:ln>
         </p:spPr>
         <p:txBody>
           <a:bodyPr wrap="square" lIns="0" tIns="0" rIns="0" bIns="0" anchor="t">
@@ -15370,7 +15604,7 @@
             <a:r>
               <a:rPr sz="900" b="0">
                 <a:solidFill>
-                  <a:srgbClr val="5C726A"/>
+                  <a:srgbClr val="22C55E"/>
                 </a:solidFill>
                 <a:latin typeface="Consolas"/>
               </a:rPr>
@@ -15394,10 +15628,10 @@
             <a:avLst/>
           </a:prstGeom>
           <a:solidFill>
-            <a:srgbClr val="00E676"/>
+            <a:srgbClr val="22C55E"/>
           </a:solidFill>
           <a:ln>
-            <a:noFill/>
+            <a:solidFill/>
           </a:ln>
           <a:effectLst/>
         </p:spPr>
@@ -15439,6 +15673,9 @@
             <a:avLst/>
           </a:prstGeom>
           <a:noFill/>
+          <a:ln>
+            <a:solidFill/>
+          </a:ln>
         </p:spPr>
         <p:txBody>
           <a:bodyPr wrap="square" lIns="0" tIns="0" rIns="0" bIns="0" anchor="t">
@@ -15460,7 +15697,7 @@
             <a:r>
               <a:rPr sz="1200" b="1">
                 <a:solidFill>
-                  <a:srgbClr val="00E676"/>
+                  <a:srgbClr val="22C55E"/>
                 </a:solidFill>
                 <a:latin typeface="Consolas"/>
               </a:rPr>
@@ -15484,6 +15721,9 @@
             <a:avLst/>
           </a:prstGeom>
           <a:noFill/>
+          <a:ln>
+            <a:solidFill/>
+          </a:ln>
         </p:spPr>
         <p:txBody>
           <a:bodyPr wrap="square" lIns="0" tIns="0" rIns="0" bIns="0" anchor="t">
@@ -15505,7 +15745,7 @@
             <a:r>
               <a:rPr sz="3000" b="1">
                 <a:solidFill>
-                  <a:srgbClr val="EAF3EF"/>
+                  <a:srgbClr val="22C55E"/>
                 </a:solidFill>
                 <a:latin typeface="Segoe UI"/>
               </a:rPr>
@@ -15529,10 +15769,10 @@
             <a:avLst/>
           </a:prstGeom>
           <a:solidFill>
-            <a:srgbClr val="00E676"/>
+            <a:srgbClr val="22C55E"/>
           </a:solidFill>
           <a:ln>
-            <a:noFill/>
+            <a:solidFill/>
           </a:ln>
           <a:effectLst/>
         </p:spPr>
@@ -15574,10 +15814,10 @@
             <a:avLst/>
           </a:prstGeom>
           <a:solidFill>
-            <a:srgbClr val="22302B"/>
+            <a:srgbClr val="080C1A"/>
           </a:solidFill>
           <a:ln>
-            <a:noFill/>
+            <a:solidFill/>
           </a:ln>
           <a:effectLst/>
         </p:spPr>
@@ -15619,11 +15859,11 @@
             <a:avLst/>
           </a:prstGeom>
           <a:solidFill>
-            <a:srgbClr val="111714"/>
+            <a:srgbClr val="080C1A"/>
           </a:solidFill>
           <a:ln w="15875">
             <a:solidFill>
-              <a:srgbClr val="2F423B"/>
+              <a:srgbClr val="1E2847"/>
             </a:solidFill>
           </a:ln>
           <a:effectLst/>
@@ -15666,10 +15906,10 @@
             <a:avLst/>
           </a:prstGeom>
           <a:solidFill>
-            <a:srgbClr val="00E676"/>
+            <a:srgbClr val="22C55E"/>
           </a:solidFill>
           <a:ln>
-            <a:noFill/>
+            <a:solidFill/>
           </a:ln>
           <a:effectLst/>
         </p:spPr>
@@ -15711,6 +15951,9 @@
             <a:avLst/>
           </a:prstGeom>
           <a:noFill/>
+          <a:ln>
+            <a:solidFill/>
+          </a:ln>
         </p:spPr>
         <p:txBody>
           <a:bodyPr wrap="square" lIns="0" tIns="0" rIns="0" bIns="0" anchor="t">
@@ -15732,7 +15975,7 @@
             <a:r>
               <a:rPr sz="3800" b="1">
                 <a:solidFill>
-                  <a:srgbClr val="00E676"/>
+                  <a:srgbClr val="22C55E"/>
                 </a:solidFill>
                 <a:latin typeface="Segoe UI"/>
               </a:rPr>
@@ -15754,7 +15997,7 @@
             <a:r>
               <a:rPr sz="1200" b="1">
                 <a:solidFill>
-                  <a:srgbClr val="8DA39B"/>
+                  <a:srgbClr val="22C55E"/>
                 </a:solidFill>
                 <a:latin typeface="Consolas"/>
               </a:rPr>
@@ -15778,6 +16021,9 @@
             <a:avLst/>
           </a:prstGeom>
           <a:noFill/>
+          <a:ln>
+            <a:solidFill/>
+          </a:ln>
         </p:spPr>
         <p:txBody>
           <a:bodyPr wrap="square" lIns="0" tIns="0" rIns="0" bIns="0" anchor="t">
@@ -15799,7 +16045,7 @@
             <a:r>
               <a:rPr sz="1350" b="0">
                 <a:solidFill>
-                  <a:srgbClr val="EAF3EF"/>
+                  <a:srgbClr val="22C55E"/>
                 </a:solidFill>
                 <a:latin typeface="Segoe UI"/>
               </a:rPr>
@@ -15824,11 +16070,11 @@
             <a:avLst/>
           </a:prstGeom>
           <a:solidFill>
-            <a:srgbClr val="111714"/>
+            <a:srgbClr val="080C1A"/>
           </a:solidFill>
           <a:ln w="15875">
             <a:solidFill>
-              <a:srgbClr val="2F423B"/>
+              <a:srgbClr val="1E2847"/>
             </a:solidFill>
           </a:ln>
           <a:effectLst/>
@@ -15871,10 +16117,10 @@
             <a:avLst/>
           </a:prstGeom>
           <a:solidFill>
-            <a:srgbClr val="00E676"/>
+            <a:srgbClr val="22C55E"/>
           </a:solidFill>
           <a:ln>
-            <a:noFill/>
+            <a:solidFill/>
           </a:ln>
           <a:effectLst/>
         </p:spPr>
@@ -15916,6 +16162,9 @@
             <a:avLst/>
           </a:prstGeom>
           <a:noFill/>
+          <a:ln>
+            <a:solidFill/>
+          </a:ln>
         </p:spPr>
         <p:txBody>
           <a:bodyPr wrap="square" lIns="0" tIns="0" rIns="0" bIns="0" anchor="t">
@@ -15937,7 +16186,7 @@
             <a:r>
               <a:rPr sz="3800" b="1">
                 <a:solidFill>
-                  <a:srgbClr val="00E676"/>
+                  <a:srgbClr val="22C55E"/>
                 </a:solidFill>
                 <a:latin typeface="Segoe UI"/>
               </a:rPr>
@@ -15959,7 +16208,7 @@
             <a:r>
               <a:rPr sz="1200" b="1">
                 <a:solidFill>
-                  <a:srgbClr val="8DA39B"/>
+                  <a:srgbClr val="22C55E"/>
                 </a:solidFill>
                 <a:latin typeface="Consolas"/>
               </a:rPr>
@@ -15983,6 +16232,9 @@
             <a:avLst/>
           </a:prstGeom>
           <a:noFill/>
+          <a:ln>
+            <a:solidFill/>
+          </a:ln>
         </p:spPr>
         <p:txBody>
           <a:bodyPr wrap="square" lIns="0" tIns="0" rIns="0" bIns="0" anchor="t">
@@ -16004,7 +16256,7 @@
             <a:r>
               <a:rPr sz="1350" b="0">
                 <a:solidFill>
-                  <a:srgbClr val="EAF3EF"/>
+                  <a:srgbClr val="22C55E"/>
                 </a:solidFill>
                 <a:latin typeface="Segoe UI"/>
               </a:rPr>
@@ -16029,11 +16281,11 @@
             <a:avLst/>
           </a:prstGeom>
           <a:solidFill>
-            <a:srgbClr val="111714"/>
+            <a:srgbClr val="080C1A"/>
           </a:solidFill>
           <a:ln w="15875">
             <a:solidFill>
-              <a:srgbClr val="2F423B"/>
+              <a:srgbClr val="1E2847"/>
             </a:solidFill>
           </a:ln>
           <a:effectLst/>
@@ -16076,10 +16328,10 @@
             <a:avLst/>
           </a:prstGeom>
           <a:solidFill>
-            <a:srgbClr val="00E676"/>
+            <a:srgbClr val="22C55E"/>
           </a:solidFill>
           <a:ln>
-            <a:noFill/>
+            <a:solidFill/>
           </a:ln>
           <a:effectLst/>
         </p:spPr>
@@ -16121,6 +16373,9 @@
             <a:avLst/>
           </a:prstGeom>
           <a:noFill/>
+          <a:ln>
+            <a:solidFill/>
+          </a:ln>
         </p:spPr>
         <p:txBody>
           <a:bodyPr wrap="square" lIns="0" tIns="0" rIns="0" bIns="0" anchor="t">
@@ -16142,7 +16397,7 @@
             <a:r>
               <a:rPr sz="3800" b="1">
                 <a:solidFill>
-                  <a:srgbClr val="00E676"/>
+                  <a:srgbClr val="22C55E"/>
                 </a:solidFill>
                 <a:latin typeface="Segoe UI"/>
               </a:rPr>
@@ -16164,7 +16419,7 @@
             <a:r>
               <a:rPr sz="1200" b="1">
                 <a:solidFill>
-                  <a:srgbClr val="8DA39B"/>
+                  <a:srgbClr val="22C55E"/>
                 </a:solidFill>
                 <a:latin typeface="Consolas"/>
               </a:rPr>
@@ -16188,6 +16443,9 @@
             <a:avLst/>
           </a:prstGeom>
           <a:noFill/>
+          <a:ln>
+            <a:solidFill/>
+          </a:ln>
         </p:spPr>
         <p:txBody>
           <a:bodyPr wrap="square" lIns="0" tIns="0" rIns="0" bIns="0" anchor="t">
@@ -16209,7 +16467,7 @@
             <a:r>
               <a:rPr sz="1350" b="0">
                 <a:solidFill>
-                  <a:srgbClr val="EAF3EF"/>
+                  <a:srgbClr val="22C55E"/>
                 </a:solidFill>
                 <a:latin typeface="Segoe UI"/>
               </a:rPr>
@@ -16233,7 +16491,7 @@
     <p:bg>
       <p:bgPr>
         <a:solidFill>
-          <a:srgbClr val="0A0E0D"/>
+          <a:srgbClr val="0D1226"/>
         </a:solidFill>
         <a:effectLst/>
       </p:bgPr>
@@ -16267,10 +16525,10 @@
             <a:avLst/>
           </a:prstGeom>
           <a:solidFill>
-            <a:srgbClr val="00E676"/>
+            <a:srgbClr val="22C55E"/>
           </a:solidFill>
           <a:ln>
-            <a:noFill/>
+            <a:solidFill/>
           </a:ln>
           <a:effectLst/>
         </p:spPr>
@@ -16312,10 +16570,10 @@
             <a:avLst/>
           </a:prstGeom>
           <a:solidFill>
-            <a:srgbClr val="22302B"/>
+            <a:srgbClr val="080C1A"/>
           </a:solidFill>
           <a:ln>
-            <a:noFill/>
+            <a:solidFill/>
           </a:ln>
           <a:effectLst/>
         </p:spPr>
@@ -16357,10 +16615,10 @@
             <a:avLst/>
           </a:prstGeom>
           <a:solidFill>
-            <a:srgbClr val="00E676"/>
+            <a:srgbClr val="22C55E"/>
           </a:solidFill>
           <a:ln>
-            <a:noFill/>
+            <a:solidFill/>
           </a:ln>
           <a:effectLst/>
         </p:spPr>
@@ -16402,6 +16660,9 @@
             <a:avLst/>
           </a:prstGeom>
           <a:noFill/>
+          <a:ln>
+            <a:solidFill/>
+          </a:ln>
         </p:spPr>
         <p:txBody>
           <a:bodyPr wrap="square" lIns="0" tIns="0" rIns="0" bIns="0" anchor="t">
@@ -16423,7 +16684,7 @@
             <a:r>
               <a:rPr sz="900" b="1">
                 <a:solidFill>
-                  <a:srgbClr val="5C726A"/>
+                  <a:srgbClr val="22C55E"/>
                 </a:solidFill>
                 <a:latin typeface="Consolas"/>
               </a:rPr>
@@ -16432,7 +16693,7 @@
             <a:r>
               <a:rPr sz="900" b="0">
                 <a:solidFill>
-                  <a:srgbClr val="5C726A"/>
+                  <a:srgbClr val="22C55E"/>
                 </a:solidFill>
                 <a:latin typeface="Consolas"/>
               </a:rPr>
@@ -16456,6 +16717,9 @@
             <a:avLst/>
           </a:prstGeom>
           <a:noFill/>
+          <a:ln>
+            <a:solidFill/>
+          </a:ln>
         </p:spPr>
         <p:txBody>
           <a:bodyPr wrap="square" lIns="0" tIns="0" rIns="0" bIns="0" anchor="t">
@@ -16477,7 +16741,7 @@
             <a:r>
               <a:rPr sz="900" b="0">
                 <a:solidFill>
-                  <a:srgbClr val="5C726A"/>
+                  <a:srgbClr val="22C55E"/>
                 </a:solidFill>
                 <a:latin typeface="Consolas"/>
               </a:rPr>
@@ -16501,10 +16765,10 @@
             <a:avLst/>
           </a:prstGeom>
           <a:solidFill>
-            <a:srgbClr val="00E676"/>
+            <a:srgbClr val="22C55E"/>
           </a:solidFill>
           <a:ln>
-            <a:noFill/>
+            <a:solidFill/>
           </a:ln>
           <a:effectLst/>
         </p:spPr>
@@ -16546,6 +16810,9 @@
             <a:avLst/>
           </a:prstGeom>
           <a:noFill/>
+          <a:ln>
+            <a:solidFill/>
+          </a:ln>
         </p:spPr>
         <p:txBody>
           <a:bodyPr wrap="square" lIns="0" tIns="0" rIns="0" bIns="0" anchor="t">
@@ -16567,7 +16834,7 @@
             <a:r>
               <a:rPr sz="1200" b="1">
                 <a:solidFill>
-                  <a:srgbClr val="00E676"/>
+                  <a:srgbClr val="22C55E"/>
                 </a:solidFill>
                 <a:latin typeface="Consolas"/>
               </a:rPr>
@@ -16591,6 +16858,9 @@
             <a:avLst/>
           </a:prstGeom>
           <a:noFill/>
+          <a:ln>
+            <a:solidFill/>
+          </a:ln>
         </p:spPr>
         <p:txBody>
           <a:bodyPr wrap="square" lIns="0" tIns="0" rIns="0" bIns="0" anchor="t">
@@ -16612,7 +16882,7 @@
             <a:r>
               <a:rPr sz="3000" b="1">
                 <a:solidFill>
-                  <a:srgbClr val="EAF3EF"/>
+                  <a:srgbClr val="22C55E"/>
                 </a:solidFill>
                 <a:latin typeface="Segoe UI"/>
               </a:rPr>
@@ -16636,10 +16906,10 @@
             <a:avLst/>
           </a:prstGeom>
           <a:solidFill>
-            <a:srgbClr val="00E676"/>
+            <a:srgbClr val="22C55E"/>
           </a:solidFill>
           <a:ln>
-            <a:noFill/>
+            <a:solidFill/>
           </a:ln>
           <a:effectLst/>
         </p:spPr>
@@ -16681,10 +16951,10 @@
             <a:avLst/>
           </a:prstGeom>
           <a:solidFill>
-            <a:srgbClr val="22302B"/>
+            <a:srgbClr val="080C1A"/>
           </a:solidFill>
           <a:ln>
-            <a:noFill/>
+            <a:solidFill/>
           </a:ln>
           <a:effectLst/>
         </p:spPr>
@@ -16769,7 +17039,7 @@
                       <a:r>
                         <a:rPr sz="1350" b="1">
                           <a:solidFill>
-                            <a:srgbClr val="00E676"/>
+                            <a:srgbClr val="22C55E"/>
                           </a:solidFill>
                           <a:latin typeface="Segoe UI"/>
                         </a:rPr>
@@ -16779,7 +17049,7 @@
                   </a:txBody>
                   <a:tcPr marL="128016" marR="73152" marT="18288" marB="18288" anchor="ctr">
                     <a:solidFill>
-                      <a:srgbClr val="0B3D2A"/>
+                      <a:srgbClr val="080C1A"/>
                     </a:solidFill>
                   </a:tcPr>
                 </a:tc>
@@ -16792,7 +17062,7 @@
                       <a:r>
                         <a:rPr sz="1350" b="1">
                           <a:solidFill>
-                            <a:srgbClr val="00E676"/>
+                            <a:srgbClr val="22C55E"/>
                           </a:solidFill>
                           <a:latin typeface="Segoe UI"/>
                         </a:rPr>
@@ -16802,7 +17072,7 @@
                   </a:txBody>
                   <a:tcPr marL="128016" marR="73152" marT="18288" marB="18288" anchor="ctr">
                     <a:solidFill>
-                      <a:srgbClr val="0B3D2A"/>
+                      <a:srgbClr val="080C1A"/>
                     </a:solidFill>
                   </a:tcPr>
                 </a:tc>
@@ -16815,7 +17085,7 @@
                       <a:r>
                         <a:rPr sz="1350" b="1">
                           <a:solidFill>
-                            <a:srgbClr val="00E676"/>
+                            <a:srgbClr val="22C55E"/>
                           </a:solidFill>
                           <a:latin typeface="Segoe UI"/>
                         </a:rPr>
@@ -16825,7 +17095,7 @@
                   </a:txBody>
                   <a:tcPr marL="128016" marR="73152" marT="18288" marB="18288" anchor="ctr">
                     <a:solidFill>
-                      <a:srgbClr val="0B3D2A"/>
+                      <a:srgbClr val="080C1A"/>
                     </a:solidFill>
                   </a:tcPr>
                 </a:tc>
@@ -16838,7 +17108,7 @@
                       <a:r>
                         <a:rPr sz="1350" b="1">
                           <a:solidFill>
-                            <a:srgbClr val="00E676"/>
+                            <a:srgbClr val="22C55E"/>
                           </a:solidFill>
                           <a:latin typeface="Segoe UI"/>
                         </a:rPr>
@@ -16848,7 +17118,7 @@
                   </a:txBody>
                   <a:tcPr marL="128016" marR="73152" marT="18288" marB="18288" anchor="ctr">
                     <a:solidFill>
-                      <a:srgbClr val="0B3D2A"/>
+                      <a:srgbClr val="080C1A"/>
                     </a:solidFill>
                   </a:tcPr>
                 </a:tc>
@@ -16868,7 +17138,7 @@
                       <a:r>
                         <a:rPr sz="1350" b="1">
                           <a:solidFill>
-                            <a:srgbClr val="EAF3EF"/>
+                            <a:srgbClr val="22C55E"/>
                           </a:solidFill>
                           <a:latin typeface="Segoe UI"/>
                         </a:rPr>
@@ -16878,7 +17148,7 @@
                   </a:txBody>
                   <a:tcPr marL="128016" marR="73152" marT="18288" marB="18288" anchor="ctr">
                     <a:solidFill>
-                      <a:srgbClr val="111714"/>
+                      <a:srgbClr val="080C1A"/>
                     </a:solidFill>
                   </a:tcPr>
                 </a:tc>
@@ -16891,7 +17161,7 @@
                       <a:r>
                         <a:rPr sz="1350" b="0">
                           <a:solidFill>
-                            <a:srgbClr val="8DA39B"/>
+                            <a:srgbClr val="22C55E"/>
                           </a:solidFill>
                           <a:latin typeface="Consolas"/>
                         </a:rPr>
@@ -16901,7 +17171,7 @@
                   </a:txBody>
                   <a:tcPr marL="128016" marR="73152" marT="18288" marB="18288" anchor="ctr">
                     <a:solidFill>
-                      <a:srgbClr val="111714"/>
+                      <a:srgbClr val="080C1A"/>
                     </a:solidFill>
                   </a:tcPr>
                 </a:tc>
@@ -16914,7 +17184,7 @@
                       <a:r>
                         <a:rPr sz="1350" b="0">
                           <a:solidFill>
-                            <a:srgbClr val="8DA39B"/>
+                            <a:srgbClr val="22C55E"/>
                           </a:solidFill>
                           <a:latin typeface="Consolas"/>
                         </a:rPr>
@@ -16924,7 +17194,7 @@
                   </a:txBody>
                   <a:tcPr marL="128016" marR="73152" marT="18288" marB="18288" anchor="ctr">
                     <a:solidFill>
-                      <a:srgbClr val="111714"/>
+                      <a:srgbClr val="080C1A"/>
                     </a:solidFill>
                   </a:tcPr>
                 </a:tc>
@@ -16937,7 +17207,7 @@
                       <a:r>
                         <a:rPr sz="1350" b="0">
                           <a:solidFill>
-                            <a:srgbClr val="8DA39B"/>
+                            <a:srgbClr val="22C55E"/>
                           </a:solidFill>
                           <a:latin typeface="Consolas"/>
                         </a:rPr>
@@ -16947,7 +17217,7 @@
                   </a:txBody>
                   <a:tcPr marL="128016" marR="73152" marT="18288" marB="18288" anchor="ctr">
                     <a:solidFill>
-                      <a:srgbClr val="111714"/>
+                      <a:srgbClr val="080C1A"/>
                     </a:solidFill>
                   </a:tcPr>
                 </a:tc>
@@ -16967,7 +17237,7 @@
                       <a:r>
                         <a:rPr sz="1350" b="1">
                           <a:solidFill>
-                            <a:srgbClr val="EAF3EF"/>
+                            <a:srgbClr val="22C55E"/>
                           </a:solidFill>
                           <a:latin typeface="Segoe UI"/>
                         </a:rPr>
@@ -16977,7 +17247,7 @@
                   </a:txBody>
                   <a:tcPr marL="128016" marR="73152" marT="18288" marB="18288" anchor="ctr">
                     <a:solidFill>
-                      <a:srgbClr val="161D1A"/>
+                      <a:srgbClr val="080C1A"/>
                     </a:solidFill>
                   </a:tcPr>
                 </a:tc>
@@ -16990,7 +17260,7 @@
                       <a:r>
                         <a:rPr sz="1350" b="0">
                           <a:solidFill>
-                            <a:srgbClr val="8DA39B"/>
+                            <a:srgbClr val="22C55E"/>
                           </a:solidFill>
                           <a:latin typeface="Consolas"/>
                         </a:rPr>
@@ -17000,7 +17270,7 @@
                   </a:txBody>
                   <a:tcPr marL="128016" marR="73152" marT="18288" marB="18288" anchor="ctr">
                     <a:solidFill>
-                      <a:srgbClr val="161D1A"/>
+                      <a:srgbClr val="080C1A"/>
                     </a:solidFill>
                   </a:tcPr>
                 </a:tc>
@@ -17013,7 +17283,7 @@
                       <a:r>
                         <a:rPr sz="1350" b="0">
                           <a:solidFill>
-                            <a:srgbClr val="8DA39B"/>
+                            <a:srgbClr val="22C55E"/>
                           </a:solidFill>
                           <a:latin typeface="Consolas"/>
                         </a:rPr>
@@ -17023,7 +17293,7 @@
                   </a:txBody>
                   <a:tcPr marL="128016" marR="73152" marT="18288" marB="18288" anchor="ctr">
                     <a:solidFill>
-                      <a:srgbClr val="161D1A"/>
+                      <a:srgbClr val="080C1A"/>
                     </a:solidFill>
                   </a:tcPr>
                 </a:tc>
@@ -17036,7 +17306,7 @@
                       <a:r>
                         <a:rPr sz="1350" b="0">
                           <a:solidFill>
-                            <a:srgbClr val="8DA39B"/>
+                            <a:srgbClr val="22C55E"/>
                           </a:solidFill>
                           <a:latin typeface="Consolas"/>
                         </a:rPr>
@@ -17046,7 +17316,7 @@
                   </a:txBody>
                   <a:tcPr marL="128016" marR="73152" marT="18288" marB="18288" anchor="ctr">
                     <a:solidFill>
-                      <a:srgbClr val="161D1A"/>
+                      <a:srgbClr val="080C1A"/>
                     </a:solidFill>
                   </a:tcPr>
                 </a:tc>
@@ -17066,7 +17336,7 @@
                       <a:r>
                         <a:rPr sz="1350" b="1">
                           <a:solidFill>
-                            <a:srgbClr val="EAF3EF"/>
+                            <a:srgbClr val="22C55E"/>
                           </a:solidFill>
                           <a:latin typeface="Segoe UI"/>
                         </a:rPr>
@@ -17076,7 +17346,7 @@
                   </a:txBody>
                   <a:tcPr marL="128016" marR="73152" marT="18288" marB="18288" anchor="ctr">
                     <a:solidFill>
-                      <a:srgbClr val="111714"/>
+                      <a:srgbClr val="080C1A"/>
                     </a:solidFill>
                   </a:tcPr>
                 </a:tc>
@@ -17089,7 +17359,7 @@
                       <a:r>
                         <a:rPr sz="1350" b="0">
                           <a:solidFill>
-                            <a:srgbClr val="8DA39B"/>
+                            <a:srgbClr val="22C55E"/>
                           </a:solidFill>
                           <a:latin typeface="Consolas"/>
                         </a:rPr>
@@ -17099,7 +17369,7 @@
                   </a:txBody>
                   <a:tcPr marL="128016" marR="73152" marT="18288" marB="18288" anchor="ctr">
                     <a:solidFill>
-                      <a:srgbClr val="111714"/>
+                      <a:srgbClr val="080C1A"/>
                     </a:solidFill>
                   </a:tcPr>
                 </a:tc>
@@ -17112,7 +17382,7 @@
                       <a:r>
                         <a:rPr sz="1350" b="0">
                           <a:solidFill>
-                            <a:srgbClr val="8DA39B"/>
+                            <a:srgbClr val="22C55E"/>
                           </a:solidFill>
                           <a:latin typeface="Consolas"/>
                         </a:rPr>
@@ -17122,7 +17392,7 @@
                   </a:txBody>
                   <a:tcPr marL="128016" marR="73152" marT="18288" marB="18288" anchor="ctr">
                     <a:solidFill>
-                      <a:srgbClr val="111714"/>
+                      <a:srgbClr val="080C1A"/>
                     </a:solidFill>
                   </a:tcPr>
                 </a:tc>
@@ -17135,7 +17405,7 @@
                       <a:r>
                         <a:rPr sz="1350" b="0">
                           <a:solidFill>
-                            <a:srgbClr val="8DA39B"/>
+                            <a:srgbClr val="22C55E"/>
                           </a:solidFill>
                           <a:latin typeface="Consolas"/>
                         </a:rPr>
@@ -17145,7 +17415,7 @@
                   </a:txBody>
                   <a:tcPr marL="128016" marR="73152" marT="18288" marB="18288" anchor="ctr">
                     <a:solidFill>
-                      <a:srgbClr val="111714"/>
+                      <a:srgbClr val="080C1A"/>
                     </a:solidFill>
                   </a:tcPr>
                 </a:tc>
@@ -17165,7 +17435,7 @@
                       <a:r>
                         <a:rPr sz="1350" b="1">
                           <a:solidFill>
-                            <a:srgbClr val="EAF3EF"/>
+                            <a:srgbClr val="22C55E"/>
                           </a:solidFill>
                           <a:latin typeface="Segoe UI"/>
                         </a:rPr>
@@ -17175,7 +17445,7 @@
                   </a:txBody>
                   <a:tcPr marL="128016" marR="73152" marT="18288" marB="18288" anchor="ctr">
                     <a:solidFill>
-                      <a:srgbClr val="161D1A"/>
+                      <a:srgbClr val="080C1A"/>
                     </a:solidFill>
                   </a:tcPr>
                 </a:tc>
@@ -17188,7 +17458,7 @@
                       <a:r>
                         <a:rPr sz="1350" b="0">
                           <a:solidFill>
-                            <a:srgbClr val="8DA39B"/>
+                            <a:srgbClr val="22C55E"/>
                           </a:solidFill>
                           <a:latin typeface="Consolas"/>
                         </a:rPr>
@@ -17198,7 +17468,7 @@
                   </a:txBody>
                   <a:tcPr marL="128016" marR="73152" marT="18288" marB="18288" anchor="ctr">
                     <a:solidFill>
-                      <a:srgbClr val="161D1A"/>
+                      <a:srgbClr val="080C1A"/>
                     </a:solidFill>
                   </a:tcPr>
                 </a:tc>
@@ -17211,7 +17481,7 @@
                       <a:r>
                         <a:rPr sz="1350" b="0">
                           <a:solidFill>
-                            <a:srgbClr val="8DA39B"/>
+                            <a:srgbClr val="22C55E"/>
                           </a:solidFill>
                           <a:latin typeface="Consolas"/>
                         </a:rPr>
@@ -17221,7 +17491,7 @@
                   </a:txBody>
                   <a:tcPr marL="128016" marR="73152" marT="18288" marB="18288" anchor="ctr">
                     <a:solidFill>
-                      <a:srgbClr val="161D1A"/>
+                      <a:srgbClr val="080C1A"/>
                     </a:solidFill>
                   </a:tcPr>
                 </a:tc>
@@ -17234,7 +17504,7 @@
                       <a:r>
                         <a:rPr sz="1350" b="0">
                           <a:solidFill>
-                            <a:srgbClr val="8DA39B"/>
+                            <a:srgbClr val="22C55E"/>
                           </a:solidFill>
                           <a:latin typeface="Consolas"/>
                         </a:rPr>
@@ -17244,7 +17514,7 @@
                   </a:txBody>
                   <a:tcPr marL="128016" marR="73152" marT="18288" marB="18288" anchor="ctr">
                     <a:solidFill>
-                      <a:srgbClr val="161D1A"/>
+                      <a:srgbClr val="080C1A"/>
                     </a:solidFill>
                   </a:tcPr>
                 </a:tc>
@@ -17264,7 +17534,7 @@
                       <a:r>
                         <a:rPr sz="1350" b="1">
                           <a:solidFill>
-                            <a:srgbClr val="EAF3EF"/>
+                            <a:srgbClr val="22C55E"/>
                           </a:solidFill>
                           <a:latin typeface="Segoe UI"/>
                         </a:rPr>
@@ -17274,7 +17544,7 @@
                   </a:txBody>
                   <a:tcPr marL="128016" marR="73152" marT="18288" marB="18288" anchor="ctr">
                     <a:solidFill>
-                      <a:srgbClr val="111714"/>
+                      <a:srgbClr val="080C1A"/>
                     </a:solidFill>
                   </a:tcPr>
                 </a:tc>
@@ -17287,7 +17557,7 @@
                       <a:r>
                         <a:rPr sz="1350" b="0">
                           <a:solidFill>
-                            <a:srgbClr val="8DA39B"/>
+                            <a:srgbClr val="22C55E"/>
                           </a:solidFill>
                           <a:latin typeface="Consolas"/>
                         </a:rPr>
@@ -17297,7 +17567,7 @@
                   </a:txBody>
                   <a:tcPr marL="128016" marR="73152" marT="18288" marB="18288" anchor="ctr">
                     <a:solidFill>
-                      <a:srgbClr val="111714"/>
+                      <a:srgbClr val="080C1A"/>
                     </a:solidFill>
                   </a:tcPr>
                 </a:tc>
@@ -17310,7 +17580,7 @@
                       <a:r>
                         <a:rPr sz="1350" b="0">
                           <a:solidFill>
-                            <a:srgbClr val="8DA39B"/>
+                            <a:srgbClr val="22C55E"/>
                           </a:solidFill>
                           <a:latin typeface="Consolas"/>
                         </a:rPr>
@@ -17320,7 +17590,7 @@
                   </a:txBody>
                   <a:tcPr marL="128016" marR="73152" marT="18288" marB="18288" anchor="ctr">
                     <a:solidFill>
-                      <a:srgbClr val="111714"/>
+                      <a:srgbClr val="080C1A"/>
                     </a:solidFill>
                   </a:tcPr>
                 </a:tc>
@@ -17333,7 +17603,7 @@
                       <a:r>
                         <a:rPr sz="1350" b="0">
                           <a:solidFill>
-                            <a:srgbClr val="8DA39B"/>
+                            <a:srgbClr val="22C55E"/>
                           </a:solidFill>
                           <a:latin typeface="Consolas"/>
                         </a:rPr>
@@ -17343,7 +17613,7 @@
                   </a:txBody>
                   <a:tcPr marL="128016" marR="73152" marT="18288" marB="18288" anchor="ctr">
                     <a:solidFill>
-                      <a:srgbClr val="111714"/>
+                      <a:srgbClr val="080C1A"/>
                     </a:solidFill>
                   </a:tcPr>
                 </a:tc>
@@ -17372,6 +17642,9 @@
             <a:avLst/>
           </a:prstGeom>
           <a:noFill/>
+          <a:ln>
+            <a:solidFill/>
+          </a:ln>
         </p:spPr>
         <p:txBody>
           <a:bodyPr wrap="square" lIns="0" tIns="0" rIns="0" bIns="0" anchor="t">
@@ -17393,7 +17666,7 @@
             <a:r>
               <a:rPr sz="1400" b="1">
                 <a:solidFill>
-                  <a:srgbClr val="00E676"/>
+                  <a:srgbClr val="22C55E"/>
                 </a:solidFill>
                 <a:latin typeface="Segoe UI"/>
               </a:rPr>
@@ -17402,7 +17675,7 @@
             <a:r>
               <a:rPr sz="1400" b="0">
                 <a:solidFill>
-                  <a:srgbClr val="8DA39B"/>
+                  <a:srgbClr val="22C55E"/>
                 </a:solidFill>
                 <a:latin typeface="Segoe UI"/>
               </a:rPr>
@@ -17425,7 +17698,7 @@
     <p:bg>
       <p:bgPr>
         <a:solidFill>
-          <a:srgbClr val="0A0E0D"/>
+          <a:srgbClr val="0D1226"/>
         </a:solidFill>
         <a:effectLst/>
       </p:bgPr>
@@ -17459,10 +17732,10 @@
             <a:avLst/>
           </a:prstGeom>
           <a:solidFill>
-            <a:srgbClr val="00E676"/>
+            <a:srgbClr val="22C55E"/>
           </a:solidFill>
           <a:ln>
-            <a:noFill/>
+            <a:solidFill/>
           </a:ln>
           <a:effectLst/>
         </p:spPr>
@@ -17504,10 +17777,10 @@
             <a:avLst/>
           </a:prstGeom>
           <a:solidFill>
-            <a:srgbClr val="22302B"/>
+            <a:srgbClr val="080C1A"/>
           </a:solidFill>
           <a:ln>
-            <a:noFill/>
+            <a:solidFill/>
           </a:ln>
           <a:effectLst/>
         </p:spPr>
@@ -17549,10 +17822,10 @@
             <a:avLst/>
           </a:prstGeom>
           <a:solidFill>
-            <a:srgbClr val="00E676"/>
+            <a:srgbClr val="22C55E"/>
           </a:solidFill>
           <a:ln>
-            <a:noFill/>
+            <a:solidFill/>
           </a:ln>
           <a:effectLst/>
         </p:spPr>
@@ -17594,6 +17867,9 @@
             <a:avLst/>
           </a:prstGeom>
           <a:noFill/>
+          <a:ln>
+            <a:solidFill/>
+          </a:ln>
         </p:spPr>
         <p:txBody>
           <a:bodyPr wrap="square" lIns="0" tIns="0" rIns="0" bIns="0" anchor="t">
@@ -17615,7 +17891,7 @@
             <a:r>
               <a:rPr sz="900" b="1">
                 <a:solidFill>
-                  <a:srgbClr val="5C726A"/>
+                  <a:srgbClr val="22C55E"/>
                 </a:solidFill>
                 <a:latin typeface="Consolas"/>
               </a:rPr>
@@ -17624,7 +17900,7 @@
             <a:r>
               <a:rPr sz="900" b="0">
                 <a:solidFill>
-                  <a:srgbClr val="5C726A"/>
+                  <a:srgbClr val="22C55E"/>
                 </a:solidFill>
                 <a:latin typeface="Consolas"/>
               </a:rPr>
@@ -17648,6 +17924,9 @@
             <a:avLst/>
           </a:prstGeom>
           <a:noFill/>
+          <a:ln>
+            <a:solidFill/>
+          </a:ln>
         </p:spPr>
         <p:txBody>
           <a:bodyPr wrap="square" lIns="0" tIns="0" rIns="0" bIns="0" anchor="t">
@@ -17669,7 +17948,7 @@
             <a:r>
               <a:rPr sz="900" b="0">
                 <a:solidFill>
-                  <a:srgbClr val="5C726A"/>
+                  <a:srgbClr val="22C55E"/>
                 </a:solidFill>
                 <a:latin typeface="Consolas"/>
               </a:rPr>
@@ -17693,10 +17972,10 @@
             <a:avLst/>
           </a:prstGeom>
           <a:solidFill>
-            <a:srgbClr val="00E676"/>
+            <a:srgbClr val="22C55E"/>
           </a:solidFill>
           <a:ln>
-            <a:noFill/>
+            <a:solidFill/>
           </a:ln>
           <a:effectLst/>
         </p:spPr>
@@ -17738,6 +18017,9 @@
             <a:avLst/>
           </a:prstGeom>
           <a:noFill/>
+          <a:ln>
+            <a:solidFill/>
+          </a:ln>
         </p:spPr>
         <p:txBody>
           <a:bodyPr wrap="square" lIns="0" tIns="0" rIns="0" bIns="0" anchor="t">
@@ -17759,7 +18041,7 @@
             <a:r>
               <a:rPr sz="1200" b="1">
                 <a:solidFill>
-                  <a:srgbClr val="00E676"/>
+                  <a:srgbClr val="22C55E"/>
                 </a:solidFill>
                 <a:latin typeface="Consolas"/>
               </a:rPr>
@@ -17783,6 +18065,9 @@
             <a:avLst/>
           </a:prstGeom>
           <a:noFill/>
+          <a:ln>
+            <a:solidFill/>
+          </a:ln>
         </p:spPr>
         <p:txBody>
           <a:bodyPr wrap="square" lIns="0" tIns="0" rIns="0" bIns="0" anchor="t">
@@ -17804,7 +18089,7 @@
             <a:r>
               <a:rPr sz="3000" b="1">
                 <a:solidFill>
-                  <a:srgbClr val="EAF3EF"/>
+                  <a:srgbClr val="22C55E"/>
                 </a:solidFill>
                 <a:latin typeface="Segoe UI"/>
               </a:rPr>
@@ -17828,10 +18113,10 @@
             <a:avLst/>
           </a:prstGeom>
           <a:solidFill>
-            <a:srgbClr val="00E676"/>
+            <a:srgbClr val="22C55E"/>
           </a:solidFill>
           <a:ln>
-            <a:noFill/>
+            <a:solidFill/>
           </a:ln>
           <a:effectLst/>
         </p:spPr>
@@ -17873,10 +18158,10 @@
             <a:avLst/>
           </a:prstGeom>
           <a:solidFill>
-            <a:srgbClr val="22302B"/>
+            <a:srgbClr val="080C1A"/>
           </a:solidFill>
           <a:ln>
-            <a:noFill/>
+            <a:solidFill/>
           </a:ln>
           <a:effectLst/>
         </p:spPr>
@@ -17918,11 +18203,11 @@
             <a:avLst/>
           </a:prstGeom>
           <a:solidFill>
-            <a:srgbClr val="111714"/>
+            <a:srgbClr val="080C1A"/>
           </a:solidFill>
           <a:ln w="15875">
             <a:solidFill>
-              <a:srgbClr val="4FC3F7"/>
+              <a:srgbClr val="38BDF8"/>
             </a:solidFill>
           </a:ln>
           <a:effectLst/>
@@ -17965,10 +18250,10 @@
             <a:avLst/>
           </a:prstGeom>
           <a:solidFill>
-            <a:srgbClr val="4FC3F7"/>
+            <a:srgbClr val="080C1A"/>
           </a:solidFill>
           <a:ln>
-            <a:noFill/>
+            <a:solidFill/>
           </a:ln>
           <a:effectLst/>
         </p:spPr>
@@ -18010,6 +18295,9 @@
             <a:avLst/>
           </a:prstGeom>
           <a:noFill/>
+          <a:ln>
+            <a:solidFill/>
+          </a:ln>
         </p:spPr>
         <p:txBody>
           <a:bodyPr wrap="square" lIns="0" tIns="0" rIns="0" bIns="0" anchor="t">
@@ -18031,7 +18319,7 @@
             <a:r>
               <a:rPr sz="1400" b="1">
                 <a:solidFill>
-                  <a:srgbClr val="4FC3F7"/>
+                  <a:srgbClr val="38BDF8"/>
                 </a:solidFill>
                 <a:latin typeface="Consolas"/>
               </a:rPr>
@@ -18055,6 +18343,9 @@
             <a:avLst/>
           </a:prstGeom>
           <a:noFill/>
+          <a:ln>
+            <a:solidFill/>
+          </a:ln>
         </p:spPr>
         <p:txBody>
           <a:bodyPr wrap="square" lIns="0" tIns="0" rIns="0" bIns="0" anchor="t">
@@ -18076,7 +18367,7 @@
             <a:r>
               <a:rPr sz="1350" b="1">
                 <a:solidFill>
-                  <a:srgbClr val="4FC3F7"/>
+                  <a:srgbClr val="38BDF8"/>
                 </a:solidFill>
                 <a:latin typeface="Segoe UI"/>
               </a:rPr>
@@ -18085,7 +18376,7 @@
             <a:r>
               <a:rPr sz="1350" b="0">
                 <a:solidFill>
-                  <a:srgbClr val="EAF3EF"/>
+                  <a:srgbClr val="22C55E"/>
                 </a:solidFill>
                 <a:latin typeface="Segoe UI"/>
               </a:rPr>
@@ -18107,7 +18398,7 @@
             <a:r>
               <a:rPr sz="1350" b="1">
                 <a:solidFill>
-                  <a:srgbClr val="4FC3F7"/>
+                  <a:srgbClr val="38BDF8"/>
                 </a:solidFill>
                 <a:latin typeface="Segoe UI"/>
               </a:rPr>
@@ -18116,7 +18407,7 @@
             <a:r>
               <a:rPr sz="1350" b="0">
                 <a:solidFill>
-                  <a:srgbClr val="EAF3EF"/>
+                  <a:srgbClr val="22C55E"/>
                 </a:solidFill>
                 <a:latin typeface="Segoe UI"/>
               </a:rPr>
@@ -18138,7 +18429,7 @@
             <a:r>
               <a:rPr sz="1350" b="1">
                 <a:solidFill>
-                  <a:srgbClr val="4FC3F7"/>
+                  <a:srgbClr val="38BDF8"/>
                 </a:solidFill>
                 <a:latin typeface="Segoe UI"/>
               </a:rPr>
@@ -18147,7 +18438,7 @@
             <a:r>
               <a:rPr sz="1350" b="0">
                 <a:solidFill>
-                  <a:srgbClr val="EAF3EF"/>
+                  <a:srgbClr val="22C55E"/>
                 </a:solidFill>
                 <a:latin typeface="Segoe UI"/>
               </a:rPr>
@@ -18169,7 +18460,7 @@
             <a:r>
               <a:rPr sz="1350" b="1">
                 <a:solidFill>
-                  <a:srgbClr val="4FC3F7"/>
+                  <a:srgbClr val="38BDF8"/>
                 </a:solidFill>
                 <a:latin typeface="Segoe UI"/>
               </a:rPr>
@@ -18178,7 +18469,7 @@
             <a:r>
               <a:rPr sz="1350" b="0">
                 <a:solidFill>
-                  <a:srgbClr val="EAF3EF"/>
+                  <a:srgbClr val="22C55E"/>
                 </a:solidFill>
                 <a:latin typeface="Segoe UI"/>
               </a:rPr>
@@ -18202,11 +18493,11 @@
             <a:avLst/>
           </a:prstGeom>
           <a:solidFill>
-            <a:srgbClr val="111714"/>
+            <a:srgbClr val="080C1A"/>
           </a:solidFill>
           <a:ln w="15875">
             <a:solidFill>
-              <a:srgbClr val="00E676"/>
+              <a:srgbClr val="38BDF8"/>
             </a:solidFill>
           </a:ln>
           <a:effectLst/>
@@ -18249,10 +18540,10 @@
             <a:avLst/>
           </a:prstGeom>
           <a:solidFill>
-            <a:srgbClr val="00E676"/>
+            <a:srgbClr val="22C55E"/>
           </a:solidFill>
           <a:ln>
-            <a:noFill/>
+            <a:solidFill/>
           </a:ln>
           <a:effectLst/>
         </p:spPr>
@@ -18294,6 +18585,9 @@
             <a:avLst/>
           </a:prstGeom>
           <a:noFill/>
+          <a:ln>
+            <a:solidFill/>
+          </a:ln>
         </p:spPr>
         <p:txBody>
           <a:bodyPr wrap="square" lIns="0" tIns="0" rIns="0" bIns="0" anchor="t">
@@ -18315,7 +18609,7 @@
             <a:r>
               <a:rPr sz="1400" b="1">
                 <a:solidFill>
-                  <a:srgbClr val="00E676"/>
+                  <a:srgbClr val="22C55E"/>
                 </a:solidFill>
                 <a:latin typeface="Consolas"/>
               </a:rPr>
@@ -18339,6 +18633,9 @@
             <a:avLst/>
           </a:prstGeom>
           <a:noFill/>
+          <a:ln>
+            <a:solidFill/>
+          </a:ln>
         </p:spPr>
         <p:txBody>
           <a:bodyPr wrap="square" lIns="0" tIns="0" rIns="0" bIns="0" anchor="t">
@@ -18360,7 +18657,7 @@
             <a:r>
               <a:rPr sz="1350" b="1">
                 <a:solidFill>
-                  <a:srgbClr val="00E676"/>
+                  <a:srgbClr val="22C55E"/>
                 </a:solidFill>
                 <a:latin typeface="Segoe UI"/>
               </a:rPr>
@@ -18369,7 +18666,7 @@
             <a:r>
               <a:rPr sz="1350" b="0">
                 <a:solidFill>
-                  <a:srgbClr val="EAF3EF"/>
+                  <a:srgbClr val="22C55E"/>
                 </a:solidFill>
                 <a:latin typeface="Segoe UI"/>
               </a:rPr>
@@ -18391,7 +18688,7 @@
             <a:r>
               <a:rPr sz="1350" b="1">
                 <a:solidFill>
-                  <a:srgbClr val="00E676"/>
+                  <a:srgbClr val="22C55E"/>
                 </a:solidFill>
                 <a:latin typeface="Segoe UI"/>
               </a:rPr>
@@ -18400,7 +18697,7 @@
             <a:r>
               <a:rPr sz="1350" b="0">
                 <a:solidFill>
-                  <a:srgbClr val="EAF3EF"/>
+                  <a:srgbClr val="22C55E"/>
                 </a:solidFill>
                 <a:latin typeface="Segoe UI"/>
               </a:rPr>
@@ -18422,7 +18719,7 @@
             <a:r>
               <a:rPr sz="1350" b="1">
                 <a:solidFill>
-                  <a:srgbClr val="00E676"/>
+                  <a:srgbClr val="22C55E"/>
                 </a:solidFill>
                 <a:latin typeface="Segoe UI"/>
               </a:rPr>
@@ -18431,7 +18728,7 @@
             <a:r>
               <a:rPr sz="1350" b="0">
                 <a:solidFill>
-                  <a:srgbClr val="EAF3EF"/>
+                  <a:srgbClr val="22C55E"/>
                 </a:solidFill>
                 <a:latin typeface="Segoe UI"/>
               </a:rPr>
@@ -18453,7 +18750,7 @@
             <a:r>
               <a:rPr sz="1350" b="1">
                 <a:solidFill>
-                  <a:srgbClr val="00E676"/>
+                  <a:srgbClr val="22C55E"/>
                 </a:solidFill>
                 <a:latin typeface="Segoe UI"/>
               </a:rPr>
@@ -18462,7 +18759,7 @@
             <a:r>
               <a:rPr sz="1350" b="0">
                 <a:solidFill>
-                  <a:srgbClr val="EAF3EF"/>
+                  <a:srgbClr val="22C55E"/>
                 </a:solidFill>
                 <a:latin typeface="Segoe UI"/>
               </a:rPr>
@@ -18486,11 +18783,11 @@
             <a:avLst/>
           </a:prstGeom>
           <a:solidFill>
-            <a:srgbClr val="161D1A"/>
+            <a:srgbClr val="080C1A"/>
           </a:solidFill>
           <a:ln w="15875">
             <a:solidFill>
-              <a:srgbClr val="2F423B"/>
+              <a:srgbClr val="1E2847"/>
             </a:solidFill>
           </a:ln>
           <a:effectLst/>
@@ -18533,6 +18830,9 @@
             <a:avLst/>
           </a:prstGeom>
           <a:noFill/>
+          <a:ln>
+            <a:solidFill/>
+          </a:ln>
         </p:spPr>
         <p:txBody>
           <a:bodyPr wrap="square" lIns="0" tIns="0" rIns="0" bIns="0" anchor="ctr">
@@ -18554,7 +18854,7 @@
             <a:r>
               <a:rPr sz="1400" b="1">
                 <a:solidFill>
-                  <a:srgbClr val="FFB300"/>
+                  <a:srgbClr val="38BDF8"/>
                 </a:solidFill>
                 <a:latin typeface="Consolas"/>
               </a:rPr>
@@ -18563,7 +18863,7 @@
             <a:r>
               <a:rPr sz="1400" b="0">
                 <a:solidFill>
-                  <a:srgbClr val="EAF3EF"/>
+                  <a:srgbClr val="22C55E"/>
                 </a:solidFill>
                 <a:latin typeface="Segoe UI"/>
               </a:rPr>
@@ -18586,7 +18886,7 @@
     <p:bg>
       <p:bgPr>
         <a:solidFill>
-          <a:srgbClr val="0A0E0D"/>
+          <a:srgbClr val="0D1226"/>
         </a:solidFill>
         <a:effectLst/>
       </p:bgPr>
@@ -18620,10 +18920,10 @@
             <a:avLst/>
           </a:prstGeom>
           <a:solidFill>
-            <a:srgbClr val="00E676"/>
+            <a:srgbClr val="22C55E"/>
           </a:solidFill>
           <a:ln>
-            <a:noFill/>
+            <a:solidFill/>
           </a:ln>
           <a:effectLst/>
         </p:spPr>
@@ -18665,10 +18965,10 @@
             <a:avLst/>
           </a:prstGeom>
           <a:solidFill>
-            <a:srgbClr val="22302B"/>
+            <a:srgbClr val="080C1A"/>
           </a:solidFill>
           <a:ln>
-            <a:noFill/>
+            <a:solidFill/>
           </a:ln>
           <a:effectLst/>
         </p:spPr>
@@ -18710,10 +19010,10 @@
             <a:avLst/>
           </a:prstGeom>
           <a:solidFill>
-            <a:srgbClr val="00E676"/>
+            <a:srgbClr val="22C55E"/>
           </a:solidFill>
           <a:ln>
-            <a:noFill/>
+            <a:solidFill/>
           </a:ln>
           <a:effectLst/>
         </p:spPr>
@@ -18755,6 +19055,9 @@
             <a:avLst/>
           </a:prstGeom>
           <a:noFill/>
+          <a:ln>
+            <a:solidFill/>
+          </a:ln>
         </p:spPr>
         <p:txBody>
           <a:bodyPr wrap="square" lIns="0" tIns="0" rIns="0" bIns="0" anchor="t">
@@ -18776,7 +19079,7 @@
             <a:r>
               <a:rPr sz="900" b="1">
                 <a:solidFill>
-                  <a:srgbClr val="5C726A"/>
+                  <a:srgbClr val="22C55E"/>
                 </a:solidFill>
                 <a:latin typeface="Consolas"/>
               </a:rPr>
@@ -18785,7 +19088,7 @@
             <a:r>
               <a:rPr sz="900" b="0">
                 <a:solidFill>
-                  <a:srgbClr val="5C726A"/>
+                  <a:srgbClr val="22C55E"/>
                 </a:solidFill>
                 <a:latin typeface="Consolas"/>
               </a:rPr>
@@ -18809,6 +19112,9 @@
             <a:avLst/>
           </a:prstGeom>
           <a:noFill/>
+          <a:ln>
+            <a:solidFill/>
+          </a:ln>
         </p:spPr>
         <p:txBody>
           <a:bodyPr wrap="square" lIns="0" tIns="0" rIns="0" bIns="0" anchor="t">
@@ -18830,7 +19136,7 @@
             <a:r>
               <a:rPr sz="900" b="0">
                 <a:solidFill>
-                  <a:srgbClr val="5C726A"/>
+                  <a:srgbClr val="22C55E"/>
                 </a:solidFill>
                 <a:latin typeface="Consolas"/>
               </a:rPr>
@@ -18854,10 +19160,10 @@
             <a:avLst/>
           </a:prstGeom>
           <a:solidFill>
-            <a:srgbClr val="00E676"/>
+            <a:srgbClr val="22C55E"/>
           </a:solidFill>
           <a:ln>
-            <a:noFill/>
+            <a:solidFill/>
           </a:ln>
           <a:effectLst/>
         </p:spPr>
@@ -18899,6 +19205,9 @@
             <a:avLst/>
           </a:prstGeom>
           <a:noFill/>
+          <a:ln>
+            <a:solidFill/>
+          </a:ln>
         </p:spPr>
         <p:txBody>
           <a:bodyPr wrap="square" lIns="0" tIns="0" rIns="0" bIns="0" anchor="t">
@@ -18920,7 +19229,7 @@
             <a:r>
               <a:rPr sz="1200" b="1">
                 <a:solidFill>
-                  <a:srgbClr val="00E676"/>
+                  <a:srgbClr val="22C55E"/>
                 </a:solidFill>
                 <a:latin typeface="Consolas"/>
               </a:rPr>
@@ -18944,6 +19253,9 @@
             <a:avLst/>
           </a:prstGeom>
           <a:noFill/>
+          <a:ln>
+            <a:solidFill/>
+          </a:ln>
         </p:spPr>
         <p:txBody>
           <a:bodyPr wrap="square" lIns="0" tIns="0" rIns="0" bIns="0" anchor="t">
@@ -18965,7 +19277,7 @@
             <a:r>
               <a:rPr sz="3000" b="1">
                 <a:solidFill>
-                  <a:srgbClr val="EAF3EF"/>
+                  <a:srgbClr val="22C55E"/>
                 </a:solidFill>
                 <a:latin typeface="Segoe UI"/>
               </a:rPr>
@@ -18989,10 +19301,10 @@
             <a:avLst/>
           </a:prstGeom>
           <a:solidFill>
-            <a:srgbClr val="00E676"/>
+            <a:srgbClr val="22C55E"/>
           </a:solidFill>
           <a:ln>
-            <a:noFill/>
+            <a:solidFill/>
           </a:ln>
           <a:effectLst/>
         </p:spPr>
@@ -19034,10 +19346,10 @@
             <a:avLst/>
           </a:prstGeom>
           <a:solidFill>
-            <a:srgbClr val="22302B"/>
+            <a:srgbClr val="080C1A"/>
           </a:solidFill>
           <a:ln>
-            <a:noFill/>
+            <a:solidFill/>
           </a:ln>
           <a:effectLst/>
         </p:spPr>
@@ -19079,6 +19391,9 @@
             <a:avLst/>
           </a:prstGeom>
           <a:noFill/>
+          <a:ln>
+            <a:solidFill/>
+          </a:ln>
         </p:spPr>
         <p:txBody>
           <a:bodyPr wrap="square" lIns="0" tIns="0" rIns="0" bIns="0" anchor="t">
@@ -19100,7 +19415,7 @@
             <a:r>
               <a:rPr sz="1600" b="1">
                 <a:solidFill>
-                  <a:srgbClr val="00E676"/>
+                  <a:srgbClr val="22C55E"/>
                 </a:solidFill>
                 <a:latin typeface="Segoe UI"/>
               </a:rPr>
@@ -19109,7 +19424,7 @@
             <a:r>
               <a:rPr sz="1600" b="1">
                 <a:solidFill>
-                  <a:srgbClr val="EAF3EF"/>
+                  <a:srgbClr val="22C55E"/>
                 </a:solidFill>
                 <a:latin typeface="Segoe UI"/>
               </a:rPr>
@@ -19118,7 +19433,7 @@
             <a:r>
               <a:rPr sz="1600" b="0">
                 <a:solidFill>
-                  <a:srgbClr val="8DA39B"/>
+                  <a:srgbClr val="22C55E"/>
                 </a:solidFill>
                 <a:latin typeface="Segoe UI"/>
               </a:rPr>
@@ -19140,7 +19455,7 @@
             <a:r>
               <a:rPr sz="1600" b="1">
                 <a:solidFill>
-                  <a:srgbClr val="00E676"/>
+                  <a:srgbClr val="22C55E"/>
                 </a:solidFill>
                 <a:latin typeface="Segoe UI"/>
               </a:rPr>
@@ -19149,7 +19464,7 @@
             <a:r>
               <a:rPr sz="1600" b="1">
                 <a:solidFill>
-                  <a:srgbClr val="EAF3EF"/>
+                  <a:srgbClr val="22C55E"/>
                 </a:solidFill>
                 <a:latin typeface="Segoe UI"/>
               </a:rPr>
@@ -19158,7 +19473,7 @@
             <a:r>
               <a:rPr sz="1600" b="0">
                 <a:solidFill>
-                  <a:srgbClr val="8DA39B"/>
+                  <a:srgbClr val="22C55E"/>
                 </a:solidFill>
                 <a:latin typeface="Segoe UI"/>
               </a:rPr>
@@ -19180,7 +19495,7 @@
             <a:r>
               <a:rPr sz="1600" b="1">
                 <a:solidFill>
-                  <a:srgbClr val="00E676"/>
+                  <a:srgbClr val="22C55E"/>
                 </a:solidFill>
                 <a:latin typeface="Segoe UI"/>
               </a:rPr>
@@ -19189,7 +19504,7 @@
             <a:r>
               <a:rPr sz="1600" b="1">
                 <a:solidFill>
-                  <a:srgbClr val="EAF3EF"/>
+                  <a:srgbClr val="22C55E"/>
                 </a:solidFill>
                 <a:latin typeface="Segoe UI"/>
               </a:rPr>
@@ -19198,7 +19513,7 @@
             <a:r>
               <a:rPr sz="1600" b="0">
                 <a:solidFill>
-                  <a:srgbClr val="8DA39B"/>
+                  <a:srgbClr val="22C55E"/>
                 </a:solidFill>
                 <a:latin typeface="Segoe UI"/>
               </a:rPr>
@@ -19220,7 +19535,7 @@
             <a:r>
               <a:rPr sz="1600" b="1">
                 <a:solidFill>
-                  <a:srgbClr val="00E676"/>
+                  <a:srgbClr val="22C55E"/>
                 </a:solidFill>
                 <a:latin typeface="Segoe UI"/>
               </a:rPr>
@@ -19229,7 +19544,7 @@
             <a:r>
               <a:rPr sz="1600" b="1">
                 <a:solidFill>
-                  <a:srgbClr val="EAF3EF"/>
+                  <a:srgbClr val="22C55E"/>
                 </a:solidFill>
                 <a:latin typeface="Segoe UI"/>
               </a:rPr>
@@ -19238,7 +19553,7 @@
             <a:r>
               <a:rPr sz="1600" b="0">
                 <a:solidFill>
-                  <a:srgbClr val="8DA39B"/>
+                  <a:srgbClr val="22C55E"/>
                 </a:solidFill>
                 <a:latin typeface="Segoe UI"/>
               </a:rPr>
@@ -19260,7 +19575,7 @@
             <a:r>
               <a:rPr sz="1600" b="1">
                 <a:solidFill>
-                  <a:srgbClr val="00E676"/>
+                  <a:srgbClr val="22C55E"/>
                 </a:solidFill>
                 <a:latin typeface="Segoe UI"/>
               </a:rPr>
@@ -19269,7 +19584,7 @@
             <a:r>
               <a:rPr sz="1600" b="1">
                 <a:solidFill>
-                  <a:srgbClr val="EAF3EF"/>
+                  <a:srgbClr val="22C55E"/>
                 </a:solidFill>
                 <a:latin typeface="Segoe UI"/>
               </a:rPr>
@@ -19278,7 +19593,7 @@
             <a:r>
               <a:rPr sz="1600" b="0">
                 <a:solidFill>
-                  <a:srgbClr val="8DA39B"/>
+                  <a:srgbClr val="22C55E"/>
                 </a:solidFill>
                 <a:latin typeface="Segoe UI"/>
               </a:rPr>
@@ -19301,7 +19616,7 @@
     <p:bg>
       <p:bgPr>
         <a:solidFill>
-          <a:srgbClr val="0A0E0D"/>
+          <a:srgbClr val="0D1226"/>
         </a:solidFill>
         <a:effectLst/>
       </p:bgPr>
@@ -19335,10 +19650,10 @@
             <a:avLst/>
           </a:prstGeom>
           <a:solidFill>
-            <a:srgbClr val="00E676"/>
+            <a:srgbClr val="22C55E"/>
           </a:solidFill>
           <a:ln>
-            <a:noFill/>
+            <a:solidFill/>
           </a:ln>
           <a:effectLst/>
         </p:spPr>
@@ -19380,10 +19695,10 @@
             <a:avLst/>
           </a:prstGeom>
           <a:solidFill>
-            <a:srgbClr val="22302B"/>
+            <a:srgbClr val="080C1A"/>
           </a:solidFill>
           <a:ln>
-            <a:noFill/>
+            <a:solidFill/>
           </a:ln>
           <a:effectLst/>
         </p:spPr>
@@ -19425,10 +19740,10 @@
             <a:avLst/>
           </a:prstGeom>
           <a:solidFill>
-            <a:srgbClr val="00E676"/>
+            <a:srgbClr val="22C55E"/>
           </a:solidFill>
           <a:ln>
-            <a:noFill/>
+            <a:solidFill/>
           </a:ln>
           <a:effectLst/>
         </p:spPr>
@@ -19470,6 +19785,9 @@
             <a:avLst/>
           </a:prstGeom>
           <a:noFill/>
+          <a:ln>
+            <a:solidFill/>
+          </a:ln>
         </p:spPr>
         <p:txBody>
           <a:bodyPr wrap="square" lIns="0" tIns="0" rIns="0" bIns="0" anchor="t">
@@ -19491,7 +19809,7 @@
             <a:r>
               <a:rPr sz="900" b="1">
                 <a:solidFill>
-                  <a:srgbClr val="5C726A"/>
+                  <a:srgbClr val="22C55E"/>
                 </a:solidFill>
                 <a:latin typeface="Consolas"/>
               </a:rPr>
@@ -19500,7 +19818,7 @@
             <a:r>
               <a:rPr sz="900" b="0">
                 <a:solidFill>
-                  <a:srgbClr val="5C726A"/>
+                  <a:srgbClr val="22C55E"/>
                 </a:solidFill>
                 <a:latin typeface="Consolas"/>
               </a:rPr>
@@ -19524,6 +19842,9 @@
             <a:avLst/>
           </a:prstGeom>
           <a:noFill/>
+          <a:ln>
+            <a:solidFill/>
+          </a:ln>
         </p:spPr>
         <p:txBody>
           <a:bodyPr wrap="square" lIns="0" tIns="0" rIns="0" bIns="0" anchor="t">
@@ -19545,7 +19866,7 @@
             <a:r>
               <a:rPr sz="900" b="0">
                 <a:solidFill>
-                  <a:srgbClr val="5C726A"/>
+                  <a:srgbClr val="22C55E"/>
                 </a:solidFill>
                 <a:latin typeface="Consolas"/>
               </a:rPr>
@@ -19569,10 +19890,10 @@
             <a:avLst/>
           </a:prstGeom>
           <a:solidFill>
-            <a:srgbClr val="00E676"/>
+            <a:srgbClr val="22C55E"/>
           </a:solidFill>
           <a:ln>
-            <a:noFill/>
+            <a:solidFill/>
           </a:ln>
           <a:effectLst/>
         </p:spPr>
@@ -19614,6 +19935,9 @@
             <a:avLst/>
           </a:prstGeom>
           <a:noFill/>
+          <a:ln>
+            <a:solidFill/>
+          </a:ln>
         </p:spPr>
         <p:txBody>
           <a:bodyPr wrap="square" lIns="0" tIns="0" rIns="0" bIns="0" anchor="t">
@@ -19635,7 +19959,7 @@
             <a:r>
               <a:rPr sz="1200" b="1">
                 <a:solidFill>
-                  <a:srgbClr val="00E676"/>
+                  <a:srgbClr val="22C55E"/>
                 </a:solidFill>
                 <a:latin typeface="Consolas"/>
               </a:rPr>
@@ -19659,6 +19983,9 @@
             <a:avLst/>
           </a:prstGeom>
           <a:noFill/>
+          <a:ln>
+            <a:solidFill/>
+          </a:ln>
         </p:spPr>
         <p:txBody>
           <a:bodyPr wrap="square" lIns="0" tIns="0" rIns="0" bIns="0" anchor="t">
@@ -19680,7 +20007,7 @@
             <a:r>
               <a:rPr sz="3000" b="1">
                 <a:solidFill>
-                  <a:srgbClr val="EAF3EF"/>
+                  <a:srgbClr val="22C55E"/>
                 </a:solidFill>
                 <a:latin typeface="Segoe UI"/>
               </a:rPr>
@@ -19704,10 +20031,10 @@
             <a:avLst/>
           </a:prstGeom>
           <a:solidFill>
-            <a:srgbClr val="00E676"/>
+            <a:srgbClr val="22C55E"/>
           </a:solidFill>
           <a:ln>
-            <a:noFill/>
+            <a:solidFill/>
           </a:ln>
           <a:effectLst/>
         </p:spPr>
@@ -19749,10 +20076,10 @@
             <a:avLst/>
           </a:prstGeom>
           <a:solidFill>
-            <a:srgbClr val="22302B"/>
+            <a:srgbClr val="080C1A"/>
           </a:solidFill>
           <a:ln>
-            <a:noFill/>
+            <a:solidFill/>
           </a:ln>
           <a:effectLst/>
         </p:spPr>
@@ -19794,11 +20121,11 @@
             <a:avLst/>
           </a:prstGeom>
           <a:solidFill>
-            <a:srgbClr val="111714"/>
+            <a:srgbClr val="080C1A"/>
           </a:solidFill>
           <a:ln w="15875">
             <a:solidFill>
-              <a:srgbClr val="2F423B"/>
+              <a:srgbClr val="1E2847"/>
             </a:solidFill>
           </a:ln>
           <a:effectLst/>
@@ -19841,10 +20168,10 @@
             <a:avLst/>
           </a:prstGeom>
           <a:solidFill>
-            <a:srgbClr val="00E676"/>
+            <a:srgbClr val="22C55E"/>
           </a:solidFill>
           <a:ln>
-            <a:noFill/>
+            <a:solidFill/>
           </a:ln>
           <a:effectLst/>
         </p:spPr>
@@ -19886,6 +20213,9 @@
             <a:avLst/>
           </a:prstGeom>
           <a:noFill/>
+          <a:ln>
+            <a:solidFill/>
+          </a:ln>
         </p:spPr>
         <p:txBody>
           <a:bodyPr wrap="square" lIns="0" tIns="0" rIns="0" bIns="0" anchor="t">
@@ -19907,7 +20237,7 @@
             <a:r>
               <a:rPr sz="1400" b="1">
                 <a:solidFill>
-                  <a:srgbClr val="00E676"/>
+                  <a:srgbClr val="22C55E"/>
                 </a:solidFill>
                 <a:latin typeface="Consolas"/>
               </a:rPr>
@@ -19931,6 +20261,9 @@
             <a:avLst/>
           </a:prstGeom>
           <a:noFill/>
+          <a:ln>
+            <a:solidFill/>
+          </a:ln>
         </p:spPr>
         <p:txBody>
           <a:bodyPr wrap="square" lIns="0" tIns="0" rIns="0" bIns="0" anchor="t">
@@ -19952,7 +20285,7 @@
             <a:r>
               <a:rPr sz="1350" b="1">
                 <a:solidFill>
-                  <a:srgbClr val="00E676"/>
+                  <a:srgbClr val="22C55E"/>
                 </a:solidFill>
                 <a:latin typeface="Segoe UI"/>
               </a:rPr>
@@ -19961,7 +20294,7 @@
             <a:r>
               <a:rPr sz="1350" b="0">
                 <a:solidFill>
-                  <a:srgbClr val="EAF3EF"/>
+                  <a:srgbClr val="22C55E"/>
                 </a:solidFill>
                 <a:latin typeface="Segoe UI"/>
               </a:rPr>
@@ -19983,7 +20316,7 @@
             <a:r>
               <a:rPr sz="1350" b="1">
                 <a:solidFill>
-                  <a:srgbClr val="00E676"/>
+                  <a:srgbClr val="22C55E"/>
                 </a:solidFill>
                 <a:latin typeface="Segoe UI"/>
               </a:rPr>
@@ -19992,7 +20325,7 @@
             <a:r>
               <a:rPr sz="1350" b="0">
                 <a:solidFill>
-                  <a:srgbClr val="EAF3EF"/>
+                  <a:srgbClr val="22C55E"/>
                 </a:solidFill>
                 <a:latin typeface="Segoe UI"/>
               </a:rPr>
@@ -20014,7 +20347,7 @@
             <a:r>
               <a:rPr sz="1350" b="1">
                 <a:solidFill>
-                  <a:srgbClr val="00E676"/>
+                  <a:srgbClr val="22C55E"/>
                 </a:solidFill>
                 <a:latin typeface="Segoe UI"/>
               </a:rPr>
@@ -20023,7 +20356,7 @@
             <a:r>
               <a:rPr sz="1350" b="0">
                 <a:solidFill>
-                  <a:srgbClr val="EAF3EF"/>
+                  <a:srgbClr val="22C55E"/>
                 </a:solidFill>
                 <a:latin typeface="Segoe UI"/>
               </a:rPr>
@@ -20047,11 +20380,11 @@
             <a:avLst/>
           </a:prstGeom>
           <a:solidFill>
-            <a:srgbClr val="111714"/>
+            <a:srgbClr val="080C1A"/>
           </a:solidFill>
           <a:ln w="15875">
             <a:solidFill>
-              <a:srgbClr val="2F423B"/>
+              <a:srgbClr val="1E2847"/>
             </a:solidFill>
           </a:ln>
           <a:effectLst/>
@@ -20094,10 +20427,10 @@
             <a:avLst/>
           </a:prstGeom>
           <a:solidFill>
-            <a:srgbClr val="FFB300"/>
+            <a:srgbClr val="080C1A"/>
           </a:solidFill>
           <a:ln>
-            <a:noFill/>
+            <a:solidFill/>
           </a:ln>
           <a:effectLst/>
         </p:spPr>
@@ -20139,6 +20472,9 @@
             <a:avLst/>
           </a:prstGeom>
           <a:noFill/>
+          <a:ln>
+            <a:solidFill/>
+          </a:ln>
         </p:spPr>
         <p:txBody>
           <a:bodyPr wrap="square" lIns="0" tIns="0" rIns="0" bIns="0" anchor="t">
@@ -20160,7 +20496,7 @@
             <a:r>
               <a:rPr sz="1400" b="1">
                 <a:solidFill>
-                  <a:srgbClr val="FFB300"/>
+                  <a:srgbClr val="38BDF8"/>
                 </a:solidFill>
                 <a:latin typeface="Consolas"/>
               </a:rPr>
@@ -20184,6 +20520,9 @@
             <a:avLst/>
           </a:prstGeom>
           <a:noFill/>
+          <a:ln>
+            <a:solidFill/>
+          </a:ln>
         </p:spPr>
         <p:txBody>
           <a:bodyPr wrap="square" lIns="0" tIns="0" rIns="0" bIns="0" anchor="t">
@@ -20205,7 +20544,7 @@
             <a:r>
               <a:rPr sz="1350" b="1">
                 <a:solidFill>
-                  <a:srgbClr val="FFB300"/>
+                  <a:srgbClr val="38BDF8"/>
                 </a:solidFill>
                 <a:latin typeface="Segoe UI"/>
               </a:rPr>
@@ -20214,7 +20553,7 @@
             <a:r>
               <a:rPr sz="1350" b="0">
                 <a:solidFill>
-                  <a:srgbClr val="EAF3EF"/>
+                  <a:srgbClr val="22C55E"/>
                 </a:solidFill>
                 <a:latin typeface="Segoe UI"/>
               </a:rPr>
@@ -20236,7 +20575,7 @@
             <a:r>
               <a:rPr sz="1350" b="1">
                 <a:solidFill>
-                  <a:srgbClr val="FFB300"/>
+                  <a:srgbClr val="38BDF8"/>
                 </a:solidFill>
                 <a:latin typeface="Segoe UI"/>
               </a:rPr>
@@ -20245,7 +20584,7 @@
             <a:r>
               <a:rPr sz="1350" b="0">
                 <a:solidFill>
-                  <a:srgbClr val="EAF3EF"/>
+                  <a:srgbClr val="22C55E"/>
                 </a:solidFill>
                 <a:latin typeface="Segoe UI"/>
               </a:rPr>
@@ -20267,7 +20606,7 @@
             <a:r>
               <a:rPr sz="1350" b="1">
                 <a:solidFill>
-                  <a:srgbClr val="FFB300"/>
+                  <a:srgbClr val="38BDF8"/>
                 </a:solidFill>
                 <a:latin typeface="Segoe UI"/>
               </a:rPr>
@@ -20276,7 +20615,7 @@
             <a:r>
               <a:rPr sz="1350" b="0">
                 <a:solidFill>
-                  <a:srgbClr val="EAF3EF"/>
+                  <a:srgbClr val="22C55E"/>
                 </a:solidFill>
                 <a:latin typeface="Segoe UI"/>
               </a:rPr>
@@ -20298,7 +20637,7 @@
             <a:r>
               <a:rPr sz="1350" b="1">
                 <a:solidFill>
-                  <a:srgbClr val="FFB300"/>
+                  <a:srgbClr val="38BDF8"/>
                 </a:solidFill>
                 <a:latin typeface="Segoe UI"/>
               </a:rPr>
@@ -20307,7 +20646,7 @@
             <a:r>
               <a:rPr sz="1350" b="0">
                 <a:solidFill>
-                  <a:srgbClr val="EAF3EF"/>
+                  <a:srgbClr val="22C55E"/>
                 </a:solidFill>
                 <a:latin typeface="Segoe UI"/>
               </a:rPr>
@@ -20331,6 +20670,9 @@
             <a:avLst/>
           </a:prstGeom>
           <a:noFill/>
+          <a:ln>
+            <a:solidFill/>
+          </a:ln>
         </p:spPr>
         <p:txBody>
           <a:bodyPr wrap="square" lIns="0" tIns="0" rIns="0" bIns="0" anchor="t">
@@ -20352,7 +20694,7 @@
             <a:r>
               <a:rPr sz="1350" b="0">
                 <a:solidFill>
-                  <a:srgbClr val="8DA39B"/>
+                  <a:srgbClr val="22C55E"/>
                 </a:solidFill>
                 <a:latin typeface="Segoe UI"/>
               </a:rPr>
